--- a/slides/deck.pptx
+++ b/slides/deck.pptx
@@ -1315,12 +1315,7 @@
           </a:p>
           <a:p>
             <a:r>
-              <a:t>timing reference is in the notes of slide 9). Once it is there, start the replay for slide 19 in</a:t>
-            </a:r>
-          </a:p>
-          <a:p>
-            <a:r>
-              <a:t>terminal B: `make replay RUN=ab-20261016-212252-aa1644`.</a:t>
+              <a:t>timing reference is in the notes of slide 9).</a:t>
             </a:r>
           </a:p>
           <a:p/>
@@ -1494,22 +1489,47 @@
           <a:p/>
           <a:p>
             <a:r>
-              <a:t>Every screen of the replay shows RECORDING. Say: "The referee probes every endpoint as Acme with</a:t>
-            </a:r>
-          </a:p>
-          <a:p>
-            <a:r>
-              <a:t>Globex ids and expects 404. It does not care which arm wrote the code, or whether the arm had a map."</a:t>
-            </a:r>
-          </a:p>
-          <a:p>
-            <a:r>
-              <a:t>The replayed run: pilot run 3, F4, A/B ab-20261016-212252-aa1644, harness arm hidden tests 27 of 69</a:t>
-            </a:r>
-          </a:p>
-          <a:p>
-            <a:r>
-              <a:t>and 3 new R1 violations. If the replay's referee is still running, walk through screens 1 and 3 first.</a:t>
+              <a:t>Walk the finished show-1 run on screens 1, 3, 5, and 2, in that order. In the quiet run (captured on</a:t>
+            </a:r>
+          </a:p>
+          <a:p>
+            <a:r>
+              <a:t>2026-10-17, run ab-20261017-112101-c5d839; your output will differ): by minute 1 the build session was</a:t>
+            </a:r>
+          </a:p>
+          <a:p>
+            <a:r>
+              <a:t>patching app/api/issues.py and app/services/issues.py; by minute 3 the test phase had run and the</a:t>
+            </a:r>
+          </a:p>
+          <a:p>
+            <a:r>
+              <a:t>agent said done; at 4:11 screen 1 showed "primary verdict ready: PASS" with new R1 violations 0; the</a:t>
+            </a:r>
+          </a:p>
+          <a:p>
+            <a:r>
+              <a:t>secondary checks finished at 10:00. Its harness decisions: 31 instruction files placed (the AGENTS.md</a:t>
+            </a:r>
+          </a:p>
+          <a:p>
+            <a:r>
+              <a:t>map, docs, skills), the agent read ARCHITECTURE.md and the add-endpoint skill. Its third tool call</a:t>
+            </a:r>
+          </a:p>
+          <a:p>
+            <a:r>
+              <a:t>opened docs/HANDBOOK.md, the same file every bare arm of run 2 opened with its third call. Screen 2</a:t>
+            </a:r>
+          </a:p>
+          <a:p>
+            <a:r>
+              <a:t>shows one board frame: F1 changes no board pixels. The image is cut to the harness panel (the bare</a:t>
+            </a:r>
+          </a:p>
+          <a:p>
+            <a:r>
+              <a:t>panel is empty in a show run).</a:t>
             </a:r>
           </a:p>
           <a:p/>
@@ -1520,7 +1540,7 @@
           </a:p>
           <a:p>
             <a:r>
-              <a:t>Source: README.md §11; Makefile `show-1`, `replay`.</a:t>
+              <a:t>Source: quiet run ab-20261017-112101-c5d839 (screens 1 and 2); README.md §11; Makefile `show-1`.</a:t>
             </a:r>
           </a:p>
         </p:txBody>
@@ -1708,6 +1728,22 @@
           <a:p/>
           <a:p>
             <a:r>
+              <a:t>Read tonight's verdict from screen 1 first, then this slide. The quiet run's arm line (captured on</a:t>
+            </a:r>
+          </a:p>
+          <a:p>
+            <a:r>
+              <a:t>2026-10-17, run ab-20261017-112101-c5d839; your output will differ): `harness completed claim=done</a:t>
+            </a:r>
+          </a:p>
+          <a:p>
+            <a:r>
+              <a:t>primary={"r1_new_violations": 0} passed=True hidden 52/52 mutants 2/4 reviewer=accept cost=$0.0179`.</a:t>
+            </a:r>
+          </a:p>
+          <a:p/>
+          <a:p>
+            <a:r>
               <a:t>The 7 runs per arm: run 3, effort medium (A/Bs ab-20261016-211419-07937b, ab-20261016-212745-2c14fb,</a:t>
             </a:r>
           </a:p>
@@ -1723,17 +1759,22 @@
           </a:p>
           <a:p>
             <a:r>
-              <a:t>ticket gave the same, 0 of 3 per arm. "Post hoc" means chosen after the results were known:</a:t>
-            </a:r>
-          </a:p>
-          <a:p>
-            <a:r>
-              <a:t>descriptive, never a test; the 10 runs per arm are run 2, the live console check, run 3, and run 4.</a:t>
-            </a:r>
-          </a:p>
-          <a:p>
-            <a:r>
-              <a:t>[[CAPTURE: what make example-1 shows on each console screen, and its wall time | how: make example-1]]</a:t>
+              <a:t>ticket gave the same, 0 of 3 per arm. Why: in run 2 every bare arm opened the handbook with its third</a:t>
+            </a:r>
+          </a:p>
+          <a:p>
+            <a:r>
+              <a:t>tool call; no arm copied the legacy handler into a leak. Post hoc, descriptive (10 runs per arm: run</a:t>
+            </a:r>
+          </a:p>
+          <a:p>
+            <a:r>
+              <a:t>2, the live console check, run 3, run 4): done claimed by harness 5, bare 9; median cost $0.0122</a:t>
+            </a:r>
+          </a:p>
+          <a:p>
+            <a:r>
+              <a:t>against $0.0103. "Post hoc" means chosen after the results were known: descriptive, never a test.</a:t>
             </a:r>
           </a:p>
           <a:p/>
@@ -1744,7 +1785,7 @@
           </a:p>
           <a:p>
             <a:r>
-              <a:t>Source: course pilot runs 2-4 and class-profile round (A/B ids above); submodules/01-instructions/concepts.md (third tool call).</a:t>
+              <a:t>Source: quiet run ab-20261017-112101-c5d839 (screen 3); course pilot runs 2-4 and class-profile round (A/B ids above); submodules/01-instructions/concepts.md (third tool call).</a:t>
             </a:r>
           </a:p>
         </p:txBody>
@@ -2010,17 +2051,32 @@
           <a:p/>
           <a:p>
             <a:r>
-              <a:t>Timing reference: in the class-profile round (A/B ab-20261017-085139-7c0661), the harness arm's</a:t>
-            </a:r>
-          </a:p>
-          <a:p>
-            <a:r>
-              <a:t>primary verdict came 358 s after launch and its full verdict 533 s after launch.</a:t>
-            </a:r>
-          </a:p>
-          <a:p>
-            <a:r>
-              <a:t>[[CAPTURE: wall time of make show-2 on the class host, launch to the primary verdict and to the full verdict | how: make show-2 SESSION_BUDGET=12,38]]</a:t>
+              <a:t>Timing reference: in the quiet run of `make show-2 SESSION_BUDGET=12,38` (captured on 2026-10-17, run</a:t>
+            </a:r>
+          </a:p>
+          <a:p>
+            <a:r>
+              <a:t>ab-20261017-113213-fe89a3; your output will differ) the primary verdict came 6:46 after launch, the</a:t>
+            </a:r>
+          </a:p>
+          <a:p>
+            <a:r>
+              <a:t>full verdict 9:52 after launch, and the command took 10 min 7 s in all. It exited 2: session 2 hit</a:t>
+            </a:r>
+          </a:p>
+          <a:p>
+            <a:r>
+              <a:t>the agent time limit (a result, not a failure of the command). In the class-profile round (A/B</a:t>
+            </a:r>
+          </a:p>
+          <a:p>
+            <a:r>
+              <a:t>ab-20261017-085139-7c0661) the harness arm's primary verdict came 358 s and its full verdict 533 s</a:t>
+            </a:r>
+          </a:p>
+          <a:p>
+            <a:r>
+              <a:t>after launch.</a:t>
             </a:r>
           </a:p>
           <a:p/>
@@ -2751,12 +2807,7 @@
           </a:p>
           <a:p>
             <a:r>
-              <a:t>timing reference is in the notes of slide 23). Once it is there, start the replay for slide 32 in</a:t>
-            </a:r>
-          </a:p>
-          <a:p>
-            <a:r>
-              <a:t>terminal B: `make replay RUN=ab-20261016-213317-9a0ec1`.</a:t>
+              <a:t>timing reference is in the notes of slide 23).</a:t>
             </a:r>
           </a:p>
           <a:p/>
@@ -2930,27 +2981,57 @@
           <a:p/>
           <a:p>
             <a:r>
-              <a:t>The replayed run: pilot run 3, F2, A/B ab-20261016-213317-9a0ec1, harness arm hidden tests 3 of 56.</a:t>
-            </a:r>
-          </a:p>
-          <a:p>
-            <a:r>
-              <a:t>The same early finish happened in ab-20261016-214959-de790f (run 3) and, in run 4 (effort low), in</a:t>
-            </a:r>
-          </a:p>
-          <a:p>
-            <a:r>
-              <a:t>the bare arm of all three A/Bs and in one harness arm. The fix is a bug fix that applies to both arms;</a:t>
-            </a:r>
-          </a:p>
-          <a:p>
-            <a:r>
-              <a:t>the class-profile round ran with it. Follow-up question: which file did session 2 read first, and did</a:t>
-            </a:r>
-          </a:p>
-          <a:p>
-            <a:r>
-              <a:t>it change what that session did next?</a:t>
+              <a:t>In the quiet run (captured on 2026-10-17, run ab-20261017-113213-fe89a3; your output will differ),</a:t>
+            </a:r>
+          </a:p>
+          <a:p>
+            <a:r>
+              <a:t>about 2 minutes after launch: turn 1.11 ran `git add progress.md docs/exec-plans/active/...`, turn</a:t>
+            </a:r>
+          </a:p>
+          <a:p>
+            <a:r>
+              <a:t>1.12 called</a:t>
+            </a:r>
+          </a:p>
+          <a:p>
+            <a:r>
+              <a:t>`finish not_done`, and screen 1 showed "Session 1 stopped: ended by claim_not_done; handoff</a:t>
+            </a:r>
+          </a:p>
+          <a:p>
+            <a:r>
+              <a:t>session-handoff.md", then "Session 2 resumed: prefix: core, instructions, state". Since change 14</a:t>
+            </a:r>
+          </a:p>
+          <a:p>
+            <a:r>
+              <a:t>(both arms) that call ends only the session, so session 2 ran; in pilot run 3 the same call ended</a:t>
+            </a:r>
+          </a:p>
+          <a:p>
+            <a:r>
+              <a:t>the build phase (A/B ab-20261016-213317-9a0ec1, hidden tests 3 of 56). Session 2 began with `pwd; git</a:t>
+            </a:r>
+          </a:p>
+          <a:p>
+            <a:r>
+              <a:t>log --oneline -20; cat progress.md`, then the ticket and the handbook. The harness decisions show</a:t>
+            </a:r>
+          </a:p>
+          <a:p>
+            <a:r>
+              <a:t>the initializer step (init.sh, progress.md, session-handoff.md) and "session 1 handoff written to</a:t>
+            </a:r>
+          </a:p>
+          <a:p>
+            <a:r>
+              <a:t>session-handoff.md". The board (screen 2) showed "✓ only own-org cards, no duplicates". The image is</a:t>
+            </a:r>
+          </a:p>
+          <a:p>
+            <a:r>
+              <a:t>cut to the harness panel.</a:t>
             </a:r>
           </a:p>
           <a:p/>
@@ -2961,7 +3042,7 @@
           </a:p>
           <a:p>
             <a:r>
-              <a:t>Source: README.md §11; Makefile `show-2`, `replay`.</a:t>
+              <a:t>Source: quiet run ab-20261017-113213-fe89a3 (screen 1); README.md §11; Makefile `show-2`.</a:t>
             </a:r>
           </a:p>
         </p:txBody>
@@ -3037,6 +3118,37 @@
           <a:p/>
           <a:p>
             <a:r>
+              <a:t>The quiet run's arm line (captured on 2026-10-17, run ab-20261017-113213-fe89a3; your output will</a:t>
+            </a:r>
+          </a:p>
+          <a:p>
+            <a:r>
+              <a:t>differ): `harness ABORTED: timeout claim=not_done primary={"continuity_failure": false} passed=True</a:t>
+            </a:r>
+          </a:p>
+          <a:p>
+            <a:r>
+              <a:t>hidden 56/56 mutants 0/4 reviewer=reject cost=$0.0268`. Sessions: 12 turns (claim_not_done), then</a:t>
+            </a:r>
+          </a:p>
+          <a:p>
+            <a:r>
+              <a:t>31. The diff-scope check is a secondary measure, and the F2 harness arm has no scope layer, so</a:t>
+            </a:r>
+          </a:p>
+          <a:p>
+            <a:r>
+              <a:t>nothing stopped that edit. Exit code 2 means the arm was aborted at a time limit, not that the</a:t>
+            </a:r>
+          </a:p>
+          <a:p>
+            <a:r>
+              <a:t>command broke.</a:t>
+            </a:r>
+          </a:p>
+          <a:p/>
+          <a:p>
+            <a:r>
               <a:t>The 7 A/Bs: run 3 (ab-20261016-211419-dfe06f, ab-20261016-213317-9a0ec1, ab-20261016-214959-de790f),</a:t>
             </a:r>
           </a:p>
@@ -3057,12 +3169,22 @@
           </a:p>
           <a:p>
             <a:r>
-              <a:t>ab-20261016-234027-226a76. The `git status` call: run 2, A/B ab-20261016-181736-08a9c4, run</a:t>
-            </a:r>
-          </a:p>
-          <a:p>
-            <a:r>
-              <a:t>r-20261016-181736-a05ddb. Post hoc rows: runs 2-4, 9 runs per arm.</a:t>
+              <a:t>ab-20261016-234027-226a76. The bare arm found its own state: in run 2 (A/B ab-20261016-181736-08a9c4,</a:t>
+            </a:r>
+          </a:p>
+          <a:p>
+            <a:r>
+              <a:t>run r-20261016-181736-a05ddb) its session 2 ran `git status` in its fourth tool call. Post hoc,</a:t>
+            </a:r>
+          </a:p>
+          <a:p>
+            <a:r>
+              <a:t>descriptive (runs 2-4, 9 runs per arm): agent time limit hit, harness 4, bare 0; median wall 361 s</a:t>
+            </a:r>
+          </a:p>
+          <a:p>
+            <a:r>
+              <a:t>against 232 s. Class-profile round, with the fix: both arms built the feature, 56 of 56 hidden tests.</a:t>
             </a:r>
           </a:p>
           <a:p/>
@@ -3076,11 +3198,6 @@
               <a:t>run because the pre-registered pilot gate did not pass.</a:t>
             </a:r>
           </a:p>
-          <a:p>
-            <a:r>
-              <a:t>[[CAPTURE: what make example-2 shows on each console screen, and its wall time | how: make example-2]]</a:t>
-            </a:r>
-          </a:p>
           <a:p/>
           <a:p>
             <a:r>
@@ -3089,7 +3206,7 @@
           </a:p>
           <a:p>
             <a:r>
-              <a:t>Source: course pilot runs 2-4 and class-profile round (A/B ids above); submodules/02-state-lifecycle/concepts.md (git status).</a:t>
+              <a:t>Source: quiet run ab-20261017-113213-fe89a3 (screens 3 and 5); course pilot runs 2-4 and class-profile round (A/B ids above); submodules/02-state-lifecycle/concepts.md (git status).</a:t>
             </a:r>
           </a:p>
         </p:txBody>
@@ -3431,17 +3548,33 @@
           <a:p/>
           <a:p>
             <a:r>
-              <a:t>Timing reference: in the class-profile round (A/B ab-20261017-090051-91f837), the harness arm's</a:t>
-            </a:r>
-          </a:p>
-          <a:p>
-            <a:r>
-              <a:t>primary verdict came 317 s after launch and its full verdict 481 s after launch.</a:t>
-            </a:r>
-          </a:p>
-          <a:p>
-            <a:r>
-              <a:t>[[CAPTURE: wall time of make show-3 on the class host, launch to the primary verdict and to the full verdict | how: make show-3]]</a:t>
+              <a:t>Harness arm layers: instructions, state, scope.</a:t>
+            </a:r>
+          </a:p>
+          <a:p/>
+          <a:p>
+            <a:r>
+              <a:t>Timing reference: in the quiet run of `make show-3` (captured on 2026-10-17, run</a:t>
+            </a:r>
+          </a:p>
+          <a:p>
+            <a:r>
+              <a:t>ab-20261017-114259-b64f54; your output will differ) the primary verdict came 4:25 after launch, the</a:t>
+            </a:r>
+          </a:p>
+          <a:p>
+            <a:r>
+              <a:t>full verdict 7:31 after launch, and the command took 7 min 43 s in all (exit 0). In the</a:t>
+            </a:r>
+          </a:p>
+          <a:p>
+            <a:r>
+              <a:t>class-profile round (A/B ab-20261017-090051-91f837) the harness arm's primary verdict came 317 s and</a:t>
+            </a:r>
+          </a:p>
+          <a:p>
+            <a:r>
+              <a:t>its full verdict 481 s after launch.</a:t>
             </a:r>
           </a:p>
           <a:p/>
@@ -4177,12 +4310,7 @@
           </a:p>
           <a:p>
             <a:r>
-              <a:t>(the timing reference is in the notes of slide 37). Once it is there, start the replay for slide 46</a:t>
-            </a:r>
-          </a:p>
-          <a:p>
-            <a:r>
-              <a:t>in terminal B: `make replay RUN=ab-20261016-214151-ca9841`.</a:t>
+              <a:t>(the timing reference is in the notes of slide 37).</a:t>
             </a:r>
           </a:p>
           <a:p/>
@@ -4356,17 +4484,42 @@
           <a:p/>
           <a:p>
             <a:r>
-              <a:t>The replayed run: pilot run 3, F4, A/B ab-20261016-214151-ca9841. F4 runs all four layers, so the</a:t>
-            </a:r>
-          </a:p>
-          <a:p>
-            <a:r>
-              <a:t>scope layer is in its harness arm. Follow-up: the harness arm cannot leave the allowed paths by</a:t>
-            </a:r>
-          </a:p>
-          <a:p>
-            <a:r>
-              <a:t>construction. What would make you trust that it also shipped a working feature?</a:t>
+              <a:t>In the quiet run (captured on 2026-10-17, run ab-20261017-114259-b64f54; your output will differ)</a:t>
+            </a:r>
+          </a:p>
+          <a:p>
+            <a:r>
+              <a:t>the agent began with `pwd; git status --short; git log --oneline`, read the ticket, then</a:t>
+            </a:r>
+          </a:p>
+          <a:p>
+            <a:r>
+              <a:t>`cat docs/QUALITY_SCORE.md`. It never tried an edit outside the allow list: no ⊘ block, no ↺</a:t>
+            </a:r>
+          </a:p>
+          <a:p>
+            <a:r>
+              <a:t>revert, and no sandbox denial. The harness decisions were the 31 instruction files, the initializer</a:t>
+            </a:r>
+          </a:p>
+          <a:p>
+            <a:r>
+              <a:t>step, and "feature_list.json written with F3 (passes: false)". Sessions: build 18 turns, test 12.</a:t>
+            </a:r>
+          </a:p>
+          <a:p>
+            <a:r>
+              <a:t>If tonight's run blocks an edit, read its reason aloud: it is what the agent read in its tool result,</a:t>
+            </a:r>
+          </a:p>
+          <a:p>
+            <a:r>
+              <a:t>and it names the phase and the allowed paths. If it records a `sandbox_denied` event, show its reason</a:t>
+            </a:r>
+          </a:p>
+          <a:p>
+            <a:r>
+              <a:t>code and command; otherwise show the policy printout. The image is cut to the harness panel.</a:t>
             </a:r>
           </a:p>
           <a:p/>
@@ -4377,7 +4530,7 @@
           </a:p>
           <a:p>
             <a:r>
-              <a:t>Source: README.md §11; Makefile `show-3`, `replay`.</a:t>
+              <a:t>Source: quiet run ab-20261017-114259-b64f54 (screen 1); README.md §11; Makefile `show-3`.</a:t>
             </a:r>
           </a:p>
         </p:txBody>
@@ -4453,6 +4606,32 @@
           <a:p/>
           <a:p>
             <a:r>
+              <a:t>The quiet run's arm line (captured on 2026-10-17, run ab-20261017-114259-b64f54; your output will</a:t>
+            </a:r>
+          </a:p>
+          <a:p>
+            <a:r>
+              <a:t>differ): `harness completed claim=done primary={"out_of_scope_files": 0, "test_phase_source_edits":</a:t>
+            </a:r>
+          </a:p>
+          <a:p>
+            <a:r>
+              <a:t>0} passed=True hidden 49/49 mutants 4/4 reviewer=reject cost=$0.0142`. Its diff map: app/api/issues.py,</a:t>
+            </a:r>
+          </a:p>
+          <a:p>
+            <a:r>
+              <a:t>app/services/issues.py, docs/HANDBOOK.md, tests/visible/test_issue_idempotency.py, all inside the</a:t>
+            </a:r>
+          </a:p>
+          <a:p>
+            <a:r>
+              <a:t>build allow list. Sandbox denials: none.</a:t>
+            </a:r>
+          </a:p>
+          <a:p/>
+          <a:p>
+            <a:r>
               <a:t>The 7 A/Bs: run 3 (ab-20261016-212115-a361f5, ab-20261016-213624-d7eb13, ab-20261016-215443-f2c188),</a:t>
             </a:r>
           </a:p>
@@ -4463,32 +4642,37 @@
           </a:p>
           <a:p>
             <a:r>
-              <a:t>class-profile round (ab-20261017-090051-91f837). Post hoc F4 rows: runs 2 and 3 (6 runs per arm).</a:t>
-            </a:r>
-          </a:p>
-          <a:p>
-            <a:r>
-              <a:t>On F2 the harness arms also stayed inside the allowed paths (0 of 9), but demo-2 has no scope layer,</a:t>
-            </a:r>
-          </a:p>
-          <a:p>
-            <a:r>
-              <a:t>so that is not the scope layer's doing. Sandbox: no `sandbox_denied` event in any recorded pilot A/B</a:t>
-            </a:r>
-          </a:p>
-          <a:p>
-            <a:r>
-              <a:t>(checked on 2026-10-17 with `grep -l sandbox_denied .shipharness/runs/*/events.jsonl`). If</a:t>
-            </a:r>
-          </a:p>
-          <a:p>
-            <a:r>
-              <a:t>tonight's `make show-3` recorded one, show its reason code and command first.</a:t>
-            </a:r>
-          </a:p>
-          <a:p>
-            <a:r>
-              <a:t>[[CAPTURE: what make example-3 shows on each console screen, and its wall time | how: make example-3]]</a:t>
+              <a:t>class-profile round (ab-20261017-090051-91f837). Post hoc, F3 (9 runs per arm): harness arms</a:t>
+            </a:r>
+          </a:p>
+          <a:p>
+            <a:r>
+              <a:t>shipped a median of 0 tests against 6; claimed done in 4 against 9. Post hoc, F4 (all four layers;</a:t>
+            </a:r>
+          </a:p>
+          <a:p>
+            <a:r>
+              <a:t>runs 2 and 3, 6 runs per arm): bare arms left the allowed paths in 6 of 6 runs, harness arms in 0 of</a:t>
+            </a:r>
+          </a:p>
+          <a:p>
+            <a:r>
+              <a:t>6. On F2 the harness arms also stayed inside the allowed paths (0 of 9), but demo-2 has no scope</a:t>
+            </a:r>
+          </a:p>
+          <a:p>
+            <a:r>
+              <a:t>layer, so that is not the scope layer's doing. Sandbox: no `sandbox_denied` event in any recorded</a:t>
+            </a:r>
+          </a:p>
+          <a:p>
+            <a:r>
+              <a:t>pilot A/B (checked on 2026-10-17 with `grep -l sandbox_denied .shipharness/runs/*/events.jsonl`),</a:t>
+            </a:r>
+          </a:p>
+          <a:p>
+            <a:r>
+              <a:t>and none in the quiet run.</a:t>
             </a:r>
           </a:p>
           <a:p/>
@@ -4499,7 +4683,7 @@
           </a:p>
           <a:p>
             <a:r>
-              <a:t>Source: course pilot runs 2-4 and class-profile round (A/B ids above).</a:t>
+              <a:t>Source: quiet run ab-20261017-114259-b64f54 (screen 3); course pilot runs 2-4 and class-profile round (A/B ids above).</a:t>
             </a:r>
           </a:p>
         </p:txBody>
@@ -4958,54 +5142,64 @@
           </a:p>
           <a:p>
             <a:r>
-              <a:t>are live at a time; the S4 replay starts in terminal B only after show-4 has finished.</a:t>
-            </a:r>
-          </a:p>
-          <a:p>
-            <a:r>
-              <a:t>The class profile is identical for both arms: effort low, Fast tier, 2 CPUs per container, early</a:t>
-            </a:r>
-          </a:p>
-          <a:p>
-            <a:r>
-              <a:t>primary verdict, five flakiness re-runs.</a:t>
+              <a:t>are live at a time. The class profile is identical for both arms: effort low, Fast tier, 2 CPUs per</a:t>
+            </a:r>
+          </a:p>
+          <a:p>
+            <a:r>
+              <a:t>container, early primary verdict, five flakiness re-runs. Final run cap $0.25 per arm.</a:t>
             </a:r>
           </a:p>
           <a:p/>
           <a:p>
             <a:r>
-              <a:t>Timing reference for show-4: in the class-profile round (A/B ab-20261017-090903-926c02, run alone),</a:t>
-            </a:r>
-          </a:p>
-          <a:p>
-            <a:r>
-              <a:t>the harness arm's primary verdict came 811 s after launch and its full verdict 927 s after launch; it</a:t>
-            </a:r>
-          </a:p>
-          <a:p>
-            <a:r>
-              <a:t>hit the agent time limit in the test phase.</a:t>
-            </a:r>
-          </a:p>
-          <a:p>
-            <a:r>
-              <a:t>[[CAPTURE: wall time of make show-4 on the class host, launch to the primary verdict and to the full verdict | how: make show-4]]</a:t>
+              <a:t>Timing reference for show-4: in the quiet run of `make show-4` (captured on 2026-10-17, run</a:t>
+            </a:r>
+          </a:p>
+          <a:p>
+            <a:r>
+              <a:t>ab-20261017-115138-c45d9d; your output will differ) the primary verdict came 9:19 after launch, the</a:t>
+            </a:r>
+          </a:p>
+          <a:p>
+            <a:r>
+              <a:t>full verdict 10:55 after launch, and the command took 11 min 6 s in all. It exited 2: the agent time</a:t>
+            </a:r>
+          </a:p>
+          <a:p>
+            <a:r>
+              <a:t>limit ended the test phase. In the class-profile round (A/B ab-20261017-090903-926c02, run alone)</a:t>
+            </a:r>
+          </a:p>
+          <a:p>
+            <a:r>
+              <a:t>the harness arm's primary verdict came 811 s and its full verdict 927 s after launch.</a:t>
             </a:r>
           </a:p>
           <a:p/>
           <a:p>
             <a:r>
-              <a:t>The final A/B must be finished by 3:40, when slide 64 opens the final block; with two features</a:t>
-            </a:r>
-          </a:p>
-          <a:p>
-            <a:r>
-              <a:t>`make final` runs them one after another.</a:t>
-            </a:r>
-          </a:p>
-          <a:p>
-            <a:r>
-              <a:t>[[CAPTURE: wall time of make final FEATURES=F5 on the class host, launch to each arm's primary verdict and full verdict | how: make final FEATURES=F5]]</a:t>
+              <a:t>Timing reference for the final: the quiet run of `make final FEATURES=F5` (captured on</a:t>
+            </a:r>
+          </a:p>
+          <a:p>
+            <a:r>
+              <a:t>2026-10-17, run ab-20261017-120323-c97138; your output will differ) took 12 min 47 s: bare arm</a:t>
+            </a:r>
+          </a:p>
+          <a:p>
+            <a:r>
+              <a:t>primary verdict 3:27 and full verdict 6:50 after launch, harness arm 9:48 and 12:32 (it hit the</a:t>
+            </a:r>
+          </a:p>
+          <a:p>
+            <a:r>
+              <a:t>agent time limit, exit 2). The final A/B must be finished by 3:40, when slide 64 opens the final</a:t>
+            </a:r>
+          </a:p>
+          <a:p>
+            <a:r>
+              <a:t>block; with two features `make final` runs them one after another.</a:t>
             </a:r>
           </a:p>
           <a:p/>
@@ -5736,17 +5930,7 @@
           </a:p>
           <a:p>
             <a:r>
-              <a:t>show-4 `Cost:` line and terminal C for the final (timing references in the notes of slide 51). Once</a:t>
-            </a:r>
-          </a:p>
-          <a:p>
-            <a:r>
-              <a:t>show-4 has finished, start the replay for slide 61 in terminal B:</a:t>
-            </a:r>
-          </a:p>
-          <a:p>
-            <a:r>
-              <a:t>`make replay RUN=ab-20261017-090903-926c02`.</a:t>
+              <a:t>show-4 `Cost:` line and terminal C for the final (timing references in the notes of slide 51).</a:t>
             </a:r>
           </a:p>
           <a:p/>
@@ -5930,7 +6114,12 @@
           <a:p/>
           <a:p>
             <a:r>
-              <a:t>`names = ...`, the build-phase branch, the clean-state check, and `passed = ...`.</a:t>
+              <a:t>`names = ...`, the build-phase branch, the start of the clean-state check, its failure line, and</a:t>
+            </a:r>
+          </a:p>
+          <a:p>
+            <a:r>
+              <a:t>`passed = ...`.</a:t>
             </a:r>
           </a:p>
           <a:p/>
@@ -6017,27 +6206,52 @@
           <a:p/>
           <a:p>
             <a:r>
-              <a:t>The replayed run: class-profile round, F4, A/B ab-20261017-090903-926c02. Bare arm: build session</a:t>
-            </a:r>
-          </a:p>
-          <a:p>
-            <a:r>
-              <a:t>ended with claim done after 30 turns, hidden tests 68 of 69, mutants killed 4 of 4, 16 shipped tests.</a:t>
-            </a:r>
-          </a:p>
-          <a:p>
-            <a:r>
-              <a:t>Harness arm: hidden 68 of 69, mutants 1 of 4; it wrote tests in the test phase for the first time in</a:t>
-            </a:r>
-          </a:p>
-          <a:p>
-            <a:r>
-              <a:t>any pilot run, and the test-phase filters ran each of its 6 tests 5 times. Say at the filter table:</a:t>
-            </a:r>
-          </a:p>
-          <a:p>
-            <a:r>
-              <a:t>"The referee-set mutants were never visible to the filters."</a:t>
+              <a:t>In the quiet run (captured on 2026-10-17, run ab-20261017-115138-c45d9d; your output will differ):</a:t>
+            </a:r>
+          </a:p>
+          <a:p>
+            <a:r>
+              <a:t>minute 1, turn 1.15 tried to patch app/services/errors.py and the scope layer blocked it ("outside</a:t>
+            </a:r>
+          </a:p>
+          <a:p>
+            <a:r>
+              <a:t>the allowed paths"); minute 3, turn 1.31 called `finish done` and the gate ran, every pill ✓</a:t>
+            </a:r>
+          </a:p>
+          <a:p>
+            <a:r>
+              <a:t>(visible tests, existing tests, R1-R7, board, clean state); the harness then set F4 `passes` with</a:t>
+            </a:r>
+          </a:p>
+          <a:p>
+            <a:r>
+              <a:t>its evidence and moved the exec plan to completed; minutes 4-8, the test phase: one new test file,</a:t>
+            </a:r>
+          </a:p>
+          <a:p>
+            <a:r>
+              <a:t>a failing `run_visible_tests`, the filters; minute 9, the agent time limit ended the run and screen 1</a:t>
+            </a:r>
+          </a:p>
+          <a:p>
+            <a:r>
+              <a:t>showed "primary verdict ready: FAIL" at 9:19; the full verdict came at 10:55. Screen 2's conflict</a:t>
+            </a:r>
+          </a:p>
+          <a:p>
+            <a:r>
+              <a:t>panel: "CONFLICT DETECTED: tab B got HTTP 409", and tab B read "This issue was changed by someone</a:t>
+            </a:r>
+          </a:p>
+          <a:p>
+            <a:r>
+              <a:t>else". Say at the filter table: "The referee-set mutants were never visible to the filters." The</a:t>
+            </a:r>
+          </a:p>
+          <a:p>
+            <a:r>
+              <a:t>image joins the harness panel of screen 1 with the conflict panel's banner and tab B.</a:t>
             </a:r>
           </a:p>
           <a:p/>
@@ -6048,7 +6262,7 @@
           </a:p>
           <a:p>
             <a:r>
-              <a:t>Source: README.md §11; Makefile `show-4`, `replay`.</a:t>
+              <a:t>Source: quiet run ab-20261017-115138-c45d9d (screens 1 and 2); README.md §11; Makefile `show-4`.</a:t>
             </a:r>
           </a:p>
         </p:txBody>
@@ -6124,6 +6338,37 @@
           <a:p/>
           <a:p>
             <a:r>
+              <a:t>The quiet run's arm line (captured on 2026-10-17, run ab-20261017-115138-c45d9d; your output will</a:t>
+            </a:r>
+          </a:p>
+          <a:p>
+            <a:r>
+              <a:t>differ): `harness ABORTED: timeout claim=done primary={"hidden_passed": 68, "mutants_killed": 0}</a:t>
+            </a:r>
+          </a:p>
+          <a:p>
+            <a:r>
+              <a:t>passed=False hidden 68/69 mutants 0/4 reviewer=reject cost=$0.0233`. Filter table: 4 proposed tests,</a:t>
+            </a:r>
+          </a:p>
+          <a:p>
+            <a:r>
+              <a:t>1 kept; two discarded by filter 3 (no new line coverage) and one by filter 2 ("failed on run 1 of 5:</a:t>
+            </a:r>
+          </a:p>
+          <a:p>
+            <a:r>
+              <a:t>assert 422 == 412"). Diff map: one ⊘ blocked file (app/services/errors.py), every shipped file inside</a:t>
+            </a:r>
+          </a:p>
+          <a:p>
+            <a:r>
+              <a:t>the allowed paths. This is a show run, so it is not part of the pilot counts below.</a:t>
+            </a:r>
+          </a:p>
+          <a:p/>
+          <a:p>
+            <a:r>
               <a:t>The 4 A/Bs: run 3 (ab-20261016-212252-aa1644, ab-20261016-214151-ca9841, ab-20261016-220010-c5b4bf),</a:t>
             </a:r>
           </a:p>
@@ -6134,22 +6379,27 @@
           </a:p>
           <a:p>
             <a:r>
-              <a:t>killed 4, 0, 3 of 4. On F4 in runs 2 and 3 the harness arm never called `finish`, so its verify gate</a:t>
-            </a:r>
-          </a:p>
-          <a:p>
-            <a:r>
-              <a:t>never ran; in two of the three run 3 A/Bs the agent time limit cut its test phase. F4 had no run 4 (pilot cap). Post hoc:</a:t>
-            </a:r>
-          </a:p>
-          <a:p>
-            <a:r>
-              <a:t>chosen after the results, descriptive; runs 2-4 and the live console check, 34 runs per arm.</a:t>
-            </a:r>
-          </a:p>
-          <a:p>
-            <a:r>
-              <a:t>[[CAPTURE: what make example-4 shows on each console screen, and its wall time | how: make example-4]]</a:t>
+              <a:t>killed 4, 0, 3 of 4. Class-profile round: both arms 68 of 69 hidden tests; mutants killed: bare 4,</a:t>
+            </a:r>
+          </a:p>
+          <a:p>
+            <a:r>
+              <a:t>harness 1. On F4 in runs 2 and 3 the harness arm never claimed done (0 of 6), so its verify gate never</a:t>
+            </a:r>
+          </a:p>
+          <a:p>
+            <a:r>
+              <a:t>ran; in two of the three run 3 A/Bs the agent time limit cut its test phase. F4 had no run 4 (pilot</a:t>
+            </a:r>
+          </a:p>
+          <a:p>
+            <a:r>
+              <a:t>cap). Post hoc (chosen after the results, descriptive; runs 2-4 and the live console check, 34 runs</a:t>
+            </a:r>
+          </a:p>
+          <a:p>
+            <a:r>
+              <a:t>per arm): no done claim came with failing hidden tests (0 of 19 bare, 0 of 10 harness).</a:t>
             </a:r>
           </a:p>
           <a:p/>
@@ -6160,7 +6410,7 @@
           </a:p>
           <a:p>
             <a:r>
-              <a:t>Source: course pilot runs 2-4 and class-profile round (A/B ids above).</a:t>
+              <a:t>Source: quiet run ab-20261017-115138-c45d9d (screen 3); course pilot runs 2-4 and class-profile round (A/B ids above).</a:t>
             </a:r>
           </a:p>
         </p:txBody>
@@ -6420,7 +6670,32 @@
           <a:p/>
           <a:p>
             <a:r>
-              <a:t>Both arms, side by side.</a:t>
+              <a:t>Both arms, side by side. Show tonight's final live; the picture is the quiet run of `make final</a:t>
+            </a:r>
+          </a:p>
+          <a:p>
+            <a:r>
+              <a:t>FEATURES=F5` (captured on 2026-10-17, run ab-20261017-120323-c97138; your output will differ): bare</a:t>
+            </a:r>
+          </a:p>
+          <a:p>
+            <a:r>
+              <a:t>arm completed and claimed done, primary verdict 3:27 and full verdict 6:50 after launch; harness arm</a:t>
+            </a:r>
+          </a:p>
+          <a:p>
+            <a:r>
+              <a:t>hit the agent time limit without a claim, 9:48 and 12:32; hidden tests 46 of 46 and mutants killed 2</a:t>
+            </a:r>
+          </a:p>
+          <a:p>
+            <a:r>
+              <a:t>of 3 in both arms; F5 has no primary measure, so read those counts. The harness arm's second turn</a:t>
+            </a:r>
+          </a:p>
+          <a:p>
+            <a:r>
+              <a:t>read session-handoff.md.</a:t>
             </a:r>
           </a:p>
           <a:p/>
@@ -6512,7 +6787,12 @@
           </a:p>
           <a:p>
             <a:r>
-              <a:t>board showed "✓ only own-org cards, no duplicates".</a:t>
+              <a:t>board showed "✓ only own-org cards, no duplicates", and so did both boards of the quiet final run</a:t>
+            </a:r>
+          </a:p>
+          <a:p>
+            <a:r>
+              <a:t>(captured on 2026-10-17, run ab-20261017-120323-c97138; your output will differ).</a:t>
             </a:r>
           </a:p>
           <a:p/>
@@ -6824,7 +7104,12 @@
           <a:p/>
           <a:p>
             <a:r>
-              <a:t>Learner budgets are course design.</a:t>
+              <a:t>Learner budgets are course design; the figures are the live-step bounds in README.md §12 and each</a:t>
+            </a:r>
+          </a:p>
+          <a:p>
+            <a:r>
+              <a:t>assignment's "Cost and trace budget".</a:t>
             </a:r>
           </a:p>
           <a:p/>
@@ -7381,28 +7666,33 @@
           </a:p>
           <a:p>
             <a:r>
-              <a:t>instead, plus one real run replayed and one constructed example.</a:t>
+              <a:t>instead, live.</a:t>
             </a:r>
           </a:p>
           <a:p/>
           <a:p>
             <a:r>
-              <a:t>Timing reference: in the class-profile round (2026-10-17, A/B ab-20261017-084558-0356a0, class</a:t>
-            </a:r>
-          </a:p>
-          <a:p>
-            <a:r>
-              <a:t>profile: effort low, Fast tier, 2 CPUs per container, early primary verdict), the harness arm's</a:t>
-            </a:r>
-          </a:p>
-          <a:p>
-            <a:r>
-              <a:t>primary verdict came 114 s after launch and its full verdict 324 s after launch.</a:t>
-            </a:r>
-          </a:p>
-          <a:p>
-            <a:r>
-              <a:t>[[CAPTURE: wall time of make show-1 on the class host, launch to the primary verdict and to the full verdict | how: make show-1]]</a:t>
+              <a:t>Timing reference: in the quiet run of `make show-1` (captured on 2026-10-17, run</a:t>
+            </a:r>
+          </a:p>
+          <a:p>
+            <a:r>
+              <a:t>ab-20261017-112101-c5d839; your output will differ) the primary verdict came 4:11 after launch, the</a:t>
+            </a:r>
+          </a:p>
+          <a:p>
+            <a:r>
+              <a:t>full verdict 10:00 after launch, and the command took 10 min 14 s in all (exit 0). In the</a:t>
+            </a:r>
+          </a:p>
+          <a:p>
+            <a:r>
+              <a:t>class-profile round (A/B ab-20261017-084558-0356a0) the harness arm's primary verdict came 114 s and</a:t>
+            </a:r>
+          </a:p>
+          <a:p>
+            <a:r>
+              <a:t>its full verdict 324 s after launch.</a:t>
             </a:r>
           </a:p>
           <a:p/>
@@ -11087,7 +11377,7 @@
                 </a:solidFill>
                 <a:latin typeface="Calibri"/>
               </a:rPr>
-              <a:t>Read the S1 result: R1 and R3 failures with and without the instructions layer</a:t>
+              <a:t>Read the S1 result: new R1 violations per run, bare arm against harness arm</a:t>
             </a:r>
           </a:p>
           <a:p>
@@ -15124,7 +15414,7 @@
                 </a:solidFill>
                 <a:latin typeface="Calibri"/>
               </a:rPr>
-              <a:t>Demo block: harness in action, and a real run replayed</a:t>
+              <a:t>Demo block: what to watch</a:t>
             </a:r>
           </a:p>
         </p:txBody>
@@ -15138,7 +15428,7 @@
         <p:spPr>
           <a:xfrm>
             <a:off x="533400" y="1219200"/>
-            <a:ext cx="11125200" cy="4705350"/>
+            <a:ext cx="11125200" cy="2229707"/>
           </a:xfrm>
           <a:prstGeom prst="rect">
             <a:avLst/>
@@ -15153,11 +15443,11 @@
           <a:p>
             <a:pPr algn="l">
               <a:spcAft>
-                <a:spcPts val="945"/>
+                <a:spcPts val="860"/>
               </a:spcAft>
             </a:pPr>
             <a:r>
-              <a:rPr sz="2100" b="0">
+              <a:rPr sz="1912" b="0">
                 <a:solidFill>
                   <a:srgbClr val="111820"/>
                 </a:solidFill>
@@ -15166,32 +15456,23 @@
               <a:t>•  </a:t>
             </a:r>
             <a:r>
-              <a:rPr sz="2100" b="0">
-                <a:solidFill>
-                  <a:srgbClr val="111820"/>
-                </a:solidFill>
-                <a:latin typeface="Consolas"/>
-              </a:rPr>
-              <a:t>make show-1</a:t>
-            </a:r>
-            <a:r>
-              <a:rPr sz="2100" b="0">
-                <a:solidFill>
-                  <a:srgbClr val="111820"/>
-                </a:solidFill>
-                <a:latin typeface="Calibri"/>
-              </a:rPr>
-              <a:t>, finished: screen 1 shows "primary verdict ready", then the full verdict</a:t>
+              <a:rPr sz="1912" b="0">
+                <a:solidFill>
+                  <a:srgbClr val="111820"/>
+                </a:solidFill>
+                <a:latin typeface="Calibri"/>
+              </a:rPr>
+              <a:t>Screen 1: build turns, test phase, "Agent said done", "primary verdict ready", full verdict</a:t>
             </a:r>
           </a:p>
           <a:p>
             <a:pPr algn="l">
               <a:spcAft>
-                <a:spcPts val="945"/>
+                <a:spcPts val="860"/>
               </a:spcAft>
             </a:pPr>
             <a:r>
-              <a:rPr sz="2100" b="0">
+              <a:rPr sz="1912" b="0">
                 <a:solidFill>
                   <a:srgbClr val="111820"/>
                 </a:solidFill>
@@ -15200,23 +15481,23 @@
               <a:t>•  </a:t>
             </a:r>
             <a:r>
-              <a:rPr sz="2100" b="0">
-                <a:solidFill>
-                  <a:srgbClr val="111820"/>
-                </a:solidFill>
-                <a:latin typeface="Calibri"/>
-              </a:rPr>
-              <a:t>Screen 1: the map read first, then the documents the ticket needs; screen 3: files read by category</a:t>
+              <a:rPr sz="1912" b="0">
+                <a:solidFill>
+                  <a:srgbClr val="111820"/>
+                </a:solidFill>
+                <a:latin typeface="Calibri"/>
+              </a:rPr>
+              <a:t>Screen 3: files read and the diff map; screen 2: the board ("✓ only own-org cards"); screen 5: trace links</a:t>
             </a:r>
           </a:p>
           <a:p>
             <a:pPr algn="l">
               <a:spcAft>
-                <a:spcPts val="945"/>
+                <a:spcPts val="860"/>
               </a:spcAft>
             </a:pPr>
             <a:r>
-              <a:rPr sz="2100" b="0">
+              <a:rPr sz="1912" b="0">
                 <a:solidFill>
                   <a:srgbClr val="111820"/>
                 </a:solidFill>
@@ -15225,63 +15506,44 @@
               <a:t>•  </a:t>
             </a:r>
             <a:r>
-              <a:rPr sz="2100" b="0">
-                <a:solidFill>
-                  <a:srgbClr val="111820"/>
-                </a:solidFill>
-                <a:latin typeface="Calibri"/>
-              </a:rPr>
-              <a:t>Real run, replayed: </a:t>
-            </a:r>
-            <a:r>
-              <a:rPr sz="2100" b="0">
-                <a:solidFill>
-                  <a:srgbClr val="111820"/>
-                </a:solidFill>
-                <a:latin typeface="Consolas"/>
-              </a:rPr>
-              <a:t>make replay RUN=ab-20261016-212252-aa1644</a:t>
-            </a:r>
-            <a:r>
-              <a:rPr sz="2100" b="0">
-                <a:solidFill>
-                  <a:srgbClr val="111820"/>
-                </a:solidFill>
-                <a:latin typeface="Calibri"/>
-              </a:rPr>
-              <a:t> (pilot run 3, F4)</a:t>
-            </a:r>
-          </a:p>
-          <a:p>
-            <a:pPr algn="l">
-              <a:spcAft>
-                <a:spcPts val="945"/>
-              </a:spcAft>
-            </a:pPr>
-            <a:r>
-              <a:rPr sz="2100" b="0">
-                <a:solidFill>
-                  <a:srgbClr val="111820"/>
-                </a:solidFill>
-                <a:latin typeface="Calibri"/>
-              </a:rPr>
-              <a:t>•  </a:t>
-            </a:r>
-            <a:r>
-              <a:rPr sz="2100" b="0">
-                <a:solidFill>
-                  <a:srgbClr val="111820"/>
-                </a:solidFill>
-                <a:latin typeface="Calibri"/>
-              </a:rPr>
-              <a:t>In that run the harness arm's change added 3 new R1 violations, and the referee's R1 check listed them</a:t>
-            </a:r>
-          </a:p>
-        </p:txBody>
-      </p:sp>
-      <p:sp>
-        <p:nvSpPr>
-          <p:cNvPr id="9" name="Rectangle 8"/>
+              <a:rPr sz="1912" b="0">
+                <a:solidFill>
+                  <a:srgbClr val="111820"/>
+                </a:solidFill>
+                <a:latin typeface="Calibri"/>
+              </a:rPr>
+              <a:t>Console screens 1 and 2 (show-1), captured on 2026-10-17, run ab-20261017-112101-c5d839; your output will differ</a:t>
+            </a:r>
+          </a:p>
+        </p:txBody>
+      </p:sp>
+      <p:pic>
+        <p:nvPicPr>
+          <p:cNvPr id="9" name="Picture 8" descr="s1-watch.png"/>
+          <p:cNvPicPr>
+            <a:picLocks noChangeAspect="1"/>
+          </p:cNvPicPr>
+          <p:nvPr/>
+        </p:nvPicPr>
+        <p:blipFill>
+          <a:blip r:embed="rId2"/>
+          <a:stretch>
+            <a:fillRect/>
+          </a:stretch>
+        </p:blipFill>
+        <p:spPr>
+          <a:xfrm>
+            <a:off x="2911123" y="3544157"/>
+            <a:ext cx="6369755" cy="2380393"/>
+          </a:xfrm>
+          <a:prstGeom prst="rect">
+            <a:avLst/>
+          </a:prstGeom>
+        </p:spPr>
+      </p:pic>
+      <p:sp>
+        <p:nvSpPr>
+          <p:cNvPr id="10" name="Rectangle 9"/>
           <p:cNvSpPr/>
           <p:nvPr/>
         </p:nvSpPr>
@@ -15327,7 +15589,7 @@
       </p:sp>
       <p:sp>
         <p:nvSpPr>
-          <p:cNvPr id="10" name="TextBox 9"/>
+          <p:cNvPr id="11" name="TextBox 10"/>
           <p:cNvSpPr txBox="1"/>
           <p:nvPr/>
         </p:nvSpPr>
@@ -15992,7 +16254,7 @@
         <p:spPr>
           <a:xfrm>
             <a:off x="533400" y="628650"/>
-            <a:ext cx="11125200" cy="933450"/>
+            <a:ext cx="11125200" cy="495300"/>
           </a:xfrm>
           <a:prstGeom prst="rect">
             <a:avLst/>
@@ -16013,7 +16275,7 @@
                 </a:solidFill>
                 <a:latin typeface="Calibri"/>
               </a:rPr>
-              <a:t>Demo block: a constructed example, and what the pilot measured</a:t>
+              <a:t>Demo block: reading the result</a:t>
             </a:r>
           </a:p>
         </p:txBody>
@@ -16026,8 +16288,8 @@
         </p:nvSpPr>
         <p:spPr>
           <a:xfrm>
-            <a:off x="533400" y="1657350"/>
-            <a:ext cx="11125200" cy="4743450"/>
+            <a:off x="533400" y="1219200"/>
+            <a:ext cx="11125200" cy="3094387"/>
           </a:xfrm>
           <a:prstGeom prst="rect">
             <a:avLst/>
@@ -16042,11 +16304,11 @@
           <a:p>
             <a:pPr algn="l">
               <a:spcAft>
-                <a:spcPts val="945"/>
+                <a:spcPts val="860"/>
               </a:spcAft>
             </a:pPr>
             <a:r>
-              <a:rPr sz="2100" b="0">
+              <a:rPr sz="1912" b="0">
                 <a:solidFill>
                   <a:srgbClr val="111820"/>
                 </a:solidFill>
@@ -16055,41 +16317,23 @@
               <a:t>•  </a:t>
             </a:r>
             <a:r>
-              <a:rPr sz="2100" b="0">
-                <a:solidFill>
-                  <a:srgbClr val="111820"/>
-                </a:solidFill>
-                <a:latin typeface="Calibri"/>
-              </a:rPr>
-              <a:t>Constructed example: </a:t>
-            </a:r>
-            <a:r>
-              <a:rPr sz="2100" b="0">
-                <a:solidFill>
-                  <a:srgbClr val="111820"/>
-                </a:solidFill>
-                <a:latin typeface="Consolas"/>
-              </a:rPr>
-              <a:t>make example-1</a:t>
-            </a:r>
-            <a:r>
-              <a:rPr sz="2100" b="0">
-                <a:solidFill>
-                  <a:srgbClr val="111820"/>
-                </a:solidFill>
-                <a:latin typeface="Calibri"/>
-              </a:rPr>
-              <a:t>, scripted, no model; CONSTRUCTED EXAMPLE on every screen</a:t>
+              <a:rPr sz="1912" b="0">
+                <a:solidFill>
+                  <a:srgbClr val="111820"/>
+                </a:solidFill>
+                <a:latin typeface="Calibri"/>
+              </a:rPr>
+              <a:t>show-1 in the quiet run: 0 new R1 violations (passes), hidden tests 52 of 52, mutants killed 2 of 4</a:t>
             </a:r>
           </a:p>
           <a:p>
             <a:pPr algn="l">
               <a:spcAft>
-                <a:spcPts val="945"/>
+                <a:spcPts val="860"/>
               </a:spcAft>
             </a:pPr>
             <a:r>
-              <a:rPr sz="2100" b="0">
+              <a:rPr sz="1912" b="0">
                 <a:solidFill>
                   <a:srgbClr val="111820"/>
                 </a:solidFill>
@@ -16098,23 +16342,23 @@
               <a:t>•  </a:t>
             </a:r>
             <a:r>
-              <a:rPr sz="2100" b="0">
-                <a:solidFill>
-                  <a:srgbClr val="111820"/>
-                </a:solidFill>
-                <a:latin typeface="Calibri"/>
-              </a:rPr>
-              <a:t>It shows the ⚠ other-org marks on a board, which no pilot arm produced</a:t>
+              <a:rPr sz="1912" b="0">
+                <a:solidFill>
+                  <a:srgbClr val="111820"/>
+                </a:solidFill>
+                <a:latin typeface="Calibri"/>
+              </a:rPr>
+              <a:t>One harness arm on one run shows the layer ran, not that it helped: that takes the A/B</a:t>
             </a:r>
           </a:p>
           <a:p>
             <a:pPr algn="l">
               <a:spcAft>
-                <a:spcPts val="945"/>
+                <a:spcPts val="860"/>
               </a:spcAft>
             </a:pPr>
             <a:r>
-              <a:rPr sz="2100" b="0">
+              <a:rPr sz="1912" b="0">
                 <a:solidFill>
                   <a:srgbClr val="111820"/>
                 </a:solidFill>
@@ -16123,7 +16367,7 @@
               <a:t>•  </a:t>
             </a:r>
             <a:r>
-              <a:rPr sz="2100" b="0">
+              <a:rPr sz="1912" b="0">
                 <a:solidFill>
                   <a:srgbClr val="111820"/>
                 </a:solidFill>
@@ -16135,11 +16379,11 @@
           <a:p>
             <a:pPr algn="l">
               <a:spcAft>
-                <a:spcPts val="945"/>
+                <a:spcPts val="860"/>
               </a:spcAft>
             </a:pPr>
             <a:r>
-              <a:rPr sz="2100" b="0">
+              <a:rPr sz="1912" b="0">
                 <a:solidFill>
                   <a:srgbClr val="111820"/>
                 </a:solidFill>
@@ -16148,7 +16392,7 @@
               <a:t>•  </a:t>
             </a:r>
             <a:r>
-              <a:rPr sz="2100" b="0">
+              <a:rPr sz="1912" b="0">
                 <a:solidFill>
                   <a:srgbClr val="111820"/>
                 </a:solidFill>
@@ -16160,11 +16404,11 @@
           <a:p>
             <a:pPr algn="l">
               <a:spcAft>
-                <a:spcPts val="945"/>
+                <a:spcPts val="860"/>
               </a:spcAft>
             </a:pPr>
             <a:r>
-              <a:rPr sz="2100" b="0">
+              <a:rPr sz="1912" b="0">
                 <a:solidFill>
                   <a:srgbClr val="111820"/>
                 </a:solidFill>
@@ -16173,42 +16417,41 @@
               <a:t>•  </a:t>
             </a:r>
             <a:r>
-              <a:rPr sz="2100" b="0">
-                <a:solidFill>
-                  <a:srgbClr val="111820"/>
-                </a:solidFill>
-                <a:latin typeface="Calibri"/>
-              </a:rPr>
-              <a:t>Why: in run 2 every bare arm opened the handbook with its third tool call; no arm copied the legacy handler into a leak</a:t>
-            </a:r>
-          </a:p>
-          <a:p>
-            <a:pPr algn="l">
-              <a:spcAft>
-                <a:spcPts val="945"/>
-              </a:spcAft>
-            </a:pPr>
-            <a:r>
-              <a:rPr sz="2100" b="0">
-                <a:solidFill>
-                  <a:srgbClr val="111820"/>
-                </a:solidFill>
-                <a:latin typeface="Calibri"/>
-              </a:rPr>
-              <a:t>•  </a:t>
-            </a:r>
-            <a:r>
-              <a:rPr sz="2100" b="0">
-                <a:solidFill>
-                  <a:srgbClr val="111820"/>
-                </a:solidFill>
-                <a:latin typeface="Calibri"/>
-              </a:rPr>
-              <a:t>Post hoc, descriptive (10 runs per arm): done claimed by harness 5, bare 9; median cost $0.0122 against $0.0103</a:t>
-            </a:r>
-          </a:p>
-        </p:txBody>
-      </p:sp>
+              <a:rPr sz="1912" b="0">
+                <a:solidFill>
+                  <a:srgbClr val="111820"/>
+                </a:solidFill>
+                <a:latin typeface="Calibri"/>
+              </a:rPr>
+              <a:t>Console screen 3 (show-1), captured on 2026-10-17, run ab-20261017-112101-c5d839; your output will differ</a:t>
+            </a:r>
+          </a:p>
+        </p:txBody>
+      </p:sp>
+      <p:pic>
+        <p:nvPicPr>
+          <p:cNvPr id="9" name="Picture 8" descr="s1-result.png"/>
+          <p:cNvPicPr>
+            <a:picLocks noChangeAspect="1"/>
+          </p:cNvPicPr>
+          <p:nvPr/>
+        </p:nvPicPr>
+        <p:blipFill>
+          <a:blip r:embed="rId2"/>
+          <a:stretch>
+            <a:fillRect/>
+          </a:stretch>
+        </p:blipFill>
+        <p:spPr>
+          <a:xfrm>
+            <a:off x="2368834" y="4408837"/>
+            <a:ext cx="7454332" cy="1991963"/>
+          </a:xfrm>
+          <a:prstGeom prst="rect">
+            <a:avLst/>
+          </a:prstGeom>
+        </p:spPr>
+      </p:pic>
     </p:spTree>
   </p:cSld>
   <p:clrMapOvr>
@@ -17292,7 +17535,7 @@
         <p:spPr>
           <a:xfrm>
             <a:off x="533400" y="1219200"/>
-            <a:ext cx="11125200" cy="5181600"/>
+            <a:ext cx="11125200" cy="2923032"/>
           </a:xfrm>
           <a:prstGeom prst="rect">
             <a:avLst/>
@@ -17424,6 +17667,30 @@
           </a:p>
         </p:txBody>
       </p:sp>
+      <p:pic>
+        <p:nvPicPr>
+          <p:cNvPr id="9" name="Picture 8" descr="2c0335426df628a5.png"/>
+          <p:cNvPicPr>
+            <a:picLocks noChangeAspect="1"/>
+          </p:cNvPicPr>
+          <p:nvPr/>
+        </p:nvPicPr>
+        <p:blipFill>
+          <a:blip r:embed="rId2"/>
+          <a:stretch>
+            <a:fillRect/>
+          </a:stretch>
+        </p:blipFill>
+        <p:spPr>
+          <a:xfrm>
+            <a:off x="533400" y="4989485"/>
+            <a:ext cx="11125200" cy="659312"/>
+          </a:xfrm>
+          <a:prstGeom prst="rect">
+            <a:avLst/>
+          </a:prstGeom>
+        </p:spPr>
+      </p:pic>
     </p:spTree>
   </p:cSld>
   <p:clrMapOvr>
@@ -20494,7 +20761,7 @@
         <p:spPr>
           <a:xfrm>
             <a:off x="533400" y="1219200"/>
-            <a:ext cx="11125200" cy="949452"/>
+            <a:ext cx="11125200" cy="1424178"/>
           </a:xfrm>
           <a:prstGeom prst="rect">
             <a:avLst/>
@@ -20565,6 +20832,31 @@
               <a:t>The neutral resume sentence comes first, the same for both arms</a:t>
             </a:r>
           </a:p>
+          <a:p>
+            <a:pPr algn="l">
+              <a:spcAft>
+                <a:spcPts val="945"/>
+              </a:spcAft>
+            </a:pPr>
+            <a:r>
+              <a:rPr sz="2100" b="0">
+                <a:solidFill>
+                  <a:srgbClr val="111820"/>
+                </a:solidFill>
+                <a:latin typeface="Calibri"/>
+              </a:rPr>
+              <a:t>•  </a:t>
+            </a:r>
+            <a:r>
+              <a:rPr sz="2100" b="0">
+                <a:solidFill>
+                  <a:srgbClr val="111820"/>
+                </a:solidFill>
+                <a:latin typeface="Calibri"/>
+              </a:rPr>
+              <a:t>A test-phase session starts with the feature's tests</a:t>
+            </a:r>
+          </a:p>
         </p:txBody>
       </p:sp>
       <p:sp>
@@ -20575,7 +20867,7 @@
         </p:nvSpPr>
         <p:spPr>
           <a:xfrm>
-            <a:off x="533400" y="2263902"/>
+            <a:off x="533400" y="2738628"/>
             <a:ext cx="11125200" cy="2548318"/>
           </a:xfrm>
           <a:prstGeom prst="rect">
@@ -20621,7 +20913,7 @@
         </p:nvSpPr>
         <p:spPr>
           <a:xfrm>
-            <a:off x="533400" y="2263902"/>
+            <a:off x="533400" y="2738628"/>
             <a:ext cx="57150" cy="2548318"/>
           </a:xfrm>
           <a:prstGeom prst="rect">
@@ -20665,7 +20957,7 @@
         </p:nvSpPr>
         <p:spPr>
           <a:xfrm>
-            <a:off x="704850" y="2359152"/>
+            <a:off x="704850" y="2833878"/>
             <a:ext cx="10858500" cy="2395918"/>
           </a:xfrm>
           <a:prstGeom prst="rect">
@@ -20796,7 +21088,7 @@
         </p:nvSpPr>
         <p:spPr>
           <a:xfrm>
-            <a:off x="533400" y="4831270"/>
+            <a:off x="533400" y="5305996"/>
             <a:ext cx="11125200" cy="209550"/>
           </a:xfrm>
           <a:prstGeom prst="rect">
@@ -21672,7 +21964,7 @@
                 </a:solidFill>
                 <a:latin typeface="Calibri"/>
               </a:rPr>
-              <a:t>Demo block: harness in action, and a real run replayed</a:t>
+              <a:t>Demo block: what to watch</a:t>
             </a:r>
           </a:p>
         </p:txBody>
@@ -21686,7 +21978,7 @@
         <p:spPr>
           <a:xfrm>
             <a:off x="533400" y="1219200"/>
-            <a:ext cx="11125200" cy="4705350"/>
+            <a:ext cx="5015023" cy="4705350"/>
           </a:xfrm>
           <a:prstGeom prst="rect">
             <a:avLst/>
@@ -21701,11 +21993,11 @@
           <a:p>
             <a:pPr algn="l">
               <a:spcAft>
-                <a:spcPts val="945"/>
+                <a:spcPts val="918"/>
               </a:spcAft>
             </a:pPr>
             <a:r>
-              <a:rPr sz="2100" b="0">
+              <a:rPr sz="2039" b="0">
                 <a:solidFill>
                   <a:srgbClr val="111820"/>
                 </a:solidFill>
@@ -21714,32 +22006,23 @@
               <a:t>•  </a:t>
             </a:r>
             <a:r>
-              <a:rPr sz="2100" b="0">
-                <a:solidFill>
-                  <a:srgbClr val="111820"/>
-                </a:solidFill>
-                <a:latin typeface="Consolas"/>
-              </a:rPr>
-              <a:t>make show-2</a:t>
-            </a:r>
-            <a:r>
-              <a:rPr sz="2100" b="0">
-                <a:solidFill>
-                  <a:srgbClr val="111820"/>
-                </a:solidFill>
-                <a:latin typeface="Calibri"/>
-              </a:rPr>
-              <a:t>, finished: screen 1 shows the session stop, the handoff, and the resume</a:t>
+              <a:rPr sz="2039" b="0">
+                <a:solidFill>
+                  <a:srgbClr val="111820"/>
+                </a:solidFill>
+                <a:latin typeface="Calibri"/>
+              </a:rPr>
+              <a:t>Screen 1: "■ Session 1 stopped" with the handoff file, then "▶ Session 2 resumed" with an empty context</a:t>
             </a:r>
           </a:p>
           <a:p>
             <a:pPr algn="l">
               <a:spcAft>
-                <a:spcPts val="945"/>
+                <a:spcPts val="918"/>
               </a:spcAft>
             </a:pPr>
             <a:r>
-              <a:rPr sz="2100" b="0">
+              <a:rPr sz="2039" b="0">
                 <a:solidFill>
                   <a:srgbClr val="111820"/>
                 </a:solidFill>
@@ -21748,23 +22031,41 @@
               <a:t>•  </a:t>
             </a:r>
             <a:r>
-              <a:rPr sz="2100" b="0">
-                <a:solidFill>
-                  <a:srgbClr val="111820"/>
-                </a:solidFill>
-                <a:latin typeface="Calibri"/>
-              </a:rPr>
-              <a:t>Screen 3: state files read at the start of session 2; screen 5: the trace links</a:t>
+              <a:rPr sz="2039" b="0">
+                <a:solidFill>
+                  <a:srgbClr val="111820"/>
+                </a:solidFill>
+                <a:latin typeface="Calibri"/>
+              </a:rPr>
+              <a:t>Session 2's first turn: </a:t>
+            </a:r>
+            <a:r>
+              <a:rPr sz="2039" b="0">
+                <a:solidFill>
+                  <a:srgbClr val="111820"/>
+                </a:solidFill>
+                <a:latin typeface="Consolas"/>
+              </a:rPr>
+              <a:t>pwd; git log; cat progress.md</a:t>
+            </a:r>
+            <a:r>
+              <a:rPr sz="2039" b="0">
+                <a:solidFill>
+                  <a:srgbClr val="111820"/>
+                </a:solidFill>
+                <a:latin typeface="Calibri"/>
+              </a:rPr>
+              <a:t>, A2's getting up to speed routine</a:t>
             </a:r>
           </a:p>
           <a:p>
             <a:pPr algn="l">
               <a:spcAft>
-                <a:spcPts val="945"/>
+                <a:spcPts val="918"/>
               </a:spcAft>
             </a:pPr>
             <a:r>
-              <a:rPr sz="2100" b="0">
+              <a:rPr sz="2039" b="0">
                 <a:solidFill>
                   <a:srgbClr val="111820"/>
                 </a:solidFill>
@@ -21773,41 +22074,23 @@
               <a:t>•  </a:t>
             </a:r>
             <a:r>
-              <a:rPr sz="2100" b="0">
-                <a:solidFill>
-                  <a:srgbClr val="111820"/>
-                </a:solidFill>
-                <a:latin typeface="Calibri"/>
-              </a:rPr>
-              <a:t>Real run, replayed: </a:t>
-            </a:r>
-            <a:r>
-              <a:rPr sz="2100" b="0">
-                <a:solidFill>
-                  <a:srgbClr val="111820"/>
-                </a:solidFill>
-                <a:latin typeface="Consolas"/>
-              </a:rPr>
-              <a:t>make replay RUN=ab-20261016-213317-9a0ec1</a:t>
-            </a:r>
-            <a:r>
-              <a:rPr sz="2100" b="0">
-                <a:solidFill>
-                  <a:srgbClr val="111820"/>
-                </a:solidFill>
-                <a:latin typeface="Calibri"/>
-              </a:rPr>
-              <a:t> (pilot run 3, F2)</a:t>
+              <a:rPr sz="2039" b="0">
+                <a:solidFill>
+                  <a:srgbClr val="111820"/>
+                </a:solidFill>
+                <a:latin typeface="Calibri"/>
+              </a:rPr>
+              <a:t>Screen 3: "Sessions", the turns and how each session ended; screen 5: the trace links</a:t>
             </a:r>
           </a:p>
           <a:p>
             <a:pPr algn="l">
               <a:spcAft>
-                <a:spcPts val="945"/>
+                <a:spcPts val="918"/>
               </a:spcAft>
             </a:pPr>
             <a:r>
-              <a:rPr sz="2100" b="0">
+              <a:rPr sz="2039" b="0">
                 <a:solidFill>
                   <a:srgbClr val="111820"/>
                 </a:solidFill>
@@ -21816,63 +22099,44 @@
               <a:t>•  </a:t>
             </a:r>
             <a:r>
-              <a:rPr sz="2100" b="0">
-                <a:solidFill>
-                  <a:srgbClr val="111820"/>
-                </a:solidFill>
-                <a:latin typeface="Calibri"/>
-              </a:rPr>
-              <a:t>Its harness arm called </a:t>
-            </a:r>
-            <a:r>
-              <a:rPr sz="2100" b="0">
-                <a:solidFill>
-                  <a:srgbClr val="111820"/>
-                </a:solidFill>
-                <a:latin typeface="Consolas"/>
-              </a:rPr>
-              <a:t>finish(claim="not_done")</a:t>
-            </a:r>
-            <a:r>
-              <a:rPr sz="2100" b="0">
-                <a:solidFill>
-                  <a:srgbClr val="111820"/>
-                </a:solidFill>
-                <a:latin typeface="Calibri"/>
-              </a:rPr>
-              <a:t> after session 1; the build phase ended, session 2 never ran</a:t>
-            </a:r>
-          </a:p>
-          <a:p>
-            <a:pPr algn="l">
-              <a:spcAft>
-                <a:spcPts val="945"/>
-              </a:spcAft>
-            </a:pPr>
-            <a:r>
-              <a:rPr sz="2100" b="0">
-                <a:solidFill>
-                  <a:srgbClr val="111820"/>
-                </a:solidFill>
-                <a:latin typeface="Calibri"/>
-              </a:rPr>
-              <a:t>•  </a:t>
-            </a:r>
-            <a:r>
-              <a:rPr sz="2100" b="0">
-                <a:solidFill>
-                  <a:srgbClr val="111820"/>
-                </a:solidFill>
-                <a:latin typeface="Calibri"/>
-              </a:rPr>
-              <a:t>The fix, for both arms: before the last build session, that call ends only the session</a:t>
-            </a:r>
-          </a:p>
-        </p:txBody>
-      </p:sp>
-      <p:sp>
-        <p:nvSpPr>
-          <p:cNvPr id="9" name="Rectangle 8"/>
+              <a:rPr sz="2039" b="0">
+                <a:solidFill>
+                  <a:srgbClr val="111820"/>
+                </a:solidFill>
+                <a:latin typeface="Calibri"/>
+              </a:rPr>
+              <a:t>Console screen 1 (show-2), captured on 2026-10-17, run ab-20261017-113213-fe89a3; your output will differ</a:t>
+            </a:r>
+          </a:p>
+        </p:txBody>
+      </p:sp>
+      <p:pic>
+        <p:nvPicPr>
+          <p:cNvPr id="9" name="Picture 8" descr="s2-watch.png"/>
+          <p:cNvPicPr>
+            <a:picLocks noChangeAspect="1"/>
+          </p:cNvPicPr>
+          <p:nvPr/>
+        </p:nvPicPr>
+        <p:blipFill>
+          <a:blip r:embed="rId2"/>
+          <a:stretch>
+            <a:fillRect/>
+          </a:stretch>
+        </p:blipFill>
+        <p:spPr>
+          <a:xfrm>
+            <a:off x="6061914" y="1219200"/>
+            <a:ext cx="5426095" cy="4705350"/>
+          </a:xfrm>
+          <a:prstGeom prst="rect">
+            <a:avLst/>
+          </a:prstGeom>
+        </p:spPr>
+      </p:pic>
+      <p:sp>
+        <p:nvSpPr>
+          <p:cNvPr id="10" name="Rectangle 9"/>
           <p:cNvSpPr/>
           <p:nvPr/>
         </p:nvSpPr>
@@ -21918,7 +22182,7 @@
       </p:sp>
       <p:sp>
         <p:nvSpPr>
-          <p:cNvPr id="10" name="TextBox 9"/>
+          <p:cNvPr id="11" name="TextBox 10"/>
           <p:cNvSpPr txBox="1"/>
           <p:nvPr/>
         </p:nvSpPr>
@@ -22189,7 +22453,7 @@
         <p:spPr>
           <a:xfrm>
             <a:off x="533400" y="628650"/>
-            <a:ext cx="11125200" cy="933450"/>
+            <a:ext cx="11125200" cy="495300"/>
           </a:xfrm>
           <a:prstGeom prst="rect">
             <a:avLst/>
@@ -22210,7 +22474,7 @@
                 </a:solidFill>
                 <a:latin typeface="Calibri"/>
               </a:rPr>
-              <a:t>Demo block: a constructed example, and what the pilot measured</a:t>
+              <a:t>Demo block: reading the result</a:t>
             </a:r>
           </a:p>
         </p:txBody>
@@ -22223,8 +22487,8 @@
         </p:nvSpPr>
         <p:spPr>
           <a:xfrm>
-            <a:off x="533400" y="1657350"/>
-            <a:ext cx="11125200" cy="4743450"/>
+            <a:off x="533400" y="1219200"/>
+            <a:ext cx="11125200" cy="3351848"/>
           </a:xfrm>
           <a:prstGeom prst="rect">
             <a:avLst/>
@@ -22239,11 +22503,11 @@
           <a:p>
             <a:pPr algn="l">
               <a:spcAft>
-                <a:spcPts val="945"/>
+                <a:spcPts val="776"/>
               </a:spcAft>
             </a:pPr>
             <a:r>
-              <a:rPr sz="2100" b="0">
+              <a:rPr sz="1725" b="0">
                 <a:solidFill>
                   <a:srgbClr val="111820"/>
                 </a:solidFill>
@@ -22252,41 +22516,23 @@
               <a:t>•  </a:t>
             </a:r>
             <a:r>
-              <a:rPr sz="2100" b="0">
-                <a:solidFill>
-                  <a:srgbClr val="111820"/>
-                </a:solidFill>
-                <a:latin typeface="Calibri"/>
-              </a:rPr>
-              <a:t>Constructed example: </a:t>
-            </a:r>
-            <a:r>
-              <a:rPr sz="2100" b="0">
-                <a:solidFill>
-                  <a:srgbClr val="111820"/>
-                </a:solidFill>
-                <a:latin typeface="Consolas"/>
-              </a:rPr>
-              <a:t>make example-2</a:t>
-            </a:r>
-            <a:r>
-              <a:rPr sz="2100" b="0">
-                <a:solidFill>
-                  <a:srgbClr val="111820"/>
-                </a:solidFill>
-                <a:latin typeface="Calibri"/>
-              </a:rPr>
-              <a:t>, scripted, no model; CONSTRUCTED EXAMPLE on every screen</a:t>
+              <a:rPr sz="1725" b="0">
+                <a:solidFill>
+                  <a:srgbClr val="111820"/>
+                </a:solidFill>
+                <a:latin typeface="Calibri"/>
+              </a:rPr>
+              <a:t>show-2 in the quiet run: no continuity failure (passes), hidden tests 56 of 56; session 2 hit the agent time limit</a:t>
             </a:r>
           </a:p>
           <a:p>
             <a:pPr algn="l">
               <a:spcAft>
-                <a:spcPts val="945"/>
+                <a:spcPts val="776"/>
               </a:spcAft>
             </a:pPr>
             <a:r>
-              <a:rPr sz="2100" b="0">
+              <a:rPr sz="1725" b="0">
                 <a:solidFill>
                   <a:srgbClr val="111820"/>
                 </a:solidFill>
@@ -22295,23 +22541,41 @@
               <a:t>•  </a:t>
             </a:r>
             <a:r>
-              <a:rPr sz="2100" b="0">
-                <a:solidFill>
-                  <a:srgbClr val="111820"/>
-                </a:solidFill>
-                <a:latin typeface="Calibri"/>
-              </a:rPr>
-              <a:t>Pilot, continuity failure fails: bare 0 of 7, harness 0 of 7 (poll answer: A); no measurable difference on this task with this model</a:t>
+              <a:rPr sz="1725" b="0">
+                <a:solidFill>
+                  <a:srgbClr val="111820"/>
+                </a:solidFill>
+                <a:latin typeface="Calibri"/>
+              </a:rPr>
+              <a:t>Screen 5's first wrong turn, a heuristic: turn 2.16 edited </a:t>
+            </a:r>
+            <a:r>
+              <a:rPr sz="1725" b="0">
+                <a:solidFill>
+                  <a:srgbClr val="111820"/>
+                </a:solidFill>
+                <a:latin typeface="Consolas"/>
+              </a:rPr>
+              <a:t>app/api/issues.py</a:t>
+            </a:r>
+            <a:r>
+              <a:rPr sz="1725" b="0">
+                <a:solidFill>
+                  <a:srgbClr val="111820"/>
+                </a:solidFill>
+                <a:latin typeface="Calibri"/>
+              </a:rPr>
+              <a:t>, outside the diff scope</a:t>
             </a:r>
           </a:p>
           <a:p>
             <a:pPr algn="l">
               <a:spcAft>
-                <a:spcPts val="945"/>
+                <a:spcPts val="776"/>
               </a:spcAft>
             </a:pPr>
             <a:r>
-              <a:rPr sz="2100" b="0">
+              <a:rPr sz="1725" b="0">
                 <a:solidFill>
                   <a:srgbClr val="111820"/>
                 </a:solidFill>
@@ -22320,23 +22584,23 @@
               <a:t>•  </a:t>
             </a:r>
             <a:r>
-              <a:rPr sz="2100" b="0">
-                <a:solidFill>
-                  <a:srgbClr val="111820"/>
-                </a:solidFill>
-                <a:latin typeface="Calibri"/>
-              </a:rPr>
-              <a:t>The measure cannot fail when session 1 leaves nothing to redo: in runs 3 and 4, 6 of 12 arms built nothing</a:t>
+              <a:rPr sz="1725" b="0">
+                <a:solidFill>
+                  <a:srgbClr val="111820"/>
+                </a:solidFill>
+                <a:latin typeface="Calibri"/>
+              </a:rPr>
+              <a:t>Pilot, continuity failure fails: bare 0 of 7, harness 0 of 7 (poll answer: A); no measurable difference on this task with this model</a:t>
             </a:r>
           </a:p>
           <a:p>
             <a:pPr algn="l">
               <a:spcAft>
-                <a:spcPts val="945"/>
+                <a:spcPts val="776"/>
               </a:spcAft>
             </a:pPr>
             <a:r>
-              <a:rPr sz="2100" b="0">
+              <a:rPr sz="1725" b="0">
                 <a:solidFill>
                   <a:srgbClr val="111820"/>
                 </a:solidFill>
@@ -22345,41 +22609,23 @@
               <a:t>•  </a:t>
             </a:r>
             <a:r>
-              <a:rPr sz="2100" b="0">
-                <a:solidFill>
-                  <a:srgbClr val="111820"/>
-                </a:solidFill>
-                <a:latin typeface="Calibri"/>
-              </a:rPr>
-              <a:t>The bare arm found its own state: in run 2 its session 2 ran </a:t>
-            </a:r>
-            <a:r>
-              <a:rPr sz="2100" b="0">
-                <a:solidFill>
-                  <a:srgbClr val="111820"/>
-                </a:solidFill>
-                <a:latin typeface="Consolas"/>
-              </a:rPr>
-              <a:t>git status</a:t>
-            </a:r>
-            <a:r>
-              <a:rPr sz="2100" b="0">
-                <a:solidFill>
-                  <a:srgbClr val="111820"/>
-                </a:solidFill>
-                <a:latin typeface="Calibri"/>
-              </a:rPr>
-              <a:t> in its fourth tool call</a:t>
+              <a:rPr sz="1725" b="0">
+                <a:solidFill>
+                  <a:srgbClr val="111820"/>
+                </a:solidFill>
+                <a:latin typeface="Calibri"/>
+              </a:rPr>
+              <a:t>The measure cannot fail when session 1 leaves nothing to redo: in runs 3 and 4, 6 of 12 arms built nothing</a:t>
             </a:r>
           </a:p>
           <a:p>
             <a:pPr algn="l">
               <a:spcAft>
-                <a:spcPts val="945"/>
+                <a:spcPts val="776"/>
               </a:spcAft>
             </a:pPr>
             <a:r>
-              <a:rPr sz="2100" b="0">
+              <a:rPr sz="1725" b="0">
                 <a:solidFill>
                   <a:srgbClr val="111820"/>
                 </a:solidFill>
@@ -22388,42 +22634,41 @@
               <a:t>•  </a:t>
             </a:r>
             <a:r>
-              <a:rPr sz="2100" b="0">
-                <a:solidFill>
-                  <a:srgbClr val="111820"/>
-                </a:solidFill>
-                <a:latin typeface="Calibri"/>
-              </a:rPr>
-              <a:t>Post hoc, descriptive (9 runs per arm): agent time limit hit, harness 4, bare 0; median wall 361 s against 232 s</a:t>
-            </a:r>
-          </a:p>
-          <a:p>
-            <a:pPr algn="l">
-              <a:spcAft>
-                <a:spcPts val="945"/>
-              </a:spcAft>
-            </a:pPr>
-            <a:r>
-              <a:rPr sz="2100" b="0">
-                <a:solidFill>
-                  <a:srgbClr val="111820"/>
-                </a:solidFill>
-                <a:latin typeface="Calibri"/>
-              </a:rPr>
-              <a:t>•  </a:t>
-            </a:r>
-            <a:r>
-              <a:rPr sz="2100" b="0">
-                <a:solidFill>
-                  <a:srgbClr val="111820"/>
-                </a:solidFill>
-                <a:latin typeface="Calibri"/>
-              </a:rPr>
-              <a:t>Class-profile round, with the fix: both arms built the feature, 56 of 56 hidden tests</a:t>
-            </a:r>
-          </a:p>
-        </p:txBody>
-      </p:sp>
+              <a:rPr sz="1725" b="0">
+                <a:solidFill>
+                  <a:srgbClr val="111820"/>
+                </a:solidFill>
+                <a:latin typeface="Calibri"/>
+              </a:rPr>
+              <a:t>Console screens 3 and 5 (show-2), captured on 2026-10-17, run ab-20261017-113213-fe89a3; your output will differ</a:t>
+            </a:r>
+          </a:p>
+        </p:txBody>
+      </p:sp>
+      <p:pic>
+        <p:nvPicPr>
+          <p:cNvPr id="9" name="Picture 8" descr="s2-result.png"/>
+          <p:cNvPicPr>
+            <a:picLocks noChangeAspect="1"/>
+          </p:cNvPicPr>
+          <p:nvPr/>
+        </p:nvPicPr>
+        <p:blipFill>
+          <a:blip r:embed="rId2"/>
+          <a:stretch>
+            <a:fillRect/>
+          </a:stretch>
+        </p:blipFill>
+        <p:spPr>
+          <a:xfrm>
+            <a:off x="2277812" y="4666298"/>
+            <a:ext cx="7636375" cy="1734503"/>
+          </a:xfrm>
+          <a:prstGeom prst="rect">
+            <a:avLst/>
+          </a:prstGeom>
+        </p:spPr>
+      </p:pic>
     </p:spTree>
   </p:cSld>
   <p:clrMapOvr>
@@ -23891,7 +24136,7 @@
         <p:spPr>
           <a:xfrm>
             <a:off x="533400" y="1219200"/>
-            <a:ext cx="11125200" cy="5181600"/>
+            <a:ext cx="11125200" cy="2923032"/>
           </a:xfrm>
           <a:prstGeom prst="rect">
             <a:avLst/>
@@ -23993,7 +24238,7 @@
                 </a:solidFill>
                 <a:latin typeface="Calibri"/>
               </a:rPr>
-              <a:t>Watch for: a blocked or reverted edit with its reason, and the sandbox policy at work</a:t>
+              <a:t>Watch for: a blocked or reverted edit with its reason, if the agent tries one, and the sandbox line</a:t>
             </a:r>
           </a:p>
           <a:p>
@@ -24021,33 +24266,32 @@
               <a:t>Build, then a test phase; allow lists from the task; shared middleware is off-limits</a:t>
             </a:r>
           </a:p>
-          <a:p>
-            <a:pPr algn="l">
-              <a:spcAft>
-                <a:spcPts val="945"/>
-              </a:spcAft>
-            </a:pPr>
-            <a:r>
-              <a:rPr sz="2100" b="0">
-                <a:solidFill>
-                  <a:srgbClr val="111820"/>
-                </a:solidFill>
-                <a:latin typeface="Calibri"/>
-              </a:rPr>
-              <a:t>•  </a:t>
-            </a:r>
-            <a:r>
-              <a:rPr sz="2100" b="0">
-                <a:solidFill>
-                  <a:srgbClr val="111820"/>
-                </a:solidFill>
-                <a:latin typeface="Calibri"/>
-              </a:rPr>
-              <a:t>Harness arm layers: instructions, state, scope</a:t>
-            </a:r>
-          </a:p>
-        </p:txBody>
-      </p:sp>
+        </p:txBody>
+      </p:sp>
+      <p:pic>
+        <p:nvPicPr>
+          <p:cNvPr id="9" name="Picture 8" descr="a03430f07b965ba6.png"/>
+          <p:cNvPicPr>
+            <a:picLocks noChangeAspect="1"/>
+          </p:cNvPicPr>
+          <p:nvPr/>
+        </p:nvPicPr>
+        <p:blipFill>
+          <a:blip r:embed="rId2"/>
+          <a:stretch>
+            <a:fillRect/>
+          </a:stretch>
+        </p:blipFill>
+        <p:spPr>
+          <a:xfrm>
+            <a:off x="533400" y="4768270"/>
+            <a:ext cx="11125200" cy="1101742"/>
+          </a:xfrm>
+          <a:prstGeom prst="rect">
+            <a:avLst/>
+          </a:prstGeom>
+        </p:spPr>
+      </p:pic>
     </p:spTree>
   </p:cSld>
   <p:clrMapOvr>
@@ -28571,7 +28815,7 @@
                 </a:solidFill>
                 <a:latin typeface="Calibri"/>
               </a:rPr>
-              <a:t>Demo block: harness in action, and a real run replayed</a:t>
+              <a:t>Demo block: what to watch</a:t>
             </a:r>
           </a:p>
         </p:txBody>
@@ -28585,7 +28829,7 @@
         <p:spPr>
           <a:xfrm>
             <a:off x="533400" y="1219200"/>
-            <a:ext cx="11125200" cy="4705350"/>
+            <a:ext cx="5015023" cy="4705350"/>
           </a:xfrm>
           <a:prstGeom prst="rect">
             <a:avLst/>
@@ -28617,18 +28861,36 @@
                 <a:solidFill>
                   <a:srgbClr val="111820"/>
                 </a:solidFill>
+                <a:latin typeface="Calibri"/>
+              </a:rPr>
+              <a:t>Screen 1: harness decisions; the scope layer writes </a:t>
+            </a:r>
+            <a:r>
+              <a:rPr sz="2100" b="0">
+                <a:solidFill>
+                  <a:srgbClr val="111820"/>
+                </a:solidFill>
                 <a:latin typeface="Consolas"/>
               </a:rPr>
-              <a:t>make show-3</a:t>
-            </a:r>
-            <a:r>
-              <a:rPr sz="2100" b="0">
-                <a:solidFill>
-                  <a:srgbClr val="111820"/>
-                </a:solidFill>
-                <a:latin typeface="Calibri"/>
-              </a:rPr>
-              <a:t>, finished: screen 1 lists blocked or reverted decisions with their reasons</a:t>
+              <a:t>feature_list.json</a:t>
+            </a:r>
+            <a:r>
+              <a:rPr sz="2100" b="0">
+                <a:solidFill>
+                  <a:srgbClr val="111820"/>
+                </a:solidFill>
+                <a:latin typeface="Calibri"/>
+              </a:rPr>
+              <a:t> with F3, </a:t>
+            </a:r>
+            <a:r>
+              <a:rPr sz="2100" b="0">
+                <a:solidFill>
+                  <a:srgbClr val="111820"/>
+                </a:solidFill>
+                <a:latin typeface="Consolas"/>
+              </a:rPr>
+              <a:t>passes: false</a:t>
             </a:r>
           </a:p>
           <a:p>
@@ -28653,25 +28915,7 @@
                 </a:solidFill>
                 <a:latin typeface="Calibri"/>
               </a:rPr>
-              <a:t>Screen 3: the diff map and any </a:t>
-            </a:r>
-            <a:r>
-              <a:rPr sz="2100" b="0">
-                <a:solidFill>
-                  <a:srgbClr val="111820"/>
-                </a:solidFill>
-                <a:latin typeface="Consolas"/>
-              </a:rPr>
-              <a:t>sandbox_denied</a:t>
-            </a:r>
-            <a:r>
-              <a:rPr sz="2100" b="0">
-                <a:solidFill>
-                  <a:srgbClr val="111820"/>
-                </a:solidFill>
-                <a:latin typeface="Calibri"/>
-              </a:rPr>
-              <a:t> event</a:t>
+              <a:t>A ⊘ block or ↺ revert appears only if the agent tries an edit outside the allow list</a:t>
             </a:r>
           </a:p>
           <a:p>
@@ -28696,25 +28940,7 @@
                 </a:solidFill>
                 <a:latin typeface="Calibri"/>
               </a:rPr>
-              <a:t>Real run, replayed: </a:t>
-            </a:r>
-            <a:r>
-              <a:rPr sz="2100" b="0">
-                <a:solidFill>
-                  <a:srgbClr val="111820"/>
-                </a:solidFill>
-                <a:latin typeface="Consolas"/>
-              </a:rPr>
-              <a:t>make replay RUN=ab-20261016-214151-ca9841</a:t>
-            </a:r>
-            <a:r>
-              <a:rPr sz="2100" b="0">
-                <a:solidFill>
-                  <a:srgbClr val="111820"/>
-                </a:solidFill>
-                <a:latin typeface="Calibri"/>
-              </a:rPr>
-              <a:t> (pilot run 3, F4)</a:t>
+              <a:t>Screen 3: the diff map and "Sandbox denials"; screen 5: the trace links</a:t>
             </a:r>
           </a:p>
           <a:p>
@@ -28739,14 +28965,38 @@
                 </a:solidFill>
                 <a:latin typeface="Calibri"/>
               </a:rPr>
-              <a:t>Its bare arm changed 2 files outside the allowed paths; its harness arm, with the scope layer, 0</a:t>
-            </a:r>
-          </a:p>
-        </p:txBody>
-      </p:sp>
-      <p:sp>
-        <p:nvSpPr>
-          <p:cNvPr id="9" name="Rectangle 8"/>
+              <a:t>Console screen 1 (show-3), captured on 2026-10-17, run ab-20261017-114259-b64f54; your output will differ</a:t>
+            </a:r>
+          </a:p>
+        </p:txBody>
+      </p:sp>
+      <p:pic>
+        <p:nvPicPr>
+          <p:cNvPr id="9" name="Picture 8" descr="s3-watch.png"/>
+          <p:cNvPicPr>
+            <a:picLocks noChangeAspect="1"/>
+          </p:cNvPicPr>
+          <p:nvPr/>
+        </p:nvPicPr>
+        <p:blipFill>
+          <a:blip r:embed="rId2"/>
+          <a:stretch>
+            <a:fillRect/>
+          </a:stretch>
+        </p:blipFill>
+        <p:spPr>
+          <a:xfrm>
+            <a:off x="6111665" y="1219200"/>
+            <a:ext cx="5326594" cy="4705350"/>
+          </a:xfrm>
+          <a:prstGeom prst="rect">
+            <a:avLst/>
+          </a:prstGeom>
+        </p:spPr>
+      </p:pic>
+      <p:sp>
+        <p:nvSpPr>
+          <p:cNvPr id="10" name="Rectangle 9"/>
           <p:cNvSpPr/>
           <p:nvPr/>
         </p:nvSpPr>
@@ -28792,7 +29042,7 @@
       </p:sp>
       <p:sp>
         <p:nvSpPr>
-          <p:cNvPr id="10" name="TextBox 9"/>
+          <p:cNvPr id="11" name="TextBox 10"/>
           <p:cNvSpPr txBox="1"/>
           <p:nvPr/>
         </p:nvSpPr>
@@ -29081,7 +29331,7 @@
         <p:spPr>
           <a:xfrm>
             <a:off x="533400" y="628650"/>
-            <a:ext cx="11125200" cy="933450"/>
+            <a:ext cx="11125200" cy="495300"/>
           </a:xfrm>
           <a:prstGeom prst="rect">
             <a:avLst/>
@@ -29102,7 +29352,7 @@
                 </a:solidFill>
                 <a:latin typeface="Calibri"/>
               </a:rPr>
-              <a:t>Demo block: a constructed example, the sandbox, and what the pilot measured</a:t>
+              <a:t>Demo block: reading the result</a:t>
             </a:r>
           </a:p>
         </p:txBody>
@@ -29115,8 +29365,8 @@
         </p:nvSpPr>
         <p:spPr>
           <a:xfrm>
-            <a:off x="533400" y="1657350"/>
-            <a:ext cx="11125200" cy="4743450"/>
+            <a:off x="533400" y="1219200"/>
+            <a:ext cx="11125200" cy="3351848"/>
           </a:xfrm>
           <a:prstGeom prst="rect">
             <a:avLst/>
@@ -29131,11 +29381,11 @@
           <a:p>
             <a:pPr algn="l">
               <a:spcAft>
-                <a:spcPts val="945"/>
+                <a:spcPts val="776"/>
               </a:spcAft>
             </a:pPr>
             <a:r>
-              <a:rPr sz="2100" b="0">
+              <a:rPr sz="1725" b="0">
                 <a:solidFill>
                   <a:srgbClr val="111820"/>
                 </a:solidFill>
@@ -29144,41 +29394,23 @@
               <a:t>•  </a:t>
             </a:r>
             <a:r>
-              <a:rPr sz="2100" b="0">
-                <a:solidFill>
-                  <a:srgbClr val="111820"/>
-                </a:solidFill>
-                <a:latin typeface="Calibri"/>
-              </a:rPr>
-              <a:t>Constructed example: </a:t>
-            </a:r>
-            <a:r>
-              <a:rPr sz="2100" b="0">
-                <a:solidFill>
-                  <a:srgbClr val="111820"/>
-                </a:solidFill>
-                <a:latin typeface="Consolas"/>
-              </a:rPr>
-              <a:t>make example-3</a:t>
-            </a:r>
-            <a:r>
-              <a:rPr sz="2100" b="0">
-                <a:solidFill>
-                  <a:srgbClr val="111820"/>
-                </a:solidFill>
-                <a:latin typeface="Calibri"/>
-              </a:rPr>
-              <a:t>, scripted, no model; CONSTRUCTED EXAMPLE on every screen</a:t>
+              <a:rPr sz="1725" b="0">
+                <a:solidFill>
+                  <a:srgbClr val="111820"/>
+                </a:solidFill>
+                <a:latin typeface="Calibri"/>
+              </a:rPr>
+              <a:t>show-3 in the quiet run: out-of-scope files 0, test-phase source edits 0 (passes); hidden tests 49 of 49, mutants killed 4 of 4</a:t>
             </a:r>
           </a:p>
           <a:p>
             <a:pPr algn="l">
               <a:spcAft>
-                <a:spcPts val="945"/>
+                <a:spcPts val="776"/>
               </a:spcAft>
             </a:pPr>
             <a:r>
-              <a:rPr sz="2100" b="0">
+              <a:rPr sz="1725" b="0">
                 <a:solidFill>
                   <a:srgbClr val="111820"/>
                 </a:solidFill>
@@ -29187,41 +29419,23 @@
               <a:t>•  </a:t>
             </a:r>
             <a:r>
-              <a:rPr sz="2100" b="0">
-                <a:solidFill>
-                  <a:srgbClr val="111820"/>
-                </a:solidFill>
-                <a:latin typeface="Calibri"/>
-              </a:rPr>
-              <a:t>Sandbox moment: no pilot A/B recorded a </a:t>
-            </a:r>
-            <a:r>
-              <a:rPr sz="2100" b="0">
-                <a:solidFill>
-                  <a:srgbClr val="111820"/>
-                </a:solidFill>
-                <a:latin typeface="Consolas"/>
-              </a:rPr>
-              <a:t>sandbox_denied</a:t>
-            </a:r>
-            <a:r>
-              <a:rPr sz="2100" b="0">
-                <a:solidFill>
-                  <a:srgbClr val="111820"/>
-                </a:solidFill>
-                <a:latin typeface="Calibri"/>
-              </a:rPr>
-              <a:t> event; show the policy printout</a:t>
+              <a:rPr sz="1725" b="0">
+                <a:solidFill>
+                  <a:srgbClr val="111820"/>
+                </a:solidFill>
+                <a:latin typeface="Calibri"/>
+              </a:rPr>
+              <a:t>The harness arm's zero is expected by construction; the question is whether it still shipped a working feature</a:t>
             </a:r>
           </a:p>
           <a:p>
             <a:pPr algn="l">
               <a:spcAft>
-                <a:spcPts val="945"/>
+                <a:spcPts val="776"/>
               </a:spcAft>
             </a:pPr>
             <a:r>
-              <a:rPr sz="2100" b="0">
+              <a:rPr sz="1725" b="0">
                 <a:solidFill>
                   <a:srgbClr val="111820"/>
                 </a:solidFill>
@@ -29230,7 +29444,7 @@
               <a:t>•  </a:t>
             </a:r>
             <a:r>
-              <a:rPr sz="2100" b="0">
+              <a:rPr sz="1725" b="0">
                 <a:solidFill>
                   <a:srgbClr val="111820"/>
                 </a:solidFill>
@@ -29242,11 +29456,11 @@
           <a:p>
             <a:pPr algn="l">
               <a:spcAft>
-                <a:spcPts val="945"/>
+                <a:spcPts val="776"/>
               </a:spcAft>
             </a:pPr>
             <a:r>
-              <a:rPr sz="2100" b="0">
+              <a:rPr sz="1725" b="0">
                 <a:solidFill>
                   <a:srgbClr val="111820"/>
                 </a:solidFill>
@@ -29255,23 +29469,23 @@
               <a:t>•  </a:t>
             </a:r>
             <a:r>
-              <a:rPr sz="2100" b="0">
-                <a:solidFill>
-                  <a:srgbClr val="111820"/>
-                </a:solidFill>
-                <a:latin typeface="Calibri"/>
-              </a:rPr>
-              <a:t>Post hoc, F3 (9 runs per arm): harness arms shipped a median of 0 tests against 6; claimed done in 4 against 9</a:t>
+              <a:rPr sz="1725" b="0">
+                <a:solidFill>
+                  <a:srgbClr val="111820"/>
+                </a:solidFill>
+                <a:latin typeface="Calibri"/>
+              </a:rPr>
+              <a:t>Scope was registered only for F3; the F4 count (post hoc) is a reason to register it next time, not a result</a:t>
             </a:r>
           </a:p>
           <a:p>
             <a:pPr algn="l">
               <a:spcAft>
-                <a:spcPts val="945"/>
+                <a:spcPts val="776"/>
               </a:spcAft>
             </a:pPr>
             <a:r>
-              <a:rPr sz="2100" b="0">
+              <a:rPr sz="1725" b="0">
                 <a:solidFill>
                   <a:srgbClr val="111820"/>
                 </a:solidFill>
@@ -29280,42 +29494,41 @@
               <a:t>•  </a:t>
             </a:r>
             <a:r>
-              <a:rPr sz="2100" b="0">
-                <a:solidFill>
-                  <a:srgbClr val="111820"/>
-                </a:solidFill>
-                <a:latin typeface="Calibri"/>
-              </a:rPr>
-              <a:t>Post hoc, F4 (all four layers): bare arms left the allowed paths in 6 of 6 runs, harness arms in 0 of 6</a:t>
-            </a:r>
-          </a:p>
-          <a:p>
-            <a:pPr algn="l">
-              <a:spcAft>
-                <a:spcPts val="945"/>
-              </a:spcAft>
-            </a:pPr>
-            <a:r>
-              <a:rPr sz="2100" b="0">
-                <a:solidFill>
-                  <a:srgbClr val="111820"/>
-                </a:solidFill>
-                <a:latin typeface="Calibri"/>
-              </a:rPr>
-              <a:t>•  </a:t>
-            </a:r>
-            <a:r>
-              <a:rPr sz="2100" b="0">
-                <a:solidFill>
-                  <a:srgbClr val="111820"/>
-                </a:solidFill>
-                <a:latin typeface="Calibri"/>
-              </a:rPr>
-              <a:t>A measure nobody registered for scope: a reason to register it next time, not a result</a:t>
-            </a:r>
-          </a:p>
-        </p:txBody>
-      </p:sp>
+              <a:rPr sz="1725" b="0">
+                <a:solidFill>
+                  <a:srgbClr val="111820"/>
+                </a:solidFill>
+                <a:latin typeface="Calibri"/>
+              </a:rPr>
+              <a:t>Console screen 3 (show-3), captured on 2026-10-17, run ab-20261017-114259-b64f54; your output will differ</a:t>
+            </a:r>
+          </a:p>
+        </p:txBody>
+      </p:sp>
+      <p:pic>
+        <p:nvPicPr>
+          <p:cNvPr id="9" name="Picture 8" descr="s3-result.png"/>
+          <p:cNvPicPr>
+            <a:picLocks noChangeAspect="1"/>
+          </p:cNvPicPr>
+          <p:nvPr/>
+        </p:nvPicPr>
+        <p:blipFill>
+          <a:blip r:embed="rId2"/>
+          <a:stretch>
+            <a:fillRect/>
+          </a:stretch>
+        </p:blipFill>
+        <p:spPr>
+          <a:xfrm>
+            <a:off x="2850569" y="4666298"/>
+            <a:ext cx="6490862" cy="1734503"/>
+          </a:xfrm>
+          <a:prstGeom prst="rect">
+            <a:avLst/>
+          </a:prstGeom>
+        </p:spPr>
+      </p:pic>
     </p:spTree>
   </p:cSld>
   <p:clrMapOvr>
@@ -29639,7 +29852,7 @@
                 </a:solidFill>
                 <a:latin typeface="Calibri"/>
               </a:rPr>
-              <a:t>Discussion: the scope layer's clearest effect showed where it was not the primary measure. How would you register that before the next run?</a:t>
+              <a:t>Discussion: the clearest post hoc difference showed where scope was not the primary measure. How would you register that before the next run?</a:t>
             </a:r>
           </a:p>
           <a:p>
@@ -31573,7 +31786,7 @@
         <p:spPr>
           <a:xfrm>
             <a:off x="533400" y="1219200"/>
-            <a:ext cx="11125200" cy="5181600"/>
+            <a:ext cx="11125200" cy="3264408"/>
           </a:xfrm>
           <a:prstGeom prst="rect">
             <a:avLst/>
@@ -31693,7 +31906,7 @@
                 </a:solidFill>
                 <a:latin typeface="Calibri"/>
               </a:rPr>
-              <a:t>show-4: the harness arm alone on F4; watch the handoffs, the test phase, and the filters</a:t>
+              <a:t>show-4: the harness arm alone on F4; watch the gate, the test phase, and the filters</a:t>
             </a:r>
           </a:p>
           <a:p>
@@ -31721,33 +31934,32 @@
               <a:t>The final is tonight's one live A/B: both arms, all four layers, blinded reviewer on both diffs</a:t>
             </a:r>
           </a:p>
-          <a:p>
-            <a:pPr algn="l">
-              <a:spcAft>
-                <a:spcPts val="945"/>
-              </a:spcAft>
-            </a:pPr>
-            <a:r>
-              <a:rPr sz="2100" b="0">
-                <a:solidFill>
-                  <a:srgbClr val="111820"/>
-                </a:solidFill>
-                <a:latin typeface="Calibri"/>
-              </a:rPr>
-              <a:t>•  </a:t>
-            </a:r>
-            <a:r>
-              <a:rPr sz="2100" b="0">
-                <a:solidFill>
-                  <a:srgbClr val="111820"/>
-                </a:solidFill>
-                <a:latin typeface="Calibri"/>
-              </a:rPr>
-              <a:t>Class profile for both arms; final run cap $0.25 per arm</a:t>
-            </a:r>
-          </a:p>
-        </p:txBody>
-      </p:sp>
+        </p:txBody>
+      </p:sp>
+      <p:pic>
+        <p:nvPicPr>
+          <p:cNvPr id="9" name="Picture 8" descr="4fd6deeee6fbd5a4.png"/>
+          <p:cNvPicPr>
+            <a:picLocks noChangeAspect="1"/>
+          </p:cNvPicPr>
+          <p:nvPr/>
+        </p:nvPicPr>
+        <p:blipFill>
+          <a:blip r:embed="rId2"/>
+          <a:stretch>
+            <a:fillRect/>
+          </a:stretch>
+        </p:blipFill>
+        <p:spPr>
+          <a:xfrm>
+            <a:off x="533400" y="4625109"/>
+            <a:ext cx="11125200" cy="1729439"/>
+          </a:xfrm>
+          <a:prstGeom prst="rect">
+            <a:avLst/>
+          </a:prstGeom>
+        </p:spPr>
+      </p:pic>
     </p:spTree>
   </p:cSld>
   <p:clrMapOvr>
@@ -35934,7 +36146,7 @@
         <p:spPr>
           <a:xfrm>
             <a:off x="533400" y="1219200"/>
-            <a:ext cx="11125200" cy="1383487"/>
+            <a:ext cx="11125200" cy="1297019"/>
           </a:xfrm>
           <a:prstGeom prst="rect">
             <a:avLst/>
@@ -35949,11 +36161,11 @@
           <a:p>
             <a:pPr algn="l">
               <a:spcAft>
-                <a:spcPts val="918"/>
+                <a:spcPts val="860"/>
               </a:spcAft>
             </a:pPr>
             <a:r>
-              <a:rPr sz="2039" b="0">
+              <a:rPr sz="1912" b="0">
                 <a:solidFill>
                   <a:srgbClr val="111820"/>
                 </a:solidFill>
@@ -35962,7 +36174,7 @@
               <a:t>•  </a:t>
             </a:r>
             <a:r>
-              <a:rPr sz="2039" b="0">
+              <a:rPr sz="1912" b="0">
                 <a:solidFill>
                   <a:srgbClr val="111820"/>
                 </a:solidFill>
@@ -35974,11 +36186,11 @@
           <a:p>
             <a:pPr algn="l">
               <a:spcAft>
-                <a:spcPts val="918"/>
+                <a:spcPts val="860"/>
               </a:spcAft>
             </a:pPr>
             <a:r>
-              <a:rPr sz="2039" b="0">
+              <a:rPr sz="1912" b="0">
                 <a:solidFill>
                   <a:srgbClr val="111820"/>
                 </a:solidFill>
@@ -35987,7 +36199,7 @@
               <a:t>•  </a:t>
             </a:r>
             <a:r>
-              <a:rPr sz="2039" b="0">
+              <a:rPr sz="1912" b="0">
                 <a:solidFill>
                   <a:srgbClr val="111820"/>
                 </a:solidFill>
@@ -35999,11 +36211,11 @@
           <a:p>
             <a:pPr algn="l">
               <a:spcAft>
-                <a:spcPts val="918"/>
+                <a:spcPts val="860"/>
               </a:spcAft>
             </a:pPr>
             <a:r>
-              <a:rPr sz="2039" b="0">
+              <a:rPr sz="1912" b="0">
                 <a:solidFill>
                   <a:srgbClr val="111820"/>
                 </a:solidFill>
@@ -36012,7 +36224,7 @@
               <a:t>•  </a:t>
             </a:r>
             <a:r>
-              <a:rPr sz="2039" b="0">
+              <a:rPr sz="1912" b="0">
                 <a:solidFill>
                   <a:srgbClr val="111820"/>
                 </a:solidFill>
@@ -36031,8 +36243,8 @@
         </p:nvSpPr>
         <p:spPr>
           <a:xfrm>
-            <a:off x="533400" y="2697937"/>
-            <a:ext cx="11125200" cy="3301944"/>
+            <a:off x="533400" y="2611469"/>
+            <a:ext cx="11125200" cy="3352110"/>
           </a:xfrm>
           <a:prstGeom prst="rect">
             <a:avLst/>
@@ -36077,8 +36289,8 @@
         </p:nvSpPr>
         <p:spPr>
           <a:xfrm>
-            <a:off x="533400" y="2697937"/>
-            <a:ext cx="57150" cy="3301944"/>
+            <a:off x="533400" y="2611469"/>
+            <a:ext cx="57150" cy="3352110"/>
           </a:xfrm>
           <a:prstGeom prst="rect">
             <a:avLst/>
@@ -36121,8 +36333,8 @@
         </p:nvSpPr>
         <p:spPr>
           <a:xfrm>
-            <a:off x="704850" y="2793187"/>
-            <a:ext cx="10858500" cy="3149544"/>
+            <a:off x="704850" y="2706719"/>
+            <a:ext cx="10858500" cy="3199710"/>
           </a:xfrm>
           <a:prstGeom prst="rect">
             <a:avLst/>
@@ -36137,7 +36349,7 @@
           <a:p>
             <a:pPr algn="l"/>
             <a:r>
-              <a:rPr sz="1527" b="0">
+              <a:rPr sz="1433" b="0">
                 <a:solidFill>
                   <a:srgbClr val="111820"/>
                 </a:solidFill>
@@ -36149,7 +36361,7 @@
           <a:p>
             <a:pPr algn="l"/>
             <a:r>
-              <a:rPr sz="1527" b="0">
+              <a:rPr sz="1433" b="0">
                 <a:solidFill>
                   <a:srgbClr val="111820"/>
                 </a:solidFill>
@@ -36161,7 +36373,7 @@
           <a:p>
             <a:pPr algn="l"/>
             <a:r>
-              <a:rPr sz="1527" b="0">
+              <a:rPr sz="1433" b="0">
                 <a:solidFill>
                   <a:srgbClr val="111820"/>
                 </a:solidFill>
@@ -36173,7 +36385,7 @@
           <a:p>
             <a:pPr algn="l"/>
             <a:r>
-              <a:rPr sz="1527" b="0">
+              <a:rPr sz="1433" b="0">
                 <a:solidFill>
                   <a:srgbClr val="111820"/>
                 </a:solidFill>
@@ -36185,7 +36397,7 @@
           <a:p>
             <a:pPr algn="l"/>
             <a:r>
-              <a:rPr sz="1527" b="0">
+              <a:rPr sz="1433" b="0">
                 <a:solidFill>
                   <a:srgbClr val="111820"/>
                 </a:solidFill>
@@ -36197,7 +36409,7 @@
           <a:p>
             <a:pPr algn="l"/>
             <a:r>
-              <a:rPr sz="1527" b="0">
+              <a:rPr sz="1433" b="0">
                 <a:solidFill>
                   <a:srgbClr val="111820"/>
                 </a:solidFill>
@@ -36209,31 +36421,43 @@
           <a:p>
             <a:pPr algn="l"/>
             <a:r>
-              <a:rPr sz="1527" b="0">
+              <a:rPr sz="1433" b="0">
                 <a:solidFill>
                   <a:srgbClr val="111820"/>
                 </a:solidFill>
                 <a:latin typeface="Consolas"/>
               </a:rPr>
-              <a:t>clean = clean_state_check(sandbox, base_sha, cfg.limit(120))</a:t>
+              <a:t>clean = clean_state_check(</a:t>
             </a:r>
           </a:p>
           <a:p>
             <a:pPr algn="l"/>
             <a:r>
-              <a:rPr sz="1527" b="0">
+              <a:rPr sz="1433" b="0">
                 <a:solidFill>
                   <a:srgbClr val="111820"/>
                 </a:solidFill>
                 <a:latin typeface="Consolas"/>
               </a:rPr>
+              <a:t>...</a:t>
+            </a:r>
+          </a:p>
+          <a:p>
+            <a:pPr algn="l"/>
+            <a:r>
+              <a:rPr sz="1433" b="0">
+                <a:solidFill>
+                  <a:srgbClr val="111820"/>
+                </a:solidFill>
+                <a:latin typeface="Consolas"/>
+              </a:rPr>
               <a:t>items.append(clean)</a:t>
             </a:r>
           </a:p>
           <a:p>
             <a:pPr algn="l"/>
             <a:r>
-              <a:rPr sz="1527" b="0">
+              <a:rPr sz="1433" b="0">
                 <a:solidFill>
                   <a:srgbClr val="111820"/>
                 </a:solidFill>
@@ -36245,7 +36469,7 @@
           <a:p>
             <a:pPr algn="l"/>
             <a:r>
-              <a:rPr sz="1527" b="0">
+              <a:rPr sz="1433" b="0">
                 <a:solidFill>
                   <a:srgbClr val="111820"/>
                 </a:solidFill>
@@ -36257,7 +36481,7 @@
           <a:p>
             <a:pPr algn="l"/>
             <a:r>
-              <a:rPr sz="1527" b="0">
+              <a:rPr sz="1433" b="0">
                 <a:solidFill>
                   <a:srgbClr val="111820"/>
                 </a:solidFill>
@@ -36269,7 +36493,7 @@
           <a:p>
             <a:pPr algn="l"/>
             <a:r>
-              <a:rPr sz="1527" b="0">
+              <a:rPr sz="1433" b="0">
                 <a:solidFill>
                   <a:srgbClr val="111820"/>
                 </a:solidFill>
@@ -36288,7 +36512,7 @@
         </p:nvSpPr>
         <p:spPr>
           <a:xfrm>
-            <a:off x="533400" y="6018931"/>
+            <a:off x="533400" y="5982630"/>
             <a:ext cx="11125200" cy="209550"/>
           </a:xfrm>
           <a:prstGeom prst="rect">
@@ -36556,7 +36780,7 @@
                 </a:solidFill>
                 <a:latin typeface="Calibri"/>
               </a:rPr>
-              <a:t>Demo block: harness in action, and a real run replayed</a:t>
+              <a:t>Demo block: what to watch</a:t>
             </a:r>
           </a:p>
         </p:txBody>
@@ -36570,7 +36794,7 @@
         <p:spPr>
           <a:xfrm>
             <a:off x="533400" y="1219200"/>
-            <a:ext cx="11125200" cy="4705350"/>
+            <a:ext cx="11125200" cy="1918811"/>
           </a:xfrm>
           <a:prstGeom prst="rect">
             <a:avLst/>
@@ -36585,11 +36809,11 @@
           <a:p>
             <a:pPr algn="l">
               <a:spcAft>
-                <a:spcPts val="945"/>
+                <a:spcPts val="860"/>
               </a:spcAft>
             </a:pPr>
             <a:r>
-              <a:rPr sz="2100" b="0">
+              <a:rPr sz="1912" b="0">
                 <a:solidFill>
                   <a:srgbClr val="111820"/>
                 </a:solidFill>
@@ -36598,32 +36822,23 @@
               <a:t>•  </a:t>
             </a:r>
             <a:r>
-              <a:rPr sz="2100" b="0">
-                <a:solidFill>
-                  <a:srgbClr val="111820"/>
-                </a:solidFill>
-                <a:latin typeface="Consolas"/>
-              </a:rPr>
-              <a:t>make show-4</a:t>
-            </a:r>
-            <a:r>
-              <a:rPr sz="2100" b="0">
-                <a:solidFill>
-                  <a:srgbClr val="111820"/>
-                </a:solidFill>
-                <a:latin typeface="Calibri"/>
-              </a:rPr>
-              <a:t>, finished: screen 1 shows the gate pills ✓ or ✗ and the gate feedback</a:t>
+              <a:rPr sz="1912" b="0">
+                <a:solidFill>
+                  <a:srgbClr val="111820"/>
+                </a:solidFill>
+                <a:latin typeface="Calibri"/>
+              </a:rPr>
+              <a:t>Screen 1: a ⊘ blocked edit, "done" and the gate pills, then the test phase; screen 2: the conflict panel</a:t>
             </a:r>
           </a:p>
           <a:p>
             <a:pPr algn="l">
               <a:spcAft>
-                <a:spcPts val="945"/>
+                <a:spcPts val="860"/>
               </a:spcAft>
             </a:pPr>
             <a:r>
-              <a:rPr sz="2100" b="0">
+              <a:rPr sz="1912" b="0">
                 <a:solidFill>
                   <a:srgbClr val="111820"/>
                 </a:solidFill>
@@ -36632,23 +36847,23 @@
               <a:t>•  </a:t>
             </a:r>
             <a:r>
-              <a:rPr sz="2100" b="0">
-                <a:solidFill>
-                  <a:srgbClr val="111820"/>
-                </a:solidFill>
-                <a:latin typeface="Calibri"/>
-              </a:rPr>
-              <a:t>Screen 3: the filter table with discard reasons, the mutant table, the referee counters</a:t>
+              <a:rPr sz="1912" b="0">
+                <a:solidFill>
+                  <a:srgbClr val="111820"/>
+                </a:solidFill>
+                <a:latin typeface="Calibri"/>
+              </a:rPr>
+              <a:t>Screen 3: the filter table (kept or discarded, with the reason) and the mutant table</a:t>
             </a:r>
           </a:p>
           <a:p>
             <a:pPr algn="l">
               <a:spcAft>
-                <a:spcPts val="945"/>
+                <a:spcPts val="860"/>
               </a:spcAft>
             </a:pPr>
             <a:r>
-              <a:rPr sz="2100" b="0">
+              <a:rPr sz="1912" b="0">
                 <a:solidFill>
                   <a:srgbClr val="111820"/>
                 </a:solidFill>
@@ -36657,63 +36872,44 @@
               <a:t>•  </a:t>
             </a:r>
             <a:r>
-              <a:rPr sz="2100" b="0">
-                <a:solidFill>
-                  <a:srgbClr val="111820"/>
-                </a:solidFill>
-                <a:latin typeface="Calibri"/>
-              </a:rPr>
-              <a:t>Real run, replayed: </a:t>
-            </a:r>
-            <a:r>
-              <a:rPr sz="2100" b="0">
-                <a:solidFill>
-                  <a:srgbClr val="111820"/>
-                </a:solidFill>
-                <a:latin typeface="Consolas"/>
-              </a:rPr>
-              <a:t>make replay RUN=ab-20261017-090903-926c02</a:t>
-            </a:r>
-            <a:r>
-              <a:rPr sz="2100" b="0">
-                <a:solidFill>
-                  <a:srgbClr val="111820"/>
-                </a:solidFill>
-                <a:latin typeface="Calibri"/>
-              </a:rPr>
-              <a:t> (class-profile round, F4)</a:t>
-            </a:r>
-          </a:p>
-          <a:p>
-            <a:pPr algn="l">
-              <a:spcAft>
-                <a:spcPts val="945"/>
-              </a:spcAft>
-            </a:pPr>
-            <a:r>
-              <a:rPr sz="2100" b="0">
-                <a:solidFill>
-                  <a:srgbClr val="111820"/>
-                </a:solidFill>
-                <a:latin typeface="Calibri"/>
-              </a:rPr>
-              <a:t>•  </a:t>
-            </a:r>
-            <a:r>
-              <a:rPr sz="2100" b="0">
-                <a:solidFill>
-                  <a:srgbClr val="111820"/>
-                </a:solidFill>
-                <a:latin typeface="Calibri"/>
-              </a:rPr>
-              <a:t>Its bare arm claimed done with 68 of 69 hidden tests passing; the referee failed the run</a:t>
-            </a:r>
-          </a:p>
-        </p:txBody>
-      </p:sp>
-      <p:sp>
-        <p:nvSpPr>
-          <p:cNvPr id="9" name="Rectangle 8"/>
+              <a:rPr sz="1912" b="0">
+                <a:solidFill>
+                  <a:srgbClr val="111820"/>
+                </a:solidFill>
+                <a:latin typeface="Calibri"/>
+              </a:rPr>
+              <a:t>Console screens 1 and 2 (show-4), captured on 2026-10-17, run ab-20261017-115138-c45d9d; your output will differ</a:t>
+            </a:r>
+          </a:p>
+        </p:txBody>
+      </p:sp>
+      <p:pic>
+        <p:nvPicPr>
+          <p:cNvPr id="9" name="Picture 8" descr="s4-watch.png"/>
+          <p:cNvPicPr>
+            <a:picLocks noChangeAspect="1"/>
+          </p:cNvPicPr>
+          <p:nvPr/>
+        </p:nvPicPr>
+        <p:blipFill>
+          <a:blip r:embed="rId2"/>
+          <a:stretch>
+            <a:fillRect/>
+          </a:stretch>
+        </p:blipFill>
+        <p:spPr>
+          <a:xfrm>
+            <a:off x="3600606" y="3233261"/>
+            <a:ext cx="4990789" cy="2691289"/>
+          </a:xfrm>
+          <a:prstGeom prst="rect">
+            <a:avLst/>
+          </a:prstGeom>
+        </p:spPr>
+      </p:pic>
+      <p:sp>
+        <p:nvSpPr>
+          <p:cNvPr id="10" name="Rectangle 9"/>
           <p:cNvSpPr/>
           <p:nvPr/>
         </p:nvSpPr>
@@ -36759,7 +36955,7 @@
       </p:sp>
       <p:sp>
         <p:nvSpPr>
-          <p:cNvPr id="10" name="TextBox 9"/>
+          <p:cNvPr id="11" name="TextBox 10"/>
           <p:cNvSpPr txBox="1"/>
           <p:nvPr/>
         </p:nvSpPr>
@@ -37030,7 +37226,7 @@
         <p:spPr>
           <a:xfrm>
             <a:off x="533400" y="628650"/>
-            <a:ext cx="11125200" cy="933450"/>
+            <a:ext cx="11125200" cy="495300"/>
           </a:xfrm>
           <a:prstGeom prst="rect">
             <a:avLst/>
@@ -37051,7 +37247,7 @@
                 </a:solidFill>
                 <a:latin typeface="Calibri"/>
               </a:rPr>
-              <a:t>Demo block: a constructed example, and what the pilot measured</a:t>
+              <a:t>Demo block: reading the result</a:t>
             </a:r>
           </a:p>
         </p:txBody>
@@ -37064,8 +37260,8 @@
         </p:nvSpPr>
         <p:spPr>
           <a:xfrm>
-            <a:off x="533400" y="1657350"/>
-            <a:ext cx="11125200" cy="4743450"/>
+            <a:off x="533400" y="1219200"/>
+            <a:ext cx="5015023" cy="5181600"/>
           </a:xfrm>
           <a:prstGeom prst="rect">
             <a:avLst/>
@@ -37080,11 +37276,11 @@
           <a:p>
             <a:pPr algn="l">
               <a:spcAft>
-                <a:spcPts val="945"/>
+                <a:spcPts val="776"/>
               </a:spcAft>
             </a:pPr>
             <a:r>
-              <a:rPr sz="2100" b="0">
+              <a:rPr sz="1725" b="0">
                 <a:solidFill>
                   <a:srgbClr val="111820"/>
                 </a:solidFill>
@@ -37093,41 +37289,23 @@
               <a:t>•  </a:t>
             </a:r>
             <a:r>
-              <a:rPr sz="2100" b="0">
-                <a:solidFill>
-                  <a:srgbClr val="111820"/>
-                </a:solidFill>
-                <a:latin typeface="Calibri"/>
-              </a:rPr>
-              <a:t>Constructed example: </a:t>
-            </a:r>
-            <a:r>
-              <a:rPr sz="2100" b="0">
-                <a:solidFill>
-                  <a:srgbClr val="111820"/>
-                </a:solidFill>
-                <a:latin typeface="Consolas"/>
-              </a:rPr>
-              <a:t>make example-4</a:t>
-            </a:r>
-            <a:r>
-              <a:rPr sz="2100" b="0">
-                <a:solidFill>
-                  <a:srgbClr val="111820"/>
-                </a:solidFill>
-                <a:latin typeface="Calibri"/>
-              </a:rPr>
-              <a:t>, scripted, no model; CONSTRUCTED EXAMPLE on every screen</a:t>
+              <a:rPr sz="1725" b="0">
+                <a:solidFill>
+                  <a:srgbClr val="111820"/>
+                </a:solidFill>
+                <a:latin typeface="Calibri"/>
+              </a:rPr>
+              <a:t>show-4 in the quiet run: the gate passed and the agent said done; the referee found hidden tests 68 of 69, mutants killed 0 of 4: fails</a:t>
             </a:r>
           </a:p>
           <a:p>
             <a:pPr algn="l">
               <a:spcAft>
-                <a:spcPts val="945"/>
+                <a:spcPts val="776"/>
               </a:spcAft>
             </a:pPr>
             <a:r>
-              <a:rPr sz="2100" b="0">
+              <a:rPr sz="1725" b="0">
                 <a:solidFill>
                   <a:srgbClr val="111820"/>
                 </a:solidFill>
@@ -37136,23 +37314,23 @@
               <a:t>•  </a:t>
             </a:r>
             <a:r>
-              <a:rPr sz="2100" b="0">
-                <a:solidFill>
-                  <a:srgbClr val="111820"/>
-                </a:solidFill>
-                <a:latin typeface="Calibri"/>
-              </a:rPr>
-              <a:t>Pilot, all 69 hidden tests and all 4 mutants: bare 0 of 4 passing, harness 0 of 4 (poll answer: D); no measurable difference on this task with this model</a:t>
+              <a:rPr sz="1725" b="0">
+                <a:solidFill>
+                  <a:srgbClr val="111820"/>
+                </a:solidFill>
+                <a:latin typeface="Calibri"/>
+              </a:rPr>
+              <a:t>The gate checks visible tests and house rules; hidden tests and referee mutants stay out of its reach</a:t>
             </a:r>
           </a:p>
           <a:p>
             <a:pPr algn="l">
               <a:spcAft>
-                <a:spcPts val="945"/>
+                <a:spcPts val="776"/>
               </a:spcAft>
             </a:pPr>
             <a:r>
-              <a:rPr sz="2100" b="0">
+              <a:rPr sz="1725" b="0">
                 <a:solidFill>
                   <a:srgbClr val="111820"/>
                 </a:solidFill>
@@ -37161,23 +37339,23 @@
               <a:t>•  </a:t>
             </a:r>
             <a:r>
-              <a:rPr sz="2100" b="0">
-                <a:solidFill>
-                  <a:srgbClr val="111820"/>
-                </a:solidFill>
-                <a:latin typeface="Calibri"/>
-              </a:rPr>
-              <a:t>Run 3: every bare arm hit the agent time limit; the harness arms shipped no tests, so killed 0 of 4 mutants</a:t>
+              <a:rPr sz="1725" b="0">
+                <a:solidFill>
+                  <a:srgbClr val="111820"/>
+                </a:solidFill>
+                <a:latin typeface="Calibri"/>
+              </a:rPr>
+              <a:t>Pilot, all 69 hidden tests and all 4 mutants: bare 0 of 4 passing, harness 0 of 4 (poll answer: D); no measurable difference on this task with this model</a:t>
             </a:r>
           </a:p>
           <a:p>
             <a:pPr algn="l">
               <a:spcAft>
-                <a:spcPts val="945"/>
+                <a:spcPts val="776"/>
               </a:spcAft>
             </a:pPr>
             <a:r>
-              <a:rPr sz="2100" b="0">
+              <a:rPr sz="1725" b="0">
                 <a:solidFill>
                   <a:srgbClr val="111820"/>
                 </a:solidFill>
@@ -37186,23 +37364,23 @@
               <a:t>•  </a:t>
             </a:r>
             <a:r>
-              <a:rPr sz="2100" b="0">
-                <a:solidFill>
-                  <a:srgbClr val="111820"/>
-                </a:solidFill>
-                <a:latin typeface="Calibri"/>
-              </a:rPr>
-              <a:t>Class-profile round: both arms 68 of 69 hidden tests; mutants killed: bare 4, harness 1</a:t>
+              <a:rPr sz="1725" b="0">
+                <a:solidFill>
+                  <a:srgbClr val="111820"/>
+                </a:solidFill>
+                <a:latin typeface="Calibri"/>
+              </a:rPr>
+              <a:t>Class-profile round: the bare arm claimed done with 68 of 69 hidden tests, the first done claim with a failing hidden test in the pilot's records</a:t>
             </a:r>
           </a:p>
           <a:p>
             <a:pPr algn="l">
               <a:spcAft>
-                <a:spcPts val="945"/>
+                <a:spcPts val="776"/>
               </a:spcAft>
             </a:pPr>
             <a:r>
-              <a:rPr sz="2100" b="0">
+              <a:rPr sz="1725" b="0">
                 <a:solidFill>
                   <a:srgbClr val="111820"/>
                 </a:solidFill>
@@ -37211,42 +37389,41 @@
               <a:t>•  </a:t>
             </a:r>
             <a:r>
-              <a:rPr sz="2100" b="0">
-                <a:solidFill>
-                  <a:srgbClr val="111820"/>
-                </a:solidFill>
-                <a:latin typeface="Calibri"/>
-              </a:rPr>
-              <a:t>Post hoc, runs 2-4 (34 runs per arm): no done claim came with failing hidden tests (0 of 19 bare, 0 of 10 harness)</a:t>
-            </a:r>
-          </a:p>
-          <a:p>
-            <a:pPr algn="l">
-              <a:spcAft>
-                <a:spcPts val="945"/>
-              </a:spcAft>
-            </a:pPr>
-            <a:r>
-              <a:rPr sz="2100" b="0">
-                <a:solidFill>
-                  <a:srgbClr val="111820"/>
-                </a:solidFill>
-                <a:latin typeface="Calibri"/>
-              </a:rPr>
-              <a:t>•  </a:t>
-            </a:r>
-            <a:r>
-              <a:rPr sz="2100" b="0">
-                <a:solidFill>
-                  <a:srgbClr val="111820"/>
-                </a:solidFill>
-                <a:latin typeface="Calibri"/>
-              </a:rPr>
-              <a:t>The class-profile bare arm on slide 61 is the first done claim with a failing hidden test since</a:t>
-            </a:r>
-          </a:p>
-        </p:txBody>
-      </p:sp>
+              <a:rPr sz="1725" b="0">
+                <a:solidFill>
+                  <a:srgbClr val="111820"/>
+                </a:solidFill>
+                <a:latin typeface="Calibri"/>
+              </a:rPr>
+              <a:t>Console screen 3 (show-4), captured on 2026-10-17, run ab-20261017-115138-c45d9d; your output will differ</a:t>
+            </a:r>
+          </a:p>
+        </p:txBody>
+      </p:sp>
+      <p:pic>
+        <p:nvPicPr>
+          <p:cNvPr id="9" name="Picture 8" descr="s4-result.png"/>
+          <p:cNvPicPr>
+            <a:picLocks noChangeAspect="1"/>
+          </p:cNvPicPr>
+          <p:nvPr/>
+        </p:nvPicPr>
+        <p:blipFill>
+          <a:blip r:embed="rId2"/>
+          <a:stretch>
+            <a:fillRect/>
+          </a:stretch>
+        </p:blipFill>
+        <p:spPr>
+          <a:xfrm>
+            <a:off x="5891323" y="2121676"/>
+            <a:ext cx="5767277" cy="3376648"/>
+          </a:xfrm>
+          <a:prstGeom prst="rect">
+            <a:avLst/>
+          </a:prstGeom>
+        </p:spPr>
+      </p:pic>
     </p:spTree>
   </p:cSld>
   <p:clrMapOvr>
@@ -37971,7 +38148,7 @@
       </p:sp>
       <p:pic>
         <p:nvPicPr>
-          <p:cNvPr id="9" name="Picture 8" descr="8293c489a42b93a9.png"/>
+          <p:cNvPr id="9" name="Picture 8" descr="747a7c8219cfe3d2.png"/>
           <p:cNvPicPr>
             <a:picLocks noChangeAspect="1"/>
           </p:cNvPicPr>
@@ -37985,8 +38162,8 @@
         </p:blipFill>
         <p:spPr>
           <a:xfrm>
-            <a:off x="1378885" y="3213354"/>
-            <a:ext cx="9434229" cy="2711196"/>
+            <a:off x="533400" y="3986461"/>
+            <a:ext cx="11125200" cy="1164983"/>
           </a:xfrm>
           <a:prstGeom prst="rect">
             <a:avLst/>
@@ -38329,7 +38506,7 @@
         <p:spPr>
           <a:xfrm>
             <a:off x="533400" y="1219200"/>
-            <a:ext cx="11125200" cy="4705350"/>
+            <a:ext cx="11125200" cy="1918811"/>
           </a:xfrm>
           <a:prstGeom prst="rect">
             <a:avLst/>
@@ -38344,11 +38521,11 @@
           <a:p>
             <a:pPr algn="l">
               <a:spcAft>
-                <a:spcPts val="945"/>
+                <a:spcPts val="860"/>
               </a:spcAft>
             </a:pPr>
             <a:r>
-              <a:rPr sz="2100" b="0">
+              <a:rPr sz="1912" b="0">
                 <a:solidFill>
                   <a:srgbClr val="111820"/>
                 </a:solidFill>
@@ -38357,23 +38534,23 @@
               <a:t>•  </a:t>
             </a:r>
             <a:r>
-              <a:rPr sz="2100" b="0">
-                <a:solidFill>
-                  <a:srgbClr val="111820"/>
-                </a:solidFill>
-                <a:latin typeface="Calibri"/>
-              </a:rPr>
-              <a:t>Screen 1: the turns, harness decisions, gate pills, "primary verdict ready"</a:t>
+              <a:rPr sz="1912" b="0">
+                <a:solidFill>
+                  <a:srgbClr val="111820"/>
+                </a:solidFill>
+                <a:latin typeface="Calibri"/>
+              </a:rPr>
+              <a:t>Screen 1: the turns, harness decisions, gate pills, "primary verdict ready" per arm</a:t>
             </a:r>
           </a:p>
           <a:p>
             <a:pPr algn="l">
               <a:spcAft>
-                <a:spcPts val="945"/>
+                <a:spcPts val="860"/>
               </a:spcAft>
             </a:pPr>
             <a:r>
-              <a:rPr sz="2100" b="0">
+              <a:rPr sz="1912" b="0">
                 <a:solidFill>
                   <a:srgbClr val="111820"/>
                 </a:solidFill>
@@ -38382,23 +38559,23 @@
               <a:t>•  </a:t>
             </a:r>
             <a:r>
-              <a:rPr sz="2100" b="0">
-                <a:solidFill>
-                  <a:srgbClr val="111820"/>
-                </a:solidFill>
-                <a:latin typeface="Calibri"/>
-              </a:rPr>
-              <a:t>Screen 3: evidence, filters, mutants, reviewer verdict</a:t>
+              <a:rPr sz="1912" b="0">
+                <a:solidFill>
+                  <a:srgbClr val="111820"/>
+                </a:solidFill>
+                <a:latin typeface="Calibri"/>
+              </a:rPr>
+              <a:t>Screen 3: evidence, filters, mutants, reviewer verdict; screen 5: the first wrong turn and the trace links</a:t>
             </a:r>
           </a:p>
           <a:p>
             <a:pPr algn="l">
               <a:spcAft>
-                <a:spcPts val="945"/>
+                <a:spcPts val="860"/>
               </a:spcAft>
             </a:pPr>
             <a:r>
-              <a:rPr sz="2100" b="0">
+              <a:rPr sz="1912" b="0">
                 <a:solidFill>
                   <a:srgbClr val="111820"/>
                 </a:solidFill>
@@ -38407,20 +38584,44 @@
               <a:t>•  </a:t>
             </a:r>
             <a:r>
-              <a:rPr sz="2100" b="0">
-                <a:solidFill>
-                  <a:srgbClr val="111820"/>
-                </a:solidFill>
-                <a:latin typeface="Calibri"/>
-              </a:rPr>
-              <a:t>Screen 5: the first wrong turn and the trace links</a:t>
-            </a:r>
-          </a:p>
-        </p:txBody>
-      </p:sp>
-      <p:sp>
-        <p:nvSpPr>
-          <p:cNvPr id="9" name="Rectangle 8"/>
+              <a:rPr sz="1912" b="0">
+                <a:solidFill>
+                  <a:srgbClr val="111820"/>
+                </a:solidFill>
+                <a:latin typeface="Calibri"/>
+              </a:rPr>
+              <a:t>Console screen 1 (final), captured on 2026-10-17, run ab-20261017-120323-c97138; your output will differ</a:t>
+            </a:r>
+          </a:p>
+        </p:txBody>
+      </p:sp>
+      <p:pic>
+        <p:nvPicPr>
+          <p:cNvPr id="9" name="Picture 8" descr="final-console.png"/>
+          <p:cNvPicPr>
+            <a:picLocks noChangeAspect="1"/>
+          </p:cNvPicPr>
+          <p:nvPr/>
+        </p:nvPicPr>
+        <p:blipFill>
+          <a:blip r:embed="rId2"/>
+          <a:stretch>
+            <a:fillRect/>
+          </a:stretch>
+        </p:blipFill>
+        <p:spPr>
+          <a:xfrm>
+            <a:off x="2942146" y="3233261"/>
+            <a:ext cx="6307708" cy="2691289"/>
+          </a:xfrm>
+          <a:prstGeom prst="rect">
+            <a:avLst/>
+          </a:prstGeom>
+        </p:spPr>
+      </p:pic>
+      <p:sp>
+        <p:nvSpPr>
+          <p:cNvPr id="10" name="Rectangle 9"/>
           <p:cNvSpPr/>
           <p:nvPr/>
         </p:nvSpPr>
@@ -38466,7 +38667,7 @@
       </p:sp>
       <p:sp>
         <p:nvSpPr>
-          <p:cNvPr id="10" name="TextBox 9"/>
+          <p:cNvPr id="11" name="TextBox 10"/>
           <p:cNvSpPr txBox="1"/>
           <p:nvPr/>
         </p:nvSpPr>
@@ -38754,7 +38955,7 @@
         <p:spPr>
           <a:xfrm>
             <a:off x="533400" y="1219200"/>
-            <a:ext cx="11125200" cy="4705350"/>
+            <a:ext cx="11125200" cy="1765554"/>
           </a:xfrm>
           <a:prstGeom prst="rect">
             <a:avLst/>
@@ -38816,11 +39017,60 @@
               <a:t>Look for ⚠ other-org and ⧉ duplicate marks</a:t>
             </a:r>
           </a:p>
-        </p:txBody>
-      </p:sp>
-      <p:sp>
-        <p:nvSpPr>
-          <p:cNvPr id="9" name="Rectangle 8"/>
+          <a:p>
+            <a:pPr algn="l">
+              <a:spcAft>
+                <a:spcPts val="945"/>
+              </a:spcAft>
+            </a:pPr>
+            <a:r>
+              <a:rPr sz="2100" b="0">
+                <a:solidFill>
+                  <a:srgbClr val="111820"/>
+                </a:solidFill>
+                <a:latin typeface="Calibri"/>
+              </a:rPr>
+              <a:t>•  </a:t>
+            </a:r>
+            <a:r>
+              <a:rPr sz="2100" b="0">
+                <a:solidFill>
+                  <a:srgbClr val="111820"/>
+                </a:solidFill>
+                <a:latin typeface="Calibri"/>
+              </a:rPr>
+              <a:t>Console screen 2 (final), captured on 2026-10-17, run ab-20261017-120323-c97138; your output will differ</a:t>
+            </a:r>
+          </a:p>
+        </p:txBody>
+      </p:sp>
+      <p:pic>
+        <p:nvPicPr>
+          <p:cNvPr id="9" name="Picture 8" descr="final-boards.png"/>
+          <p:cNvPicPr>
+            <a:picLocks noChangeAspect="1"/>
+          </p:cNvPicPr>
+          <p:nvPr/>
+        </p:nvPicPr>
+        <p:blipFill>
+          <a:blip r:embed="rId2"/>
+          <a:stretch>
+            <a:fillRect/>
+          </a:stretch>
+        </p:blipFill>
+        <p:spPr>
+          <a:xfrm>
+            <a:off x="2051622" y="3080004"/>
+            <a:ext cx="8088756" cy="2844546"/>
+          </a:xfrm>
+          <a:prstGeom prst="rect">
+            <a:avLst/>
+          </a:prstGeom>
+        </p:spPr>
+      </p:pic>
+      <p:sp>
+        <p:nvSpPr>
+          <p:cNvPr id="10" name="Rectangle 9"/>
           <p:cNvSpPr/>
           <p:nvPr/>
         </p:nvSpPr>
@@ -38866,7 +39116,7 @@
       </p:sp>
       <p:sp>
         <p:nvSpPr>
-          <p:cNvPr id="10" name="TextBox 9"/>
+          <p:cNvPr id="11" name="TextBox 10"/>
           <p:cNvSpPr txBox="1"/>
           <p:nvPr/>
         </p:nvSpPr>
@@ -40372,7 +40622,7 @@
                 </a:solidFill>
                 <a:latin typeface="Calibri"/>
               </a:rPr>
-              <a:t>, ≤ $1.50 and 60 traces</a:t>
+              <a:t>, ≤ $0.40 and 4 traces</a:t>
             </a:r>
           </a:p>
           <a:p>
@@ -40415,7 +40665,7 @@
                 </a:solidFill>
                 <a:latin typeface="Calibri"/>
               </a:rPr>
-              <a:t>, ≤ $0.25 and 30 traces</a:t>
+              <a:t>, ≤ $0.48 and 4 traces</a:t>
             </a:r>
           </a:p>
           <a:p>
@@ -40458,7 +40708,7 @@
                 </a:solidFill>
                 <a:latin typeface="Calibri"/>
               </a:rPr>
-              <a:t>, ≤ $1.75 and 120 traces</a:t>
+              <a:t>, ≤ $0.68</a:t>
             </a:r>
           </a:p>
           <a:p>
@@ -43259,7 +43509,7 @@
         <p:spPr>
           <a:xfrm>
             <a:off x="533400" y="1219200"/>
-            <a:ext cx="11125200" cy="5181600"/>
+            <a:ext cx="11125200" cy="2839517"/>
           </a:xfrm>
           <a:prstGeom prst="rect">
             <a:avLst/>
@@ -43274,11 +43524,11 @@
           <a:p>
             <a:pPr algn="l">
               <a:spcAft>
-                <a:spcPts val="945"/>
+                <a:spcPts val="918"/>
               </a:spcAft>
             </a:pPr>
             <a:r>
-              <a:rPr sz="2100" b="0">
+              <a:rPr sz="2039" b="0">
                 <a:solidFill>
                   <a:srgbClr val="111820"/>
                 </a:solidFill>
@@ -43287,7 +43537,7 @@
               <a:t>•  </a:t>
             </a:r>
             <a:r>
-              <a:rPr sz="2100" b="0">
+              <a:rPr sz="2039" b="0">
                 <a:solidFill>
                   <a:srgbClr val="111820"/>
                 </a:solidFill>
@@ -43296,7 +43546,7 @@
               <a:t>Now: run </a:t>
             </a:r>
             <a:r>
-              <a:rPr sz="2100" b="0">
+              <a:rPr sz="2039" b="0">
                 <a:solidFill>
                   <a:srgbClr val="111820"/>
                 </a:solidFill>
@@ -43305,7 +43555,7 @@
               <a:t>make show-1</a:t>
             </a:r>
             <a:r>
-              <a:rPr sz="2100" b="0">
+              <a:rPr sz="2039" b="0">
                 <a:solidFill>
                   <a:srgbClr val="111820"/>
                 </a:solidFill>
@@ -43317,11 +43567,11 @@
           <a:p>
             <a:pPr algn="l">
               <a:spcAft>
-                <a:spcPts val="945"/>
+                <a:spcPts val="918"/>
               </a:spcAft>
             </a:pPr>
             <a:r>
-              <a:rPr sz="2100" b="0">
+              <a:rPr sz="2039" b="0">
                 <a:solidFill>
                   <a:srgbClr val="111820"/>
                 </a:solidFill>
@@ -43330,7 +43580,7 @@
               <a:t>•  </a:t>
             </a:r>
             <a:r>
-              <a:rPr sz="2100" b="0">
+              <a:rPr sz="2039" b="0">
                 <a:solidFill>
                   <a:srgbClr val="111820"/>
                 </a:solidFill>
@@ -43342,11 +43592,11 @@
           <a:p>
             <a:pPr algn="l">
               <a:spcAft>
-                <a:spcPts val="945"/>
+                <a:spcPts val="918"/>
               </a:spcAft>
             </a:pPr>
             <a:r>
-              <a:rPr sz="2100" b="0">
+              <a:rPr sz="2039" b="0">
                 <a:solidFill>
                   <a:srgbClr val="111820"/>
                 </a:solidFill>
@@ -43355,23 +43605,23 @@
               <a:t>•  </a:t>
             </a:r>
             <a:r>
-              <a:rPr sz="2100" b="0">
-                <a:solidFill>
-                  <a:srgbClr val="111820"/>
-                </a:solidFill>
-                <a:latin typeface="Calibri"/>
-              </a:rPr>
-              <a:t>Watch for: the agent reads the map, then only the documents the ticket needs</a:t>
+              <a:rPr sz="2039" b="0">
+                <a:solidFill>
+                  <a:srgbClr val="111820"/>
+                </a:solidFill>
+                <a:latin typeface="Calibri"/>
+              </a:rPr>
+              <a:t>Watch for: the map is in its context from the first turn; which documents does it open before it writes code?</a:t>
             </a:r>
           </a:p>
           <a:p>
             <a:pPr algn="l">
               <a:spcAft>
-                <a:spcPts val="945"/>
+                <a:spcPts val="918"/>
               </a:spcAft>
             </a:pPr>
             <a:r>
-              <a:rPr sz="2100" b="0">
+              <a:rPr sz="2039" b="0">
                 <a:solidFill>
                   <a:srgbClr val="111820"/>
                 </a:solidFill>
@@ -43380,17 +43630,41 @@
               <a:t>•  </a:t>
             </a:r>
             <a:r>
-              <a:rPr sz="2100" b="0">
-                <a:solidFill>
-                  <a:srgbClr val="111820"/>
-                </a:solidFill>
-                <a:latin typeface="Calibri"/>
-              </a:rPr>
-              <a:t>Harness arm layers: instructions; the referee still judges the run (R1 probes, hidden tests, mutants)</a:t>
-            </a:r>
-          </a:p>
-        </p:txBody>
-      </p:sp>
+              <a:rPr sz="2039" b="0">
+                <a:solidFill>
+                  <a:srgbClr val="111820"/>
+                </a:solidFill>
+                <a:latin typeface="Calibri"/>
+              </a:rPr>
+              <a:t>The referee judges it live: R1 probes first ("primary verdict ready"), then the other checks</a:t>
+            </a:r>
+          </a:p>
+        </p:txBody>
+      </p:sp>
+      <p:pic>
+        <p:nvPicPr>
+          <p:cNvPr id="9" name="Picture 8" descr="f0edb3aded035d1f.png"/>
+          <p:cNvPicPr>
+            <a:picLocks noChangeAspect="1"/>
+          </p:cNvPicPr>
+          <p:nvPr/>
+        </p:nvPicPr>
+        <p:blipFill>
+          <a:blip r:embed="rId2"/>
+          <a:stretch>
+            <a:fillRect/>
+          </a:stretch>
+        </p:blipFill>
+        <p:spPr>
+          <a:xfrm>
+            <a:off x="533400" y="4936524"/>
+            <a:ext cx="11125200" cy="681719"/>
+          </a:xfrm>
+          <a:prstGeom prst="rect">
+            <a:avLst/>
+          </a:prstGeom>
+        </p:spPr>
+      </p:pic>
     </p:spTree>
   </p:cSld>
   <p:clrMapOvr>

--- a/slides/deck.pptx
+++ b/slides/deck.pptx
@@ -36451,7 +36451,7 @@
                 </a:solidFill>
                 <a:latin typeface="Consolas"/>
               </a:rPr>
-              <a:t>items.append(clean)</a:t>
+              <a:t>passed = not any(i.status == "fail" for i in items)</a:t>
             </a:r>
           </a:p>
           <a:p>
@@ -36463,7 +36463,7 @@
                 </a:solidFill>
                 <a:latin typeface="Consolas"/>
               </a:rPr>
-              <a:t>if clean.status == "fail":</a:t>
+              <a:t>feedback = "" if passed else _feedback(gate_id, items, lines)</a:t>
             </a:r>
           </a:p>
           <a:p>
@@ -36475,7 +36475,7 @@
                 </a:solidFill>
                 <a:latin typeface="Consolas"/>
               </a:rPr>
-              <a:t>    lines.append(f"FAIL clean state: {clean.detail}")</a:t>
+              <a:t>result = GateResult(gate_id=gate_id, items=items, passed=passed, feedback=feedback)</a:t>
             </a:r>
           </a:p>
           <a:p>
@@ -36487,7 +36487,7 @@
                 </a:solidFill>
                 <a:latin typeface="Consolas"/>
               </a:rPr>
-              <a:t>    ...</a:t>
+              <a:t>...</a:t>
             </a:r>
           </a:p>
           <a:p>
@@ -36499,7 +36499,7 @@
                 </a:solidFill>
                 <a:latin typeface="Consolas"/>
               </a:rPr>
-              <a:t>passed = not any(i.status == "fail" for i in items)</a:t>
+              <a:t>    on_update(result)</a:t>
             </a:r>
           </a:p>
         </p:txBody>

--- a/slides/deck.pptx
+++ b/slides/deck.pptx
@@ -579,28 +579,23 @@
           <a:p/>
           <a:p>
             <a:r>
-              <a:t>Welcome. Tonight you see each harness piece at work on a real feature, the results of the course's</a:t>
-            </a:r>
-          </a:p>
-          <a:p>
-            <a:r>
-              <a:t>own measurements before class, and one live A/B at the end. Everything you see is in the course</a:t>
-            </a:r>
-          </a:p>
-          <a:p>
-            <a:r>
-              <a:t>repository.</a:t>
+              <a:t>Welcome. Tonight you see each harness piece at work on a real feature. You see the results of the</a:t>
+            </a:r>
+          </a:p>
+          <a:p>
+            <a:r>
+              <a:t>runs we made before class. Section 3 and the final are live A/Bs: both arms, side by side.</a:t>
+            </a:r>
+          </a:p>
+          <a:p>
+            <a:r>
+              <a:t>Everything you see is in the course repository.</a:t>
             </a:r>
           </a:p>
           <a:p/>
           <a:p>
             <a:r>
-              <a:t>Run sheet: docs/instructor-guide.md, Stage 3: Opening (0:00-0:10).</a:t>
-            </a:r>
-          </a:p>
-          <a:p>
-            <a:r>
-              <a:t>Source: README.md title and first paragraph.</a:t>
+              <a:t>Guide: docs/instructor-guide.md, "Section by section", Opening.</a:t>
             </a:r>
           </a:p>
         </p:txBody>
@@ -676,23 +671,18 @@
           <a:p/>
           <a:p>
             <a:r>
-              <a:t>The first three bullets are the section's objectives (course design). The one-line assumption is the</a:t>
-            </a:r>
-          </a:p>
-          <a:p>
-            <a:r>
-              <a:t>course's wording, after A3 (F-a-124). Today's question: does it hold for this model on this ticket?</a:t>
+              <a:t>The first three bullets are the section's objectives. The one-line assumption is the course's</a:t>
+            </a:r>
+          </a:p>
+          <a:p>
+            <a:r>
+              <a:t>wording. Tonight's question: does it hold for this model on this ticket?</a:t>
             </a:r>
           </a:p>
           <a:p/>
           <a:p>
             <a:r>
-              <a:t>Run sheet: docs/instructor-guide.md, Stage 4: S1 Instructions (0:10-1:00).</a:t>
-            </a:r>
-          </a:p>
-          <a:p>
-            <a:r>
-              <a:t>Source: S1 learning objectives (course design); README.md §10 (legacy GET /v1/issues).</a:t>
+              <a:t>Guide: docs/instructor-guide.md, "Section by section", Section 1.</a:t>
             </a:r>
           </a:p>
         </p:txBody>
@@ -768,18 +758,23 @@
           <a:p/>
           <a:p>
             <a:r>
-              <a:t>Both arms get every rule. The question is not whether the rule exists but whether the agent applies it.</a:t>
+              <a:t>Both arms get every rule. The question is not whether the rule exists, but whether the agent</a:t>
+            </a:r>
+          </a:p>
+          <a:p>
+            <a:r>
+              <a:t>applies it.</a:t>
             </a:r>
           </a:p>
           <a:p/>
           <a:p>
             <a:r>
-              <a:t>Run sheet: docs/instructor-guide.md, Stage 4: S1 Instructions (0:10-1:00).</a:t>
-            </a:r>
-          </a:p>
-          <a:p>
-            <a:r>
-              <a:t>Source: teamtrack/docs/HANDBOOK.md (R1); README.md §4; teamtrack/docs/features/f1.md.</a:t>
+              <a:t>Guide: docs/instructor-guide.md, "Section by section", Section 1.</a:t>
+            </a:r>
+          </a:p>
+          <a:p>
+            <a:r>
+              <a:t>Source: platform/teamtrack/docs/HANDBOOK.md (R1); platform/teamtrack/docs/features/f1.md.</a:t>
             </a:r>
           </a:p>
         </p:txBody>
@@ -855,18 +850,23 @@
           <a:p/>
           <a:p>
             <a:r>
-              <a:t>Cause 1 from the opening, in A1's words. A handbook the agent never opens does not exist for it.</a:t>
+              <a:t>Cause 1 from the opening. All five lines are from OpenAI, Harness engineering. A handbook the agent</a:t>
+            </a:r>
+          </a:p>
+          <a:p>
+            <a:r>
+              <a:t>never opens does not exist for it.</a:t>
             </a:r>
           </a:p>
           <a:p/>
           <a:p>
             <a:r>
-              <a:t>Run sheet: docs/instructor-guide.md, Stage 4: S1 Instructions (0:10-1:00).</a:t>
-            </a:r>
-          </a:p>
-          <a:p>
-            <a:r>
-              <a:t>Source: A1 in REFERENCES.md.</a:t>
+              <a:t>Guide: docs/instructor-guide.md, "Section by section", Section 1.</a:t>
+            </a:r>
+          </a:p>
+          <a:p>
+            <a:r>
+              <a:t>Source: docs/REFERENCES.md (OpenAI, Harness engineering).</a:t>
             </a:r>
           </a:p>
         </p:txBody>
@@ -942,23 +942,23 @@
           <a:p/>
           <a:p>
             <a:r>
-              <a:t>TeamTrack's harness instructions follow this layout: teamtrack/harness/instructions/. The map points;</a:t>
-            </a:r>
-          </a:p>
-          <a:p>
-            <a:r>
-              <a:t>the documents hold the rules.</a:t>
+              <a:t>TeamTrack's harness instructions follow this layout: platform/teamtrack/harness/instructions/. The</a:t>
+            </a:r>
+          </a:p>
+          <a:p>
+            <a:r>
+              <a:t>map points. The documents hold the rules.</a:t>
             </a:r>
           </a:p>
           <a:p/>
           <a:p>
             <a:r>
-              <a:t>Run sheet: docs/instructor-guide.md, Stage 4: S1 Instructions (0:10-1:00).</a:t>
-            </a:r>
-          </a:p>
-          <a:p>
-            <a:r>
-              <a:t>Source: A1 in REFERENCES.md; teamtrack/harness/instructions/.</a:t>
+              <a:t>Guide: docs/instructor-guide.md, "Section by section", Section 1.</a:t>
+            </a:r>
+          </a:p>
+          <a:p>
+            <a:r>
+              <a:t>Source: docs/REFERENCES.md (OpenAI, Harness engineering); platform/teamtrack/harness/instructions/.</a:t>
             </a:r>
           </a:p>
         </p:txBody>
@@ -1034,23 +1034,23 @@
           <a:p/>
           <a:p>
             <a:r>
-              <a:t>Only tier 1 (name and description) sits in the context for every skill; the agent opens the rest</a:t>
-            </a:r>
-          </a:p>
-          <a:p>
-            <a:r>
-              <a:t>when a task needs it.</a:t>
+              <a:t>Only tier 1, the name and description, sits in the context for every skill. The agent opens the</a:t>
+            </a:r>
+          </a:p>
+          <a:p>
+            <a:r>
+              <a:t>rest when a task needs it.</a:t>
             </a:r>
           </a:p>
           <a:p/>
           <a:p>
             <a:r>
-              <a:t>Run sheet: docs/instructor-guide.md, Stage 4: S1 Instructions (0:10-1:00).</a:t>
-            </a:r>
-          </a:p>
-          <a:p>
-            <a:r>
-              <a:t>Source: A1, B1, B2 in REFERENCES.md.</a:t>
+              <a:t>Guide: docs/instructor-guide.md, "Section by section", Section 1.</a:t>
+            </a:r>
+          </a:p>
+          <a:p>
+            <a:r>
+              <a:t>Source: docs/REFERENCES.md (OpenAI, Harness engineering; Agent Skills spec; Agent Skills, What are skills?).</a:t>
             </a:r>
           </a:p>
         </p:txBody>
@@ -1126,28 +1126,28 @@
           <a:p/>
           <a:p>
             <a:r>
-              <a:t>The harness changes how knowledge is organised, not what the agent may know. A1's argument is a map</a:t>
-            </a:r>
-          </a:p>
-          <a:p>
-            <a:r>
-              <a:t>against one giant instruction file (F-a-23, F-a-24). The course's bare arm has the rules in a</a:t>
-            </a:r>
-          </a:p>
-          <a:p>
-            <a:r>
-              <a:t>handbook on disk, so the pilot did not test A1's comparison.</a:t>
+              <a:t>The harness changes how knowledge is organised, not what the agent may know. OpenAI compares a map</a:t>
+            </a:r>
+          </a:p>
+          <a:p>
+            <a:r>
+              <a:t>with one giant instruction file. Our bare arm has the rules in a handbook on disk, so these runs did</a:t>
+            </a:r>
+          </a:p>
+          <a:p>
+            <a:r>
+              <a:t>not test OpenAI's comparison.</a:t>
             </a:r>
           </a:p>
           <a:p/>
           <a:p>
             <a:r>
-              <a:t>Run sheet: docs/instructor-guide.md, Stage 4: S1 Instructions (0:10-1:00).</a:t>
-            </a:r>
-          </a:p>
-          <a:p>
-            <a:r>
-              <a:t>Source: A1 in REFERENCES.md; README.md §4.</a:t>
+              <a:t>Guide: docs/instructor-guide.md, "Section by section", Section 1.</a:t>
+            </a:r>
+          </a:p>
+          <a:p>
+            <a:r>
+              <a:t>Source: docs/REFERENCES.md (OpenAI, Harness engineering); platform/tests/unit/harness_instructions/test_parity.py.</a:t>
             </a:r>
           </a:p>
         </p:txBody>
@@ -1229,7 +1229,7 @@
           <a:p/>
           <a:p>
             <a:r>
-              <a:t>Run sheet: docs/instructor-guide.md, Stage 4: S1 Instructions (0:10-1:00).</a:t>
+              <a:t>Guide: docs/instructor-guide.md, "Section by section", Section 1.</a:t>
             </a:r>
           </a:p>
           <a:p>
@@ -1310,18 +1310,18 @@
           <a:p/>
           <a:p>
             <a:r>
-              <a:t>Section minute 25 falls on this slide: check terminal B for the `Cost:` line of `make show-1` (the</a:t>
-            </a:r>
-          </a:p>
-          <a:p>
-            <a:r>
-              <a:t>timing reference is in the notes of slide 9).</a:t>
+              <a:t>Section minute 25 falls on this slide: check terminal B for the `Cost:` line of `make show-1`. The</a:t>
+            </a:r>
+          </a:p>
+          <a:p>
+            <a:r>
+              <a:t>timing is in the notes of slide 9.</a:t>
             </a:r>
           </a:p>
           <a:p/>
           <a:p>
             <a:r>
-              <a:t>Run sheet: docs/instructor-guide.md, Stage 4: S1 Instructions (0:10-1:00), "Check at section minute 25".</a:t>
+              <a:t>Guide: docs/instructor-guide.md, "Section by section".</a:t>
             </a:r>
           </a:p>
           <a:p>
@@ -1408,7 +1408,7 @@
           <a:p/>
           <a:p>
             <a:r>
-              <a:t>Run sheet: docs/instructor-guide.md, Stage 4: S1 Instructions (0:10-1:00).</a:t>
+              <a:t>Guide: docs/instructor-guide.md, "Section by section", Section 1.</a:t>
             </a:r>
           </a:p>
           <a:p>
@@ -1489,58 +1489,48 @@
           <a:p/>
           <a:p>
             <a:r>
-              <a:t>Walk the finished show-1 run on screens 1, 3, 5, and 2, in that order. In the quiet run (captured on</a:t>
-            </a:r>
-          </a:p>
-          <a:p>
-            <a:r>
-              <a:t>2026-10-17, run ab-20261017-112101-c5d839; your output will differ): by minute 1 the build session was</a:t>
-            </a:r>
-          </a:p>
-          <a:p>
-            <a:r>
-              <a:t>patching app/api/issues.py and app/services/issues.py; by minute 3 the test phase had run and the</a:t>
-            </a:r>
-          </a:p>
-          <a:p>
-            <a:r>
-              <a:t>agent said done; at 4:11 screen 1 showed "primary verdict ready: PASS" with new R1 violations 0; the</a:t>
-            </a:r>
-          </a:p>
-          <a:p>
-            <a:r>
-              <a:t>secondary checks finished at 10:00. Its harness decisions: 31 instruction files placed (the AGENTS.md</a:t>
-            </a:r>
-          </a:p>
-          <a:p>
-            <a:r>
-              <a:t>map, docs, skills), the agent read ARCHITECTURE.md and the add-endpoint skill. Its third tool call</a:t>
-            </a:r>
-          </a:p>
-          <a:p>
-            <a:r>
-              <a:t>opened docs/HANDBOOK.md, the same file every bare arm of run 2 opened with its third call. Screen 2</a:t>
-            </a:r>
-          </a:p>
-          <a:p>
-            <a:r>
-              <a:t>shows one board frame: F1 changes no board pixels. The image is cut to the harness panel (the bare</a:t>
-            </a:r>
-          </a:p>
-          <a:p>
-            <a:r>
-              <a:t>panel is empty in a show run).</a:t>
+              <a:t>Walk the finished show-1 run on screens 1, 3, 5, and 2, in that order. In the timed run before</a:t>
+            </a:r>
+          </a:p>
+          <a:p>
+            <a:r>
+              <a:t>class (your output will differ): by minute 1 the build session was patching app/api/issues.py and</a:t>
+            </a:r>
+          </a:p>
+          <a:p>
+            <a:r>
+              <a:t>app/services/issues.py. By minute 3 the test phase had run and the agent said done. At 4:11 screen 1</a:t>
+            </a:r>
+          </a:p>
+          <a:p>
+            <a:r>
+              <a:t>showed "primary verdict ready: PASS" with new R1 violations 0. The secondary checks finished at</a:t>
+            </a:r>
+          </a:p>
+          <a:p>
+            <a:r>
+              <a:t>10:00. Its harness decisions: 31 instruction files placed (the AGENTS.md map, docs, skills); the</a:t>
+            </a:r>
+          </a:p>
+          <a:p>
+            <a:r>
+              <a:t>agent read ARCHITECTURE.md and the add-endpoint skill. Its third tool call opened docs/HANDBOOK.md.</a:t>
+            </a:r>
+          </a:p>
+          <a:p>
+            <a:r>
+              <a:t>Screen 2 shows one board frame: F1 changes no board pixels. The picture is cut to the harness panel.</a:t>
             </a:r>
           </a:p>
           <a:p/>
           <a:p>
             <a:r>
-              <a:t>Run sheet: docs/instructor-guide.md, Stage 4: S1 Instructions (0:10-1:00).</a:t>
-            </a:r>
-          </a:p>
-          <a:p>
-            <a:r>
-              <a:t>Source: quiet run ab-20261017-112101-c5d839 (screens 1 and 2); README.md §11; Makefile `show-1`.</a:t>
+              <a:t>Guide: docs/instructor-guide.md, "Section by section", Section 1.</a:t>
+            </a:r>
+          </a:p>
+          <a:p>
+            <a:r>
+              <a:t>Runs: docs/evidence.md, Captures.</a:t>
             </a:r>
           </a:p>
         </p:txBody>
@@ -1616,43 +1606,23 @@
           <a:p/>
           <a:p>
             <a:r>
-              <a:t>Read the four failures. Then say: "In the course pilot no bare-arm F1 run shipped a new</a:t>
-            </a:r>
-          </a:p>
-          <a:p>
-            <a:r>
-              <a:t>tenant-isolation violation, so there is no recorded screenshot of one to show. We come back to what</a:t>
-            </a:r>
-          </a:p>
-          <a:p>
-            <a:r>
-              <a:t>that means at the end." Pilot facts: F1 bare arm, 0 new R1 violations in run 2 (A/Bs</a:t>
-            </a:r>
-          </a:p>
-          <a:p>
-            <a:r>
-              <a:t>ab-20261016-181736-a07558, ab-20261016-183644-0036f0, ab-20261016-185628-37483b), run 3, run 4, the</a:t>
-            </a:r>
-          </a:p>
-          <a:p>
-            <a:r>
-              <a:t>live console check (ab-20261016-210339-909651), and the class-profile round</a:t>
-            </a:r>
-          </a:p>
-          <a:p>
-            <a:r>
-              <a:t>(ab-20261017-084558-0356a0).</a:t>
+              <a:t>Read the four failures. Then say: "Before class, no bare arm on the issue-search ticket shipped a</a:t>
+            </a:r>
+          </a:p>
+          <a:p>
+            <a:r>
+              <a:t>new tenant leak, so there is no screenshot of one to show. We come back to what that means at the</a:t>
+            </a:r>
+          </a:p>
+          <a:p>
+            <a:r>
+              <a:t>end." Runs: docs/evidence.md, Section 1.</a:t>
             </a:r>
           </a:p>
           <a:p/>
           <a:p>
             <a:r>
-              <a:t>Run sheet: docs/instructor-guide.md, Stage 3: Opening (0:00-0:10).</a:t>
-            </a:r>
-          </a:p>
-          <a:p>
-            <a:r>
-              <a:t>Source: README.md §1.</a:t>
+              <a:t>Guide: docs/instructor-guide.md, "Section by section", Opening.</a:t>
             </a:r>
           </a:p>
         </p:txBody>
@@ -1728,64 +1698,54 @@
           <a:p/>
           <a:p>
             <a:r>
-              <a:t>Read tonight's verdict from screen 1 first, then this slide. The quiet run's arm line (captured on</a:t>
-            </a:r>
-          </a:p>
-          <a:p>
-            <a:r>
-              <a:t>2026-10-17, run ab-20261017-112101-c5d839; your output will differ): `harness completed claim=done</a:t>
-            </a:r>
-          </a:p>
-          <a:p>
-            <a:r>
-              <a:t>primary={"r1_new_violations": 0} passed=True hidden 52/52 mutants 2/4 reviewer=accept cost=$0.0179`.</a:t>
+              <a:t>Read tonight's verdict from screen 1 first, then this slide. The timed run's arm line (your output</a:t>
+            </a:r>
+          </a:p>
+          <a:p>
+            <a:r>
+              <a:t>will differ): `harness completed claim=done primary={"r1_new_violations": 0} passed=True hidden</a:t>
+            </a:r>
+          </a:p>
+          <a:p>
+            <a:r>
+              <a:t>52/52 mutants 2/4 reviewer=accept cost=$0.0179`.</a:t>
             </a:r>
           </a:p>
           <a:p/>
           <a:p>
             <a:r>
-              <a:t>The 7 runs per arm: run 3, effort medium (A/Bs ab-20261016-211419-07937b, ab-20261016-212745-2c14fb,</a:t>
-            </a:r>
-          </a:p>
-          <a:p>
-            <a:r>
-              <a:t>ab-20261016-214636-c8b3c4); run 4, effort low (ab-20261016-232842-b372c2, ab-20261016-233807-3f34fa,</a:t>
-            </a:r>
-          </a:p>
-          <a:p>
-            <a:r>
-              <a:t>ab-20261016-234639-4a18bd); class-profile round (ab-20261017-084558-0356a0). Run 2 on the canonical</a:t>
-            </a:r>
-          </a:p>
-          <a:p>
-            <a:r>
-              <a:t>ticket gave the same, 0 of 3 per arm. Why: in run 2 every bare arm opened the handbook with its third</a:t>
-            </a:r>
-          </a:p>
-          <a:p>
-            <a:r>
-              <a:t>tool call; no arm copied the legacy handler into a leak. Post hoc, descriptive (10 runs per arm: run</a:t>
-            </a:r>
-          </a:p>
-          <a:p>
-            <a:r>
-              <a:t>2, the live console check, run 3, run 4): done claimed by harness 5, bare 9; median cost $0.0122</a:t>
-            </a:r>
-          </a:p>
-          <a:p>
-            <a:r>
-              <a:t>against $0.0103. "Post hoc" means chosen after the results were known: descriptive, never a test.</a:t>
+              <a:t>The 7 runs per arm: the medium-effort round (3), the low-effort round (3), the class-settings round</a:t>
+            </a:r>
+          </a:p>
+          <a:p>
+            <a:r>
+              <a:t>(1). An earlier round on the plain ticket gave the same, 0 of 3 per arm; in it every bare arm opened</a:t>
+            </a:r>
+          </a:p>
+          <a:p>
+            <a:r>
+              <a:t>the handbook with its third tool call. No arm copied the legacy handler into a leak. Post hoc means</a:t>
+            </a:r>
+          </a:p>
+          <a:p>
+            <a:r>
+              <a:t>chosen after the results were known, so it describes and never tests. Post hoc, over 10 runs per</a:t>
+            </a:r>
+          </a:p>
+          <a:p>
+            <a:r>
+              <a:t>arm: harness arms claimed done in 5, bare arms in 9; median cost per arm $0.0122 against $0.0103.</a:t>
             </a:r>
           </a:p>
           <a:p/>
           <a:p>
             <a:r>
-              <a:t>Run sheet: docs/instructor-guide.md, Stage 4: S1 Instructions (0:10-1:00).</a:t>
-            </a:r>
-          </a:p>
-          <a:p>
-            <a:r>
-              <a:t>Source: quiet run ab-20261017-112101-c5d839 (screen 3); course pilot runs 2-4 and class-profile round (A/B ids above); submodules/01-instructions/concepts.md (third tool call).</a:t>
+              <a:t>Guide: docs/instructor-guide.md, "Section by section", Section 1.</a:t>
+            </a:r>
+          </a:p>
+          <a:p>
+            <a:r>
+              <a:t>Runs: docs/evidence.md, Section 1.</a:t>
             </a:r>
           </a:p>
         </p:txBody>
@@ -1861,18 +1821,18 @@
           <a:p/>
           <a:p>
             <a:r>
-              <a:t>Tie the discussion back to A1, F-a-05, and to A3, F-a-124.</a:t>
+              <a:t>Tie the discussion back to cause 1 (what is not in context does not exist) and to the claim that</a:t>
+            </a:r>
+          </a:p>
+          <a:p>
+            <a:r>
+              <a:t>every piece encodes an assumption about the model.</a:t>
             </a:r>
           </a:p>
           <a:p/>
           <a:p>
             <a:r>
-              <a:t>Run sheet: docs/instructor-guide.md, Stage 4: S1 Instructions (0:10-1:00).</a:t>
-            </a:r>
-          </a:p>
-          <a:p>
-            <a:r>
-              <a:t>Source: docs/instructor-guide.md (schedule).</a:t>
+              <a:t>Guide: docs/instructor-guide.md, "Section by section", Section 1.</a:t>
             </a:r>
           </a:p>
         </p:txBody>
@@ -1948,23 +1908,18 @@
           <a:p/>
           <a:p>
             <a:r>
-              <a:t>The answer comes on slide 33. The 7 A/Bs: pilot run 3, run 4, and the class-profile round, F2</a:t>
-            </a:r>
-          </a:p>
-          <a:p>
-            <a:r>
-              <a:t>canonical with a 12-turn first session and a 38-turn second session.</a:t>
+              <a:t>The answer comes on slide 33. The 7 A/Bs: the medium-effort round (3), the low-effort round (3),</a:t>
+            </a:r>
+          </a:p>
+          <a:p>
+            <a:r>
+              <a:t>and the class-settings round (1). Each ran a 12-turn first session and a 38-turn second session.</a:t>
             </a:r>
           </a:p>
           <a:p/>
           <a:p>
             <a:r>
-              <a:t>Run sheet: docs/instructor-guide.md, Stage 5: S2 State and session lifecycle (1:00-1:50).</a:t>
-            </a:r>
-          </a:p>
-          <a:p>
-            <a:r>
-              <a:t>Source: submodules/02-state-lifecycle/demo/README.md §4.</a:t>
+              <a:t>Guide: docs/instructor-guide.md, "Section by section", Section 2.</a:t>
             </a:r>
           </a:p>
         </p:txBody>
@@ -2040,54 +1995,44 @@
           <a:p/>
           <a:p>
             <a:r>
-              <a:t>Continuity failure, the primary measure: R7 fails, a second migration creates the same table, or 30%</a:t>
-            </a:r>
-          </a:p>
-          <a:p>
-            <a:r>
-              <a:t>or more of session 1's added lines are removed in session 2.</a:t>
+              <a:t>Continuity failure, the primary measure: R7 fails, a second migration creates the same table, or</a:t>
+            </a:r>
+          </a:p>
+          <a:p>
+            <a:r>
+              <a:t>30% or more of session 1's added lines are removed in session 2.</a:t>
             </a:r>
           </a:p>
           <a:p/>
           <a:p>
             <a:r>
-              <a:t>Timing reference: in the quiet run of `make show-2 SESSION_BUDGET=12,38` (captured on 2026-10-17, run</a:t>
-            </a:r>
-          </a:p>
-          <a:p>
-            <a:r>
-              <a:t>ab-20261017-113213-fe89a3; your output will differ) the primary verdict came 6:46 after launch, the</a:t>
-            </a:r>
-          </a:p>
-          <a:p>
-            <a:r>
-              <a:t>full verdict 9:52 after launch, and the command took 10 min 7 s in all. It exited 2: session 2 hit</a:t>
-            </a:r>
-          </a:p>
-          <a:p>
-            <a:r>
-              <a:t>the agent time limit (a result, not a failure of the command). In the class-profile round (A/B</a:t>
-            </a:r>
-          </a:p>
-          <a:p>
-            <a:r>
-              <a:t>ab-20261017-085139-7c0661) the harness arm's primary verdict came 358 s and its full verdict 533 s</a:t>
-            </a:r>
-          </a:p>
-          <a:p>
-            <a:r>
-              <a:t>after launch.</a:t>
+              <a:t>Timing: in a timed run before class (agent time limit then 300 s; now 420 s), the primary verdict</a:t>
+            </a:r>
+          </a:p>
+          <a:p>
+            <a:r>
+              <a:t>came 6:46 after launch and the full verdict 9:52 after launch. Cost $0.0295. It exited 2: session 2</a:t>
+            </a:r>
+          </a:p>
+          <a:p>
+            <a:r>
+              <a:t>hit the agent time limit. That is a result, not a broken command. Your output will differ. Runs:</a:t>
+            </a:r>
+          </a:p>
+          <a:p>
+            <a:r>
+              <a:t>docs/evidence.md, Captures.</a:t>
             </a:r>
           </a:p>
           <a:p/>
           <a:p>
             <a:r>
-              <a:t>Run sheet: docs/instructor-guide.md, Stage 5: S2 State and session lifecycle (1:00-1:50).</a:t>
-            </a:r>
-          </a:p>
-          <a:p>
-            <a:r>
-              <a:t>Source: Makefile `show-2`; README.md §10; teamtrack/reference/f2/task.toml.</a:t>
+              <a:t>Guide: docs/instructor-guide.md, "Section by section", Section 2.</a:t>
+            </a:r>
+          </a:p>
+          <a:p>
+            <a:r>
+              <a:t>Source: Makefile `show-2`; platform/teamtrack/reference/f2/task.toml.</a:t>
             </a:r>
           </a:p>
         </p:txBody>
@@ -2163,23 +2108,18 @@
           <a:p/>
           <a:p>
             <a:r>
-              <a:t>The first three bullets are the section's objectives (course design). A2 states the problem</a:t>
-            </a:r>
-          </a:p>
-          <a:p>
-            <a:r>
-              <a:t>(F-a-08); the one-line assumption is the course's wording.</a:t>
+              <a:t>The first three bullets are the section's objectives. Anthropic, Effective harnesses, states the</a:t>
+            </a:r>
+          </a:p>
+          <a:p>
+            <a:r>
+              <a:t>problem. The one-line assumption is the course's wording.</a:t>
             </a:r>
           </a:p>
           <a:p/>
           <a:p>
             <a:r>
-              <a:t>Run sheet: docs/instructor-guide.md, Stage 5: S2 State and session lifecycle (1:00-1:50).</a:t>
-            </a:r>
-          </a:p>
-          <a:p>
-            <a:r>
-              <a:t>Source: S2 learning objectives (course design); README.md §1.</a:t>
+              <a:t>Guide: docs/instructor-guide.md, "Section by section", Section 2.</a:t>
             </a:r>
           </a:p>
         </p:txBody>
@@ -2261,12 +2201,12 @@
           <a:p/>
           <a:p>
             <a:r>
-              <a:t>Run sheet: docs/instructor-guide.md, Stage 5: S2 State and session lifecycle (1:00-1:50).</a:t>
-            </a:r>
-          </a:p>
-          <a:p>
-            <a:r>
-              <a:t>Source: A2 in REFERENCES.md.</a:t>
+              <a:t>Guide: docs/instructor-guide.md, "Section by section", Section 2.</a:t>
+            </a:r>
+          </a:p>
+          <a:p>
+            <a:r>
+              <a:t>Source: docs/REFERENCES.md (Anthropic, Effective harnesses).</a:t>
             </a:r>
           </a:p>
         </p:txBody>
@@ -2342,23 +2282,23 @@
           <a:p/>
           <a:p>
             <a:r>
-              <a:t>A2's two agents differ only by their first prompt (F-a-52). In the course, the harness writes the</a:t>
-            </a:r>
-          </a:p>
-          <a:p>
-            <a:r>
-              <a:t>initial files itself.</a:t>
+              <a:t>In the source, the two agents differ only by their first prompt. In the course, the harness writes</a:t>
+            </a:r>
+          </a:p>
+          <a:p>
+            <a:r>
+              <a:t>the initial files itself.</a:t>
             </a:r>
           </a:p>
           <a:p/>
           <a:p>
             <a:r>
-              <a:t>Run sheet: docs/instructor-guide.md, Stage 5: S2 State and session lifecycle (1:00-1:50).</a:t>
-            </a:r>
-          </a:p>
-          <a:p>
-            <a:r>
-              <a:t>Source: A2 in REFERENCES.md; docs/architecture.md §5.</a:t>
+              <a:t>Guide: docs/instructor-guide.md, "Section by section", Section 2.</a:t>
+            </a:r>
+          </a:p>
+          <a:p>
+            <a:r>
+              <a:t>Source: docs/REFERENCES.md (Anthropic, Effective harnesses); docs/architecture.md.</a:t>
             </a:r>
           </a:p>
         </p:txBody>
@@ -2434,18 +2374,18 @@
           <a:p/>
           <a:p>
             <a:r>
-              <a:t>"Getting up to speed" is A2's own name for the routine.</a:t>
+              <a:t>"Getting up to speed" is the source's own name for the routine.</a:t>
             </a:r>
           </a:p>
           <a:p/>
           <a:p>
             <a:r>
-              <a:t>Run sheet: docs/instructor-guide.md, Stage 5: S2 State and session lifecycle (1:00-1:50).</a:t>
-            </a:r>
-          </a:p>
-          <a:p>
-            <a:r>
-              <a:t>Source: A2 in REFERENCES.md.</a:t>
+              <a:t>Guide: docs/instructor-guide.md, "Section by section", Section 2.</a:t>
+            </a:r>
+          </a:p>
+          <a:p>
+            <a:r>
+              <a:t>Source: docs/REFERENCES.md (Anthropic, Effective harnesses).</a:t>
             </a:r>
           </a:p>
         </p:txBody>
@@ -2521,28 +2461,28 @@
           <a:p/>
           <a:p>
             <a:r>
-              <a:t>Say: "This stop is the session turn budget, the same for both arms. A3 calls the pattern a context</a:t>
-            </a:r>
-          </a:p>
-          <a:p>
-            <a:r>
-              <a:t>reset with a structured handoff (A3, F-a-65). A piece that answers a model's weakness is kept only</a:t>
-            </a:r>
-          </a:p>
-          <a:p>
-            <a:r>
-              <a:t>while the weakness is there."</a:t>
+              <a:t>Say: "This stop is the session turn budget, the same for both arms. Anthropic calls the pattern a</a:t>
+            </a:r>
+          </a:p>
+          <a:p>
+            <a:r>
+              <a:t>context reset with a structured handoff. A piece that answers a model's weakness is kept only while</a:t>
+            </a:r>
+          </a:p>
+          <a:p>
+            <a:r>
+              <a:t>the weakness is there."</a:t>
             </a:r>
           </a:p>
           <a:p/>
           <a:p>
             <a:r>
-              <a:t>Run sheet: docs/instructor-guide.md, Stage 5: S2 State and session lifecycle (1:00-1:50).</a:t>
-            </a:r>
-          </a:p>
-          <a:p>
-            <a:r>
-              <a:t>Source: A1, A3, A7 in REFERENCES.md.</a:t>
+              <a:t>Guide: docs/instructor-guide.md, "Section by section", Section 2.</a:t>
+            </a:r>
+          </a:p>
+          <a:p>
+            <a:r>
+              <a:t>Source: docs/REFERENCES.md (OpenAI, Harness engineering; OpenAI, PLANS.md; Anthropic, Harness design).</a:t>
             </a:r>
           </a:p>
         </p:txBody>
@@ -2624,7 +2564,7 @@
           <a:p/>
           <a:p>
             <a:r>
-              <a:t>Run sheet: docs/instructor-guide.md, Stage 5: S2 State and session lifecycle (1:00-1:50).</a:t>
+              <a:t>Guide: docs/instructor-guide.md, "Section by section", Section 2.</a:t>
             </a:r>
           </a:p>
           <a:p>
@@ -2705,28 +2645,28 @@
           <a:p/>
           <a:p>
             <a:r>
-              <a:t>One cited line per cause. Cause 3 (agents copy existing patterns and can take actions that are hard</a:t>
-            </a:r>
-          </a:p>
-          <a:p>
-            <a:r>
-              <a:t>to undo) has no single source that says both, so the four citations stand side by side and are not</a:t>
-            </a:r>
-          </a:p>
-          <a:p>
-            <a:r>
-              <a:t>merged. Cause 4: the visible suite passes while held-out tests that compose features fail (B13).</a:t>
+              <a:t>One sourced line per cause. Cause 3 has no single source that says both halves, so Section 3 shows</a:t>
+            </a:r>
+          </a:p>
+          <a:p>
+            <a:r>
+              <a:t>its four sources side by side and does not merge them. Cause 4 also has a second source: in</a:t>
+            </a:r>
+          </a:p>
+          <a:p>
+            <a:r>
+              <a:t>SpecBench, the visible suite passes while held-out tests that combine features fail.</a:t>
             </a:r>
           </a:p>
           <a:p/>
           <a:p>
             <a:r>
-              <a:t>Run sheet: docs/instructor-guide.md, Stage 3: Opening (0:00-0:10).</a:t>
-            </a:r>
-          </a:p>
-          <a:p>
-            <a:r>
-              <a:t>Source: README.md §2; REFERENCES.md.</a:t>
+              <a:t>Guide: docs/instructor-guide.md, "Section by section", Opening.</a:t>
+            </a:r>
+          </a:p>
+          <a:p>
+            <a:r>
+              <a:t>Sources: docs/REFERENCES.md.</a:t>
             </a:r>
           </a:p>
         </p:txBody>
@@ -2802,18 +2742,18 @@
           <a:p/>
           <a:p>
             <a:r>
-              <a:t>Section minute 25 falls on this slide: check terminal B for the `Cost:` line of `make show-2` (the</a:t>
-            </a:r>
-          </a:p>
-          <a:p>
-            <a:r>
-              <a:t>timing reference is in the notes of slide 23).</a:t>
+              <a:t>Section minute 25 falls on this slide: check terminal B for the `Cost:` line of `make show-2`. The</a:t>
+            </a:r>
+          </a:p>
+          <a:p>
+            <a:r>
+              <a:t>timing is in the notes of slide 23.</a:t>
             </a:r>
           </a:p>
           <a:p/>
           <a:p>
             <a:r>
-              <a:t>Run sheet: docs/instructor-guide.md, Stage 5: S2 State and session lifecycle (1:00-1:50), "Check at section minute 25".</a:t>
+              <a:t>Guide: docs/instructor-guide.md, "Section by section".</a:t>
             </a:r>
           </a:p>
           <a:p>
@@ -2894,13 +2834,13 @@
           <a:p/>
           <a:p>
             <a:r>
-              <a:t>The next session reads this line during Getting up to speed.</a:t>
+              <a:t>The next session reads this line while it gets up to speed.</a:t>
             </a:r>
           </a:p>
           <a:p/>
           <a:p>
             <a:r>
-              <a:t>Run sheet: docs/instructor-guide.md, Stage 5: S2 State and session lifecycle (1:00-1:50).</a:t>
+              <a:t>Guide: docs/instructor-guide.md, "Section by section", Section 2.</a:t>
             </a:r>
           </a:p>
           <a:p>
@@ -2981,68 +2921,53 @@
           <a:p/>
           <a:p>
             <a:r>
-              <a:t>In the quiet run (captured on 2026-10-17, run ab-20261017-113213-fe89a3; your output will differ),</a:t>
-            </a:r>
-          </a:p>
-          <a:p>
-            <a:r>
-              <a:t>about 2 minutes after launch: turn 1.11 ran `git add progress.md docs/exec-plans/active/...`, turn</a:t>
-            </a:r>
-          </a:p>
-          <a:p>
-            <a:r>
-              <a:t>1.12 called</a:t>
-            </a:r>
-          </a:p>
-          <a:p>
-            <a:r>
-              <a:t>`finish not_done`, and screen 1 showed "Session 1 stopped: ended by claim_not_done; handoff</a:t>
-            </a:r>
-          </a:p>
-          <a:p>
-            <a:r>
-              <a:t>session-handoff.md", then "Session 2 resumed: prefix: core, instructions, state". Since change 14</a:t>
-            </a:r>
-          </a:p>
-          <a:p>
-            <a:r>
-              <a:t>(both arms) that call ends only the session, so session 2 ran; in pilot run 3 the same call ended</a:t>
-            </a:r>
-          </a:p>
-          <a:p>
-            <a:r>
-              <a:t>the build phase (A/B ab-20261016-213317-9a0ec1, hidden tests 3 of 56). Session 2 began with `pwd; git</a:t>
-            </a:r>
-          </a:p>
-          <a:p>
-            <a:r>
-              <a:t>log --oneline -20; cat progress.md`, then the ticket and the handbook. The harness decisions show</a:t>
-            </a:r>
-          </a:p>
-          <a:p>
-            <a:r>
-              <a:t>the initializer step (init.sh, progress.md, session-handoff.md) and "session 1 handoff written to</a:t>
-            </a:r>
-          </a:p>
-          <a:p>
-            <a:r>
-              <a:t>session-handoff.md". The board (screen 2) showed "✓ only own-org cards, no duplicates". The image is</a:t>
-            </a:r>
-          </a:p>
-          <a:p>
-            <a:r>
-              <a:t>cut to the harness panel.</a:t>
+              <a:t>In the timed run before class (your output will differ), about 2 minutes after launch, turn 1.11</a:t>
+            </a:r>
+          </a:p>
+          <a:p>
+            <a:r>
+              <a:t>committed progress.md and the exec plan, and turn 1.12 called `finish not_done`. Screen 1 showed</a:t>
+            </a:r>
+          </a:p>
+          <a:p>
+            <a:r>
+              <a:t>"Session 1 stopped: ended by claim_not_done; handoff session-handoff.md", then "Session 2 resumed".</a:t>
+            </a:r>
+          </a:p>
+          <a:p>
+            <a:r>
+              <a:t>Since a runner fix for both arms, that call ends only the session, so session 2 ran. In the</a:t>
+            </a:r>
+          </a:p>
+          <a:p>
+            <a:r>
+              <a:t>medium-effort round the same call had ended the whole build phase, and that arm passed 3 of 56</a:t>
+            </a:r>
+          </a:p>
+          <a:p>
+            <a:r>
+              <a:t>hidden tests. Session 2 began with `pwd; git log --oneline -20; cat progress.md`, then the ticket</a:t>
+            </a:r>
+          </a:p>
+          <a:p>
+            <a:r>
+              <a:t>and the handbook. The board showed "✓ only own-org cards, no duplicates". The picture is cut to the</a:t>
+            </a:r>
+          </a:p>
+          <a:p>
+            <a:r>
+              <a:t>harness panel.</a:t>
             </a:r>
           </a:p>
           <a:p/>
           <a:p>
             <a:r>
-              <a:t>Run sheet: docs/instructor-guide.md, Stage 5: S2 State and session lifecycle (1:00-1:50).</a:t>
-            </a:r>
-          </a:p>
-          <a:p>
-            <a:r>
-              <a:t>Source: quiet run ab-20261017-113213-fe89a3 (screen 1); README.md §11; Makefile `show-2`.</a:t>
+              <a:t>Guide: docs/instructor-guide.md, "Section by section", Section 2.</a:t>
+            </a:r>
+          </a:p>
+          <a:p>
+            <a:r>
+              <a:t>Runs: docs/evidence.md, Captures.</a:t>
             </a:r>
           </a:p>
         </p:txBody>
@@ -3118,95 +3043,59 @@
           <a:p/>
           <a:p>
             <a:r>
-              <a:t>The quiet run's arm line (captured on 2026-10-17, run ab-20261017-113213-fe89a3; your output will</a:t>
-            </a:r>
-          </a:p>
-          <a:p>
-            <a:r>
-              <a:t>differ): `harness ABORTED: timeout claim=not_done primary={"continuity_failure": false} passed=True</a:t>
-            </a:r>
-          </a:p>
-          <a:p>
-            <a:r>
-              <a:t>hidden 56/56 mutants 0/4 reviewer=reject cost=$0.0268`. Sessions: 12 turns (claim_not_done), then</a:t>
-            </a:r>
-          </a:p>
-          <a:p>
-            <a:r>
-              <a:t>31. The diff-scope check is a secondary measure, and the F2 harness arm has no scope layer, so</a:t>
-            </a:r>
-          </a:p>
-          <a:p>
-            <a:r>
-              <a:t>nothing stopped that edit. Exit code 2 means the arm was aborted at a time limit, not that the</a:t>
-            </a:r>
-          </a:p>
-          <a:p>
-            <a:r>
-              <a:t>command broke.</a:t>
+              <a:t>The timed run's arm line (your output will differ): `harness ABORTED: timeout claim=not_done</a:t>
+            </a:r>
+          </a:p>
+          <a:p>
+            <a:r>
+              <a:t>primary={"continuity_failure": false} passed=True hidden 56/56 mutants 0/4 reviewer=reject</a:t>
+            </a:r>
+          </a:p>
+          <a:p>
+            <a:r>
+              <a:t>cost=$0.0268`. Sessions: 12 turns, then 31. The diff-scope check is a secondary measure, and the F2</a:t>
+            </a:r>
+          </a:p>
+          <a:p>
+            <a:r>
+              <a:t>harness arm has no scope layer, so nothing stopped that edit. Exit code 2 means the arm stopped at a</a:t>
+            </a:r>
+          </a:p>
+          <a:p>
+            <a:r>
+              <a:t>time limit, not that the command broke.</a:t>
             </a:r>
           </a:p>
           <a:p/>
           <a:p>
             <a:r>
-              <a:t>The 7 A/Bs: run 3 (ab-20261016-211419-dfe06f, ab-20261016-213317-9a0ec1, ab-20261016-214959-de790f),</a:t>
-            </a:r>
-          </a:p>
-          <a:p>
-            <a:r>
-              <a:t>run 4 (ab-20261016-232842-ac03b2, ab-20261016-234027-226a76, ab-20261016-235211-ea59a9), class-profile</a:t>
-            </a:r>
-          </a:p>
-          <a:p>
-            <a:r>
-              <a:t>round (ab-20261017-085139-7c0661). Built nothing (3 of 56 hidden tests): run 3 harness in</a:t>
-            </a:r>
-          </a:p>
-          <a:p>
-            <a:r>
-              <a:t>ab-20261016-213317-9a0ec1 and ab-20261016-214959-de790f; run 4 bare in all three A/Bs and harness in</a:t>
-            </a:r>
-          </a:p>
-          <a:p>
-            <a:r>
-              <a:t>ab-20261016-234027-226a76. The bare arm found its own state: in run 2 (A/B ab-20261016-181736-08a9c4,</a:t>
-            </a:r>
-          </a:p>
-          <a:p>
-            <a:r>
-              <a:t>run r-20261016-181736-a05ddb) its session 2 ran `git status` in its fourth tool call. Post hoc,</a:t>
-            </a:r>
-          </a:p>
-          <a:p>
-            <a:r>
-              <a:t>descriptive (runs 2-4, 9 runs per arm): agent time limit hit, harness 4, bare 0; median wall 361 s</a:t>
-            </a:r>
-          </a:p>
-          <a:p>
-            <a:r>
-              <a:t>against 232 s. Class-profile round, with the fix: both arms built the feature, 56 of 56 hidden tests.</a:t>
+              <a:t>The bare arm found its own state: in an earlier round its session 2 ran `git status` in its fourth</a:t>
+            </a:r>
+          </a:p>
+          <a:p>
+            <a:r>
+              <a:t>tool call. Post hoc over 9 runs per arm: harness arms hit the agent time limit in 4, bare arms in 0;</a:t>
+            </a:r>
+          </a:p>
+          <a:p>
+            <a:r>
+              <a:t>median wall time 361 s against 232 s. In the class-settings round, with the runner fix, both arms</a:t>
+            </a:r>
+          </a:p>
+          <a:p>
+            <a:r>
+              <a:t>built the feature: 56 of 56 hidden tests.</a:t>
             </a:r>
           </a:p>
           <a:p/>
           <a:p>
             <a:r>
-              <a:t>The leave-one-layer-out bars were planned for the course's larger experiment batch (M8), which was not</a:t>
-            </a:r>
-          </a:p>
-          <a:p>
-            <a:r>
-              <a:t>run because the pre-registered pilot gate did not pass.</a:t>
-            </a:r>
-          </a:p>
-          <a:p/>
-          <a:p>
-            <a:r>
-              <a:t>Run sheet: docs/instructor-guide.md, Stage 5: S2 State and session lifecycle (1:00-1:50).</a:t>
-            </a:r>
-          </a:p>
-          <a:p>
-            <a:r>
-              <a:t>Source: quiet run ab-20261017-113213-fe89a3 (screens 3 and 5); course pilot runs 2-4 and class-profile round (A/B ids above); submodules/02-state-lifecycle/concepts.md (git status).</a:t>
+              <a:t>Guide: docs/instructor-guide.md, "Section by section", Section 2.</a:t>
+            </a:r>
+          </a:p>
+          <a:p>
+            <a:r>
+              <a:t>Runs: docs/evidence.md, Section 2.</a:t>
             </a:r>
           </a:p>
         </p:txBody>
@@ -3282,18 +3171,13 @@
           <a:p/>
           <a:p>
             <a:r>
-              <a:t>`make show-3` launches right after the S3 poll; nothing needs to run over the break.</a:t>
+              <a:t>Section 3 launches its live A/B right after its poll. Nothing runs over the break.</a:t>
             </a:r>
           </a:p>
           <a:p/>
           <a:p>
             <a:r>
-              <a:t>Run sheet: docs/instructor-guide.md, Stage 5: S2 State and session lifecycle (1:00-1:50).</a:t>
-            </a:r>
-          </a:p>
-          <a:p>
-            <a:r>
-              <a:t>Source: docs/instructor-guide.md (schedule).</a:t>
+              <a:t>Guide: docs/instructor-guide.md, "Section by section", Section 2.</a:t>
             </a:r>
           </a:p>
         </p:txBody>
@@ -3375,12 +3259,7 @@
           <a:p/>
           <a:p>
             <a:r>
-              <a:t>Run sheet: docs/instructor-guide.md, Schedule (240 minutes).</a:t>
-            </a:r>
-          </a:p>
-          <a:p>
-            <a:r>
-              <a:t>Source: docs/instructor-guide.md (schedule).</a:t>
+              <a:t>Guide: docs/instructor-guide.md, "Section by section", Break.</a:t>
             </a:r>
           </a:p>
         </p:txBody>
@@ -3456,23 +3335,23 @@
           <a:p/>
           <a:p>
             <a:r>
-              <a:t>The answer comes on slide 47. The 7 runs: pilot run 3, run 4, and the class-profile round, on the F3</a:t>
-            </a:r>
-          </a:p>
-          <a:p>
-            <a:r>
-              <a:t>trap ticket with the tempting shared middleware (trap-tempting-middleware).</a:t>
+              <a:t>Say before the vote: "The harness arm is not in the question. Its scope layer refuses any edit</a:t>
+            </a:r>
+          </a:p>
+          <a:p>
+            <a:r>
+              <a:t>outside the list, so its zero is built in." The answer comes on slide 47. The 3 A/Bs are the S3</a:t>
+            </a:r>
+          </a:p>
+          <a:p>
+            <a:r>
+              <a:t>confirmation: registered before any of its runs, class profile, 420 s agent time limit.</a:t>
             </a:r>
           </a:p>
           <a:p/>
           <a:p>
             <a:r>
-              <a:t>Run sheet: docs/instructor-guide.md, Stage 6: S3 Scope and sandbox (2:00-2:50).</a:t>
-            </a:r>
-          </a:p>
-          <a:p>
-            <a:r>
-              <a:t>Source: submodules/03-scope-sandbox/demo/README.md §4.</a:t>
+              <a:t>Guide: docs/instructor-guide.md, "Section by section", Section 3.</a:t>
             </a:r>
           </a:p>
         </p:txBody>
@@ -3548,44 +3427,44 @@
           <a:p/>
           <a:p>
             <a:r>
-              <a:t>Harness arm layers: instructions, state, scope.</a:t>
+              <a:t>Why a live A/B here: before class this ticket showed a real gap (slide 47), so the class runs the</a:t>
+            </a:r>
+          </a:p>
+          <a:p>
+            <a:r>
+              <a:t>comparison live. Each arm has its own sandbox with the same limits.</a:t>
             </a:r>
           </a:p>
           <a:p/>
           <a:p>
             <a:r>
-              <a:t>Timing reference: in the quiet run of `make show-3` (captured on 2026-10-17, run</a:t>
-            </a:r>
-          </a:p>
-          <a:p>
-            <a:r>
-              <a:t>ab-20261017-114259-b64f54; your output will differ) the primary verdict came 4:25 after launch, the</a:t>
-            </a:r>
-          </a:p>
-          <a:p>
-            <a:r>
-              <a:t>full verdict 7:31 after launch, and the command took 7 min 43 s in all (exit 0). In the</a:t>
-            </a:r>
-          </a:p>
-          <a:p>
-            <a:r>
-              <a:t>class-profile round (A/B ab-20261017-090051-91f837) the harness arm's primary verdict came 317 s and</a:t>
-            </a:r>
-          </a:p>
-          <a:p>
-            <a:r>
-              <a:t>its full verdict 481 s after launch.</a:t>
+              <a:t>Timing: in the S3 confirmation A/B that ran alone, like tonight's (agent time limit 420 s), the bare</a:t>
+            </a:r>
+          </a:p>
+          <a:p>
+            <a:r>
+              <a:t>arm's primary verdict came 5:15 after launch and its full verdict 8:06; the harness arm's came 8:50</a:t>
+            </a:r>
+          </a:p>
+          <a:p>
+            <a:r>
+              <a:t>and 11:18. Cost $0.0487. The command exited 2: the harness arm stopped at the harness's own time</a:t>
+            </a:r>
+          </a:p>
+          <a:p>
+            <a:r>
+              <a:t>limit after shipping its change. Your output will differ. Runs: docs/evidence.md, Section 3.</a:t>
             </a:r>
           </a:p>
           <a:p/>
           <a:p>
             <a:r>
-              <a:t>Run sheet: docs/instructor-guide.md, Stage 6: S3 Scope and sandbox (2:00-2:50).</a:t>
-            </a:r>
-          </a:p>
-          <a:p>
-            <a:r>
-              <a:t>Source: Makefile `show-3`; README.md §10; docs/architecture.md §2; teamtrack/reference/f3/task.toml.</a:t>
+              <a:t>Guide: docs/instructor-guide.md, "Section by section", Section 3.</a:t>
+            </a:r>
+          </a:p>
+          <a:p>
+            <a:r>
+              <a:t>Source: Makefile `demo-3`; platform/teamtrack/reference/f4/task.toml.</a:t>
             </a:r>
           </a:p>
         </p:txBody>
@@ -3661,28 +3540,18 @@
           <a:p/>
           <a:p>
             <a:r>
-              <a:t>The first three bullets are the section's objectives (course design). The one-line assumption is the</a:t>
-            </a:r>
-          </a:p>
-          <a:p>
-            <a:r>
-              <a:t>course's wording; no single source sentence states the cause, so slide 39 shows its sources side by</a:t>
-            </a:r>
-          </a:p>
-          <a:p>
-            <a:r>
-              <a:t>side.</a:t>
+              <a:t>The first three bullets are the section's objectives. The one-line assumption is the course's</a:t>
+            </a:r>
+          </a:p>
+          <a:p>
+            <a:r>
+              <a:t>wording. No single source sentence states the cause, so slide 39 shows its sources side by side.</a:t>
             </a:r>
           </a:p>
           <a:p/>
           <a:p>
             <a:r>
-              <a:t>Run sheet: docs/instructor-guide.md, Stage 6: S3 Scope and sandbox (2:00-2:50).</a:t>
-            </a:r>
-          </a:p>
-          <a:p>
-            <a:r>
-              <a:t>Source: S3 learning objectives (course design); README.md §1.</a:t>
+              <a:t>Guide: docs/instructor-guide.md, "Section by section", Section 3.</a:t>
             </a:r>
           </a:p>
         </p:txBody>
@@ -3758,18 +3627,23 @@
           <a:p/>
           <a:p>
             <a:r>
-              <a:t>Four citations side by side, not merged: no single source states cause 3.</a:t>
+              <a:t>Four sources side by side, not merged: no single source states cause 3. The last one is</a:t>
+            </a:r>
+          </a:p>
+          <a:p>
+            <a:r>
+              <a:t>supplementary.</a:t>
             </a:r>
           </a:p>
           <a:p/>
           <a:p>
             <a:r>
-              <a:t>Run sheet: docs/instructor-guide.md, Stage 6: S3 Scope and sandbox (2:00-2:50).</a:t>
-            </a:r>
-          </a:p>
-          <a:p>
-            <a:r>
-              <a:t>Source: README.md §2 (cause 3); REFERENCES.md.</a:t>
+              <a:t>Guide: docs/instructor-guide.md, "Section by section", Section 3.</a:t>
+            </a:r>
+          </a:p>
+          <a:p>
+            <a:r>
+              <a:t>Source: docs/REFERENCES.md.</a:t>
             </a:r>
           </a:p>
         </p:txBody>
@@ -3845,33 +3719,33 @@
           <a:p/>
           <a:p>
             <a:r>
-              <a:t>A3's sentence goes on: "and those assumptions are worth stress testing" (F-a-124). A1 never defines</a:t>
-            </a:r>
-          </a:p>
-          <a:p>
-            <a:r>
-              <a:t>"harness engineering"; no definition is attributed to A1. The thick borders and the word "now" mark</a:t>
-            </a:r>
-          </a:p>
-          <a:p>
-            <a:r>
-              <a:t>all four parts and the sandbox. The section names S1 to S4 and the phrase "keep what earns its</a:t>
-            </a:r>
-          </a:p>
-          <a:p>
-            <a:r>
-              <a:t>place" are course framing, not source terms.</a:t>
+              <a:t>The Anthropic sentence goes on: "and those assumptions are worth stress testing". The OpenAI</a:t>
+            </a:r>
+          </a:p>
+          <a:p>
+            <a:r>
+              <a:t>article never defines "harness engineering", so no definition is attributed to it. The thick borders</a:t>
+            </a:r>
+          </a:p>
+          <a:p>
+            <a:r>
+              <a:t>and the word "now" mark all four parts and the sandbox. "Keep what earns its place" is how this</a:t>
+            </a:r>
+          </a:p>
+          <a:p>
+            <a:r>
+              <a:t>course puts it.</a:t>
             </a:r>
           </a:p>
           <a:p/>
           <a:p>
             <a:r>
-              <a:t>Run sheet: docs/instructor-guide.md, Stage 3: Opening (0:00-0:10).</a:t>
-            </a:r>
-          </a:p>
-          <a:p>
-            <a:r>
-              <a:t>Source: README.md §3; REFERENCES.md (A1 F-a-02; A3 F-a-124, F-a-69).</a:t>
+              <a:t>Guide: docs/instructor-guide.md, "Section by section", Opening.</a:t>
+            </a:r>
+          </a:p>
+          <a:p>
+            <a:r>
+              <a:t>Sources: docs/REFERENCES.md (OpenAI, Harness engineering; Anthropic, Harness design).</a:t>
             </a:r>
           </a:p>
         </p:txBody>
@@ -3947,23 +3821,28 @@
           <a:p/>
           <a:p>
             <a:r>
-              <a:t>A2 lets the agent set `passes` (F-a-108); the course follows A3's separation of doer and judge</a:t>
-            </a:r>
-          </a:p>
-          <a:p>
-            <a:r>
-              <a:t>(F-a-110). That choice is course design.</a:t>
+              <a:t>In Anthropic, Effective harnesses, the agent sets `passes` itself. The course follows Anthropic,</a:t>
+            </a:r>
+          </a:p>
+          <a:p>
+            <a:r>
+              <a:t>Harness design, which separates the agent that does the work from the one that judges it. That</a:t>
+            </a:r>
+          </a:p>
+          <a:p>
+            <a:r>
+              <a:t>choice is the course's.</a:t>
             </a:r>
           </a:p>
           <a:p/>
           <a:p>
             <a:r>
-              <a:t>Run sheet: docs/instructor-guide.md, Stage 6: S3 Scope and sandbox (2:00-2:50).</a:t>
-            </a:r>
-          </a:p>
-          <a:p>
-            <a:r>
-              <a:t>Source: A2, A3, A5 in REFERENCES.md.</a:t>
+              <a:t>Guide: docs/instructor-guide.md, "Section by section", Section 3.</a:t>
+            </a:r>
+          </a:p>
+          <a:p>
+            <a:r>
+              <a:t>Source: docs/REFERENCES.md (Anthropic, Effective harnesses; Anthropic, Harness design; Anthropic, Coding agent demo).</a:t>
             </a:r>
           </a:p>
         </p:txBody>
@@ -4039,18 +3918,23 @@
           <a:p/>
           <a:p>
             <a:r>
-              <a:t>A1: "enforce boundaries centrally, allow autonomy locally." (F-a-98)</a:t>
+              <a:t>OpenAI: "enforce boundaries centrally, allow autonomy locally." Allow lists per phase combine that</a:t>
+            </a:r>
+          </a:p>
+          <a:p>
+            <a:r>
+              <a:t>idea with the coding agent demo's project-directory limit; no single source describes them.</a:t>
             </a:r>
           </a:p>
           <a:p/>
           <a:p>
             <a:r>
-              <a:t>Run sheet: docs/instructor-guide.md, Stage 6: S3 Scope and sandbox (2:00-2:50).</a:t>
-            </a:r>
-          </a:p>
-          <a:p>
-            <a:r>
-              <a:t>Source: docs/architecture.md §5; A1, A2, A5 in REFERENCES.md.</a:t>
+              <a:t>Guide: docs/instructor-guide.md, "Section by section", Section 3.</a:t>
+            </a:r>
+          </a:p>
+          <a:p>
+            <a:r>
+              <a:t>Source: docs/architecture.md; platform/teamtrack/reference/f4/task.toml; docs/REFERENCES.md.</a:t>
             </a:r>
           </a:p>
         </p:txBody>
@@ -4132,12 +4016,12 @@
           <a:p/>
           <a:p>
             <a:r>
-              <a:t>Run sheet: docs/instructor-guide.md, Stage 6: S3 Scope and sandbox (2:00-2:50).</a:t>
-            </a:r>
-          </a:p>
-          <a:p>
-            <a:r>
-              <a:t>Source: A4, A5 in REFERENCES.md.</a:t>
+              <a:t>Guide: docs/instructor-guide.md, "Section by section", Section 3.</a:t>
+            </a:r>
+          </a:p>
+          <a:p>
+            <a:r>
+              <a:t>Source: docs/REFERENCES.md.</a:t>
             </a:r>
           </a:p>
         </p:txBody>
@@ -4218,18 +4102,18 @@
           </a:p>
           <a:p>
             <a:r>
-              <a:t>Detailed sandbox design is Module 2.</a:t>
+              <a:t>Detailed sandbox design is a later module.</a:t>
             </a:r>
           </a:p>
           <a:p/>
           <a:p>
             <a:r>
-              <a:t>Run sheet: docs/instructor-guide.md, Stage 6: S3 Scope and sandbox (2:00-2:50).</a:t>
-            </a:r>
-          </a:p>
-          <a:p>
-            <a:r>
-              <a:t>Source: docs/architecture.md §2 (sandbox policy); submodules/03-scope-sandbox/concepts.md (sandbox_denied).</a:t>
+              <a:t>Guide: docs/instructor-guide.md, "Section by section", Section 3.</a:t>
+            </a:r>
+          </a:p>
+          <a:p>
+            <a:r>
+              <a:t>Source: docs/architecture.md (sandbox policy); 03-scope-sandbox/concepts.md.</a:t>
             </a:r>
           </a:p>
         </p:txBody>
@@ -4305,18 +4189,23 @@
           <a:p/>
           <a:p>
             <a:r>
-              <a:t>Section minute 25 is the switch to slide 45: check terminal B for the `Cost:` line of `make show-3`</a:t>
-            </a:r>
-          </a:p>
-          <a:p>
-            <a:r>
-              <a:t>(the timing reference is in the notes of slide 37).</a:t>
+              <a:t>The string `reason()` returns is what the harness arm reads tonight when it tries to edit</a:t>
+            </a:r>
+          </a:p>
+          <a:p>
+            <a:r>
+              <a:t>`app/services/errors.py`. Section minute 25 is the switch to slide 45: check terminal B for the</a:t>
+            </a:r>
+          </a:p>
+          <a:p>
+            <a:r>
+              <a:t>`Cost:` line of `make demo-3` (the timing is in the notes of slide 37).</a:t>
             </a:r>
           </a:p>
           <a:p/>
           <a:p>
             <a:r>
-              <a:t>Run sheet: docs/instructor-guide.md, Stage 6: S3 Scope and sandbox (2:00-2:50), "Check at section minute 25".</a:t>
+              <a:t>Guide: docs/instructor-guide.md, "Section by section".</a:t>
             </a:r>
           </a:p>
           <a:p>
@@ -4397,13 +4286,18 @@
           <a:p/>
           <a:p>
             <a:r>
-              <a:t>Fields from `network` to `no_new_privileges`. Show `S3:run_args` and `S3:dockerfile` in the editor only.</a:t>
+              <a:t>Fields from `network` to `no_new_privileges`. Show `S3:run_args` and `S3:dockerfile` in the editor</a:t>
+            </a:r>
+          </a:p>
+          <a:p>
+            <a:r>
+              <a:t>only.</a:t>
             </a:r>
           </a:p>
           <a:p/>
           <a:p>
             <a:r>
-              <a:t>Run sheet: docs/instructor-guide.md, Stage 6: S3 Scope and sandbox (2:00-2:50).</a:t>
+              <a:t>Guide: docs/instructor-guide.md, "Section by section", Section 3.</a:t>
             </a:r>
           </a:p>
           <a:p>
@@ -4484,53 +4378,48 @@
           <a:p/>
           <a:p>
             <a:r>
-              <a:t>In the quiet run (captured on 2026-10-17, run ab-20261017-114259-b64f54; your output will differ)</a:t>
-            </a:r>
-          </a:p>
-          <a:p>
-            <a:r>
-              <a:t>the agent began with `pwd; git status --short; git log --oneline`, read the ticket, then</a:t>
-            </a:r>
-          </a:p>
-          <a:p>
-            <a:r>
-              <a:t>`cat docs/QUALITY_SCORE.md`. It never tried an edit outside the allow list: no ⊘ block, no ↺</a:t>
-            </a:r>
-          </a:p>
-          <a:p>
-            <a:r>
-              <a:t>revert, and no sandbox denial. The harness decisions were the 31 instruction files, the initializer</a:t>
-            </a:r>
-          </a:p>
-          <a:p>
-            <a:r>
-              <a:t>step, and "feature_list.json written with F3 (passes: false)". Sessions: build 18 turns, test 12.</a:t>
-            </a:r>
-          </a:p>
-          <a:p>
-            <a:r>
-              <a:t>If tonight's run blocks an edit, read its reason aloud: it is what the agent read in its tool result,</a:t>
-            </a:r>
-          </a:p>
-          <a:p>
-            <a:r>
-              <a:t>and it names the phase and the allowed paths. If it records a `sandbox_denied` event, show its reason</a:t>
-            </a:r>
-          </a:p>
-          <a:p>
-            <a:r>
-              <a:t>code and command; otherwise show the policy printout. The image is cut to the harness panel.</a:t>
+              <a:t>In the S3 confirmation A/B that ran alone (your output will differ; times from the arms' start):</a:t>
+            </a:r>
+          </a:p>
+          <a:p>
+            <a:r>
+              <a:t>the harness arm read the add-endpoint skill at 0:25. At 1:16 its patch to app/services/errors.py</a:t>
+            </a:r>
+          </a:p>
+          <a:p>
+            <a:r>
+              <a:t>was blocked: "app/services/errors.py: outside the allowed paths for the build phase". Both arms</a:t>
+            </a:r>
+          </a:p>
+          <a:p>
+            <a:r>
+              <a:t>claimed done about 3 minutes in. The bare arm's diff map lists six changed files, among them</a:t>
+            </a:r>
+          </a:p>
+          <a:p>
+            <a:r>
+              <a:t>app/services/errors.py. The harness arm's lists five changed files and one blocked file. Neither arm</a:t>
+            </a:r>
+          </a:p>
+          <a:p>
+            <a:r>
+              <a:t>had a sandbox denial. If tonight's run records a `sandbox_denied` event, show its reason code and</a:t>
+            </a:r>
+          </a:p>
+          <a:p>
+            <a:r>
+              <a:t>command. Otherwise show the policy printout.</a:t>
             </a:r>
           </a:p>
           <a:p/>
           <a:p>
             <a:r>
-              <a:t>Run sheet: docs/instructor-guide.md, Stage 6: S3 Scope and sandbox (2:00-2:50).</a:t>
-            </a:r>
-          </a:p>
-          <a:p>
-            <a:r>
-              <a:t>Source: quiet run ab-20261017-114259-b64f54 (screen 1); README.md §11; Makefile `show-3`.</a:t>
+              <a:t>Guide: docs/instructor-guide.md, "Section by section", Section 3.</a:t>
+            </a:r>
+          </a:p>
+          <a:p>
+            <a:r>
+              <a:t>Runs: docs/evidence.md, Section 3.</a:t>
             </a:r>
           </a:p>
         </p:txBody>
@@ -4606,84 +4495,75 @@
           <a:p/>
           <a:p>
             <a:r>
-              <a:t>The quiet run's arm line (captured on 2026-10-17, run ab-20261017-114259-b64f54; your output will</a:t>
-            </a:r>
-          </a:p>
-          <a:p>
-            <a:r>
-              <a:t>differ): `harness completed claim=done primary={"out_of_scope_files": 0, "test_phase_source_edits":</a:t>
-            </a:r>
-          </a:p>
-          <a:p>
-            <a:r>
-              <a:t>0} passed=True hidden 49/49 mutants 4/4 reviewer=reject cost=$0.0142`. Its diff map: app/api/issues.py,</a:t>
-            </a:r>
-          </a:p>
-          <a:p>
-            <a:r>
-              <a:t>app/services/issues.py, docs/HANDBOOK.md, tests/visible/test_issue_idempotency.py, all inside the</a:t>
-            </a:r>
-          </a:p>
-          <a:p>
-            <a:r>
-              <a:t>build allow list. Sandbox denials: none.</a:t>
+              <a:t>Read tonight's `diff_scope` lines first, then this slide. If tonight's bare arm stays in scope, say</a:t>
+            </a:r>
+          </a:p>
+          <a:p>
+            <a:r>
+              <a:t>so: one A/B is one dot.</a:t>
             </a:r>
           </a:p>
           <a:p/>
           <a:p>
             <a:r>
-              <a:t>The 7 A/Bs: run 3 (ab-20261016-212115-a361f5, ab-20261016-213624-d7eb13, ab-20261016-215443-f2c188),</a:t>
-            </a:r>
-          </a:p>
-          <a:p>
-            <a:r>
-              <a:t>run 4 (ab-20261016-233517-2c9ea4, ab-20261016-234509-8b9bfa, ab-20261016-235305-723a0f),</a:t>
-            </a:r>
-          </a:p>
-          <a:p>
-            <a:r>
-              <a:t>class-profile round (ab-20261017-090051-91f837). Post hoc, F3 (9 runs per arm): harness arms</a:t>
-            </a:r>
-          </a:p>
-          <a:p>
-            <a:r>
-              <a:t>shipped a median of 0 tests against 6; claimed done in 4 against 9. Post hoc, F4 (all four layers;</a:t>
-            </a:r>
-          </a:p>
-          <a:p>
-            <a:r>
-              <a:t>runs 2 and 3, 6 runs per arm): bare arms left the allowed paths in 6 of 6 runs, harness arms in 0 of</a:t>
-            </a:r>
-          </a:p>
-          <a:p>
-            <a:r>
-              <a:t>6. On F2 the harness arms also stayed inside the allowed paths (0 of 9), but demo-2 has no scope</a:t>
-            </a:r>
-          </a:p>
-          <a:p>
-            <a:r>
-              <a:t>layer, so that is not the scope layer's doing. Sandbox: no `sandbox_denied` event in any recorded</a:t>
-            </a:r>
-          </a:p>
-          <a:p>
-            <a:r>
-              <a:t>pilot A/B (checked on 2026-10-17 with `grep -l sandbox_denied .shipharness/runs/*/events.jsonl`),</a:t>
-            </a:r>
-          </a:p>
-          <a:p>
-            <a:r>
-              <a:t>and none in the quiet run.</a:t>
+              <a:t>The S3 confirmation was registered before any of its runs: F4 ticket, the S3 layer stack, class</a:t>
+            </a:r>
+          </a:p>
+          <a:p>
+            <a:r>
+              <a:t>profile with the 420 s agent time limit, 3 A/Bs, primary measure for this confirmation only: one or</a:t>
+            </a:r>
+          </a:p>
+          <a:p>
+            <a:r>
+              <a:t>more out-of-scope files fails. Every bare arm changed app/services/errors.py. Every harness arm was</a:t>
+            </a:r>
+          </a:p>
+          <a:p>
+            <a:r>
+              <a:t>refused that edit. The harness arms stopped at the harness's own 120 s limit, each after shipping</a:t>
+            </a:r>
+          </a:p>
+          <a:p>
+            <a:r>
+              <a:t>its change. F4's own measure needs all 69 hidden tests and all 4 referee mutants; the arms passed 62</a:t>
+            </a:r>
+          </a:p>
+          <a:p>
+            <a:r>
+              <a:t>to 68 of 69 hidden tests, so all six failed it.</a:t>
             </a:r>
           </a:p>
           <a:p/>
           <a:p>
             <a:r>
-              <a:t>Run sheet: docs/instructor-guide.md, Stage 6: S3 Scope and sandbox (2:00-2:50), sandbox moment.</a:t>
-            </a:r>
-          </a:p>
-          <a:p>
-            <a:r>
-              <a:t>Source: quiet run ab-20261017-114259-b64f54 (screen 3); course pilot runs 2-4 and class-profile round (A/B ids above).</a:t>
+              <a:t>The F3 result: the medium-effort round, the low-effort round, and the class-settings round, 7 runs</a:t>
+            </a:r>
+          </a:p>
+          <a:p>
+            <a:r>
+              <a:t>per arm, on the ticket with the tempting shared middleware. Post hoc, before the confirmation, bare</a:t>
+            </a:r>
+          </a:p>
+          <a:p>
+            <a:r>
+              <a:t>arms on F4 had left the allowed paths in 6 of 6 runs, harness arms in 0 of 6. That count led to the</a:t>
+            </a:r>
+          </a:p>
+          <a:p>
+            <a:r>
+              <a:t>registered confirmation.</a:t>
+            </a:r>
+          </a:p>
+          <a:p/>
+          <a:p>
+            <a:r>
+              <a:t>Guide: docs/instructor-guide.md, "Section by section", Section 3.</a:t>
+            </a:r>
+          </a:p>
+          <a:p>
+            <a:r>
+              <a:t>Runs: docs/evidence.md, Section 3.</a:t>
             </a:r>
           </a:p>
         </p:txBody>
@@ -4759,23 +4639,18 @@
           <a:p/>
           <a:p>
             <a:r>
-              <a:t>Expected direction: register out-of-scope files as a measure for every section that runs the scope</a:t>
-            </a:r>
-          </a:p>
-          <a:p>
-            <a:r>
-              <a:t>layer, and keep hidden tests passed and existing tests that keep passing next to it.</a:t>
+              <a:t>Expected direction: hidden tests passed and existing tests that keep passing, next to out-of-scope</a:t>
+            </a:r>
+          </a:p>
+          <a:p>
+            <a:r>
+              <a:t>files. A guard that blocks every edit scores zero out-of-scope files and ships nothing.</a:t>
             </a:r>
           </a:p>
           <a:p/>
           <a:p>
             <a:r>
-              <a:t>Run sheet: docs/instructor-guide.md, Stage 6: S3 Scope and sandbox (2:00-2:50).</a:t>
-            </a:r>
-          </a:p>
-          <a:p>
-            <a:r>
-              <a:t>Source: docs/instructor-guide.md (schedule).</a:t>
+              <a:t>Guide: docs/instructor-guide.md, "Section by section", Section 3.</a:t>
             </a:r>
           </a:p>
         </p:txBody>
@@ -4851,33 +4726,28 @@
           <a:p/>
           <a:p>
             <a:r>
-              <a:t>The answer comes on slide 62. The 4 A/Bs: pilot run 3 and the class-profile round. Hint after the</a:t>
-            </a:r>
-          </a:p>
-          <a:p>
-            <a:r>
-              <a:t>vote: one referee mutant makes writes stop moving the version, which brings back lost updates. A</a:t>
-            </a:r>
-          </a:p>
-          <a:p>
-            <a:r>
-              <a:t>shipped test catches it only if it checks that a write moves the ETag, or that a save with the old</a:t>
-            </a:r>
-          </a:p>
-          <a:p>
-            <a:r>
-              <a:t>version gets 412.</a:t>
+              <a:t>The answer comes on slide 62. The 4 A/Bs: the medium-effort round (3) and the class-settings round</a:t>
+            </a:r>
+          </a:p>
+          <a:p>
+            <a:r>
+              <a:t>(1). Hint after the vote: one referee mutant makes writes stop moving the version, which brings back</a:t>
+            </a:r>
+          </a:p>
+          <a:p>
+            <a:r>
+              <a:t>lost updates. A shipped test catches it only if it checks that a write moves the ETag, or that a</a:t>
+            </a:r>
+          </a:p>
+          <a:p>
+            <a:r>
+              <a:t>save with the old version gets 412.</a:t>
             </a:r>
           </a:p>
           <a:p/>
           <a:p>
             <a:r>
-              <a:t>Run sheet: docs/instructor-guide.md, Stage 7: S4 Verification, with the final launched (2:50-3:40).</a:t>
-            </a:r>
-          </a:p>
-          <a:p>
-            <a:r>
-              <a:t>Source: submodules/04-verification/demo/README.md §4.</a:t>
+              <a:t>Guide: docs/instructor-guide.md, "Section by section", Section 4.</a:t>
             </a:r>
           </a:p>
         </p:txBody>
@@ -4953,28 +4823,23 @@
           <a:p/>
           <a:p>
             <a:r>
-              <a:t>The code shows both arms running at the same time and each judged by the same referee as soon as it</a:t>
-            </a:r>
-          </a:p>
-          <a:p>
-            <a:r>
-              <a:t>finishes; the finally block is folded. `Opening:publish` is shown in the editor only. TeamTrack size</a:t>
-            </a:r>
-          </a:p>
-          <a:p>
-            <a:r>
-              <a:t>as counted at M3 (OpenAPI operations, visible tests).</a:t>
+              <a:t>The code starts both arms at the same time. Each arm is judged by the same referee as soon as it</a:t>
+            </a:r>
+          </a:p>
+          <a:p>
+            <a:r>
+              <a:t>finishes. The finally block is folded. Show `Opening:publish` in the editor only.</a:t>
             </a:r>
           </a:p>
           <a:p/>
           <a:p>
             <a:r>
-              <a:t>Run sheet: docs/instructor-guide.md, Stage 3: Opening (0:00-0:10).</a:t>
-            </a:r>
-          </a:p>
-          <a:p>
-            <a:r>
-              <a:t>Source: README.md §5, §9, §11; anchor Opening:two_arms.</a:t>
+              <a:t>Guide: docs/instructor-guide.md, "Section by section", Opening.</a:t>
+            </a:r>
+          </a:p>
+          <a:p>
+            <a:r>
+              <a:t>Source: anchor Opening:two_arms (platform/src/shipharness/ab/demo.py).</a:t>
             </a:r>
           </a:p>
         </p:txBody>
@@ -5056,12 +4921,12 @@
           <a:p/>
           <a:p>
             <a:r>
-              <a:t>Run sheet: docs/instructor-guide.md, Stage 7: S4 Verification, with the final launched (2:50-3:40).</a:t>
-            </a:r>
-          </a:p>
-          <a:p>
-            <a:r>
-              <a:t>Source: submodules/04-verification/demo/README.md (final feature poll); final-project/README.md §2.</a:t>
+              <a:t>Guide: docs/instructor-guide.md, "Section by section", Section 4.</a:t>
+            </a:r>
+          </a:p>
+          <a:p>
+            <a:r>
+              <a:t>Source: final-project/README.md; platform/teamtrack/reference/f5/task.toml to f7.</a:t>
             </a:r>
           </a:p>
         </p:txBody>
@@ -5142,75 +5007,65 @@
           </a:p>
           <a:p>
             <a:r>
-              <a:t>are live at a time. The class profile is identical for both arms: effort low, Fast tier, 2 CPUs per</a:t>
-            </a:r>
-          </a:p>
-          <a:p>
-            <a:r>
-              <a:t>container, early primary verdict, five flakiness re-runs. Final run cap $0.25 per arm.</a:t>
+              <a:t>are live at a time. The class profile is the same for both arms: effort low, the Fast tier, 2 CPUs</a:t>
+            </a:r>
+          </a:p>
+          <a:p>
+            <a:r>
+              <a:t>per container, the early primary verdict, five flakiness re-runs, and a 420 s agent time limit.</a:t>
+            </a:r>
+          </a:p>
+          <a:p>
+            <a:r>
+              <a:t>Final run cap $0.25 per arm.</a:t>
             </a:r>
           </a:p>
           <a:p/>
           <a:p>
             <a:r>
-              <a:t>Timing reference for show-4: in the quiet run of `make show-4` (captured on 2026-10-17, run</a:t>
-            </a:r>
-          </a:p>
-          <a:p>
-            <a:r>
-              <a:t>ab-20261017-115138-c45d9d; your output will differ) the primary verdict came 9:19 after launch, the</a:t>
-            </a:r>
-          </a:p>
-          <a:p>
-            <a:r>
-              <a:t>full verdict 10:55 after launch, and the command took 11 min 6 s in all. It exited 2: the agent time</a:t>
-            </a:r>
-          </a:p>
-          <a:p>
-            <a:r>
-              <a:t>limit ended the test phase. In the class-profile round (A/B ab-20261017-090903-926c02, run alone)</a:t>
-            </a:r>
-          </a:p>
-          <a:p>
-            <a:r>
-              <a:t>the harness arm's primary verdict came 811 s and its full verdict 927 s after launch.</a:t>
+              <a:t>Timing for show-4: in a timed run before class (agent time limit then 300 s; now 420 s), the primary</a:t>
+            </a:r>
+          </a:p>
+          <a:p>
+            <a:r>
+              <a:t>verdict came 9:19 after launch and the full verdict 10:55. Cost $0.0265. It exited 2: the agent time</a:t>
+            </a:r>
+          </a:p>
+          <a:p>
+            <a:r>
+              <a:t>limit ended the test phase.</a:t>
             </a:r>
           </a:p>
           <a:p/>
           <a:p>
             <a:r>
-              <a:t>Timing reference for the final: the quiet run of `make final FEATURES=F5` (captured on</a:t>
-            </a:r>
-          </a:p>
-          <a:p>
-            <a:r>
-              <a:t>2026-10-17, run ab-20261017-120323-c97138; your output will differ) took 12 min 47 s: bare arm</a:t>
-            </a:r>
-          </a:p>
-          <a:p>
-            <a:r>
-              <a:t>primary verdict 3:27 and full verdict 6:50 after launch, harness arm 9:48 and 12:32 (it hit the</a:t>
-            </a:r>
-          </a:p>
-          <a:p>
-            <a:r>
-              <a:t>agent time limit, exit 2). The final A/B must be finished by 3:40, when slide 64 opens the final</a:t>
-            </a:r>
-          </a:p>
-          <a:p>
-            <a:r>
-              <a:t>block; with two features `make final` runs them one after another.</a:t>
+              <a:t>Timing for the final: a timed run of `make final FEATURES=F5` before class took 12 min 47 s. The</a:t>
+            </a:r>
+          </a:p>
+          <a:p>
+            <a:r>
+              <a:t>bare arm's verdicts came at 3:27 and 6:50, the harness arm's at 9:48 and 12:32 (it hit the agent</a:t>
+            </a:r>
+          </a:p>
+          <a:p>
+            <a:r>
+              <a:t>time limit, exit 2). Cost $0.0456. The final must be finished by 3:40, when slide 64 opens the final</a:t>
+            </a:r>
+          </a:p>
+          <a:p>
+            <a:r>
+              <a:t>block. Your output will differ. Runs: docs/evidence.md, Captures.</a:t>
             </a:r>
           </a:p>
           <a:p/>
           <a:p>
             <a:r>
-              <a:t>Run sheet: docs/instructor-guide.md, Stage 7: S4 Verification, with the final launched (2:50-3:40).</a:t>
-            </a:r>
-          </a:p>
-          <a:p>
-            <a:r>
-              <a:t>Source: README.md §10, §13; Makefile `show-4`, `final`; teamtrack/reference/f4/task.toml; teamtrack/mutants/features/f4.jsonl.</a:t>
+              <a:t>Guide: docs/instructor-guide.md, "Section by section", Section 4.</a:t>
+            </a:r>
+          </a:p>
+          <a:p>
+            <a:r>
+              <a:t>Source: Makefile `show-4`, `final`; platform/teamtrack/reference/f4/task.toml; platform/teamtrack/mutants/features/f4.jsonl.</a:t>
             </a:r>
           </a:p>
         </p:txBody>
@@ -5286,23 +5141,18 @@
           <a:p/>
           <a:p>
             <a:r>
-              <a:t>The first three bullets are the section's objectives (course design). The one-line assumption is the</a:t>
-            </a:r>
-          </a:p>
-          <a:p>
-            <a:r>
-              <a:t>course's wording, after A3 (F-a-15) and A4 (F-a-17).</a:t>
+              <a:t>The first three bullets are the section's objectives. The one-line assumption is the course's</a:t>
+            </a:r>
+          </a:p>
+          <a:p>
+            <a:r>
+              <a:t>wording, based on Anthropic, Harness design, and Anthropic, C compiler.</a:t>
             </a:r>
           </a:p>
           <a:p/>
           <a:p>
             <a:r>
-              <a:t>Run sheet: docs/instructor-guide.md, Stage 7: S4 Verification, with the final launched (2:50-3:40).</a:t>
-            </a:r>
-          </a:p>
-          <a:p>
-            <a:r>
-              <a:t>Source: S4 learning objectives (course design); README.md §1.</a:t>
+              <a:t>Guide: docs/instructor-guide.md, "Section by section", Section 4.</a:t>
             </a:r>
           </a:p>
         </p:txBody>
@@ -5384,12 +5234,12 @@
           <a:p/>
           <a:p>
             <a:r>
-              <a:t>Run sheet: docs/instructor-guide.md, Stage 7: S4 Verification, with the final launched (2:50-3:40).</a:t>
-            </a:r>
-          </a:p>
-          <a:p>
-            <a:r>
-              <a:t>Source: A3, A4, B13 in REFERENCES.md.</a:t>
+              <a:t>Guide: docs/instructor-guide.md, "Section by section", Section 4.</a:t>
+            </a:r>
+          </a:p>
+          <a:p>
+            <a:r>
+              <a:t>Source: docs/REFERENCES.md.</a:t>
             </a:r>
           </a:p>
         </p:txBody>
@@ -5465,28 +5315,23 @@
           <a:p/>
           <a:p>
             <a:r>
-              <a:t>Say at the filter table: "Filters 1 to 3 are TestGen-LLM's; 4 and 5 are course filters." TestGen-LLM</a:t>
-            </a:r>
-          </a:p>
-          <a:p>
-            <a:r>
-              <a:t>reports its evaluation funnel over 86 test classes (F-b-23). The referee's flakiness check runs each</a:t>
-            </a:r>
-          </a:p>
-          <a:p>
-            <a:r>
-              <a:t>shipped test five times since 2026-10-17 (it was ten before), for both arms.</a:t>
+              <a:t>Say at the filter table: "Filters 1 to 3 are TestGen-LLM's. 4 and 5 are this course's." The</a:t>
+            </a:r>
+          </a:p>
+          <a:p>
+            <a:r>
+              <a:t>referee's flakiness check runs each shipped test five times, for both arms.</a:t>
             </a:r>
           </a:p>
           <a:p/>
           <a:p>
             <a:r>
-              <a:t>Run sheet: docs/instructor-guide.md, Stage 7: S4 Verification, with the final launched (2:50-3:40).</a:t>
-            </a:r>
-          </a:p>
-          <a:p>
-            <a:r>
-              <a:t>Source: submodules/04-verification/concepts.md §3.3; B11 in REFERENCES.md.</a:t>
+              <a:t>Guide: docs/instructor-guide.md, "Section by section", Section 4.</a:t>
+            </a:r>
+          </a:p>
+          <a:p>
+            <a:r>
+              <a:t>Source: 04-verification/concepts.md; docs/REFERENCES.md (TestGen-LLM).</a:t>
             </a:r>
           </a:p>
         </p:txBody>
@@ -5568,12 +5413,12 @@
           <a:p/>
           <a:p>
             <a:r>
-              <a:t>Run sheet: docs/instructor-guide.md, Stage 7: S4 Verification, with the final launched (2:50-3:40).</a:t>
-            </a:r>
-          </a:p>
-          <a:p>
-            <a:r>
-              <a:t>Source: submodules/04-verification/concepts.md §3.4; B12, B13, B14 in REFERENCES.md; counts in submodules/04-verification/post-class-reading/04-held-out-tests-specbench.md.</a:t>
+              <a:t>Guide: docs/instructor-guide.md, "Section by section", Section 4.</a:t>
+            </a:r>
+          </a:p>
+          <a:p>
+            <a:r>
+              <a:t>Source: 04-verification/concepts.md; docs/REFERENCES.md (ACH; SpecBench); counts in 04-verification/post-class-reading/04-held-out-tests-specbench.md.</a:t>
             </a:r>
           </a:p>
         </p:txBody>
@@ -5649,28 +5494,28 @@
           <a:p/>
           <a:p>
             <a:r>
-              <a:t>A3: separating the agent doing the work from the agent judging it is "a strong lever" (F-a-110), but</a:t>
-            </a:r>
-          </a:p>
-          <a:p>
-            <a:r>
-              <a:t>the evaluator is still inclined to be generous (F-a-112). The F-a-123 sentence starts: "The practical</a:t>
-            </a:r>
-          </a:p>
-          <a:p>
-            <a:r>
-              <a:t>implication is that the evaluator is not a fixed yes-or-no decision."</a:t>
+              <a:t>Anthropic, Harness design, calls the separation of doer and judge "a strong lever", but notes that</a:t>
+            </a:r>
+          </a:p>
+          <a:p>
+            <a:r>
+              <a:t>the evaluator still tends to be generous. The quoted sentence starts: "The practical implication is</a:t>
+            </a:r>
+          </a:p>
+          <a:p>
+            <a:r>
+              <a:t>that the evaluator is not a fixed yes-or-no decision."</a:t>
             </a:r>
           </a:p>
           <a:p/>
           <a:p>
             <a:r>
-              <a:t>Run sheet: docs/instructor-guide.md, Stage 7: S4 Verification, with the final launched (2:50-3:40).</a:t>
-            </a:r>
-          </a:p>
-          <a:p>
-            <a:r>
-              <a:t>Source: docs/architecture.md §5, §6; A2, A3, A4 in REFERENCES.md.</a:t>
+              <a:t>Guide: docs/instructor-guide.md, "Section by section", Section 4.</a:t>
+            </a:r>
+          </a:p>
+          <a:p>
+            <a:r>
+              <a:t>Source: docs/architecture.md; docs/REFERENCES.md.</a:t>
             </a:r>
           </a:p>
         </p:txBody>
@@ -5746,23 +5591,23 @@
           <a:p/>
           <a:p>
             <a:r>
-              <a:t>The course planned a leave-one-layer-out batch for all four layers (M8). It was not run because the</a:t>
-            </a:r>
-          </a:p>
-          <a:p>
-            <a:r>
-              <a:t>pre-registered pilot gate did not pass, so the course has no per-layer result to show.</a:t>
+              <a:t>The course planned a batch that leaves out one layer at a time. It was not run, because the gate</a:t>
+            </a:r>
+          </a:p>
+          <a:p>
+            <a:r>
+              <a:t>registered before the runs did not pass, so the course has no per-layer result to show.</a:t>
             </a:r>
           </a:p>
           <a:p/>
           <a:p>
             <a:r>
-              <a:t>Run sheet: docs/instructor-guide.md, Stage 7: S4 Verification, with the final launched (2:50-3:40).</a:t>
-            </a:r>
-          </a:p>
-          <a:p>
-            <a:r>
-              <a:t>Source: A3 in REFERENCES.md; docs/architecture.md §5 (leave one layer out).</a:t>
+              <a:t>Guide: docs/instructor-guide.md, "Section by section", Section 4.</a:t>
+            </a:r>
+          </a:p>
+          <a:p>
+            <a:r>
+              <a:t>Source: docs/REFERENCES.md (Anthropic, Harness design); docs/architecture.md.</a:t>
             </a:r>
           </a:p>
         </p:txBody>
@@ -5844,7 +5689,7 @@
           <a:p/>
           <a:p>
             <a:r>
-              <a:t>Run sheet: docs/instructor-guide.md, Stage 7: S4 Verification, with the final launched (2:50-3:40).</a:t>
+              <a:t>Guide: docs/instructor-guide.md, "Section by section", Section 4.</a:t>
             </a:r>
           </a:p>
           <a:p>
@@ -5930,13 +5775,13 @@
           </a:p>
           <a:p>
             <a:r>
-              <a:t>show-4 `Cost:` line and terminal C for the final (timing references in the notes of slide 51).</a:t>
+              <a:t>show-4 `Cost:` line and terminal C for the final (timings in the notes of slide 51).</a:t>
             </a:r>
           </a:p>
           <a:p/>
           <a:p>
             <a:r>
-              <a:t>Run sheet: docs/instructor-guide.md, Stage 7: S4 Verification, with the final launched (2:50-3:40), "Check at section minute 25".</a:t>
+              <a:t>Guide: docs/instructor-guide.md, "Section by section".</a:t>
             </a:r>
           </a:p>
           <a:p>
@@ -6022,23 +5867,23 @@
           </a:p>
           <a:p>
             <a:r>
-              <a:t>harness so far against the bare arm; only taking one piece out tests that piece. A3's full sentence:</a:t>
-            </a:r>
-          </a:p>
-          <a:p>
-            <a:r>
-              <a:t>"removing one component at a time and reviewing what impact it had on the final result." (F-a-125)</a:t>
+              <a:t>harness so far against the bare arm. Only taking one piece out tests that piece. The full sentence:</a:t>
+            </a:r>
+          </a:p>
+          <a:p>
+            <a:r>
+              <a:t>"removing one component at a time and reviewing what impact it had on the final result."</a:t>
             </a:r>
           </a:p>
           <a:p/>
           <a:p>
             <a:r>
-              <a:t>Run sheet: docs/instructor-guide.md, Stage 3: Opening (0:00-0:10).</a:t>
-            </a:r>
-          </a:p>
-          <a:p>
-            <a:r>
-              <a:t>Source: README.md §4, §10 (primary measures); teamtrack/docs/HANDBOOK.md (R1-R7); datasets/README.md.</a:t>
+              <a:t>Guide: docs/instructor-guide.md, "Section by section", Opening.</a:t>
+            </a:r>
+          </a:p>
+          <a:p>
+            <a:r>
+              <a:t>Sources: platform/teamtrack/docs/HANDBOOK.md (R1 to R7); platform/datasets/README.md.</a:t>
             </a:r>
           </a:p>
         </p:txBody>
@@ -6125,7 +5970,7 @@
           <a:p/>
           <a:p>
             <a:r>
-              <a:t>Run sheet: docs/instructor-guide.md, Stage 7: S4 Verification, with the final launched (2:50-3:40).</a:t>
+              <a:t>Guide: docs/instructor-guide.md, "Section by section", Section 4.</a:t>
             </a:r>
           </a:p>
           <a:p>
@@ -6206,63 +6051,58 @@
           <a:p/>
           <a:p>
             <a:r>
-              <a:t>In the quiet run (captured on 2026-10-17, run ab-20261017-115138-c45d9d; your output will differ):</a:t>
-            </a:r>
-          </a:p>
-          <a:p>
-            <a:r>
-              <a:t>minute 1, turn 1.15 tried to patch app/services/errors.py and the scope layer blocked it ("outside</a:t>
-            </a:r>
-          </a:p>
-          <a:p>
-            <a:r>
-              <a:t>the allowed paths"); minute 3, turn 1.31 called `finish done` and the gate ran, every pill ✓</a:t>
-            </a:r>
-          </a:p>
-          <a:p>
-            <a:r>
-              <a:t>(visible tests, existing tests, R1-R7, board, clean state); the harness then set F4 `passes` with</a:t>
-            </a:r>
-          </a:p>
-          <a:p>
-            <a:r>
-              <a:t>its evidence and moved the exec plan to completed; minutes 4-8, the test phase: one new test file,</a:t>
-            </a:r>
-          </a:p>
-          <a:p>
-            <a:r>
-              <a:t>a failing `run_visible_tests`, the filters; minute 9, the agent time limit ended the run and screen 1</a:t>
-            </a:r>
-          </a:p>
-          <a:p>
-            <a:r>
-              <a:t>showed "primary verdict ready: FAIL" at 9:19; the full verdict came at 10:55. Screen 2's conflict</a:t>
-            </a:r>
-          </a:p>
-          <a:p>
-            <a:r>
-              <a:t>panel: "CONFLICT DETECTED: tab B got HTTP 409", and tab B read "This issue was changed by someone</a:t>
-            </a:r>
-          </a:p>
-          <a:p>
-            <a:r>
-              <a:t>else". Say at the filter table: "The referee-set mutants were never visible to the filters." The</a:t>
-            </a:r>
-          </a:p>
-          <a:p>
-            <a:r>
-              <a:t>image joins the harness panel of screen 1 with the conflict panel's banner and tab B.</a:t>
+              <a:t>In the timed run before class (your output will differ): minute 1, turn 1.15 tried to patch</a:t>
+            </a:r>
+          </a:p>
+          <a:p>
+            <a:r>
+              <a:t>app/services/errors.py and the scope layer blocked it, the same edit as in Section 3. Minute 3, turn</a:t>
+            </a:r>
+          </a:p>
+          <a:p>
+            <a:r>
+              <a:t>1.31 called `finish done` and the gate ran, every pill ✓ (visible tests, existing tests, R1-R7,</a:t>
+            </a:r>
+          </a:p>
+          <a:p>
+            <a:r>
+              <a:t>board, clean state). The harness then set F4 `passes` with its evidence and moved the exec plan to</a:t>
+            </a:r>
+          </a:p>
+          <a:p>
+            <a:r>
+              <a:t>completed. Minutes 4-8, the test phase: one new test file and the filters. Minute 9, the agent time</a:t>
+            </a:r>
+          </a:p>
+          <a:p>
+            <a:r>
+              <a:t>limit ended the run; screen 1 showed "primary verdict ready: FAIL" at 9:19, and the full verdict came</a:t>
+            </a:r>
+          </a:p>
+          <a:p>
+            <a:r>
+              <a:t>at 10:55. Screen 2's conflict panel: "CONFLICT DETECTED: tab B got HTTP 409", and tab B read "This</a:t>
+            </a:r>
+          </a:p>
+          <a:p>
+            <a:r>
+              <a:t>issue was changed by someone else". The picture joins the harness panel of screen 1 with the</a:t>
+            </a:r>
+          </a:p>
+          <a:p>
+            <a:r>
+              <a:t>conflict panel.</a:t>
             </a:r>
           </a:p>
           <a:p/>
           <a:p>
             <a:r>
-              <a:t>Run sheet: docs/instructor-guide.md, Stage 7: S4 Verification, with the final launched (2:50-3:40).</a:t>
-            </a:r>
-          </a:p>
-          <a:p>
-            <a:r>
-              <a:t>Source: quiet run ab-20261017-115138-c45d9d (screens 1 and 2); README.md §11; Makefile `show-4`.</a:t>
+              <a:t>Guide: docs/instructor-guide.md, "Section by section", Section 4.</a:t>
+            </a:r>
+          </a:p>
+          <a:p>
+            <a:r>
+              <a:t>Runs: docs/evidence.md, Captures.</a:t>
             </a:r>
           </a:p>
         </p:txBody>
@@ -6338,79 +6178,64 @@
           <a:p/>
           <a:p>
             <a:r>
-              <a:t>The quiet run's arm line (captured on 2026-10-17, run ab-20261017-115138-c45d9d; your output will</a:t>
-            </a:r>
-          </a:p>
-          <a:p>
-            <a:r>
-              <a:t>differ): `harness ABORTED: timeout claim=done primary={"hidden_passed": 68, "mutants_killed": 0}</a:t>
-            </a:r>
-          </a:p>
-          <a:p>
-            <a:r>
-              <a:t>passed=False hidden 68/69 mutants 0/4 reviewer=reject cost=$0.0233`. Filter table: 4 proposed tests,</a:t>
-            </a:r>
-          </a:p>
-          <a:p>
-            <a:r>
-              <a:t>1 kept; two discarded by filter 3 (no new line coverage) and one by filter 2 ("failed on run 1 of 5:</a:t>
-            </a:r>
-          </a:p>
-          <a:p>
-            <a:r>
-              <a:t>assert 422 == 412"). Diff map: one ⊘ blocked file (app/services/errors.py), every shipped file inside</a:t>
-            </a:r>
-          </a:p>
-          <a:p>
-            <a:r>
-              <a:t>the allowed paths. This is a show run, so it is not part of the pilot counts below.</a:t>
+              <a:t>The timed run's arm line (your output will differ): `harness ABORTED: timeout claim=done</a:t>
+            </a:r>
+          </a:p>
+          <a:p>
+            <a:r>
+              <a:t>primary={"hidden_passed": 68, "mutants_killed": 0} passed=False hidden 68/69 mutants 0/4</a:t>
+            </a:r>
+          </a:p>
+          <a:p>
+            <a:r>
+              <a:t>reviewer=reject cost=$0.0233`. Filter table: 4 proposed tests, 1 kept; two discarded by filter 3 (no</a:t>
+            </a:r>
+          </a:p>
+          <a:p>
+            <a:r>
+              <a:t>new line coverage) and one by filter 2 ("failed on run 1 of 5: assert 422 == 412"). This is a</a:t>
+            </a:r>
+          </a:p>
+          <a:p>
+            <a:r>
+              <a:t>harness-in-action run, so it is not part of the counts on the slide.</a:t>
             </a:r>
           </a:p>
           <a:p/>
           <a:p>
             <a:r>
-              <a:t>The 4 A/Bs: run 3 (ab-20261016-212252-aa1644, ab-20261016-214151-ca9841, ab-20261016-220010-c5b4bf),</a:t>
-            </a:r>
-          </a:p>
-          <a:p>
-            <a:r>
-              <a:t>class-profile round (ab-20261017-090903-926c02). Run 3 bare hidden tests 66, 66, 69 of 69 and mutants</a:t>
-            </a:r>
-          </a:p>
-          <a:p>
-            <a:r>
-              <a:t>killed 4, 0, 3 of 4. Class-profile round: both arms 68 of 69 hidden tests; mutants killed: bare 4,</a:t>
-            </a:r>
-          </a:p>
-          <a:p>
-            <a:r>
-              <a:t>harness 1. On F4 in runs 2 and 3 the harness arm never claimed done (0 of 6), so its verify gate never</a:t>
-            </a:r>
-          </a:p>
-          <a:p>
-            <a:r>
-              <a:t>ran; in two of the three run 3 A/Bs the agent time limit cut its test phase. F4 had no run 4 (pilot</a:t>
-            </a:r>
-          </a:p>
-          <a:p>
-            <a:r>
-              <a:t>cap). Post hoc (chosen after the results, descriptive; runs 2-4 and the live console check, 34 runs</a:t>
-            </a:r>
-          </a:p>
-          <a:p>
-            <a:r>
-              <a:t>per arm): no done claim came with failing hidden tests (0 of 19 bare, 0 of 10 harness).</a:t>
+              <a:t>The 4 A/Bs: in the medium-effort round, bare hidden tests 66, 66, and 69 of 69, with mutants killed</a:t>
+            </a:r>
+          </a:p>
+          <a:p>
+            <a:r>
+              <a:t>4, 0, and 3 of 4. In the class-settings round both arms passed 68 of 69 hidden tests; mutants killed:</a:t>
+            </a:r>
+          </a:p>
+          <a:p>
+            <a:r>
+              <a:t>bare 4, harness 1. That bare claim was the first done claim with a failing hidden test in the</a:t>
+            </a:r>
+          </a:p>
+          <a:p>
+            <a:r>
+              <a:t>records. Post hoc over 34 runs per arm: no other done claim came with failing hidden tests (0 of 19</a:t>
+            </a:r>
+          </a:p>
+          <a:p>
+            <a:r>
+              <a:t>bare, 0 of 10 harness).</a:t>
             </a:r>
           </a:p>
           <a:p/>
           <a:p>
             <a:r>
-              <a:t>Run sheet: docs/instructor-guide.md, Stage 7: S4 Verification, with the final launched (2:50-3:40).</a:t>
-            </a:r>
-          </a:p>
-          <a:p>
-            <a:r>
-              <a:t>Source: quiet run ab-20261017-115138-c45d9d (screen 3); course pilot runs 2-4 and class-profile round (A/B ids above).</a:t>
+              <a:t>Guide: docs/instructor-guide.md, "Section by section", Section 4.</a:t>
+            </a:r>
+          </a:p>
+          <a:p>
+            <a:r>
+              <a:t>Runs: docs/evidence.md, Section 4.</a:t>
             </a:r>
           </a:p>
         </p:txBody>
@@ -6486,18 +6311,13 @@
           <a:p/>
           <a:p>
             <a:r>
-              <a:t>Tie the discussion to A4, F-a-17, and A3, F-a-123.</a:t>
+              <a:t>Tie the discussion to cause 4: tests that pass are not the same as work that is done.</a:t>
             </a:r>
           </a:p>
           <a:p/>
           <a:p>
             <a:r>
-              <a:t>Run sheet: docs/instructor-guide.md, Stage 7: S4 Verification, with the final launched (2:50-3:40).</a:t>
-            </a:r>
-          </a:p>
-          <a:p>
-            <a:r>
-              <a:t>Source: docs/instructor-guide.md (schedule).</a:t>
+              <a:t>Guide: docs/instructor-guide.md, "Section by section", Section 4.</a:t>
             </a:r>
           </a:p>
         </p:txBody>
@@ -6573,28 +6393,28 @@
           <a:p/>
           <a:p>
             <a:r>
-              <a:t>The final A/B was launched on slide 51 and ran during S4. No run starts here. This is the class's</a:t>
-            </a:r>
-          </a:p>
-          <a:p>
-            <a:r>
-              <a:t>measurement lesson: one run per arm cannot show a difference; the pilot ran 3 A/Bs per section per</a:t>
-            </a:r>
-          </a:p>
-          <a:p>
-            <a:r>
-              <a:t>run and still reports "no measurable difference" where the arms tie.</a:t>
+              <a:t>The final A/B was launched on slide 51 and ran during Section 4. No run starts here. This is the</a:t>
+            </a:r>
+          </a:p>
+          <a:p>
+            <a:r>
+              <a:t>class's measurement lesson: one run per arm cannot show a difference. Before class we ran 3 A/Bs per</a:t>
+            </a:r>
+          </a:p>
+          <a:p>
+            <a:r>
+              <a:t>section per round, and still report "no measurable difference" where the arms tie.</a:t>
             </a:r>
           </a:p>
           <a:p/>
           <a:p>
             <a:r>
-              <a:t>Run sheet: docs/instructor-guide.md, Stage 8: Final block and wrap-up (3:40-4:00).</a:t>
-            </a:r>
-          </a:p>
-          <a:p>
-            <a:r>
-              <a:t>Source: Makefile `final`; README.md §10, §13; final-project/README.md §5.1.</a:t>
+              <a:t>Guide: docs/instructor-guide.md, "Section by section", Final results and wrap-up.</a:t>
+            </a:r>
+          </a:p>
+          <a:p>
+            <a:r>
+              <a:t>Source: Makefile `final`; final-project/README.md.</a:t>
             </a:r>
           </a:p>
         </p:txBody>
@@ -6670,43 +6490,38 @@
           <a:p/>
           <a:p>
             <a:r>
-              <a:t>Both arms, side by side. Show tonight's final live; the picture is the quiet run of `make final</a:t>
-            </a:r>
-          </a:p>
-          <a:p>
-            <a:r>
-              <a:t>FEATURES=F5` (captured on 2026-10-17, run ab-20261017-120323-c97138; your output will differ): bare</a:t>
-            </a:r>
-          </a:p>
-          <a:p>
-            <a:r>
-              <a:t>arm completed and claimed done, primary verdict 3:27 and full verdict 6:50 after launch; harness arm</a:t>
-            </a:r>
-          </a:p>
-          <a:p>
-            <a:r>
-              <a:t>hit the agent time limit without a claim, 9:48 and 12:32; hidden tests 46 of 46 and mutants killed 2</a:t>
-            </a:r>
-          </a:p>
-          <a:p>
-            <a:r>
-              <a:t>of 3 in both arms; F5 has no primary measure, so read those counts. The harness arm's second turn</a:t>
-            </a:r>
-          </a:p>
-          <a:p>
-            <a:r>
-              <a:t>read session-handoff.md.</a:t>
+              <a:t>Both arms, side by side. Show tonight's final live. The picture is the timed run before class (your</a:t>
+            </a:r>
+          </a:p>
+          <a:p>
+            <a:r>
+              <a:t>output will differ): the bare arm completed and claimed done, with its verdicts at 3:27 and 6:50.</a:t>
+            </a:r>
+          </a:p>
+          <a:p>
+            <a:r>
+              <a:t>The harness arm hit the agent time limit without a claim, at 9:48 and 12:32. Hidden tests 46 of 46</a:t>
+            </a:r>
+          </a:p>
+          <a:p>
+            <a:r>
+              <a:t>and mutants killed 2 of 3 in both arms. F5 has no primary measure, so read those counts. The harness</a:t>
+            </a:r>
+          </a:p>
+          <a:p>
+            <a:r>
+              <a:t>arm's second turn read session-handoff.md.</a:t>
             </a:r>
           </a:p>
           <a:p/>
           <a:p>
             <a:r>
-              <a:t>Run sheet: docs/instructor-guide.md, Stage 8: Final block and wrap-up (3:40-4:00).</a:t>
-            </a:r>
-          </a:p>
-          <a:p>
-            <a:r>
-              <a:t>Source: README.md §11; final-project/README.md §4.</a:t>
+              <a:t>Guide: docs/instructor-guide.md, "Section by section", Final results and wrap-up.</a:t>
+            </a:r>
+          </a:p>
+          <a:p>
+            <a:r>
+              <a:t>Runs: docs/evidence.md, Captures.</a:t>
             </a:r>
           </a:p>
         </p:txBody>
@@ -6782,28 +6597,23 @@
           <a:p/>
           <a:p>
             <a:r>
-              <a:t>The marks come from trusted data- attributes, not from the agent. In the class-profile round every</a:t>
-            </a:r>
-          </a:p>
-          <a:p>
-            <a:r>
-              <a:t>board showed "✓ only own-org cards, no duplicates", and so did both boards of the quiet final run</a:t>
-            </a:r>
-          </a:p>
-          <a:p>
-            <a:r>
-              <a:t>(captured on 2026-10-17, run ab-20261017-120323-c97138; your output will differ).</a:t>
+              <a:t>The marks come from trusted data attributes, not from the agent. In the class-settings round every</a:t>
+            </a:r>
+          </a:p>
+          <a:p>
+            <a:r>
+              <a:t>board showed "✓ only own-org cards, no duplicates", and so did both boards of the timed final run.</a:t>
             </a:r>
           </a:p>
           <a:p/>
           <a:p>
             <a:r>
-              <a:t>Run sheet: docs/instructor-guide.md, Stage 8: Final block and wrap-up (3:40-4:00).</a:t>
-            </a:r>
-          </a:p>
-          <a:p>
-            <a:r>
-              <a:t>Source: README.md §11 (screen 2).</a:t>
+              <a:t>Guide: docs/instructor-guide.md, "Section by section", Final results and wrap-up.</a:t>
+            </a:r>
+          </a:p>
+          <a:p>
+            <a:r>
+              <a:t>Source: docs/architecture.md (screen 2).</a:t>
             </a:r>
           </a:p>
         </p:txBody>
@@ -6885,12 +6695,12 @@
           <a:p/>
           <a:p>
             <a:r>
-              <a:t>Run sheet: docs/instructor-guide.md, Stage 8: Final block and wrap-up (3:40-4:00).</a:t>
-            </a:r>
-          </a:p>
-          <a:p>
-            <a:r>
-              <a:t>Source: anchor Final:dots; docs/architecture.md §10.</a:t>
+              <a:t>Guide: docs/instructor-guide.md, "Section by section", Final results and wrap-up.</a:t>
+            </a:r>
+          </a:p>
+          <a:p>
+            <a:r>
+              <a:t>Source: anchor Final:dots; docs/architecture.md.</a:t>
             </a:r>
           </a:p>
         </p:txBody>
@@ -6966,69 +6776,64 @@
           <a:p/>
           <a:p>
             <a:r>
-              <a:t>F4: run 3 and the class-profile round (F4 had no run 4). Runs 3 (effort medium) and 4 (effort low),</a:t>
-            </a:r>
-          </a:p>
-          <a:p>
-            <a:r>
-              <a:t>2026-10-16 to 2026-10-17; class-profile round 2026-10-17 (effort low, Fast tier); 3 A/Bs per section</a:t>
-            </a:r>
-          </a:p>
-          <a:p>
-            <a:r>
-              <a:t>per run, 1 in the class-profile round; A/B ids in the notes of slides 20, 33, 47, and 62. The</a:t>
-            </a:r>
-          </a:p>
-          <a:p>
-            <a:r>
-              <a:t>pre-registered gate needed the harness arm ahead in 3 of 4 sections; it was ahead in 0, so the planned</a:t>
-            </a:r>
-          </a:p>
-          <a:p>
-            <a:r>
-              <a:t>experiment batches (M8: 10 runs per arm and leave-one-layer-out) were not run.</a:t>
+              <a:t>S1 to S3 on their own tickets: the medium-effort round, the low-effort round, and the class-settings</a:t>
+            </a:r>
+          </a:p>
+          <a:p>
+            <a:r>
+              <a:t>round. F4: the medium-effort round and the class-settings round. The S3 confirmation: 3 A/Bs,</a:t>
+            </a:r>
+          </a:p>
+          <a:p>
+            <a:r>
+              <a:t>registered before its runs. The gate registered before the medium- and low-effort rounds needed the</a:t>
+            </a:r>
+          </a:p>
+          <a:p>
+            <a:r>
+              <a:t>harness arm ahead in 3 of 4 sections. It was ahead in 0, so the planned larger batches (10 runs per</a:t>
+            </a:r>
+          </a:p>
+          <a:p>
+            <a:r>
+              <a:t>arm, and one layer left out at a time) were not run.</a:t>
             </a:r>
           </a:p>
           <a:p/>
           <a:p>
             <a:r>
-              <a:t>Post hoc, descriptive, runs 2-4 and the live console check: the scope layer ran only in F3 and F4</a:t>
-            </a:r>
-          </a:p>
-          <a:p>
-            <a:r>
-              <a:t>(bare out of scope: F4 6 of 6, F2 3 of 9); tests shipped, median harness 2.5, bare 7.5; arm wall</a:t>
-            </a:r>
-          </a:p>
-          <a:p>
-            <a:r>
-              <a:t>time, median 302 s against 190 s; agent time limit hit, harness 9 of 34, bare 4 of 34; cost per arm,</a:t>
-            </a:r>
-          </a:p>
-          <a:p>
-            <a:r>
-              <a:t>median $0.0123 against $0.0103. What to take home: each piece is a bet on what the model cannot do. A1</a:t>
-            </a:r>
-          </a:p>
-          <a:p>
-            <a:r>
-              <a:t>warns that its own results should "not be assumed to generalize without similar investment"</a:t>
-            </a:r>
-          </a:p>
-          <a:p>
-            <a:r>
-              <a:t>(F-a-143); the same holds here: one model, one task per section, a few runs per arm.</a:t>
+              <a:t>Post hoc, descriptive: tests shipped, median harness 2.5, bare 7.5; arm wall time, median 302 s</a:t>
+            </a:r>
+          </a:p>
+          <a:p>
+            <a:r>
+              <a:t>against 190 s; agent time limit hit, harness 9 of 34, bare 4 of 34; cost per arm, median $0.0123</a:t>
+            </a:r>
+          </a:p>
+          <a:p>
+            <a:r>
+              <a:t>against $0.0103. What to take home: each piece is a bet on what the model cannot do. OpenAI warns</a:t>
+            </a:r>
+          </a:p>
+          <a:p>
+            <a:r>
+              <a:t>that its own results should "not be assumed to generalize without similar investment". The same</a:t>
+            </a:r>
+          </a:p>
+          <a:p>
+            <a:r>
+              <a:t>holds here: one model, one task per section, a few runs per arm.</a:t>
             </a:r>
           </a:p>
           <a:p/>
           <a:p>
             <a:r>
-              <a:t>Run sheet: docs/instructor-guide.md, Stage 8: Final block and wrap-up (3:40-4:00).</a:t>
-            </a:r>
-          </a:p>
-          <a:p>
-            <a:r>
-              <a:t>Source: course pilot runs 2-4 and class-profile round; A1 F-a-143 in REFERENCES.md.</a:t>
+              <a:t>Guide: docs/instructor-guide.md, "Section by section", Final results and wrap-up.</a:t>
+            </a:r>
+          </a:p>
+          <a:p>
+            <a:r>
+              <a:t>Runs: docs/evidence.md, Results.</a:t>
             </a:r>
           </a:p>
         </p:txBody>
@@ -7104,23 +6909,23 @@
           <a:p/>
           <a:p>
             <a:r>
-              <a:t>Learner budgets are course design; the figures are the live-step bounds in README.md §12 and each</a:t>
-            </a:r>
-          </a:p>
-          <a:p>
-            <a:r>
-              <a:t>assignment's "Cost and trace budget".</a:t>
+              <a:t>The budgets are the caps of each assignment's live step. Each assignment folder has a solution/</a:t>
+            </a:r>
+          </a:p>
+          <a:p>
+            <a:r>
+              <a:t>folder with a step-by-step walkthrough. Tell learners to try first.</a:t>
             </a:r>
           </a:p>
           <a:p/>
           <a:p>
             <a:r>
-              <a:t>Run sheet: docs/instructor-guide.md, Stage 8: Final block and wrap-up (3:40-4:00).</a:t>
-            </a:r>
-          </a:p>
-          <a:p>
-            <a:r>
-              <a:t>Source: submodules/01-instructions/assignment/README.md to submodules/04-verification/assignment/README.md; Makefile `check-assignment-N`.</a:t>
+              <a:t>Guide: docs/instructor-guide.md, "Section by section", Final results and wrap-up.</a:t>
+            </a:r>
+          </a:p>
+          <a:p>
+            <a:r>
+              <a:t>Source: 01-instructions/assignment/README.md to 04-verification/assignment/README.md; Makefile `check-assignment-N`.</a:t>
             </a:r>
           </a:p>
         </p:txBody>
@@ -7196,28 +7001,28 @@
           <a:p/>
           <a:p>
             <a:r>
-              <a:t>Run both live. The assessment is read-only and makes no model calls. `make warm` ran before class:</a:t>
-            </a:r>
-          </a:p>
-          <a:p>
-            <a:r>
-              <a:t>it builds the images if their source changed, pages each image in, and caches the referee and gate</a:t>
-            </a:r>
-          </a:p>
-          <a:p>
-            <a:r>
-              <a:t>baselines, so the first launch does not pay for startup.</a:t>
+              <a:t>Run both live. The assessment reads files only and makes no model calls. Before class, the class</a:t>
+            </a:r>
+          </a:p>
+          <a:p>
+            <a:r>
+              <a:t>date was set and `make warm` ran: it builds the images if their source changed, starts each image</a:t>
+            </a:r>
+          </a:p>
+          <a:p>
+            <a:r>
+              <a:t>once, and caches the referee and gate baselines, so the first launch does not pay for start-up.</a:t>
             </a:r>
           </a:p>
           <a:p/>
           <a:p>
             <a:r>
-              <a:t>Run sheet: docs/instructor-guide.md, Stage 3: Opening (0:00-0:10).</a:t>
-            </a:r>
-          </a:p>
-          <a:p>
-            <a:r>
-              <a:t>Source: Makefile `doctor`, `warm`; skills/harness-setup/scripts/assess.py.</a:t>
+              <a:t>Guide: docs/instructor-guide.md, "Thirty minutes before".</a:t>
+            </a:r>
+          </a:p>
+          <a:p>
+            <a:r>
+              <a:t>Source: Makefile `doctor`, `warm`; use-in-your-repo/skills/harness-setup/scripts/assess.py.</a:t>
             </a:r>
           </a:p>
         </p:txBody>
@@ -7293,28 +7098,28 @@
           <a:p/>
           <a:p>
             <a:r>
-              <a:t>The `skill-template` frontmatter from `name` to `license`. The kit copies the AGENTS.md map, the docs/</a:t>
-            </a:r>
-          </a:p>
-          <a:p>
-            <a:r>
-              <a:t>layout, the state files, the feature list and its schema, house-rule check templates, a sandbox</a:t>
-            </a:r>
-          </a:p>
-          <a:p>
-            <a:r>
-              <a:t>policy, a CI workflow, and the four skills into `.claude/skills/` and `.agents/skills/`.</a:t>
+              <a:t>The `skill-template` frontmatter from `name` to `license`. The kit copies the AGENTS.md map, the</a:t>
+            </a:r>
+          </a:p>
+          <a:p>
+            <a:r>
+              <a:t>docs/ layout, the state files, the feature list and its schema, house-rule check templates, a</a:t>
+            </a:r>
+          </a:p>
+          <a:p>
+            <a:r>
+              <a:t>sandbox policy, a CI workflow, and the four skills into `.claude/skills/` and `.agents/skills/`.</a:t>
             </a:r>
           </a:p>
           <a:p/>
           <a:p>
             <a:r>
-              <a:t>Run sheet: docs/instructor-guide.md, Stage 8: Final block and wrap-up (3:40-4:00).</a:t>
-            </a:r>
-          </a:p>
-          <a:p>
-            <a:r>
-              <a:t>Source: B1 in REFERENCES.md; README.md §14; kit/README.md; anchor Final:skill_template.</a:t>
+              <a:t>Guide: docs/instructor-guide.md, "Section by section", Final results and wrap-up.</a:t>
+            </a:r>
+          </a:p>
+          <a:p>
+            <a:r>
+              <a:t>Source: use-in-your-repo/kit/README.md; anchor Final:skill_template.</a:t>
             </a:r>
           </a:p>
         </p:txBody>
@@ -7390,18 +7195,18 @@
           <a:p/>
           <a:p>
             <a:r>
-              <a:t>Full links in REFERENCES.md.</a:t>
+              <a:t>Full links in docs/REFERENCES.md.</a:t>
             </a:r>
           </a:p>
           <a:p/>
           <a:p>
             <a:r>
-              <a:t>Run sheet: docs/instructor-guide.md, Stage 8: Final block and wrap-up (3:40-4:00).</a:t>
-            </a:r>
-          </a:p>
-          <a:p>
-            <a:r>
-              <a:t>Source: REFERENCES.md.</a:t>
+              <a:t>Guide: docs/instructor-guide.md, "Section by section", Final results and wrap-up.</a:t>
+            </a:r>
+          </a:p>
+          <a:p>
+            <a:r>
+              <a:t>Source: docs/REFERENCES.md.</a:t>
             </a:r>
           </a:p>
         </p:txBody>
@@ -7477,18 +7282,18 @@
           <a:p/>
           <a:p>
             <a:r>
-              <a:t>Full links in REFERENCES.md.</a:t>
+              <a:t>Full links in docs/REFERENCES.md.</a:t>
             </a:r>
           </a:p>
           <a:p/>
           <a:p>
             <a:r>
-              <a:t>Run sheet: docs/instructor-guide.md, Stage 8: Final block and wrap-up (3:40-4:00).</a:t>
-            </a:r>
-          </a:p>
-          <a:p>
-            <a:r>
-              <a:t>Source: REFERENCES.md.</a:t>
+              <a:t>Guide: docs/instructor-guide.md, "Section by section", Final results and wrap-up.</a:t>
+            </a:r>
+          </a:p>
+          <a:p>
+            <a:r>
+              <a:t>Source: docs/REFERENCES.md.</a:t>
             </a:r>
           </a:p>
         </p:txBody>
@@ -7564,23 +7369,18 @@
           <a:p/>
           <a:p>
             <a:r>
-              <a:t>The answer comes on slide 20. The 7 runs: pilot run 3 (effort medium), run 4 (effort low), and the</a:t>
-            </a:r>
-          </a:p>
-          <a:p>
-            <a:r>
-              <a:t>class-profile round, all on the F1 trap ticket (trap-legacy-pattern).</a:t>
+              <a:t>The answer comes on slide 20. The 7 runs: the medium-effort round (3), the low-effort round (3),</a:t>
+            </a:r>
+          </a:p>
+          <a:p>
+            <a:r>
+              <a:t>and the class-settings round (1), all on the legacy-pattern ticket.</a:t>
             </a:r>
           </a:p>
           <a:p/>
           <a:p>
             <a:r>
-              <a:t>Run sheet: docs/instructor-guide.md, Stage 4: S1 Instructions (0:10-1:00).</a:t>
-            </a:r>
-          </a:p>
-          <a:p>
-            <a:r>
-              <a:t>Source: submodules/01-instructions/demo/README.md §4.</a:t>
+              <a:t>Guide: docs/instructor-guide.md, "Section by section", Section 1.</a:t>
             </a:r>
           </a:p>
         </p:txBody>
@@ -7656,54 +7456,44 @@
           <a:p/>
           <a:p>
             <a:r>
-              <a:t>Reload the console's run list and open the newest run; stay on screen 1 while the container starts.</a:t>
-            </a:r>
-          </a:p>
-          <a:p>
-            <a:r>
-              <a:t>Why no live A/B here: the pilot showed no gap on F1 (slide 20), so the class shows the layer at work</a:t>
-            </a:r>
-          </a:p>
-          <a:p>
-            <a:r>
-              <a:t>instead, live.</a:t>
+              <a:t>Reload the console's run list and open the newest run. Stay on screen 1 while the container starts.</a:t>
+            </a:r>
+          </a:p>
+          <a:p>
+            <a:r>
+              <a:t>Why no live A/B here: before class F1 showed no gap (slide 20), so the class shows the layer at</a:t>
+            </a:r>
+          </a:p>
+          <a:p>
+            <a:r>
+              <a:t>work instead, live.</a:t>
             </a:r>
           </a:p>
           <a:p/>
           <a:p>
             <a:r>
-              <a:t>Timing reference: in the quiet run of `make show-1` (captured on 2026-10-17, run</a:t>
-            </a:r>
-          </a:p>
-          <a:p>
-            <a:r>
-              <a:t>ab-20261017-112101-c5d839; your output will differ) the primary verdict came 4:11 after launch, the</a:t>
-            </a:r>
-          </a:p>
-          <a:p>
-            <a:r>
-              <a:t>full verdict 10:00 after launch, and the command took 10 min 14 s in all (exit 0). In the</a:t>
-            </a:r>
-          </a:p>
-          <a:p>
-            <a:r>
-              <a:t>class-profile round (A/B ab-20261017-084558-0356a0) the harness arm's primary verdict came 114 s and</a:t>
-            </a:r>
-          </a:p>
-          <a:p>
-            <a:r>
-              <a:t>its full verdict 324 s after launch.</a:t>
+              <a:t>Timing: in a timed run before class (agent time limit then 300 s; now 420 s), the primary verdict</a:t>
+            </a:r>
+          </a:p>
+          <a:p>
+            <a:r>
+              <a:t>came 4:11 after launch and the full verdict 10:00 after launch. Cost $0.0197. Your output will</a:t>
+            </a:r>
+          </a:p>
+          <a:p>
+            <a:r>
+              <a:t>differ. Runs: docs/evidence.md, Captures.</a:t>
             </a:r>
           </a:p>
           <a:p/>
           <a:p>
             <a:r>
-              <a:t>Run sheet: docs/instructor-guide.md, Stage 4: S1 Instructions (0:10-1:00).</a:t>
-            </a:r>
-          </a:p>
-          <a:p>
-            <a:r>
-              <a:t>Source: Makefile `show-1`; README.md §10; teamtrack/reference/f1/task.toml.</a:t>
+              <a:t>Guide: docs/instructor-guide.md, "Section by section", Section 1.</a:t>
+            </a:r>
+          </a:p>
+          <a:p>
+            <a:r>
+              <a:t>Source: Makefile `show-1`; platform/teamtrack/reference/f1/task.toml.</a:t>
             </a:r>
           </a:p>
         </p:txBody>
@@ -10932,7 +10722,7 @@
                 </a:solidFill>
                 <a:latin typeface="Calibri"/>
               </a:rPr>
-              <a:t>Harness Engineering for Coding Agents</a:t>
+              <a:t>Module 1: Harness Engineering for Coding Agents</a:t>
             </a:r>
           </a:p>
         </p:txBody>
@@ -11006,7 +10796,7 @@
                 </a:solidFill>
                 <a:latin typeface="Calibri"/>
               </a:rPr>
-              <a:t>Module 1 · course repository </a:t>
+              <a:t>Course repository </a:t>
             </a:r>
             <a:r>
               <a:rPr sz="2100" b="0">
@@ -11275,7 +11065,7 @@
         <p:spPr>
           <a:xfrm>
             <a:off x="533400" y="1219200"/>
-            <a:ext cx="11125200" cy="2839517"/>
+            <a:ext cx="11125200" cy="2581656"/>
           </a:xfrm>
           <a:prstGeom prst="rect">
             <a:avLst/>
@@ -11290,11 +11080,11 @@
           <a:p>
             <a:pPr algn="l">
               <a:spcAft>
-                <a:spcPts val="918"/>
+                <a:spcPts val="945"/>
               </a:spcAft>
             </a:pPr>
             <a:r>
-              <a:rPr sz="2039" b="0">
+              <a:rPr sz="2100" b="0">
                 <a:solidFill>
                   <a:srgbClr val="111820"/>
                 </a:solidFill>
@@ -11303,23 +11093,23 @@
               <a:t>•  </a:t>
             </a:r>
             <a:r>
-              <a:rPr sz="2039" b="0">
-                <a:solidFill>
-                  <a:srgbClr val="111820"/>
-                </a:solidFill>
-                <a:latin typeface="Calibri"/>
-              </a:rPr>
-              <a:t>Explain why an agent does not apply a rule that exists only outside its context (A1)</a:t>
+              <a:rPr sz="2100" b="0">
+                <a:solidFill>
+                  <a:srgbClr val="111820"/>
+                </a:solidFill>
+                <a:latin typeface="Calibri"/>
+              </a:rPr>
+              <a:t>Why an agent does not apply a rule that lives only outside its context</a:t>
             </a:r>
           </a:p>
           <a:p>
             <a:pPr algn="l">
               <a:spcAft>
-                <a:spcPts val="918"/>
+                <a:spcPts val="945"/>
               </a:spcAft>
             </a:pPr>
             <a:r>
-              <a:rPr sz="2039" b="0">
+              <a:rPr sz="2100" b="0">
                 <a:solidFill>
                   <a:srgbClr val="111820"/>
                 </a:solidFill>
@@ -11328,16 +11118,16 @@
               <a:t>•  </a:t>
             </a:r>
             <a:r>
-              <a:rPr sz="2039" b="0">
-                <a:solidFill>
-                  <a:srgbClr val="111820"/>
-                </a:solidFill>
-                <a:latin typeface="Calibri"/>
-              </a:rPr>
-              <a:t>Structure knowledge as a short AGENTS.md map into </a:t>
-            </a:r>
-            <a:r>
-              <a:rPr sz="2039" b="0">
+              <a:rPr sz="2100" b="0">
+                <a:solidFill>
+                  <a:srgbClr val="111820"/>
+                </a:solidFill>
+                <a:latin typeface="Calibri"/>
+              </a:rPr>
+              <a:t>Knowledge as a short AGENTS.md map into </a:t>
+            </a:r>
+            <a:r>
+              <a:rPr sz="2100" b="0">
                 <a:solidFill>
                   <a:srgbClr val="111820"/>
                 </a:solidFill>
@@ -11346,23 +11136,23 @@
               <a:t>docs/</a:t>
             </a:r>
             <a:r>
-              <a:rPr sz="2039" b="0">
-                <a:solidFill>
-                  <a:srgbClr val="111820"/>
-                </a:solidFill>
-                <a:latin typeface="Calibri"/>
-              </a:rPr>
-              <a:t>, plus one skill with progressive disclosure (B1)</a:t>
+              <a:rPr sz="2100" b="0">
+                <a:solidFill>
+                  <a:srgbClr val="111820"/>
+                </a:solidFill>
+                <a:latin typeface="Calibri"/>
+              </a:rPr>
+              <a:t>, plus skills that load in tiers</a:t>
             </a:r>
           </a:p>
           <a:p>
             <a:pPr algn="l">
               <a:spcAft>
-                <a:spcPts val="918"/>
+                <a:spcPts val="945"/>
               </a:spcAft>
             </a:pPr>
             <a:r>
-              <a:rPr sz="2039" b="0">
+              <a:rPr sz="2100" b="0">
                 <a:solidFill>
                   <a:srgbClr val="111820"/>
                 </a:solidFill>
@@ -11371,23 +11161,23 @@
               <a:t>•  </a:t>
             </a:r>
             <a:r>
-              <a:rPr sz="2039" b="0">
-                <a:solidFill>
-                  <a:srgbClr val="111820"/>
-                </a:solidFill>
-                <a:latin typeface="Calibri"/>
-              </a:rPr>
-              <a:t>Read the S1 result: new R1 violations per run, bare arm against harness arm</a:t>
+              <a:rPr sz="2100" b="0">
+                <a:solidFill>
+                  <a:srgbClr val="111820"/>
+                </a:solidFill>
+                <a:latin typeface="Calibri"/>
+              </a:rPr>
+              <a:t>How to read the S1 result: new R1 violations per run, bare arm against harness arm</a:t>
             </a:r>
           </a:p>
           <a:p>
             <a:pPr algn="l">
               <a:spcAft>
-                <a:spcPts val="918"/>
+                <a:spcPts val="945"/>
               </a:spcAft>
             </a:pPr>
             <a:r>
-              <a:rPr sz="2039" b="0">
+              <a:rPr sz="2100" b="0">
                 <a:solidFill>
                   <a:srgbClr val="111820"/>
                 </a:solidFill>
@@ -11396,7 +11186,7 @@
               <a:t>•  </a:t>
             </a:r>
             <a:r>
-              <a:rPr sz="2039" b="0">
+              <a:rPr sz="2100" b="0">
                 <a:solidFill>
                   <a:srgbClr val="111820"/>
                 </a:solidFill>
@@ -11423,8 +11213,8 @@
         </p:blipFill>
         <p:spPr>
           <a:xfrm>
-            <a:off x="2186814" y="4153967"/>
-            <a:ext cx="7818372" cy="2246833"/>
+            <a:off x="1738171" y="3896106"/>
+            <a:ext cx="8715658" cy="2504694"/>
           </a:xfrm>
           <a:prstGeom prst="rect">
             <a:avLst/>
@@ -12125,7 +11915,7 @@
                 </a:solidFill>
                 <a:latin typeface="Calibri"/>
               </a:rPr>
-              <a:t>"anything it can’t access in-context while running effectively doesn’t exist" (A1, F-a-05)</a:t>
+              <a:t>"anything it can’t access in-context while running effectively doesn’t exist"</a:t>
             </a:r>
           </a:p>
           <a:p>
@@ -12150,7 +11940,7 @@
                 </a:solidFill>
                 <a:latin typeface="Calibri"/>
               </a:rPr>
-              <a:t>"A giant instruction file crowds out the task, the code, and the relevant docs" (A1, F-a-23)</a:t>
+              <a:t>"A giant instruction file crowds out the task, the code, and the relevant docs"</a:t>
             </a:r>
           </a:p>
           <a:p>
@@ -12175,7 +11965,7 @@
                 </a:solidFill>
                 <a:latin typeface="Calibri"/>
               </a:rPr>
-              <a:t>"Too much guidance becomes non-guidance." (A1, F-a-24)</a:t>
+              <a:t>"Too much guidance becomes non-guidance."</a:t>
             </a:r>
           </a:p>
           <a:p>
@@ -12200,7 +11990,7 @@
                 </a:solidFill>
                 <a:latin typeface="Calibri"/>
               </a:rPr>
-              <a:t>A long manual goes stale and cannot be checked mechanically (A1, F-a-25, F-a-26)</a:t>
+              <a:t>A long manual goes stale, and no check can keep it true</a:t>
             </a:r>
           </a:p>
           <a:p>
@@ -12225,7 +12015,7 @@
                 </a:solidFill>
                 <a:latin typeface="Calibri"/>
               </a:rPr>
-              <a:t>Agents copy existing patterns, including uneven ones (A1, F-a-20)</a:t>
+              <a:t>Agents copy patterns that already exist, even uneven ones</a:t>
             </a:r>
           </a:p>
         </p:txBody>
@@ -12519,7 +12309,7 @@
                 </a:solidFill>
                 <a:latin typeface="Calibri"/>
               </a:rPr>
-              <a:t>"roughly 100 lines", "a map", "the table of contents" (A1, F-a-22, F-a-27, F-a-28)</a:t>
+              <a:t>"roughly 100 lines", "a map", "the table of contents" (OpenAI)</a:t>
             </a:r>
           </a:p>
           <a:p>
@@ -12553,7 +12343,7 @@
                 </a:solidFill>
                 <a:latin typeface="Calibri"/>
               </a:rPr>
-              <a:t> is the system of record (A1, F-a-29, F-a-30)</a:t>
+              <a:t> is the system of record</a:t>
             </a:r>
           </a:p>
           <a:p>
@@ -12578,7 +12368,7 @@
                 </a:solidFill>
                 <a:latin typeface="Calibri"/>
               </a:rPr>
-              <a:t>A1's layout: ARCHITECTURE.md at the root; SECURITY.md, RELIABILITY.md, QUALITY_SCORE.md, PLANS.md in docs/</a:t>
+              <a:t>OpenAI's layout: ARCHITECTURE.md at the root; SECURITY.md, RELIABILITY.md, QUALITY_SCORE.md, PLANS.md in docs/</a:t>
             </a:r>
           </a:p>
           <a:p>
@@ -12603,7 +12393,7 @@
                 </a:solidFill>
                 <a:latin typeface="Calibri"/>
               </a:rPr>
-              <a:t>Also in docs/: design-docs/, product-specs/, references/ (A1, F-a-30, F-a-31)</a:t>
+              <a:t>Also in docs/: design-docs/, product-specs/, references/</a:t>
             </a:r>
           </a:p>
         </p:txBody>
@@ -12897,7 +12687,7 @@
                 </a:solidFill>
                 <a:latin typeface="Calibri"/>
               </a:rPr>
-              <a:t>Docs: "agents start with a small, stable entry point and are taught where to look next" (A1, F-a-36)</a:t>
+              <a:t>Docs: "agents start with a small, stable entry point and are taught where to look next" (OpenAI)</a:t>
             </a:r>
           </a:p>
           <a:p>
@@ -12922,7 +12712,7 @@
                 </a:solidFill>
                 <a:latin typeface="Calibri"/>
               </a:rPr>
-              <a:t>Skills, three tiers: "Metadata (~100 tokens)", "Instructions (&lt; 5000 tokens recommended)", "Resources (as needed)"</a:t>
+              <a:t>Skills load in three tiers: name and description, then the instructions, then resources</a:t>
             </a:r>
           </a:p>
           <a:p>
@@ -12947,7 +12737,7 @@
                 </a:solidFill>
                 <a:latin typeface="Calibri"/>
               </a:rPr>
-              <a:t>Tiers from B1 and B2 (F-b-05, F-b-06)</a:t>
+              <a:t>Tier sizes from the Agent Skills spec: "&lt; 5000 tokens recommended" for the instructions</a:t>
             </a:r>
           </a:p>
           <a:p>
@@ -13000,15 +12790,6 @@
                 <a:latin typeface="Consolas"/>
               </a:rPr>
               <a:t>description</a:t>
-            </a:r>
-            <a:r>
-              <a:rPr sz="2100" b="0">
-                <a:solidFill>
-                  <a:srgbClr val="111820"/>
-                </a:solidFill>
-                <a:latin typeface="Calibri"/>
-              </a:rPr>
-              <a:t> (F-b-01 to F-b-04)</a:t>
             </a:r>
           </a:p>
         </p:txBody>
@@ -13302,7 +13083,7 @@
                 </a:solidFill>
                 <a:latin typeface="Calibri"/>
               </a:rPr>
-              <a:t>Docs are checked mechanically by linters and CI jobs (A1, F-a-37)</a:t>
+              <a:t>Linters and CI jobs check the docs (OpenAI)</a:t>
             </a:r>
           </a:p>
           <a:p>
@@ -13327,7 +13108,7 @@
                 </a:solidFill>
                 <a:latin typeface="Calibri"/>
               </a:rPr>
-              <a:t>Lint messages that teach: the error carries the fix into the agent's context (A1, F-a-97)</a:t>
+              <a:t>Lint messages that teach: the error carries the fix into the agent's context</a:t>
             </a:r>
           </a:p>
           <a:p>
@@ -13997,7 +13778,7 @@
                 </a:solidFill>
                 <a:latin typeface="Consolas"/>
               </a:rPr>
-              <a:t>teamtrack/harness/instructions/AGENTS.md</a:t>
+              <a:t>platform/teamtrack/harness/instructions/AGENTS.md</a:t>
             </a:r>
           </a:p>
         </p:txBody>
@@ -14257,7 +14038,7 @@
         <p:spPr>
           <a:xfrm>
             <a:off x="533400" y="1219200"/>
-            <a:ext cx="11125200" cy="949452"/>
+            <a:ext cx="11125200" cy="1290828"/>
           </a:xfrm>
           <a:prstGeom prst="rect">
             <a:avLst/>
@@ -14325,7 +14106,7 @@
                 </a:solidFill>
                 <a:latin typeface="Calibri"/>
               </a:rPr>
-              <a:t>The full SKILL.md is never pre-loaded; the agent reads it when the task matches</a:t>
+              <a:t>The full SKILL.md is never loaded up front; the agent reads it when the task matches</a:t>
             </a:r>
           </a:p>
         </p:txBody>
@@ -14338,7 +14119,7 @@
         </p:nvSpPr>
         <p:spPr>
           <a:xfrm>
-            <a:off x="533400" y="2263902"/>
+            <a:off x="533400" y="2605278"/>
             <a:ext cx="11125200" cy="2435162"/>
           </a:xfrm>
           <a:prstGeom prst="rect">
@@ -14384,7 +14165,7 @@
         </p:nvSpPr>
         <p:spPr>
           <a:xfrm>
-            <a:off x="533400" y="2263902"/>
+            <a:off x="533400" y="2605278"/>
             <a:ext cx="57150" cy="2435162"/>
           </a:xfrm>
           <a:prstGeom prst="rect">
@@ -14428,7 +14209,7 @@
         </p:nvSpPr>
         <p:spPr>
           <a:xfrm>
-            <a:off x="704850" y="2359152"/>
+            <a:off x="704850" y="2700528"/>
             <a:ext cx="10858500" cy="2282762"/>
           </a:xfrm>
           <a:prstGeom prst="rect">
@@ -14559,7 +14340,7 @@
         </p:nvSpPr>
         <p:spPr>
           <a:xfrm>
-            <a:off x="533400" y="4718114"/>
+            <a:off x="533400" y="5059490"/>
             <a:ext cx="11125200" cy="209550"/>
           </a:xfrm>
           <a:prstGeom prst="rect">
@@ -14581,7 +14362,7 @@
                 </a:solidFill>
                 <a:latin typeface="Consolas"/>
               </a:rPr>
-              <a:t>src/shipharness/runner/skills_loader.py</a:t>
+              <a:t>platform/src/shipharness/runner/skills_loader.py</a:t>
             </a:r>
           </a:p>
         </p:txBody>
@@ -15168,7 +14949,7 @@
                 </a:solidFill>
                 <a:latin typeface="Consolas"/>
               </a:rPr>
-              <a:t>src/shipharness/harness/instructions/router.py</a:t>
+              <a:t>platform/src/shipharness/harness/instructions/router.py</a:t>
             </a:r>
           </a:p>
         </p:txBody>
@@ -15428,7 +15209,7 @@
         <p:spPr>
           <a:xfrm>
             <a:off x="533400" y="1219200"/>
-            <a:ext cx="11125200" cy="2229707"/>
+            <a:ext cx="11125200" cy="1765554"/>
           </a:xfrm>
           <a:prstGeom prst="rect">
             <a:avLst/>
@@ -15443,11 +15224,11 @@
           <a:p>
             <a:pPr algn="l">
               <a:spcAft>
-                <a:spcPts val="860"/>
+                <a:spcPts val="945"/>
               </a:spcAft>
             </a:pPr>
             <a:r>
-              <a:rPr sz="1912" b="0">
+              <a:rPr sz="2100" b="0">
                 <a:solidFill>
                   <a:srgbClr val="111820"/>
                 </a:solidFill>
@@ -15456,7 +15237,7 @@
               <a:t>•  </a:t>
             </a:r>
             <a:r>
-              <a:rPr sz="1912" b="0">
+              <a:rPr sz="2100" b="0">
                 <a:solidFill>
                   <a:srgbClr val="111820"/>
                 </a:solidFill>
@@ -15468,11 +15249,11 @@
           <a:p>
             <a:pPr algn="l">
               <a:spcAft>
-                <a:spcPts val="860"/>
+                <a:spcPts val="945"/>
               </a:spcAft>
             </a:pPr>
             <a:r>
-              <a:rPr sz="1912" b="0">
+              <a:rPr sz="2100" b="0">
                 <a:solidFill>
                   <a:srgbClr val="111820"/>
                 </a:solidFill>
@@ -15481,23 +15262,23 @@
               <a:t>•  </a:t>
             </a:r>
             <a:r>
-              <a:rPr sz="1912" b="0">
-                <a:solidFill>
-                  <a:srgbClr val="111820"/>
-                </a:solidFill>
-                <a:latin typeface="Calibri"/>
-              </a:rPr>
-              <a:t>Screen 3: files read and the diff map; screen 2: the board ("✓ only own-org cards"); screen 5: trace links</a:t>
+              <a:rPr sz="2100" b="0">
+                <a:solidFill>
+                  <a:srgbClr val="111820"/>
+                </a:solidFill>
+                <a:latin typeface="Calibri"/>
+              </a:rPr>
+              <a:t>Screen 3: files read and the diff map; screen 2: the board; screen 5: trace links</a:t>
             </a:r>
           </a:p>
           <a:p>
             <a:pPr algn="l">
               <a:spcAft>
-                <a:spcPts val="860"/>
+                <a:spcPts val="945"/>
               </a:spcAft>
             </a:pPr>
             <a:r>
-              <a:rPr sz="1912" b="0">
+              <a:rPr sz="2100" b="0">
                 <a:solidFill>
                   <a:srgbClr val="111820"/>
                 </a:solidFill>
@@ -15506,13 +15287,31 @@
               <a:t>•  </a:t>
             </a:r>
             <a:r>
-              <a:rPr sz="1912" b="0">
-                <a:solidFill>
-                  <a:srgbClr val="111820"/>
-                </a:solidFill>
-                <a:latin typeface="Calibri"/>
-              </a:rPr>
-              <a:t>Console screens 1 and 2 (show-1), captured on 2026-10-17, run ab-20261017-112101-c5d839; your output will differ</a:t>
+              <a:rPr sz="2100" b="0">
+                <a:solidFill>
+                  <a:srgbClr val="111820"/>
+                </a:solidFill>
+                <a:latin typeface="Calibri"/>
+              </a:rPr>
+              <a:t>Picture: screens 1 and 2 of a timed run of </a:t>
+            </a:r>
+            <a:r>
+              <a:rPr sz="2100" b="0">
+                <a:solidFill>
+                  <a:srgbClr val="111820"/>
+                </a:solidFill>
+                <a:latin typeface="Consolas"/>
+              </a:rPr>
+              <a:t>make show-1</a:t>
+            </a:r>
+            <a:r>
+              <a:rPr sz="2100" b="0">
+                <a:solidFill>
+                  <a:srgbClr val="111820"/>
+                </a:solidFill>
+                <a:latin typeface="Calibri"/>
+              </a:rPr>
+              <a:t> before class</a:t>
             </a:r>
           </a:p>
         </p:txBody>
@@ -15533,8 +15332,8 @@
         </p:blipFill>
         <p:spPr>
           <a:xfrm>
-            <a:off x="2911123" y="3544157"/>
-            <a:ext cx="6369755" cy="2380393"/>
+            <a:off x="2290103" y="3080004"/>
+            <a:ext cx="7611794" cy="2844546"/>
           </a:xfrm>
           <a:prstGeom prst="rect">
             <a:avLst/>
@@ -16289,7 +16088,7 @@
         <p:spPr>
           <a:xfrm>
             <a:off x="533400" y="1219200"/>
-            <a:ext cx="11125200" cy="3094387"/>
+            <a:ext cx="11125200" cy="2373630"/>
           </a:xfrm>
           <a:prstGeom prst="rect">
             <a:avLst/>
@@ -16304,11 +16103,11 @@
           <a:p>
             <a:pPr algn="l">
               <a:spcAft>
-                <a:spcPts val="860"/>
+                <a:spcPts val="945"/>
               </a:spcAft>
             </a:pPr>
             <a:r>
-              <a:rPr sz="1912" b="0">
+              <a:rPr sz="2100" b="0">
                 <a:solidFill>
                   <a:srgbClr val="111820"/>
                 </a:solidFill>
@@ -16317,23 +16116,23 @@
               <a:t>•  </a:t>
             </a:r>
             <a:r>
-              <a:rPr sz="1912" b="0">
-                <a:solidFill>
-                  <a:srgbClr val="111820"/>
-                </a:solidFill>
-                <a:latin typeface="Calibri"/>
-              </a:rPr>
-              <a:t>show-1 in the quiet run: 0 new R1 violations (passes), hidden tests 52 of 52, mutants killed 2 of 4</a:t>
+              <a:rPr sz="2100" b="0">
+                <a:solidFill>
+                  <a:srgbClr val="111820"/>
+                </a:solidFill>
+                <a:latin typeface="Calibri"/>
+              </a:rPr>
+              <a:t>The timed run: no new R1 violation; hidden tests 52 of 52; mutants 2 of 4</a:t>
             </a:r>
           </a:p>
           <a:p>
             <a:pPr algn="l">
               <a:spcAft>
-                <a:spcPts val="860"/>
+                <a:spcPts val="945"/>
               </a:spcAft>
             </a:pPr>
             <a:r>
-              <a:rPr sz="1912" b="0">
+              <a:rPr sz="2100" b="0">
                 <a:solidFill>
                   <a:srgbClr val="111820"/>
                 </a:solidFill>
@@ -16342,23 +16141,23 @@
               <a:t>•  </a:t>
             </a:r>
             <a:r>
-              <a:rPr sz="1912" b="0">
-                <a:solidFill>
-                  <a:srgbClr val="111820"/>
-                </a:solidFill>
-                <a:latin typeface="Calibri"/>
-              </a:rPr>
-              <a:t>One harness arm on one run shows the layer ran, not that it helped: that takes the A/B</a:t>
+              <a:rPr sz="2100" b="0">
+                <a:solidFill>
+                  <a:srgbClr val="111820"/>
+                </a:solidFill>
+                <a:latin typeface="Calibri"/>
+              </a:rPr>
+              <a:t>One run shows the layer ran, not that it helped</a:t>
             </a:r>
           </a:p>
           <a:p>
             <a:pPr algn="l">
               <a:spcAft>
-                <a:spcPts val="860"/>
+                <a:spcPts val="945"/>
               </a:spcAft>
             </a:pPr>
             <a:r>
-              <a:rPr sz="1912" b="0">
+              <a:rPr sz="2100" b="0">
                 <a:solidFill>
                   <a:srgbClr val="111820"/>
                 </a:solidFill>
@@ -16367,23 +16166,23 @@
               <a:t>•  </a:t>
             </a:r>
             <a:r>
-              <a:rPr sz="1912" b="0">
-                <a:solidFill>
-                  <a:srgbClr val="111820"/>
-                </a:solidFill>
-                <a:latin typeface="Calibri"/>
-              </a:rPr>
-              <a:t>Pilot, any new R1 violation fails: bare 0 of 7 failing, harness 0 of 7 (poll answer: A)</a:t>
+              <a:rPr sz="2100" b="0">
+                <a:solidFill>
+                  <a:srgbClr val="111820"/>
+                </a:solidFill>
+                <a:latin typeface="Calibri"/>
+              </a:rPr>
+              <a:t>Before class: bare 0 of 7 failing, harness 0 of 7 (poll answer: A)</a:t>
             </a:r>
           </a:p>
           <a:p>
             <a:pPr algn="l">
               <a:spcAft>
-                <a:spcPts val="860"/>
+                <a:spcPts val="945"/>
               </a:spcAft>
             </a:pPr>
             <a:r>
-              <a:rPr sz="1912" b="0">
+              <a:rPr sz="2100" b="0">
                 <a:solidFill>
                   <a:srgbClr val="111820"/>
                 </a:solidFill>
@@ -16392,23 +16191,23 @@
               <a:t>•  </a:t>
             </a:r>
             <a:r>
-              <a:rPr sz="1912" b="0">
-                <a:solidFill>
-                  <a:srgbClr val="111820"/>
-                </a:solidFill>
-                <a:latin typeface="Calibri"/>
-              </a:rPr>
-              <a:t>No measurable difference on this task with this model: the bare arm applied R1 without the map</a:t>
+              <a:rPr sz="2100" b="0">
+                <a:solidFill>
+                  <a:srgbClr val="111820"/>
+                </a:solidFill>
+                <a:latin typeface="Calibri"/>
+              </a:rPr>
+              <a:t>No measurable difference: the bare arm applied R1 without the map</a:t>
             </a:r>
           </a:p>
           <a:p>
             <a:pPr algn="l">
               <a:spcAft>
-                <a:spcPts val="860"/>
+                <a:spcPts val="945"/>
               </a:spcAft>
             </a:pPr>
             <a:r>
-              <a:rPr sz="1912" b="0">
+              <a:rPr sz="2100" b="0">
                 <a:solidFill>
                   <a:srgbClr val="111820"/>
                 </a:solidFill>
@@ -16417,13 +16216,13 @@
               <a:t>•  </a:t>
             </a:r>
             <a:r>
-              <a:rPr sz="1912" b="0">
-                <a:solidFill>
-                  <a:srgbClr val="111820"/>
-                </a:solidFill>
-                <a:latin typeface="Calibri"/>
-              </a:rPr>
-              <a:t>Console screen 3 (show-1), captured on 2026-10-17, run ab-20261017-112101-c5d839; your output will differ</a:t>
+              <a:rPr sz="2100" b="0">
+                <a:solidFill>
+                  <a:srgbClr val="111820"/>
+                </a:solidFill>
+                <a:latin typeface="Calibri"/>
+              </a:rPr>
+              <a:t>Picture: screen 3 of the same run</a:t>
             </a:r>
           </a:p>
         </p:txBody>
@@ -16444,8 +16243,8 @@
         </p:blipFill>
         <p:spPr>
           <a:xfrm>
-            <a:off x="2368834" y="4408837"/>
-            <a:ext cx="7454332" cy="1991963"/>
+            <a:off x="1020225" y="3688080"/>
+            <a:ext cx="10151551" cy="2712720"/>
           </a:xfrm>
           <a:prstGeom prst="rect">
             <a:avLst/>
@@ -16750,7 +16549,7 @@
                 </a:solidFill>
                 <a:latin typeface="Consolas"/>
               </a:rPr>
-              <a:t>submodules/01-instructions/demo/README.md</a:t>
+              <a:t>01-instructions/demo/README.md</a:t>
             </a:r>
           </a:p>
           <a:p>
@@ -16775,7 +16574,7 @@
                 </a:solidFill>
                 <a:latin typeface="Calibri"/>
               </a:rPr>
-              <a:t>Discussion: the map changed nothing on this ticket. What would have to be true of a model or a ticket for it to earn its place?</a:t>
+              <a:t>Discussion: the map changed nothing on this ticket. What would have to be true for it to earn its place?</a:t>
             </a:r>
           </a:p>
           <a:p>
@@ -17119,7 +16918,7 @@
                 </a:solidFill>
                 <a:latin typeface="Calibri"/>
               </a:rPr>
-              <a:t>In the pilot both arms stopped after 12 turns and restarted with an empty context</a:t>
+              <a:t>Before class, both arms stopped after 12 turns and restarted with an empty context</a:t>
             </a:r>
           </a:p>
           <a:p>
@@ -17535,7 +17334,7 @@
         <p:spPr>
           <a:xfrm>
             <a:off x="533400" y="1219200"/>
-            <a:ext cx="11125200" cy="2923032"/>
+            <a:ext cx="11125200" cy="2581656"/>
           </a:xfrm>
           <a:prstGeom prst="rect">
             <a:avLst/>
@@ -17587,7 +17386,7 @@
                 </a:solidFill>
                 <a:latin typeface="Calibri"/>
               </a:rPr>
-              <a:t> in terminal B; it runs during slides 24-31, back on slide 32</a:t>
+              <a:t> in terminal B; back on slide 32</a:t>
             </a:r>
           </a:p>
           <a:p>
@@ -17683,7 +17482,7 @@
         </p:blipFill>
         <p:spPr>
           <a:xfrm>
-            <a:off x="533400" y="4989485"/>
+            <a:off x="533400" y="4818797"/>
             <a:ext cx="11125200" cy="659312"/>
           </a:xfrm>
           <a:prstGeom prst="rect">
@@ -17946,7 +17745,7 @@
         <p:spPr>
           <a:xfrm>
             <a:off x="533400" y="1219200"/>
-            <a:ext cx="11125200" cy="3171139"/>
+            <a:ext cx="11125200" cy="2240280"/>
           </a:xfrm>
           <a:prstGeom prst="rect">
             <a:avLst/>
@@ -17961,11 +17760,11 @@
           <a:p>
             <a:pPr algn="l">
               <a:spcAft>
-                <a:spcPts val="918"/>
+                <a:spcPts val="945"/>
               </a:spcAft>
             </a:pPr>
             <a:r>
-              <a:rPr sz="2039" b="0">
+              <a:rPr sz="2100" b="0">
                 <a:solidFill>
                   <a:srgbClr val="111820"/>
                 </a:solidFill>
@@ -17974,16 +17773,16 @@
               <a:t>•  </a:t>
             </a:r>
             <a:r>
-              <a:rPr sz="2039" b="0">
-                <a:solidFill>
-                  <a:srgbClr val="111820"/>
-                </a:solidFill>
-                <a:latin typeface="Calibri"/>
-              </a:rPr>
-              <a:t>Describe the initializer and coding agents, </a:t>
-            </a:r>
-            <a:r>
-              <a:rPr sz="2039" b="0">
+              <a:rPr sz="2100" b="0">
+                <a:solidFill>
+                  <a:srgbClr val="111820"/>
+                </a:solidFill>
+                <a:latin typeface="Calibri"/>
+              </a:rPr>
+              <a:t>The initializer and coding agents, </a:t>
+            </a:r>
+            <a:r>
+              <a:rPr sz="2100" b="0">
                 <a:solidFill>
                   <a:srgbClr val="111820"/>
                 </a:solidFill>
@@ -17992,23 +17791,23 @@
               <a:t>init.sh</a:t>
             </a:r>
             <a:r>
-              <a:rPr sz="2039" b="0">
-                <a:solidFill>
-                  <a:srgbClr val="111820"/>
-                </a:solidFill>
-                <a:latin typeface="Calibri"/>
-              </a:rPr>
-              <a:t>, the progress file, and git history (A2)</a:t>
+              <a:rPr sz="2100" b="0">
+                <a:solidFill>
+                  <a:srgbClr val="111820"/>
+                </a:solidFill>
+                <a:latin typeface="Calibri"/>
+              </a:rPr>
+              <a:t>, the progress file, and git history</a:t>
             </a:r>
           </a:p>
           <a:p>
             <a:pPr algn="l">
               <a:spcAft>
-                <a:spcPts val="918"/>
+                <a:spcPts val="945"/>
               </a:spcAft>
             </a:pPr>
             <a:r>
-              <a:rPr sz="2039" b="0">
+              <a:rPr sz="2100" b="0">
                 <a:solidFill>
                   <a:srgbClr val="111820"/>
                 </a:solidFill>
@@ -18017,23 +17816,23 @@
               <a:t>•  </a:t>
             </a:r>
             <a:r>
-              <a:rPr sz="2039" b="0">
-                <a:solidFill>
-                  <a:srgbClr val="111820"/>
-                </a:solidFill>
-                <a:latin typeface="Calibri"/>
-              </a:rPr>
-              <a:t>Design an exec plan (A1, A7) and a structured handoff (A3) that let a session resume after a reset</a:t>
+              <a:rPr sz="2100" b="0">
+                <a:solidFill>
+                  <a:srgbClr val="111820"/>
+                </a:solidFill>
+                <a:latin typeface="Calibri"/>
+              </a:rPr>
+              <a:t>An exec plan and a structured handoff that let a session resume after a reset</a:t>
             </a:r>
           </a:p>
           <a:p>
             <a:pPr algn="l">
               <a:spcAft>
-                <a:spcPts val="918"/>
+                <a:spcPts val="945"/>
               </a:spcAft>
             </a:pPr>
             <a:r>
-              <a:rPr sz="2039" b="0">
+              <a:rPr sz="2100" b="0">
                 <a:solidFill>
                   <a:srgbClr val="111820"/>
                 </a:solidFill>
@@ -18042,23 +17841,23 @@
               <a:t>•  </a:t>
             </a:r>
             <a:r>
-              <a:rPr sz="2039" b="0">
-                <a:solidFill>
-                  <a:srgbClr val="111820"/>
-                </a:solidFill>
-                <a:latin typeface="Calibri"/>
-              </a:rPr>
-              <a:t>Read the S2 result: redone or lost work and migration-head conflicts after a forced stop</a:t>
+              <a:rPr sz="2100" b="0">
+                <a:solidFill>
+                  <a:srgbClr val="111820"/>
+                </a:solidFill>
+                <a:latin typeface="Calibri"/>
+              </a:rPr>
+              <a:t>How to read the S2 result: redone or lost work after a forced stop</a:t>
             </a:r>
           </a:p>
           <a:p>
             <a:pPr algn="l">
               <a:spcAft>
-                <a:spcPts val="918"/>
+                <a:spcPts val="945"/>
               </a:spcAft>
             </a:pPr>
             <a:r>
-              <a:rPr sz="2039" b="0">
+              <a:rPr sz="2100" b="0">
                 <a:solidFill>
                   <a:srgbClr val="111820"/>
                 </a:solidFill>
@@ -18067,7 +17866,7 @@
               <a:t>•  </a:t>
             </a:r>
             <a:r>
-              <a:rPr sz="2039" b="0">
+              <a:rPr sz="2100" b="0">
                 <a:solidFill>
                   <a:srgbClr val="111820"/>
                 </a:solidFill>
@@ -18094,8 +17893,8 @@
         </p:blipFill>
         <p:spPr>
           <a:xfrm>
-            <a:off x="2763792" y="4485589"/>
-            <a:ext cx="6664416" cy="1915211"/>
+            <a:off x="1144223" y="3554730"/>
+            <a:ext cx="9903554" cy="2846070"/>
           </a:xfrm>
           <a:prstGeom prst="rect">
             <a:avLst/>
@@ -18391,7 +18190,7 @@
                 </a:solidFill>
                 <a:latin typeface="Calibri"/>
               </a:rPr>
-              <a:t>"each new session begins with no memory of what came before." (A2, F-a-08)</a:t>
+              <a:t>"each new session begins with no memory of what came before." (Anthropic, Effective harnesses)</a:t>
             </a:r>
           </a:p>
           <a:p>
@@ -18416,7 +18215,7 @@
                 </a:solidFill>
                 <a:latin typeface="Calibri"/>
               </a:rPr>
-              <a:t>"However, compaction isn’t sufficient." (A2, F-a-54, F-a-55)</a:t>
+              <a:t>"However, compaction isn’t sufficient." (same source)</a:t>
             </a:r>
           </a:p>
           <a:p>
@@ -18441,7 +18240,7 @@
                 </a:solidFill>
                 <a:latin typeface="Calibri"/>
               </a:rPr>
-              <a:t>What the last session knew must be written down somewhere the next one reads</a:t>
+              <a:t>What the last session knew must be written down where the next one reads it</a:t>
             </a:r>
           </a:p>
         </p:txBody>
@@ -18735,7 +18534,7 @@
                 </a:solidFill>
                 <a:latin typeface="Calibri"/>
               </a:rPr>
-              <a:t>An initializer agent and a coding agent (A2, F-a-49, F-a-52)</a:t>
+              <a:t>An initializer agent and a coding agent (Anthropic, Effective harnesses)</a:t>
             </a:r>
           </a:p>
           <a:p>
@@ -18769,7 +18568,7 @@
                 </a:solidFill>
                 <a:latin typeface="Calibri"/>
               </a:rPr>
-              <a:t> (F-a-50) and a progress file (F-a-50, F-a-53); the course names it </a:t>
+              <a:t> and a progress file; the course names it </a:t>
             </a:r>
             <a:r>
               <a:rPr sz="2100" b="0">
@@ -18803,7 +18602,7 @@
                 </a:solidFill>
                 <a:latin typeface="Calibri"/>
               </a:rPr>
-              <a:t>Git history as state and as a way back (F-a-53, F-a-57)</a:t>
+              <a:t>Git history as state, and as a way back</a:t>
             </a:r>
           </a:p>
           <a:p>
@@ -18828,7 +18627,7 @@
                 </a:solidFill>
                 <a:latin typeface="Calibri"/>
               </a:rPr>
-              <a:t>Course design: the initializer is a deterministic harness step</a:t>
+              <a:t>In this course, the initializer is a fixed harness step, not an agent</a:t>
             </a:r>
           </a:p>
         </p:txBody>
@@ -19122,7 +18921,7 @@
                 </a:solidFill>
                 <a:latin typeface="Calibri"/>
               </a:rPr>
-              <a:t>A2's routine: </a:t>
+              <a:t>The routine: </a:t>
             </a:r>
             <a:r>
               <a:rPr sz="2100" b="0">
@@ -19158,7 +18957,7 @@
                 </a:solidFill>
                 <a:latin typeface="Calibri"/>
               </a:rPr>
-              <a:t>, a basic test (F-a-58 to F-a-62)</a:t>
+              <a:t>, a basic test</a:t>
             </a:r>
           </a:p>
           <a:p>
@@ -19183,7 +18982,7 @@
                 </a:solidFill>
                 <a:latin typeface="Calibri"/>
               </a:rPr>
-              <a:t>"End the session by writing a git commit and progress update." (F-a-63)</a:t>
+              <a:t>"End the session by writing a git commit and progress update." (Anthropic, Effective harnesses)</a:t>
             </a:r>
           </a:p>
           <a:p>
@@ -19208,7 +19007,7 @@
                 </a:solidFill>
                 <a:latin typeface="Calibri"/>
               </a:rPr>
-              <a:t>Both steps are the same every session</a:t>
+              <a:t>Both steps are the same in every session</a:t>
             </a:r>
           </a:p>
         </p:txBody>
@@ -19502,7 +19301,7 @@
                 </a:solidFill>
                 <a:latin typeface="Calibri"/>
               </a:rPr>
-              <a:t>Exec plans move from active to completed (A1, A7; F-a-34, F-a-35, F-a-45 to F-a-48)</a:t>
+              <a:t>Exec plans move from active to completed (OpenAI; OpenAI, PLANS.md)</a:t>
             </a:r>
           </a:p>
           <a:p>
@@ -19527,7 +19326,7 @@
                 </a:solidFill>
                 <a:latin typeface="Calibri"/>
               </a:rPr>
-              <a:t>A3's context reset: a fresh agent "combined with a structured handoff" (F-a-65)</a:t>
+              <a:t>A context reset: a fresh agent "combined with a structured handoff" (Anthropic, Harness design)</a:t>
             </a:r>
           </a:p>
           <a:p>
@@ -19552,7 +19351,7 @@
                 </a:solidFill>
                 <a:latin typeface="Calibri"/>
               </a:rPr>
-              <a:t>The course mechanism is the session turn budget, the same for both arms</a:t>
+              <a:t>The course's mechanism is the session turn budget, the same for both arms</a:t>
             </a:r>
           </a:p>
           <a:p>
@@ -19577,7 +19376,7 @@
                 </a:solidFill>
                 <a:latin typeface="Calibri"/>
               </a:rPr>
-              <a:t>A reset has a price: "orchestration complexity, token overhead, and latency" (A3, F-a-68)</a:t>
+              <a:t>A reset has a price: "orchestration complexity, token overhead, and latency"</a:t>
             </a:r>
           </a:p>
           <a:p>
@@ -19602,7 +19401,7 @@
                 </a:solidFill>
                 <a:latin typeface="Calibri"/>
               </a:rPr>
-              <a:t>"Opus 4.5 largely removed that behavior on its own, so I was able to drop context resets from this harness entirely." (A3, F-a-69)</a:t>
+              <a:t>Later, a newer model "largely removed that behavior", so the author dropped context resets</a:t>
             </a:r>
           </a:p>
         </p:txBody>
@@ -20132,7 +19931,7 @@
                 </a:solidFill>
                 <a:latin typeface="Consolas"/>
               </a:rPr>
-              <a:t>src/shipharness/harness/state/assets/init.sh</a:t>
+              <a:t>platform/src/shipharness/harness/state/assets/init.sh</a:t>
             </a:r>
           </a:p>
         </p:txBody>
@@ -20426,7 +20225,7 @@
                 </a:solidFill>
                 <a:latin typeface="Calibri"/>
               </a:rPr>
-              <a:t>Cause 1: "anything it can’t access in-context while running effectively doesn’t exist" (A1, F-a-05)</a:t>
+              <a:t>"anything it can’t access in-context while running effectively doesn’t exist" (OpenAI, Harness engineering)</a:t>
             </a:r>
           </a:p>
           <a:p>
@@ -20451,7 +20250,7 @@
                 </a:solidFill>
                 <a:latin typeface="Calibri"/>
               </a:rPr>
-              <a:t>Cause 2: "each new session begins with no memory of what came before." (A2, F-a-08)</a:t>
+              <a:t>"each new session begins with no memory of what came before." (Anthropic, Effective harnesses)</a:t>
             </a:r>
           </a:p>
           <a:p>
@@ -20476,7 +20275,7 @@
                 </a:solidFill>
                 <a:latin typeface="Calibri"/>
               </a:rPr>
-              <a:t>Cause 3, side by side: A1 F-a-20; A4 F-a-18, F-a-19; A5 F-a-86; A6 F-a-21 (supplementary)</a:t>
+              <a:t>Agents copy patterns and take hard-to-undo actions: four sources, side by side (Section 3)</a:t>
             </a:r>
           </a:p>
           <a:p>
@@ -20501,7 +20300,7 @@
                 </a:solidFill>
                 <a:latin typeface="Calibri"/>
               </a:rPr>
-              <a:t>Cause 4: "agents reliably skew positive when grading their own work" (A3, F-a-15); B13 F-b-45, F-b-50</a:t>
+              <a:t>"agents reliably skew positive when grading their own work" (Anthropic, Harness design)</a:t>
             </a:r>
           </a:p>
         </p:txBody>
@@ -21110,7 +20909,7 @@
                 </a:solidFill>
                 <a:latin typeface="Consolas"/>
               </a:rPr>
-              <a:t>src/shipharness/harness/state/lifecycle.py</a:t>
+              <a:t>platform/src/shipharness/harness/state/lifecycle.py</a:t>
             </a:r>
           </a:p>
         </p:txBody>
@@ -21718,7 +21517,7 @@
                 </a:solidFill>
                 <a:latin typeface="Consolas"/>
               </a:rPr>
-              <a:t>src/shipharness/harness/state/progress.py</a:t>
+              <a:t>platform/src/shipharness/harness/state/progress.py</a:t>
             </a:r>
           </a:p>
         </p:txBody>
@@ -21993,11 +21792,11 @@
           <a:p>
             <a:pPr algn="l">
               <a:spcAft>
-                <a:spcPts val="918"/>
+                <a:spcPts val="945"/>
               </a:spcAft>
             </a:pPr>
             <a:r>
-              <a:rPr sz="2039" b="0">
+              <a:rPr sz="2100" b="0">
                 <a:solidFill>
                   <a:srgbClr val="111820"/>
                 </a:solidFill>
@@ -22006,23 +21805,23 @@
               <a:t>•  </a:t>
             </a:r>
             <a:r>
-              <a:rPr sz="2039" b="0">
-                <a:solidFill>
-                  <a:srgbClr val="111820"/>
-                </a:solidFill>
-                <a:latin typeface="Calibri"/>
-              </a:rPr>
-              <a:t>Screen 1: "■ Session 1 stopped" with the handoff file, then "▶ Session 2 resumed" with an empty context</a:t>
+              <a:rPr sz="2100" b="0">
+                <a:solidFill>
+                  <a:srgbClr val="111820"/>
+                </a:solidFill>
+                <a:latin typeface="Calibri"/>
+              </a:rPr>
+              <a:t>Screen 1: "■ Session 1 stopped" with the handoff file, then "▶ Session 2 resumed"</a:t>
             </a:r>
           </a:p>
           <a:p>
             <a:pPr algn="l">
               <a:spcAft>
-                <a:spcPts val="918"/>
+                <a:spcPts val="945"/>
               </a:spcAft>
             </a:pPr>
             <a:r>
-              <a:rPr sz="2039" b="0">
+              <a:rPr sz="2100" b="0">
                 <a:solidFill>
                   <a:srgbClr val="111820"/>
                 </a:solidFill>
@@ -22031,7 +21830,7 @@
               <a:t>•  </a:t>
             </a:r>
             <a:r>
-              <a:rPr sz="2039" b="0">
+              <a:rPr sz="2100" b="0">
                 <a:solidFill>
                   <a:srgbClr val="111820"/>
                 </a:solidFill>
@@ -22040,7 +21839,7 @@
               <a:t>Session 2's first turn: </a:t>
             </a:r>
             <a:r>
-              <a:rPr sz="2039" b="0">
+              <a:rPr sz="2100" b="0">
                 <a:solidFill>
                   <a:srgbClr val="111820"/>
                 </a:solidFill>
@@ -22049,23 +21848,23 @@
               <a:t>pwd; git log; cat progress.md</a:t>
             </a:r>
             <a:r>
-              <a:rPr sz="2039" b="0">
-                <a:solidFill>
-                  <a:srgbClr val="111820"/>
-                </a:solidFill>
-                <a:latin typeface="Calibri"/>
-              </a:rPr>
-              <a:t>, A2's getting up to speed routine</a:t>
+              <a:rPr sz="2100" b="0">
+                <a:solidFill>
+                  <a:srgbClr val="111820"/>
+                </a:solidFill>
+                <a:latin typeface="Calibri"/>
+              </a:rPr>
+              <a:t>, the getting-up-to-speed routine</a:t>
             </a:r>
           </a:p>
           <a:p>
             <a:pPr algn="l">
               <a:spcAft>
-                <a:spcPts val="918"/>
+                <a:spcPts val="945"/>
               </a:spcAft>
             </a:pPr>
             <a:r>
-              <a:rPr sz="2039" b="0">
+              <a:rPr sz="2100" b="0">
                 <a:solidFill>
                   <a:srgbClr val="111820"/>
                 </a:solidFill>
@@ -22074,7 +21873,7 @@
               <a:t>•  </a:t>
             </a:r>
             <a:r>
-              <a:rPr sz="2039" b="0">
+              <a:rPr sz="2100" b="0">
                 <a:solidFill>
                   <a:srgbClr val="111820"/>
                 </a:solidFill>
@@ -22086,11 +21885,11 @@
           <a:p>
             <a:pPr algn="l">
               <a:spcAft>
-                <a:spcPts val="918"/>
+                <a:spcPts val="945"/>
               </a:spcAft>
             </a:pPr>
             <a:r>
-              <a:rPr sz="2039" b="0">
+              <a:rPr sz="2100" b="0">
                 <a:solidFill>
                   <a:srgbClr val="111820"/>
                 </a:solidFill>
@@ -22099,13 +21898,31 @@
               <a:t>•  </a:t>
             </a:r>
             <a:r>
-              <a:rPr sz="2039" b="0">
-                <a:solidFill>
-                  <a:srgbClr val="111820"/>
-                </a:solidFill>
-                <a:latin typeface="Calibri"/>
-              </a:rPr>
-              <a:t>Console screen 1 (show-2), captured on 2026-10-17, run ab-20261017-113213-fe89a3; your output will differ</a:t>
+              <a:rPr sz="2100" b="0">
+                <a:solidFill>
+                  <a:srgbClr val="111820"/>
+                </a:solidFill>
+                <a:latin typeface="Calibri"/>
+              </a:rPr>
+              <a:t>Picture: screen 1 of a timed run of </a:t>
+            </a:r>
+            <a:r>
+              <a:rPr sz="2100" b="0">
+                <a:solidFill>
+                  <a:srgbClr val="111820"/>
+                </a:solidFill>
+                <a:latin typeface="Consolas"/>
+              </a:rPr>
+              <a:t>make show-2</a:t>
+            </a:r>
+            <a:r>
+              <a:rPr sz="2100" b="0">
+                <a:solidFill>
+                  <a:srgbClr val="111820"/>
+                </a:solidFill>
+                <a:latin typeface="Calibri"/>
+              </a:rPr>
+              <a:t> before class</a:t>
             </a:r>
           </a:p>
         </p:txBody>
@@ -22488,7 +22305,7 @@
         <p:spPr>
           <a:xfrm>
             <a:off x="533400" y="1219200"/>
-            <a:ext cx="11125200" cy="3351848"/>
+            <a:ext cx="11125200" cy="2373630"/>
           </a:xfrm>
           <a:prstGeom prst="rect">
             <a:avLst/>
@@ -22503,11 +22320,11 @@
           <a:p>
             <a:pPr algn="l">
               <a:spcAft>
-                <a:spcPts val="776"/>
+                <a:spcPts val="945"/>
               </a:spcAft>
             </a:pPr>
             <a:r>
-              <a:rPr sz="1725" b="0">
+              <a:rPr sz="2100" b="0">
                 <a:solidFill>
                   <a:srgbClr val="111820"/>
                 </a:solidFill>
@@ -22516,23 +22333,23 @@
               <a:t>•  </a:t>
             </a:r>
             <a:r>
-              <a:rPr sz="1725" b="0">
-                <a:solidFill>
-                  <a:srgbClr val="111820"/>
-                </a:solidFill>
-                <a:latin typeface="Calibri"/>
-              </a:rPr>
-              <a:t>show-2 in the quiet run: no continuity failure (passes), hidden tests 56 of 56; session 2 hit the agent time limit</a:t>
+              <a:rPr sz="2100" b="0">
+                <a:solidFill>
+                  <a:srgbClr val="111820"/>
+                </a:solidFill>
+                <a:latin typeface="Calibri"/>
+              </a:rPr>
+              <a:t>The timed run: no continuity failure; hidden tests 56 of 56</a:t>
             </a:r>
           </a:p>
           <a:p>
             <a:pPr algn="l">
               <a:spcAft>
-                <a:spcPts val="776"/>
+                <a:spcPts val="945"/>
               </a:spcAft>
             </a:pPr>
             <a:r>
-              <a:rPr sz="1725" b="0">
+              <a:rPr sz="2100" b="0">
                 <a:solidFill>
                   <a:srgbClr val="111820"/>
                 </a:solidFill>
@@ -22541,41 +22358,32 @@
               <a:t>•  </a:t>
             </a:r>
             <a:r>
-              <a:rPr sz="1725" b="0">
-                <a:solidFill>
-                  <a:srgbClr val="111820"/>
-                </a:solidFill>
-                <a:latin typeface="Calibri"/>
-              </a:rPr>
-              <a:t>Screen 5's first wrong turn, a heuristic: turn 2.16 edited </a:t>
-            </a:r>
-            <a:r>
-              <a:rPr sz="1725" b="0">
+              <a:rPr sz="2100" b="0">
+                <a:solidFill>
+                  <a:srgbClr val="111820"/>
+                </a:solidFill>
+                <a:latin typeface="Calibri"/>
+              </a:rPr>
+              <a:t>First wrong turn (screen 5, a heuristic): turn 2.16 edited </a:t>
+            </a:r>
+            <a:r>
+              <a:rPr sz="2100" b="0">
                 <a:solidFill>
                   <a:srgbClr val="111820"/>
                 </a:solidFill>
                 <a:latin typeface="Consolas"/>
               </a:rPr>
               <a:t>app/api/issues.py</a:t>
-            </a:r>
-            <a:r>
-              <a:rPr sz="1725" b="0">
-                <a:solidFill>
-                  <a:srgbClr val="111820"/>
-                </a:solidFill>
-                <a:latin typeface="Calibri"/>
-              </a:rPr>
-              <a:t>, outside the diff scope</a:t>
             </a:r>
           </a:p>
           <a:p>
             <a:pPr algn="l">
               <a:spcAft>
-                <a:spcPts val="776"/>
+                <a:spcPts val="945"/>
               </a:spcAft>
             </a:pPr>
             <a:r>
-              <a:rPr sz="1725" b="0">
+              <a:rPr sz="2100" b="0">
                 <a:solidFill>
                   <a:srgbClr val="111820"/>
                 </a:solidFill>
@@ -22584,23 +22392,23 @@
               <a:t>•  </a:t>
             </a:r>
             <a:r>
-              <a:rPr sz="1725" b="0">
-                <a:solidFill>
-                  <a:srgbClr val="111820"/>
-                </a:solidFill>
-                <a:latin typeface="Calibri"/>
-              </a:rPr>
-              <a:t>Pilot, continuity failure fails: bare 0 of 7, harness 0 of 7 (poll answer: A); no measurable difference on this task with this model</a:t>
+              <a:rPr sz="2100" b="0">
+                <a:solidFill>
+                  <a:srgbClr val="111820"/>
+                </a:solidFill>
+                <a:latin typeface="Calibri"/>
+              </a:rPr>
+              <a:t>Before class: bare 0 of 7 failing, harness 0 of 7 (poll answer: A)</a:t>
             </a:r>
           </a:p>
           <a:p>
             <a:pPr algn="l">
               <a:spcAft>
-                <a:spcPts val="776"/>
+                <a:spcPts val="945"/>
               </a:spcAft>
             </a:pPr>
             <a:r>
-              <a:rPr sz="1725" b="0">
+              <a:rPr sz="2100" b="0">
                 <a:solidFill>
                   <a:srgbClr val="111820"/>
                 </a:solidFill>
@@ -22609,23 +22417,23 @@
               <a:t>•  </a:t>
             </a:r>
             <a:r>
-              <a:rPr sz="1725" b="0">
-                <a:solidFill>
-                  <a:srgbClr val="111820"/>
-                </a:solidFill>
-                <a:latin typeface="Calibri"/>
-              </a:rPr>
-              <a:t>The measure cannot fail when session 1 leaves nothing to redo: in runs 3 and 4, 6 of 12 arms built nothing</a:t>
+              <a:rPr sz="2100" b="0">
+                <a:solidFill>
+                  <a:srgbClr val="111820"/>
+                </a:solidFill>
+                <a:latin typeface="Calibri"/>
+              </a:rPr>
+              <a:t>The measure cannot fail when session 1 builds nothing: 6 of 12 arms did</a:t>
             </a:r>
           </a:p>
           <a:p>
             <a:pPr algn="l">
               <a:spcAft>
-                <a:spcPts val="776"/>
+                <a:spcPts val="945"/>
               </a:spcAft>
             </a:pPr>
             <a:r>
-              <a:rPr sz="1725" b="0">
+              <a:rPr sz="2100" b="0">
                 <a:solidFill>
                   <a:srgbClr val="111820"/>
                 </a:solidFill>
@@ -22634,13 +22442,13 @@
               <a:t>•  </a:t>
             </a:r>
             <a:r>
-              <a:rPr sz="1725" b="0">
-                <a:solidFill>
-                  <a:srgbClr val="111820"/>
-                </a:solidFill>
-                <a:latin typeface="Calibri"/>
-              </a:rPr>
-              <a:t>Console screens 3 and 5 (show-2), captured on 2026-10-17, run ab-20261017-113213-fe89a3; your output will differ</a:t>
+              <a:rPr sz="2100" b="0">
+                <a:solidFill>
+                  <a:srgbClr val="111820"/>
+                </a:solidFill>
+                <a:latin typeface="Calibri"/>
+              </a:rPr>
+              <a:t>Picture: screens 3 and 5 of the same run</a:t>
             </a:r>
           </a:p>
         </p:txBody>
@@ -22661,8 +22469,8 @@
         </p:blipFill>
         <p:spPr>
           <a:xfrm>
-            <a:off x="2277812" y="4666298"/>
-            <a:ext cx="7636375" cy="1734503"/>
+            <a:off x="533400" y="3780968"/>
+            <a:ext cx="11125200" cy="2526943"/>
           </a:xfrm>
           <a:prstGeom prst="rect">
             <a:avLst/>
@@ -22967,7 +22775,7 @@
                 </a:solidFill>
                 <a:latin typeface="Consolas"/>
               </a:rPr>
-              <a:t>submodules/02-state-lifecycle/demo/README.md</a:t>
+              <a:t>02-state-lifecycle/demo/README.md</a:t>
             </a:r>
           </a:p>
           <a:p>
@@ -23010,7 +22818,7 @@
                 </a:solidFill>
                 <a:latin typeface="Calibri"/>
               </a:rPr>
-              <a:t>. Which state file would you keep for this model, and how would you measure it?</a:t>
+              <a:t>. Which state file would you keep, and how would you measure it?</a:t>
             </a:r>
           </a:p>
           <a:p>
@@ -23695,7 +23503,7 @@
                 </a:solidFill>
                 <a:latin typeface="Calibri"/>
               </a:rPr>
-              <a:t>F3 idempotency keys; at risk: scope</a:t>
+              <a:t>F4 optimistic concurrency, tonight's live A/B; at risk: scope</a:t>
             </a:r>
           </a:p>
           <a:p>
@@ -23720,7 +23528,25 @@
                 </a:solidFill>
                 <a:latin typeface="Calibri"/>
               </a:rPr>
-              <a:t>The ticket: "shared middleware is out of scope"; tests in a separate test phase, no app code changes</a:t>
+              <a:t>The build may change the issue, audit, and web files; </a:t>
+            </a:r>
+            <a:r>
+              <a:rPr sz="2100" b="0">
+                <a:solidFill>
+                  <a:srgbClr val="111820"/>
+                </a:solidFill>
+                <a:latin typeface="Consolas"/>
+              </a:rPr>
+              <a:t>app/services/errors.py</a:t>
+            </a:r>
+            <a:r>
+              <a:rPr sz="2100" b="0">
+                <a:solidFill>
+                  <a:srgbClr val="111820"/>
+                </a:solidFill>
+                <a:latin typeface="Calibri"/>
+              </a:rPr>
+              <a:t> is not on the list</a:t>
             </a:r>
           </a:p>
           <a:p>
@@ -23745,7 +23571,7 @@
                 </a:solidFill>
                 <a:latin typeface="Calibri"/>
               </a:rPr>
-              <a:t>Of the pilot's 7 bare-arm F3 runs, how many touched a file outside the allowed paths, or changed source in the test phase?</a:t>
+              <a:t>Before class, 3 A/Bs ran this ticket. In how many did the bare arm ship a file outside the list?</a:t>
             </a:r>
           </a:p>
           <a:p>
@@ -23770,7 +23596,7 @@
                 </a:solidFill>
                 <a:latin typeface="Calibri"/>
               </a:rPr>
-              <a:t>(a) 0-1   (b) 2-3   (c) 4-5   (d) 6-7</a:t>
+              <a:t>(a) 0 of 3   (b) 1 of 3   (c) 2 of 3   (d) 3 of 3</a:t>
             </a:r>
           </a:p>
           <a:p>
@@ -24122,7 +23948,7 @@
                 </a:solidFill>
                 <a:latin typeface="Calibri"/>
               </a:rPr>
-              <a:t>Launching harness in action: F3 idempotency keys</a:t>
+              <a:t>Launching a live A/B: F4, scope</a:t>
             </a:r>
           </a:p>
         </p:txBody>
@@ -24136,7 +23962,7 @@
         <p:spPr>
           <a:xfrm>
             <a:off x="533400" y="1219200"/>
-            <a:ext cx="11125200" cy="2923032"/>
+            <a:ext cx="11125200" cy="2581656"/>
           </a:xfrm>
           <a:prstGeom prst="rect">
             <a:avLst/>
@@ -24179,7 +24005,7 @@
                 </a:solidFill>
                 <a:latin typeface="Consolas"/>
               </a:rPr>
-              <a:t>make show-3</a:t>
+              <a:t>make demo-3 FEATURE=F4</a:t>
             </a:r>
             <a:r>
               <a:rPr sz="2100" b="0">
@@ -24213,7 +24039,7 @@
                 </a:solidFill>
                 <a:latin typeface="Calibri"/>
               </a:rPr>
-              <a:t>Harness in action: the harness arm alone on F3; not an A/B</a:t>
+              <a:t>A live A/B: bare arm and harness arm, same ticket, same limits, at the same time</a:t>
             </a:r>
           </a:p>
           <a:p>
@@ -24238,7 +24064,7 @@
                 </a:solidFill>
                 <a:latin typeface="Calibri"/>
               </a:rPr>
-              <a:t>Watch for: a blocked or reverted edit with its reason, if the agent tries one, and the sandbox line</a:t>
+              <a:t>Harness arm layers: instructions, state, scope</a:t>
             </a:r>
           </a:p>
           <a:p>
@@ -24263,14 +24089,14 @@
                 </a:solidFill>
                 <a:latin typeface="Calibri"/>
               </a:rPr>
-              <a:t>Build, then a test phase; allow lists from the task; shared middleware is off-limits</a:t>
+              <a:t>Watch for: the bare arm's diff, and the harness arm's blocked edit with its reason</a:t>
             </a:r>
           </a:p>
         </p:txBody>
       </p:sp>
       <p:pic>
         <p:nvPicPr>
-          <p:cNvPr id="9" name="Picture 8" descr="a03430f07b965ba6.png"/>
+          <p:cNvPr id="9" name="Picture 8" descr="996f2d9d8b11569f.png"/>
           <p:cNvPicPr>
             <a:picLocks noChangeAspect="1"/>
           </p:cNvPicPr>
@@ -24284,8 +24110,8 @@
         </p:blipFill>
         <p:spPr>
           <a:xfrm>
-            <a:off x="533400" y="4768270"/>
-            <a:ext cx="11125200" cy="1101742"/>
+            <a:off x="533400" y="4395146"/>
+            <a:ext cx="11125200" cy="1506615"/>
           </a:xfrm>
           <a:prstGeom prst="rect">
             <a:avLst/>
@@ -24547,7 +24373,7 @@
         <p:spPr>
           <a:xfrm>
             <a:off x="533400" y="1219200"/>
-            <a:ext cx="11125200" cy="2507894"/>
+            <a:ext cx="11125200" cy="2839517"/>
           </a:xfrm>
           <a:prstGeom prst="rect">
             <a:avLst/>
@@ -24581,7 +24407,7 @@
                 </a:solidFill>
                 <a:latin typeface="Calibri"/>
               </a:rPr>
-              <a:t>Enforce one feature at a time, allowed paths per phase, and a </a:t>
+              <a:t>One feature at a time, allowed paths per phase, and a </a:t>
             </a:r>
             <a:r>
               <a:rPr sz="2039" b="0">
@@ -24624,7 +24450,7 @@
                 </a:solidFill>
                 <a:latin typeface="Calibri"/>
               </a:rPr>
-              <a:t>Explain the container limits for both arms and read a </a:t>
+              <a:t>The container limits for both arms, and how to read a </a:t>
             </a:r>
             <a:r>
               <a:rPr sz="2039" b="0">
@@ -24667,7 +24493,7 @@
                 </a:solidFill>
                 <a:latin typeface="Calibri"/>
               </a:rPr>
-              <a:t>Read the S3 result: out-of-scope files and source edits during the test phase</a:t>
+              <a:t>How to read the S3 result: out-of-scope files in the shipped diff, bare arm against harness arm</a:t>
             </a:r>
           </a:p>
           <a:p>
@@ -24713,8 +24539,8 @@
         </p:blipFill>
         <p:spPr>
           <a:xfrm>
-            <a:off x="1609836" y="3822344"/>
-            <a:ext cx="8972329" cy="2578456"/>
+            <a:off x="2186814" y="4153967"/>
+            <a:ext cx="7818372" cy="2246833"/>
           </a:xfrm>
           <a:prstGeom prst="rect">
             <a:avLst/>
@@ -25010,7 +24836,7 @@
                 </a:solidFill>
                 <a:latin typeface="Calibri"/>
               </a:rPr>
-              <a:t>"Codex replicates patterns that already exist in the repository—even uneven or suboptimal ones" (A1, F-a-20)</a:t>
+              <a:t>"Codex replicates patterns that already exist in the repository—even uneven or suboptimal ones" (OpenAI)</a:t>
             </a:r>
           </a:p>
           <a:p>
@@ -25035,7 +24861,7 @@
                 </a:solidFill>
                 <a:latin typeface="Calibri"/>
               </a:rPr>
-              <a:t>A4: "(Run this in a container, not your actual machine)"; the agent ran </a:t>
+              <a:t>"(Run this in a container, not your actual machine)"; the agent once ran </a:t>
             </a:r>
             <a:r>
               <a:rPr sz="2100" b="0">
@@ -25053,7 +24879,7 @@
                 </a:solidFill>
                 <a:latin typeface="Calibri"/>
               </a:rPr>
-              <a:t> (F-a-18, F-a-19)</a:t>
+              <a:t> (Anthropic, C compiler)</a:t>
             </a:r>
           </a:p>
           <a:p>
@@ -25078,7 +24904,7 @@
                 </a:solidFill>
                 <a:latin typeface="Calibri"/>
               </a:rPr>
-              <a:t>A5: file operations "to the project directory only" (F-a-86)</a:t>
+              <a:t>File operations "to the project directory only" (Anthropic, Coding agent demo)</a:t>
             </a:r>
           </a:p>
           <a:p>
@@ -25103,7 +24929,7 @@
                 </a:solidFill>
                 <a:latin typeface="Calibri"/>
               </a:rPr>
-              <a:t>A6, supplementary: actions "that are difficult to reverse or affect shared systems" (F-a-21)</a:t>
+              <a:t>Actions "that are difficult to reverse or affect shared systems" (Anthropic, Prompting best practices)</a:t>
             </a:r>
           </a:p>
         </p:txBody>
@@ -25397,7 +25223,7 @@
                 </a:solidFill>
                 <a:latin typeface="Calibri"/>
               </a:rPr>
-              <a:t>A1 on the work: "design environments, specify intent, and build feedback loops" (F-a-02)</a:t>
+              <a:t>The work: "design environments, specify intent, and build feedback loops" (OpenAI)</a:t>
             </a:r>
           </a:p>
           <a:p>
@@ -25422,7 +25248,7 @@
                 </a:solidFill>
                 <a:latin typeface="Calibri"/>
               </a:rPr>
-              <a:t>A3: "every component in a harness encodes an assumption about what the model can't do on its own" (F-a-124)</a:t>
+              <a:t>"every component in a harness encodes an assumption about what the model can't do on its own" (Anthropic, Harness design)</a:t>
             </a:r>
           </a:p>
           <a:p>
@@ -25447,7 +25273,7 @@
                 </a:solidFill>
                 <a:latin typeface="Calibri"/>
               </a:rPr>
-              <a:t>Assumptions change with the model: A3 dropped context resets for Opus 4.5 (F-a-69)</a:t>
+              <a:t>Assumptions change with the model: the same author later dropped context resets</a:t>
             </a:r>
           </a:p>
           <a:p>
@@ -25472,7 +25298,7 @@
                 </a:solidFill>
                 <a:latin typeface="Calibri"/>
               </a:rPr>
-              <a:t>Four parts, S1 to S4, plus a sandbox that is identical for both arms</a:t>
+              <a:t>Four parts, S1 to S4, plus a sandbox that is the same for both arms</a:t>
             </a:r>
           </a:p>
           <a:p>
@@ -25824,7 +25650,7 @@
                 </a:solidFill>
                 <a:latin typeface="Calibri"/>
               </a:rPr>
-              <a:t> as the source of truth; JSON over Markdown (A2, A5; F-a-78, F-a-81, F-a-85)</a:t>
+              <a:t> as the source of truth; JSON over Markdown (Anthropic)</a:t>
             </a:r>
           </a:p>
           <a:p>
@@ -25867,7 +25693,7 @@
                 </a:solidFill>
                 <a:latin typeface="Calibri"/>
               </a:rPr>
-              <a:t> field (F-a-79, F-a-82); one feature at a time (F-a-83)</a:t>
+              <a:t> field, and one feature at a time</a:t>
             </a:r>
           </a:p>
           <a:p>
@@ -25892,7 +25718,7 @@
                 </a:solidFill>
                 <a:latin typeface="Calibri"/>
               </a:rPr>
-              <a:t>"It is unacceptable to remove or edit tests because this could lead to missing or buggy functionality." (F-a-80)</a:t>
+              <a:t>"It is unacceptable to remove or edit tests because this could lead to missing or buggy functionality."</a:t>
             </a:r>
           </a:p>
           <a:p>
@@ -25917,7 +25743,7 @@
                 </a:solidFill>
                 <a:latin typeface="Calibri"/>
               </a:rPr>
-              <a:t>Course design: only the harness sets </a:t>
+              <a:t>In this course, only the harness sets </a:t>
             </a:r>
             <a:r>
               <a:rPr sz="2100" b="0">
@@ -25963,15 +25789,6 @@
                 <a:latin typeface="Consolas"/>
               </a:rPr>
               <a:t>testedAt</a:t>
-            </a:r>
-            <a:r>
-              <a:rPr sz="2100" b="0">
-                <a:solidFill>
-                  <a:srgbClr val="111820"/>
-                </a:solidFill>
-                <a:latin typeface="Calibri"/>
-              </a:rPr>
-              <a:t> (A2 F-a-108, A3 F-a-110)</a:t>
             </a:r>
           </a:p>
         </p:txBody>
@@ -26340,7 +26157,7 @@
                 </a:solidFill>
                 <a:latin typeface="Calibri"/>
               </a:rPr>
-              <a:t>The agent reads the reason</a:t>
+              <a:t>The agent reads the reason, which names the phase and the list</a:t>
             </a:r>
           </a:p>
           <a:p>
@@ -26365,7 +26182,16 @@
                 </a:solidFill>
                 <a:latin typeface="Calibri"/>
               </a:rPr>
-              <a:t>Composite citation: A5 F-a-86, F-a-87; A1 F-a-92, F-a-98; A2 F-a-57</a:t>
+              <a:t>F4's build list leaves out </a:t>
+            </a:r>
+            <a:r>
+              <a:rPr sz="2100" b="0">
+                <a:solidFill>
+                  <a:srgbClr val="111820"/>
+                </a:solidFill>
+                <a:latin typeface="Consolas"/>
+              </a:rPr>
+              <a:t>app/services/errors.py</a:t>
             </a:r>
           </a:p>
         </p:txBody>
@@ -26659,7 +26485,7 @@
                 </a:solidFill>
                 <a:latin typeface="Calibri"/>
               </a:rPr>
-              <a:t>A4: "for each agent, a Docker container is spun up", and no internet access (F-a-88, F-a-90)</a:t>
+              <a:t>"for each agent, a Docker container is spun up", with no internet access (Anthropic, C compiler)</a:t>
             </a:r>
           </a:p>
           <a:p>
@@ -26684,7 +26510,7 @@
                 </a:solidFill>
                 <a:latin typeface="Calibri"/>
               </a:rPr>
-              <a:t>A5's three-layer security model (F-a-86, F-a-87)</a:t>
+              <a:t>A three-layer security model (Anthropic, Coding agent demo)</a:t>
             </a:r>
           </a:p>
           <a:p>
@@ -26709,7 +26535,7 @@
                 </a:solidFill>
                 <a:latin typeface="Calibri"/>
               </a:rPr>
-              <a:t>Codex: "By default, the agent runs with network access turned off." (D21-D23)</a:t>
+              <a:t>"By default, the agent runs with network access turned off." (Codex docs)</a:t>
             </a:r>
           </a:p>
         </p:txBody>
@@ -27036,7 +26862,7 @@
                 </a:solidFill>
                 <a:latin typeface="Calibri"/>
               </a:rPr>
-              <a:t>, memory without swap, 256 processes, non-root (D24-D30)</a:t>
+              <a:t>, memory without swap, 256 processes, non-root</a:t>
             </a:r>
           </a:p>
           <a:p>
@@ -27156,7 +26982,7 @@
                 </a:solidFill>
                 <a:latin typeface="Calibri"/>
               </a:rPr>
-              <a:t>Never an A/B variable, so the pilot cannot tell whether it earns its place</a:t>
+              <a:t>Never an A/B variable, so no run can tell whether it earns its place</a:t>
             </a:r>
           </a:p>
           <a:p>
@@ -27181,7 +27007,7 @@
                 </a:solidFill>
                 <a:latin typeface="Calibri"/>
               </a:rPr>
-              <a:t>Kept on the sources' advice: a container per agent, no internet (A4, F-a-88, F-a-90); project directory only (A5, F-a-86)</a:t>
+              <a:t>Kept on the sources' advice: a container per agent, no internet, project directory only</a:t>
             </a:r>
           </a:p>
         </p:txBody>
@@ -27765,7 +27591,7 @@
                 </a:solidFill>
                 <a:latin typeface="Consolas"/>
               </a:rPr>
-              <a:t>src/shipharness/harness/scope/guard.py</a:t>
+              <a:t>platform/src/shipharness/harness/scope/guard.py</a:t>
             </a:r>
           </a:p>
         </p:txBody>
@@ -27973,7 +27799,7 @@
                 </a:solidFill>
                 <a:latin typeface="Consolas"/>
               </a:rPr>
-              <a:t>src/shipharness/harness/scope/status.py</a:t>
+              <a:t>platform/src/shipharness/harness/scope/status.py</a:t>
             </a:r>
           </a:p>
         </p:txBody>
@@ -28276,7 +28102,7 @@
                 </a:solidFill>
                 <a:latin typeface="Calibri"/>
               </a:rPr>
-              <a:t>: identical for both arms in every run</a:t>
+              <a:t>: the same for both arms in every run</a:t>
             </a:r>
           </a:p>
           <a:p>
@@ -28569,7 +28395,7 @@
                 </a:solidFill>
                 <a:latin typeface="Consolas"/>
               </a:rPr>
-              <a:t>src/shipharness/sandbox/policy.py</a:t>
+              <a:t>platform/src/shipharness/sandbox/policy.py</a:t>
             </a:r>
           </a:p>
         </p:txBody>
@@ -28863,7 +28689,7 @@
                 </a:solidFill>
                 <a:latin typeface="Calibri"/>
               </a:rPr>
-              <a:t>Screen 1: harness decisions; the scope layer writes </a:t>
+              <a:t>Screen 3, Scope and sandbox: the bare arm changed </a:t>
             </a:r>
             <a:r>
               <a:rPr sz="2100" b="0">
@@ -28872,25 +28698,7 @@
                 </a:solidFill>
                 <a:latin typeface="Consolas"/>
               </a:rPr>
-              <a:t>feature_list.json</a:t>
-            </a:r>
-            <a:r>
-              <a:rPr sz="2100" b="0">
-                <a:solidFill>
-                  <a:srgbClr val="111820"/>
-                </a:solidFill>
-                <a:latin typeface="Calibri"/>
-              </a:rPr>
-              <a:t> with F3, </a:t>
-            </a:r>
-            <a:r>
-              <a:rPr sz="2100" b="0">
-                <a:solidFill>
-                  <a:srgbClr val="111820"/>
-                </a:solidFill>
-                <a:latin typeface="Consolas"/>
-              </a:rPr>
-              <a:t>passes: false</a:t>
+              <a:t>app/services/errors.py</a:t>
             </a:r>
           </a:p>
           <a:p>
@@ -28915,7 +28723,7 @@
                 </a:solidFill>
                 <a:latin typeface="Calibri"/>
               </a:rPr>
-              <a:t>A ⊘ block or ↺ revert appears only if the agent tries an edit outside the allow list</a:t>
+              <a:t>The harness arm's diff map shows the same file as ⊘ blocked</a:t>
             </a:r>
           </a:p>
           <a:p>
@@ -28940,7 +28748,7 @@
                 </a:solidFill>
                 <a:latin typeface="Calibri"/>
               </a:rPr>
-              <a:t>Screen 3: the diff map and "Sandbox denials"; screen 5: the trace links</a:t>
+              <a:t>Screen 1: the harness decision ⊘ block, with the reason the agent read</a:t>
             </a:r>
           </a:p>
           <a:p>
@@ -28965,7 +28773,50 @@
                 </a:solidFill>
                 <a:latin typeface="Calibri"/>
               </a:rPr>
-              <a:t>Console screen 1 (show-3), captured on 2026-10-17, run ab-20261017-114259-b64f54; your output will differ</a:t>
+              <a:t>Screen 3, Verification: </a:t>
+            </a:r>
+            <a:r>
+              <a:rPr sz="2100" b="0">
+                <a:solidFill>
+                  <a:srgbClr val="111820"/>
+                </a:solidFill>
+                <a:latin typeface="Consolas"/>
+              </a:rPr>
+              <a:t>diff_scope</a:t>
+            </a:r>
+            <a:r>
+              <a:rPr sz="2100" b="0">
+                <a:solidFill>
+                  <a:srgbClr val="111820"/>
+                </a:solidFill>
+                <a:latin typeface="Calibri"/>
+              </a:rPr>
+              <a:t> per arm; Sandbox denials for both</a:t>
+            </a:r>
+          </a:p>
+          <a:p>
+            <a:pPr algn="l">
+              <a:spcAft>
+                <a:spcPts val="945"/>
+              </a:spcAft>
+            </a:pPr>
+            <a:r>
+              <a:rPr sz="2100" b="0">
+                <a:solidFill>
+                  <a:srgbClr val="111820"/>
+                </a:solidFill>
+                <a:latin typeface="Calibri"/>
+              </a:rPr>
+              <a:t>•  </a:t>
+            </a:r>
+            <a:r>
+              <a:rPr sz="2100" b="0">
+                <a:solidFill>
+                  <a:srgbClr val="111820"/>
+                </a:solidFill>
+                <a:latin typeface="Calibri"/>
+              </a:rPr>
+              <a:t>Picture: screen 3 of an S3 confirmation A/B before class</a:t>
             </a:r>
           </a:p>
         </p:txBody>
@@ -28986,8 +28837,8 @@
         </p:blipFill>
         <p:spPr>
           <a:xfrm>
-            <a:off x="6111665" y="1219200"/>
-            <a:ext cx="5326594" cy="4705350"/>
+            <a:off x="6823963" y="1219200"/>
+            <a:ext cx="3901998" cy="4705350"/>
           </a:xfrm>
           <a:prstGeom prst="rect">
             <a:avLst/>
@@ -29003,7 +28854,7 @@
         <p:spPr>
           <a:xfrm>
             <a:off x="533400" y="6019800"/>
-            <a:ext cx="8906637" cy="381000"/>
+            <a:ext cx="8530209" cy="381000"/>
           </a:xfrm>
           <a:prstGeom prst="rect">
             <a:avLst/>
@@ -29049,7 +28900,7 @@
         <p:spPr>
           <a:xfrm>
             <a:off x="647700" y="6067425"/>
-            <a:ext cx="8678037" cy="304800"/>
+            <a:ext cx="8301609" cy="304800"/>
           </a:xfrm>
           <a:prstGeom prst="rect">
             <a:avLst/>
@@ -29079,7 +28930,7 @@
                 </a:solidFill>
                 <a:latin typeface="Consolas"/>
               </a:rPr>
-              <a:t>make show-3</a:t>
+              <a:t>make demo-3 FEATURE=F4</a:t>
             </a:r>
             <a:r>
               <a:rPr sz="1400" b="0">
@@ -29088,7 +28939,7 @@
                 </a:solidFill>
                 <a:latin typeface="Calibri"/>
               </a:rPr>
-              <a:t>: blocked or reverted decisions and any </a:t>
+              <a:t>: each arm's diff map and its </a:t>
             </a:r>
             <a:r>
               <a:rPr sz="1400" b="0">
@@ -29097,7 +28948,7 @@
                 </a:solidFill>
                 <a:latin typeface="Consolas"/>
               </a:rPr>
-              <a:t>sandbox_denied</a:t>
+              <a:t>diff_scope</a:t>
             </a:r>
             <a:r>
               <a:rPr sz="1400" b="0">
@@ -29106,7 +28957,7 @@
                 </a:solidFill>
                 <a:latin typeface="Calibri"/>
               </a:rPr>
-              <a:t> event</a:t>
+              <a:t> line</a:t>
             </a:r>
           </a:p>
         </p:txBody>
@@ -29366,7 +29217,7 @@
         <p:spPr>
           <a:xfrm>
             <a:off x="533400" y="1219200"/>
-            <a:ext cx="11125200" cy="3351848"/>
+            <a:ext cx="11125200" cy="2502484"/>
           </a:xfrm>
           <a:prstGeom prst="rect">
             <a:avLst/>
@@ -29381,11 +29232,11 @@
           <a:p>
             <a:pPr algn="l">
               <a:spcAft>
-                <a:spcPts val="776"/>
+                <a:spcPts val="830"/>
               </a:spcAft>
             </a:pPr>
             <a:r>
-              <a:rPr sz="1725" b="0">
+              <a:rPr sz="1845" b="0">
                 <a:solidFill>
                   <a:srgbClr val="111820"/>
                 </a:solidFill>
@@ -29394,23 +29245,23 @@
               <a:t>•  </a:t>
             </a:r>
             <a:r>
-              <a:rPr sz="1725" b="0">
-                <a:solidFill>
-                  <a:srgbClr val="111820"/>
-                </a:solidFill>
-                <a:latin typeface="Calibri"/>
-              </a:rPr>
-              <a:t>show-3 in the quiet run: out-of-scope files 0, test-phase source edits 0 (passes); hidden tests 49 of 49, mutants killed 4 of 4</a:t>
+              <a:rPr sz="1845" b="0">
+                <a:solidFill>
+                  <a:srgbClr val="111820"/>
+                </a:solidFill>
+                <a:latin typeface="Calibri"/>
+              </a:rPr>
+              <a:t>Before class: in scope, bare 0 of 3, harness 3 of 3 (poll answer: d)</a:t>
             </a:r>
           </a:p>
           <a:p>
             <a:pPr algn="l">
               <a:spcAft>
-                <a:spcPts val="776"/>
+                <a:spcPts val="830"/>
               </a:spcAft>
             </a:pPr>
             <a:r>
-              <a:rPr sz="1725" b="0">
+              <a:rPr sz="1845" b="0">
                 <a:solidFill>
                   <a:srgbClr val="111820"/>
                 </a:solidFill>
@@ -29419,23 +29270,23 @@
               <a:t>•  </a:t>
             </a:r>
             <a:r>
-              <a:rPr sz="1725" b="0">
-                <a:solidFill>
-                  <a:srgbClr val="111820"/>
-                </a:solidFill>
-                <a:latin typeface="Calibri"/>
-              </a:rPr>
-              <a:t>The harness arm's zero is expected by construction; the question is whether it still shipped a working feature</a:t>
+              <a:rPr sz="1845" b="0">
+                <a:solidFill>
+                  <a:srgbClr val="111820"/>
+                </a:solidFill>
+                <a:latin typeface="Calibri"/>
+              </a:rPr>
+              <a:t>Harness ahead, by construction: the guard enforces what this measures</a:t>
             </a:r>
           </a:p>
           <a:p>
             <a:pPr algn="l">
               <a:spcAft>
-                <a:spcPts val="776"/>
+                <a:spcPts val="830"/>
               </a:spcAft>
             </a:pPr>
             <a:r>
-              <a:rPr sz="1725" b="0">
+              <a:rPr sz="1845" b="0">
                 <a:solidFill>
                   <a:srgbClr val="111820"/>
                 </a:solidFill>
@@ -29444,23 +29295,23 @@
               <a:t>•  </a:t>
             </a:r>
             <a:r>
-              <a:rPr sz="1725" b="0">
-                <a:solidFill>
-                  <a:srgbClr val="111820"/>
-                </a:solidFill>
-                <a:latin typeface="Calibri"/>
-              </a:rPr>
-              <a:t>Pilot, out-of-scope file or test-phase source edit fails: bare 0 of 7, harness 0 of 7 (poll answer: a); no measurable difference on this task with this model</a:t>
+              <a:rPr sz="1845" b="0">
+                <a:solidFill>
+                  <a:srgbClr val="111820"/>
+                </a:solidFill>
+                <a:latin typeface="Calibri"/>
+              </a:rPr>
+              <a:t>New: on this ticket the bare agent edits a shared file every time</a:t>
             </a:r>
           </a:p>
           <a:p>
             <a:pPr algn="l">
               <a:spcAft>
-                <a:spcPts val="776"/>
+                <a:spcPts val="830"/>
               </a:spcAft>
             </a:pPr>
             <a:r>
-              <a:rPr sz="1725" b="0">
+              <a:rPr sz="1845" b="0">
                 <a:solidFill>
                   <a:srgbClr val="111820"/>
                 </a:solidFill>
@@ -29469,23 +29320,23 @@
               <a:t>•  </a:t>
             </a:r>
             <a:r>
-              <a:rPr sz="1725" b="0">
-                <a:solidFill>
-                  <a:srgbClr val="111820"/>
-                </a:solidFill>
-                <a:latin typeface="Calibri"/>
-              </a:rPr>
-              <a:t>Scope was registered only for F3; the F4 count (post hoc) is a reason to register it next time, not a result</a:t>
+              <a:rPr sz="1845" b="0">
+                <a:solidFill>
+                  <a:srgbClr val="111820"/>
+                </a:solidFill>
+                <a:latin typeface="Calibri"/>
+              </a:rPr>
+              <a:t>The pill on screen 1 is F4's own bar, and every arm failed it</a:t>
             </a:r>
           </a:p>
           <a:p>
             <a:pPr algn="l">
               <a:spcAft>
-                <a:spcPts val="776"/>
+                <a:spcPts val="830"/>
               </a:spcAft>
             </a:pPr>
             <a:r>
-              <a:rPr sz="1725" b="0">
+              <a:rPr sz="1845" b="0">
                 <a:solidFill>
                   <a:srgbClr val="111820"/>
                 </a:solidFill>
@@ -29494,13 +29345,38 @@
               <a:t>•  </a:t>
             </a:r>
             <a:r>
-              <a:rPr sz="1725" b="0">
-                <a:solidFill>
-                  <a:srgbClr val="111820"/>
-                </a:solidFill>
-                <a:latin typeface="Calibri"/>
-              </a:rPr>
-              <a:t>Console screen 3 (show-3), captured on 2026-10-17, run ab-20261017-114259-b64f54; your output will differ</a:t>
+              <a:rPr sz="1845" b="0">
+                <a:solidFill>
+                  <a:srgbClr val="111820"/>
+                </a:solidFill>
+                <a:latin typeface="Calibri"/>
+              </a:rPr>
+              <a:t>S3's own ticket, F3: no measurable difference, 7 of 7 each</a:t>
+            </a:r>
+          </a:p>
+          <a:p>
+            <a:pPr algn="l">
+              <a:spcAft>
+                <a:spcPts val="830"/>
+              </a:spcAft>
+            </a:pPr>
+            <a:r>
+              <a:rPr sz="1845" b="0">
+                <a:solidFill>
+                  <a:srgbClr val="111820"/>
+                </a:solidFill>
+                <a:latin typeface="Calibri"/>
+              </a:rPr>
+              <a:t>•  </a:t>
+            </a:r>
+            <a:r>
+              <a:rPr sz="1845" b="0">
+                <a:solidFill>
+                  <a:srgbClr val="111820"/>
+                </a:solidFill>
+                <a:latin typeface="Calibri"/>
+              </a:rPr>
+              <a:t>Picture: screen 1 of the same A/B, the verdict lines</a:t>
             </a:r>
           </a:p>
         </p:txBody>
@@ -29521,8 +29397,8 @@
         </p:blipFill>
         <p:spPr>
           <a:xfrm>
-            <a:off x="2850569" y="4666298"/>
-            <a:ext cx="6490862" cy="1734503"/>
+            <a:off x="533400" y="4651790"/>
+            <a:ext cx="11125200" cy="914154"/>
           </a:xfrm>
           <a:prstGeom prst="rect">
             <a:avLst/>
@@ -29827,7 +29703,7 @@
                 </a:solidFill>
                 <a:latin typeface="Consolas"/>
               </a:rPr>
-              <a:t>submodules/03-scope-sandbox/demo/README.md</a:t>
+              <a:t>03-scope-sandbox/demo/README.md</a:t>
             </a:r>
           </a:p>
           <a:p>
@@ -29852,7 +29728,7 @@
                 </a:solidFill>
                 <a:latin typeface="Calibri"/>
               </a:rPr>
-              <a:t>Discussion: the clearest post hoc difference showed where scope was not the primary measure. How would you register that before the next run?</a:t>
+              <a:t>Discussion: the guard won by construction. What would you measure next to it, so a guard that blocks everything cannot look good?</a:t>
             </a:r>
           </a:p>
           <a:p>
@@ -30171,7 +30047,7 @@
                 </a:solidFill>
                 <a:latin typeface="Calibri"/>
               </a:rPr>
-              <a:t>F4 optimistic concurrency; at stake: hidden tests (69) and referee mutants (4)</a:t>
+              <a:t>F4 again, now with all four layers; at stake: hidden tests (69) and referee mutants (4)</a:t>
             </a:r>
           </a:p>
           <a:p>
@@ -30221,7 +30097,7 @@
                 </a:solidFill>
                 <a:latin typeface="Calibri"/>
               </a:rPr>
-              <a:t>In the pilot's 4 F4 A/Bs, which arm passed more often?</a:t>
+              <a:t>Before class, 4 A/Bs ran F4 with all four layers in the harness arm. Which arm passed more often?</a:t>
             </a:r>
           </a:p>
           <a:p>
@@ -30612,7 +30488,7 @@
         <p:spPr>
           <a:xfrm>
             <a:off x="533400" y="1219200"/>
-            <a:ext cx="11125200" cy="1658360"/>
+            <a:ext cx="11125200" cy="1383487"/>
           </a:xfrm>
           <a:prstGeom prst="rect">
             <a:avLst/>
@@ -30627,11 +30503,11 @@
           <a:p>
             <a:pPr algn="l">
               <a:spcAft>
-                <a:spcPts val="887"/>
+                <a:spcPts val="918"/>
               </a:spcAft>
             </a:pPr>
             <a:r>
-              <a:rPr sz="1972" b="0">
+              <a:rPr sz="2039" b="0">
                 <a:solidFill>
                   <a:srgbClr val="111820"/>
                 </a:solidFill>
@@ -30640,7 +30516,7 @@
               <a:t>•  </a:t>
             </a:r>
             <a:r>
-              <a:rPr sz="1972" b="0">
+              <a:rPr sz="2039" b="0">
                 <a:solidFill>
                   <a:srgbClr val="111820"/>
                 </a:solidFill>
@@ -30649,7 +30525,7 @@
               <a:t>shipharness</a:t>
             </a:r>
             <a:r>
-              <a:rPr sz="1972" b="0">
+              <a:rPr sz="2039" b="0">
                 <a:solidFill>
                   <a:srgbClr val="111820"/>
                 </a:solidFill>
@@ -30661,11 +30537,11 @@
           <a:p>
             <a:pPr algn="l">
               <a:spcAft>
-                <a:spcPts val="887"/>
+                <a:spcPts val="918"/>
               </a:spcAft>
             </a:pPr>
             <a:r>
-              <a:rPr sz="1972" b="0">
+              <a:rPr sz="2039" b="0">
                 <a:solidFill>
                   <a:srgbClr val="111820"/>
                 </a:solidFill>
@@ -30674,23 +30550,23 @@
               <a:t>•  </a:t>
             </a:r>
             <a:r>
-              <a:rPr sz="1972" b="0">
-                <a:solidFill>
-                  <a:srgbClr val="111820"/>
-                </a:solidFill>
-                <a:latin typeface="Calibri"/>
-              </a:rPr>
-              <a:t>TeamTrack: multi-tenant issue tracker, orgs Acme and Globex, 25 API operations, 142 visible tests</a:t>
+              <a:rPr sz="2039" b="0">
+                <a:solidFill>
+                  <a:srgbClr val="111820"/>
+                </a:solidFill>
+                <a:latin typeface="Calibri"/>
+              </a:rPr>
+              <a:t>TeamTrack: a multi-tenant issue tracker with two orgs, Acme and Globex</a:t>
             </a:r>
           </a:p>
           <a:p>
             <a:pPr algn="l">
               <a:spcAft>
-                <a:spcPts val="887"/>
+                <a:spcPts val="918"/>
               </a:spcAft>
             </a:pPr>
             <a:r>
-              <a:rPr sz="1972" b="0">
+              <a:rPr sz="2039" b="0">
                 <a:solidFill>
                   <a:srgbClr val="111820"/>
                 </a:solidFill>
@@ -30699,7 +30575,7 @@
               <a:t>•  </a:t>
             </a:r>
             <a:r>
-              <a:rPr sz="1972" b="0">
+              <a:rPr sz="2039" b="0">
                 <a:solidFill>
                   <a:srgbClr val="111820"/>
                 </a:solidFill>
@@ -30708,7 +30584,7 @@
               <a:t>Console: five screens on keys </a:t>
             </a:r>
             <a:r>
-              <a:rPr sz="1972" b="0">
+              <a:rPr sz="2039" b="0">
                 <a:solidFill>
                   <a:srgbClr val="111820"/>
                 </a:solidFill>
@@ -30717,7 +30593,7 @@
               <a:t>1</a:t>
             </a:r>
             <a:r>
-              <a:rPr sz="1972" b="0">
+              <a:rPr sz="2039" b="0">
                 <a:solidFill>
                   <a:srgbClr val="111820"/>
                 </a:solidFill>
@@ -30726,7 +30602,7 @@
               <a:t> to </a:t>
             </a:r>
             <a:r>
-              <a:rPr sz="1972" b="0">
+              <a:rPr sz="2039" b="0">
                 <a:solidFill>
                   <a:srgbClr val="111820"/>
                 </a:solidFill>
@@ -30735,7 +30611,7 @@
               <a:t>5</a:t>
             </a:r>
             <a:r>
-              <a:rPr sz="1972" b="0">
+              <a:rPr sz="2039" b="0">
                 <a:solidFill>
                   <a:srgbClr val="111820"/>
                 </a:solidFill>
@@ -30744,7 +30620,7 @@
               <a:t>, </a:t>
             </a:r>
             <a:r>
-              <a:rPr sz="1972" b="0">
+              <a:rPr sz="2039" b="0">
                 <a:solidFill>
                   <a:srgbClr val="111820"/>
                 </a:solidFill>
@@ -30753,7 +30629,7 @@
               <a:t>F</a:t>
             </a:r>
             <a:r>
-              <a:rPr sz="1972" b="0">
+              <a:rPr sz="2039" b="0">
                 <a:solidFill>
                   <a:srgbClr val="111820"/>
                 </a:solidFill>
@@ -30772,8 +30648,8 @@
         </p:nvSpPr>
         <p:spPr>
           <a:xfrm>
-            <a:off x="533400" y="2972810"/>
-            <a:ext cx="11125200" cy="3206892"/>
+            <a:off x="533400" y="2697937"/>
+            <a:ext cx="11125200" cy="3301944"/>
           </a:xfrm>
           <a:prstGeom prst="rect">
             <a:avLst/>
@@ -30818,8 +30694,8 @@
         </p:nvSpPr>
         <p:spPr>
           <a:xfrm>
-            <a:off x="533400" y="2972810"/>
-            <a:ext cx="57150" cy="3206892"/>
+            <a:off x="533400" y="2697937"/>
+            <a:ext cx="57150" cy="3301944"/>
           </a:xfrm>
           <a:prstGeom prst="rect">
             <a:avLst/>
@@ -30862,8 +30738,8 @@
         </p:nvSpPr>
         <p:spPr>
           <a:xfrm>
-            <a:off x="704850" y="3068060"/>
-            <a:ext cx="10858500" cy="3054492"/>
+            <a:off x="704850" y="2793187"/>
+            <a:ext cx="10858500" cy="3149544"/>
           </a:xfrm>
           <a:prstGeom prst="rect">
             <a:avLst/>
@@ -30878,7 +30754,7 @@
           <a:p>
             <a:pPr algn="l"/>
             <a:r>
-              <a:rPr sz="1480" b="0">
+              <a:rPr sz="1527" b="0">
                 <a:solidFill>
                   <a:srgbClr val="111820"/>
                 </a:solidFill>
@@ -30890,7 +30766,7 @@
           <a:p>
             <a:pPr algn="l"/>
             <a:r>
-              <a:rPr sz="1480" b="0">
+              <a:rPr sz="1527" b="0">
                 <a:solidFill>
                   <a:srgbClr val="111820"/>
                 </a:solidFill>
@@ -30902,7 +30778,7 @@
           <a:p>
             <a:pPr algn="l"/>
             <a:r>
-              <a:rPr sz="1480" b="0">
+              <a:rPr sz="1527" b="0">
                 <a:solidFill>
                   <a:srgbClr val="111820"/>
                 </a:solidFill>
@@ -30914,7 +30790,7 @@
           <a:p>
             <a:pPr algn="l"/>
             <a:r>
-              <a:rPr sz="1480" b="0">
+              <a:rPr sz="1527" b="0">
                 <a:solidFill>
                   <a:srgbClr val="111820"/>
                 </a:solidFill>
@@ -30926,7 +30802,7 @@
           <a:p>
             <a:pPr algn="l"/>
             <a:r>
-              <a:rPr sz="1480" b="0">
+              <a:rPr sz="1527" b="0">
                 <a:solidFill>
                   <a:srgbClr val="111820"/>
                 </a:solidFill>
@@ -30938,7 +30814,7 @@
           <a:p>
             <a:pPr algn="l"/>
             <a:r>
-              <a:rPr sz="1480" b="0">
+              <a:rPr sz="1527" b="0">
                 <a:solidFill>
                   <a:srgbClr val="111820"/>
                 </a:solidFill>
@@ -30950,7 +30826,7 @@
           <a:p>
             <a:pPr algn="l"/>
             <a:r>
-              <a:rPr sz="1480" b="0">
+              <a:rPr sz="1527" b="0">
                 <a:solidFill>
                   <a:srgbClr val="111820"/>
                 </a:solidFill>
@@ -30962,7 +30838,7 @@
           <a:p>
             <a:pPr algn="l"/>
             <a:r>
-              <a:rPr sz="1480" b="0">
+              <a:rPr sz="1527" b="0">
                 <a:solidFill>
                   <a:srgbClr val="111820"/>
                 </a:solidFill>
@@ -30974,7 +30850,7 @@
           <a:p>
             <a:pPr algn="l"/>
             <a:r>
-              <a:rPr sz="1480" b="0">
+              <a:rPr sz="1527" b="0">
                 <a:solidFill>
                   <a:srgbClr val="111820"/>
                 </a:solidFill>
@@ -30986,7 +30862,7 @@
           <a:p>
             <a:pPr algn="l"/>
             <a:r>
-              <a:rPr sz="1480" b="0">
+              <a:rPr sz="1527" b="0">
                 <a:solidFill>
                   <a:srgbClr val="111820"/>
                 </a:solidFill>
@@ -30998,7 +30874,7 @@
           <a:p>
             <a:pPr algn="l"/>
             <a:r>
-              <a:rPr sz="1480" b="0">
+              <a:rPr sz="1527" b="0">
                 <a:solidFill>
                   <a:srgbClr val="111820"/>
                 </a:solidFill>
@@ -31010,7 +30886,7 @@
           <a:p>
             <a:pPr algn="l"/>
             <a:r>
-              <a:rPr sz="1480" b="0">
+              <a:rPr sz="1527" b="0">
                 <a:solidFill>
                   <a:srgbClr val="111820"/>
                 </a:solidFill>
@@ -31029,7 +30905,7 @@
         </p:nvSpPr>
         <p:spPr>
           <a:xfrm>
-            <a:off x="533400" y="6198752"/>
+            <a:off x="533400" y="6018931"/>
             <a:ext cx="11125200" cy="209550"/>
           </a:xfrm>
           <a:prstGeom prst="rect">
@@ -31051,7 +30927,7 @@
                 </a:solidFill>
                 <a:latin typeface="Consolas"/>
               </a:rPr>
-              <a:t>src/shipharness/ab/demo.py</a:t>
+              <a:t>platform/src/shipharness/ab/demo.py</a:t>
             </a:r>
           </a:p>
         </p:txBody>
@@ -31420,7 +31296,7 @@
                 </a:solidFill>
                 <a:latin typeface="Calibri"/>
               </a:rPr>
-              <a:t>The winner runs as tonight's one live A/B, and the runner-up after it if the session figure allows</a:t>
+              <a:t>The winner runs as the final live A/B, and the runner-up after it if the session figure allows</a:t>
             </a:r>
           </a:p>
           <a:p>
@@ -31786,7 +31662,7 @@
         <p:spPr>
           <a:xfrm>
             <a:off x="533400" y="1219200"/>
-            <a:ext cx="11125200" cy="3264408"/>
+            <a:ext cx="11125200" cy="2923032"/>
           </a:xfrm>
           <a:prstGeom prst="rect">
             <a:avLst/>
@@ -31931,7 +31807,7 @@
                 </a:solidFill>
                 <a:latin typeface="Calibri"/>
               </a:rPr>
-              <a:t>The final is tonight's one live A/B: both arms, all four layers, blinded reviewer on both diffs</a:t>
+              <a:t>The final: both arms, all four layers, the blinded reviewer on both diffs</a:t>
             </a:r>
           </a:p>
         </p:txBody>
@@ -31952,7 +31828,7 @@
         </p:blipFill>
         <p:spPr>
           <a:xfrm>
-            <a:off x="533400" y="4625109"/>
+            <a:off x="533400" y="4454421"/>
             <a:ext cx="11125200" cy="1729439"/>
           </a:xfrm>
           <a:prstGeom prst="rect">
@@ -32249,7 +32125,7 @@
                 </a:solidFill>
                 <a:latin typeface="Calibri"/>
               </a:rPr>
-              <a:t>Build verification the agent does not control: filters, mutants, house-rule checks, held-out tests, reviewer, gate</a:t>
+              <a:t>Verification the agent does not control: filters, mutants, house-rule checks, held-out tests, reviewer, gate</a:t>
             </a:r>
           </a:p>
           <a:p>
@@ -32642,7 +32518,7 @@
                 </a:solidFill>
                 <a:latin typeface="Calibri"/>
               </a:rPr>
-              <a:t>"agents reliably skew positive when grading their own work" (A3, F-a-15)</a:t>
+              <a:t>"agents reliably skew positive when grading their own work" (Anthropic, Harness design)</a:t>
             </a:r>
           </a:p>
           <a:p>
@@ -32667,7 +32543,7 @@
                 </a:solidFill>
                 <a:latin typeface="Calibri"/>
               </a:rPr>
-              <a:t>"while every frontier agent saturates the visible suite, reward hacking persists" (B13, F-b-45)</a:t>
+              <a:t>"while every frontier agent saturates the visible suite, reward hacking persists" (SpecBench)</a:t>
             </a:r>
           </a:p>
           <a:p>
@@ -32692,7 +32568,7 @@
                 </a:solidFill>
                 <a:latin typeface="Calibri"/>
               </a:rPr>
-              <a:t>Mostly features that pass alone and fail when combined (B13, F-b-50)</a:t>
+              <a:t>Mostly features that pass alone and fail when combined (SpecBench)</a:t>
             </a:r>
           </a:p>
           <a:p>
@@ -32717,7 +32593,7 @@
                 </a:solidFill>
                 <a:latin typeface="Calibri"/>
               </a:rPr>
-              <a:t>"it is easy to see tests pass and assume the job is done, when this is rarely the case." (A4, F-a-17)</a:t>
+              <a:t>"it is easy to see tests pass and assume the job is done, when this is rarely the case." (Anthropic, C compiler)</a:t>
             </a:r>
           </a:p>
         </p:txBody>
@@ -33011,7 +32887,7 @@
                 </a:solidFill>
                 <a:latin typeface="Calibri"/>
               </a:rPr>
-              <a:t>Filters 1-3 from TestGen-LLM: builds, passes reliably, adds coverage (B11, F-b-16 to F-b-22)</a:t>
+              <a:t>Filters 1-3 from TestGen-LLM (Meta): builds, passes reliably, adds coverage</a:t>
             </a:r>
           </a:p>
           <a:p>
@@ -33036,7 +32912,7 @@
                 </a:solidFill>
                 <a:latin typeface="Calibri"/>
               </a:rPr>
-              <a:t>Passes reliably: "every one of five executions" (B11, F-b-19); the referee also re-runs shipped tests five times</a:t>
+              <a:t>Passes reliably: "every one of five executions"; the referee also re-runs shipped tests five times</a:t>
             </a:r>
           </a:p>
           <a:p>
@@ -33061,7 +32937,7 @@
                 </a:solidFill>
                 <a:latin typeface="Calibri"/>
               </a:rPr>
-              <a:t>Filters 4 and 5 are course filters: real assertions, no source change in the test phase</a:t>
+              <a:t>Filters 4 and 5 are the course's own: real assertions, no source change in the test phase</a:t>
             </a:r>
           </a:p>
           <a:p>
@@ -33380,7 +33256,7 @@
                 </a:solidFill>
                 <a:latin typeface="Calibri"/>
               </a:rPr>
-              <a:t>ACH: mutants for the fault of concern, then hardening (B12, F-b-29, F-b-32)</a:t>
+              <a:t>ACH (Meta): mutants for the fault you care about, then tests that catch them</a:t>
             </a:r>
           </a:p>
           <a:p>
@@ -33405,7 +33281,7 @@
                 </a:solidFill>
                 <a:latin typeface="Calibri"/>
               </a:rPr>
-              <a:t>49% of tests that uniquely kill a mutant add no line coverage (F-b-40)</a:t>
+              <a:t>ACH reports that 49% of tests that uniquely kill a mutant add no line coverage</a:t>
             </a:r>
           </a:p>
           <a:p>
@@ -33455,7 +33331,7 @@
                 </a:solidFill>
                 <a:latin typeface="Calibri"/>
               </a:rPr>
-              <a:t>Hidden tests that compose features (B13, B14; F-b-42 to F-b-44)</a:t>
+              <a:t>Hidden tests that combine features (SpecBench)</a:t>
             </a:r>
           </a:p>
           <a:p>
@@ -33774,7 +33650,7 @@
                 </a:solidFill>
                 <a:latin typeface="Calibri"/>
               </a:rPr>
-              <a:t>Blinded reviewer with grading criteria (A3, F-a-110 to F-a-112)</a:t>
+              <a:t>A blinded reviewer with grading criteria (Anthropic, Harness design)</a:t>
             </a:r>
           </a:p>
           <a:p>
@@ -33799,7 +33675,7 @@
                 </a:solidFill>
                 <a:latin typeface="Calibri"/>
               </a:rPr>
-              <a:t>Clean-state gate (A2, F-a-84; A4, F-a-127)</a:t>
+              <a:t>A clean-state gate (Anthropic, Effective harnesses; Anthropic, C compiler)</a:t>
             </a:r>
           </a:p>
           <a:p>
@@ -33824,7 +33700,7 @@
                 </a:solidFill>
                 <a:latin typeface="Calibri"/>
               </a:rPr>
-              <a:t>House rules R1-R7 (course label)</a:t>
+              <a:t>House rules R1 to R7, checked by code</a:t>
             </a:r>
           </a:p>
           <a:p>
@@ -33849,7 +33725,7 @@
                 </a:solidFill>
                 <a:latin typeface="Calibri"/>
               </a:rPr>
-              <a:t>A3: "It is worth the cost when the task sits beyond what the current model does reliably solo." (F-a-123)</a:t>
+              <a:t>"It is worth the cost when the task sits beyond what the current model does reliably solo." (Anthropic, Harness design)</a:t>
             </a:r>
           </a:p>
         </p:txBody>
@@ -34143,7 +34019,7 @@
                 </a:solidFill>
                 <a:latin typeface="Calibri"/>
               </a:rPr>
-              <a:t>Read the trace: find the first wrong turn (A3, F-a-126); screen 5 shows it per arm, as a heuristic</a:t>
+              <a:t>Read the trace: find the first wrong turn; screen 5 shows it per arm, as a heuristic</a:t>
             </a:r>
           </a:p>
           <a:p>
@@ -34168,7 +34044,7 @@
                 </a:solidFill>
                 <a:latin typeface="Calibri"/>
               </a:rPr>
-              <a:t>Measure one piece: "removing one component at a time and reviewing what impact it had on the final result." (A3, F-a-125)</a:t>
+              <a:t>Measure one piece: "removing one component at a time and reviewing what impact it had on the final result."</a:t>
             </a:r>
           </a:p>
           <a:p>
@@ -34847,7 +34723,7 @@
                 </a:solidFill>
                 <a:latin typeface="Consolas"/>
               </a:rPr>
-              <a:t>src/shipharness/filters/pipeline.py</a:t>
+              <a:t>platform/src/shipharness/filters/pipeline.py</a:t>
             </a:r>
           </a:p>
         </p:txBody>
@@ -35467,7 +35343,7 @@
                 </a:solidFill>
                 <a:latin typeface="Consolas"/>
               </a:rPr>
-              <a:t>src/shipharness/checks/r1_tenant.py</a:t>
+              <a:t>platform/src/shipharness/checks/r1_tenant.py</a:t>
             </a:r>
           </a:p>
         </p:txBody>
@@ -35761,7 +35637,7 @@
                 </a:solidFill>
                 <a:latin typeface="Calibri"/>
               </a:rPr>
-              <a:t>Same agent, model, effort, task, repository, tools, sandbox, turn limit, cost cap; one deterministic referee</a:t>
+              <a:t>Same agent, model, effort, task, repository, tools, sandbox, turn limit, and cost cap</a:t>
             </a:r>
           </a:p>
           <a:p>
@@ -35786,7 +35662,7 @@
                 </a:solidFill>
                 <a:latin typeface="Calibri"/>
               </a:rPr>
-              <a:t>House rules R1-R7: the course label for A1's "golden principles" (F-a-99)</a:t>
+              <a:t>One referee judges what ships, the same way for both arms</a:t>
             </a:r>
           </a:p>
           <a:p>
@@ -35811,7 +35687,7 @@
                 </a:solidFill>
                 <a:latin typeface="Calibri"/>
               </a:rPr>
-              <a:t>One primary measure per section, registered before any run; results are counts, never percentages</a:t>
+              <a:t>House rules R1 to R7: the course's name for OpenAI's "golden principles"</a:t>
             </a:r>
           </a:p>
           <a:p>
@@ -35836,7 +35712,7 @@
                 </a:solidFill>
                 <a:latin typeface="Calibri"/>
               </a:rPr>
-              <a:t>Registered before the runs: no gap is reported as "no measurable difference on this task with this model"</a:t>
+              <a:t>One primary measure per section, registered before any run; results are counts</a:t>
             </a:r>
           </a:p>
           <a:p>
@@ -35861,7 +35737,7 @@
                 </a:solidFill>
                 <a:latin typeface="Calibri"/>
               </a:rPr>
-              <a:t>One piece at a time is A3's method: "removing one component at a time" (F-a-125)</a:t>
+              <a:t>No gap is reported as "no measurable difference on this task with this model"</a:t>
             </a:r>
           </a:p>
           <a:p>
@@ -35886,7 +35762,7 @@
                 </a:solidFill>
                 <a:latin typeface="Calibri"/>
               </a:rPr>
-              <a:t>Datasets: 60 tasks in six groups, 40 test-generation targets</a:t>
+              <a:t>One piece at a time: "removing one component at a time" (Anthropic, Harness design)</a:t>
             </a:r>
           </a:p>
         </p:txBody>
@@ -36534,7 +36410,7 @@
                 </a:solidFill>
                 <a:latin typeface="Consolas"/>
               </a:rPr>
-              <a:t>src/shipharness/harness/verify/gate.py</a:t>
+              <a:t>platform/src/shipharness/harness/verify/gate.py</a:t>
             </a:r>
           </a:p>
         </p:txBody>
@@ -36794,7 +36670,7 @@
         <p:spPr>
           <a:xfrm>
             <a:off x="533400" y="1219200"/>
-            <a:ext cx="11125200" cy="1918811"/>
+            <a:ext cx="11125200" cy="2106930"/>
           </a:xfrm>
           <a:prstGeom prst="rect">
             <a:avLst/>
@@ -36809,11 +36685,11 @@
           <a:p>
             <a:pPr algn="l">
               <a:spcAft>
-                <a:spcPts val="860"/>
+                <a:spcPts val="945"/>
               </a:spcAft>
             </a:pPr>
             <a:r>
-              <a:rPr sz="1912" b="0">
+              <a:rPr sz="2100" b="0">
                 <a:solidFill>
                   <a:srgbClr val="111820"/>
                 </a:solidFill>
@@ -36822,7 +36698,7 @@
               <a:t>•  </a:t>
             </a:r>
             <a:r>
-              <a:rPr sz="1912" b="0">
+              <a:rPr sz="2100" b="0">
                 <a:solidFill>
                   <a:srgbClr val="111820"/>
                 </a:solidFill>
@@ -36834,11 +36710,11 @@
           <a:p>
             <a:pPr algn="l">
               <a:spcAft>
-                <a:spcPts val="860"/>
+                <a:spcPts val="945"/>
               </a:spcAft>
             </a:pPr>
             <a:r>
-              <a:rPr sz="1912" b="0">
+              <a:rPr sz="2100" b="0">
                 <a:solidFill>
                   <a:srgbClr val="111820"/>
                 </a:solidFill>
@@ -36847,7 +36723,7 @@
               <a:t>•  </a:t>
             </a:r>
             <a:r>
-              <a:rPr sz="1912" b="0">
+              <a:rPr sz="2100" b="0">
                 <a:solidFill>
                   <a:srgbClr val="111820"/>
                 </a:solidFill>
@@ -36859,11 +36735,11 @@
           <a:p>
             <a:pPr algn="l">
               <a:spcAft>
-                <a:spcPts val="860"/>
+                <a:spcPts val="945"/>
               </a:spcAft>
             </a:pPr>
             <a:r>
-              <a:rPr sz="1912" b="0">
+              <a:rPr sz="2100" b="0">
                 <a:solidFill>
                   <a:srgbClr val="111820"/>
                 </a:solidFill>
@@ -36872,13 +36748,31 @@
               <a:t>•  </a:t>
             </a:r>
             <a:r>
-              <a:rPr sz="1912" b="0">
-                <a:solidFill>
-                  <a:srgbClr val="111820"/>
-                </a:solidFill>
-                <a:latin typeface="Calibri"/>
-              </a:rPr>
-              <a:t>Console screens 1 and 2 (show-4), captured on 2026-10-17, run ab-20261017-115138-c45d9d; your output will differ</a:t>
+              <a:rPr sz="2100" b="0">
+                <a:solidFill>
+                  <a:srgbClr val="111820"/>
+                </a:solidFill>
+                <a:latin typeface="Calibri"/>
+              </a:rPr>
+              <a:t>Picture: screens 1 and 2 of a timed run of </a:t>
+            </a:r>
+            <a:r>
+              <a:rPr sz="2100" b="0">
+                <a:solidFill>
+                  <a:srgbClr val="111820"/>
+                </a:solidFill>
+                <a:latin typeface="Consolas"/>
+              </a:rPr>
+              <a:t>make show-4</a:t>
+            </a:r>
+            <a:r>
+              <a:rPr sz="2100" b="0">
+                <a:solidFill>
+                  <a:srgbClr val="111820"/>
+                </a:solidFill>
+                <a:latin typeface="Calibri"/>
+              </a:rPr>
+              <a:t> before class</a:t>
             </a:r>
           </a:p>
         </p:txBody>
@@ -36899,8 +36793,8 @@
         </p:blipFill>
         <p:spPr>
           <a:xfrm>
-            <a:off x="3600606" y="3233261"/>
-            <a:ext cx="4990789" cy="2691289"/>
+            <a:off x="3775032" y="3421380"/>
+            <a:ext cx="4641937" cy="2503170"/>
           </a:xfrm>
           <a:prstGeom prst="rect">
             <a:avLst/>
@@ -37276,11 +37170,11 @@
           <a:p>
             <a:pPr algn="l">
               <a:spcAft>
-                <a:spcPts val="776"/>
+                <a:spcPts val="945"/>
               </a:spcAft>
             </a:pPr>
             <a:r>
-              <a:rPr sz="1725" b="0">
+              <a:rPr sz="2100" b="0">
                 <a:solidFill>
                   <a:srgbClr val="111820"/>
                 </a:solidFill>
@@ -37289,23 +37183,23 @@
               <a:t>•  </a:t>
             </a:r>
             <a:r>
-              <a:rPr sz="1725" b="0">
-                <a:solidFill>
-                  <a:srgbClr val="111820"/>
-                </a:solidFill>
-                <a:latin typeface="Calibri"/>
-              </a:rPr>
-              <a:t>show-4 in the quiet run: the gate passed and the agent said done; the referee found hidden tests 68 of 69, mutants killed 0 of 4: fails</a:t>
+              <a:rPr sz="2100" b="0">
+                <a:solidFill>
+                  <a:srgbClr val="111820"/>
+                </a:solidFill>
+                <a:latin typeface="Calibri"/>
+              </a:rPr>
+              <a:t>The timed run: the gate passed; hidden tests 68 of 69, mutants 0 of 4: fail</a:t>
             </a:r>
           </a:p>
           <a:p>
             <a:pPr algn="l">
               <a:spcAft>
-                <a:spcPts val="776"/>
+                <a:spcPts val="945"/>
               </a:spcAft>
             </a:pPr>
             <a:r>
-              <a:rPr sz="1725" b="0">
+              <a:rPr sz="2100" b="0">
                 <a:solidFill>
                   <a:srgbClr val="111820"/>
                 </a:solidFill>
@@ -37314,23 +37208,23 @@
               <a:t>•  </a:t>
             </a:r>
             <a:r>
-              <a:rPr sz="1725" b="0">
-                <a:solidFill>
-                  <a:srgbClr val="111820"/>
-                </a:solidFill>
-                <a:latin typeface="Calibri"/>
-              </a:rPr>
-              <a:t>The gate checks visible tests and house rules; hidden tests and referee mutants stay out of its reach</a:t>
+              <a:rPr sz="2100" b="0">
+                <a:solidFill>
+                  <a:srgbClr val="111820"/>
+                </a:solidFill>
+                <a:latin typeface="Calibri"/>
+              </a:rPr>
+              <a:t>The gate never sees the hidden tests or the referee's mutants</a:t>
             </a:r>
           </a:p>
           <a:p>
             <a:pPr algn="l">
               <a:spcAft>
-                <a:spcPts val="776"/>
+                <a:spcPts val="945"/>
               </a:spcAft>
             </a:pPr>
             <a:r>
-              <a:rPr sz="1725" b="0">
+              <a:rPr sz="2100" b="0">
                 <a:solidFill>
                   <a:srgbClr val="111820"/>
                 </a:solidFill>
@@ -37339,23 +37233,23 @@
               <a:t>•  </a:t>
             </a:r>
             <a:r>
-              <a:rPr sz="1725" b="0">
-                <a:solidFill>
-                  <a:srgbClr val="111820"/>
-                </a:solidFill>
-                <a:latin typeface="Calibri"/>
-              </a:rPr>
-              <a:t>Pilot, all 69 hidden tests and all 4 mutants: bare 0 of 4 passing, harness 0 of 4 (poll answer: D); no measurable difference on this task with this model</a:t>
+              <a:rPr sz="2100" b="0">
+                <a:solidFill>
+                  <a:srgbClr val="111820"/>
+                </a:solidFill>
+                <a:latin typeface="Calibri"/>
+              </a:rPr>
+              <a:t>Before class: bare 0 of 4 passing, harness 0 of 4 (poll answer: D)</a:t>
             </a:r>
           </a:p>
           <a:p>
             <a:pPr algn="l">
               <a:spcAft>
-                <a:spcPts val="776"/>
+                <a:spcPts val="945"/>
               </a:spcAft>
             </a:pPr>
             <a:r>
-              <a:rPr sz="1725" b="0">
+              <a:rPr sz="2100" b="0">
                 <a:solidFill>
                   <a:srgbClr val="111820"/>
                 </a:solidFill>
@@ -37364,23 +37258,23 @@
               <a:t>•  </a:t>
             </a:r>
             <a:r>
-              <a:rPr sz="1725" b="0">
-                <a:solidFill>
-                  <a:srgbClr val="111820"/>
-                </a:solidFill>
-                <a:latin typeface="Calibri"/>
-              </a:rPr>
-              <a:t>Class-profile round: the bare arm claimed done with 68 of 69 hidden tests, the first done claim with a failing hidden test in the pilot's records</a:t>
+              <a:rPr sz="2100" b="0">
+                <a:solidFill>
+                  <a:srgbClr val="111820"/>
+                </a:solidFill>
+                <a:latin typeface="Calibri"/>
+              </a:rPr>
+              <a:t>One bare arm claimed done with 68 of 69 hidden tests</a:t>
             </a:r>
           </a:p>
           <a:p>
             <a:pPr algn="l">
               <a:spcAft>
-                <a:spcPts val="776"/>
+                <a:spcPts val="945"/>
               </a:spcAft>
             </a:pPr>
             <a:r>
-              <a:rPr sz="1725" b="0">
+              <a:rPr sz="2100" b="0">
                 <a:solidFill>
                   <a:srgbClr val="111820"/>
                 </a:solidFill>
@@ -37389,13 +37283,13 @@
               <a:t>•  </a:t>
             </a:r>
             <a:r>
-              <a:rPr sz="1725" b="0">
-                <a:solidFill>
-                  <a:srgbClr val="111820"/>
-                </a:solidFill>
-                <a:latin typeface="Calibri"/>
-              </a:rPr>
-              <a:t>Console screen 3 (show-4), captured on 2026-10-17, run ab-20261017-115138-c45d9d; your output will differ</a:t>
+              <a:rPr sz="2100" b="0">
+                <a:solidFill>
+                  <a:srgbClr val="111820"/>
+                </a:solidFill>
+                <a:latin typeface="Calibri"/>
+              </a:rPr>
+              <a:t>Picture: screen 3 of the same run</a:t>
             </a:r>
           </a:p>
         </p:txBody>
@@ -37722,7 +37616,7 @@
                 </a:solidFill>
                 <a:latin typeface="Consolas"/>
               </a:rPr>
-              <a:t>submodules/04-verification/demo/README.md</a:t>
+              <a:t>04-verification/demo/README.md</a:t>
             </a:r>
           </a:p>
           <a:p>
@@ -37747,7 +37641,7 @@
                 </a:solidFill>
                 <a:latin typeface="Calibri"/>
               </a:rPr>
-              <a:t>Discussion: one false "done" in 4 pilot F4 runs per arm, from the bare arm. What would a gate need to catch to earn its turns on this model?</a:t>
+              <a:t>Discussion: one false "done" in 4 F4 runs per arm, from the bare arm. What would a gate need to catch to earn its turns on this model?</a:t>
             </a:r>
           </a:p>
           <a:p>
@@ -38116,7 +38010,7 @@
                 </a:solidFill>
                 <a:latin typeface="Calibri"/>
               </a:rPr>
-              <a:t>No pre-registered primary measure: read hidden tests and mutants per arm</a:t>
+              <a:t>No primary measure registered: read hidden tests and mutants per arm</a:t>
             </a:r>
           </a:p>
           <a:p>
@@ -38141,7 +38035,7 @@
                 </a:solidFill>
                 <a:latin typeface="Calibri"/>
               </a:rPr>
-              <a:t>One A/B is one dot: read it against the pilot's dots</a:t>
+              <a:t>One A/B is one dot: read it next to the dots from before class</a:t>
             </a:r>
           </a:p>
         </p:txBody>
@@ -38506,7 +38400,7 @@
         <p:spPr>
           <a:xfrm>
             <a:off x="533400" y="1219200"/>
-            <a:ext cx="11125200" cy="1918811"/>
+            <a:ext cx="11125200" cy="2106930"/>
           </a:xfrm>
           <a:prstGeom prst="rect">
             <a:avLst/>
@@ -38521,11 +38415,11 @@
           <a:p>
             <a:pPr algn="l">
               <a:spcAft>
-                <a:spcPts val="860"/>
+                <a:spcPts val="945"/>
               </a:spcAft>
             </a:pPr>
             <a:r>
-              <a:rPr sz="1912" b="0">
+              <a:rPr sz="2100" b="0">
                 <a:solidFill>
                   <a:srgbClr val="111820"/>
                 </a:solidFill>
@@ -38534,7 +38428,7 @@
               <a:t>•  </a:t>
             </a:r>
             <a:r>
-              <a:rPr sz="1912" b="0">
+              <a:rPr sz="2100" b="0">
                 <a:solidFill>
                   <a:srgbClr val="111820"/>
                 </a:solidFill>
@@ -38546,11 +38440,11 @@
           <a:p>
             <a:pPr algn="l">
               <a:spcAft>
-                <a:spcPts val="860"/>
+                <a:spcPts val="945"/>
               </a:spcAft>
             </a:pPr>
             <a:r>
-              <a:rPr sz="1912" b="0">
+              <a:rPr sz="2100" b="0">
                 <a:solidFill>
                   <a:srgbClr val="111820"/>
                 </a:solidFill>
@@ -38559,7 +38453,7 @@
               <a:t>•  </a:t>
             </a:r>
             <a:r>
-              <a:rPr sz="1912" b="0">
+              <a:rPr sz="2100" b="0">
                 <a:solidFill>
                   <a:srgbClr val="111820"/>
                 </a:solidFill>
@@ -38571,11 +38465,11 @@
           <a:p>
             <a:pPr algn="l">
               <a:spcAft>
-                <a:spcPts val="860"/>
+                <a:spcPts val="945"/>
               </a:spcAft>
             </a:pPr>
             <a:r>
-              <a:rPr sz="1912" b="0">
+              <a:rPr sz="2100" b="0">
                 <a:solidFill>
                   <a:srgbClr val="111820"/>
                 </a:solidFill>
@@ -38584,13 +38478,31 @@
               <a:t>•  </a:t>
             </a:r>
             <a:r>
-              <a:rPr sz="1912" b="0">
-                <a:solidFill>
-                  <a:srgbClr val="111820"/>
-                </a:solidFill>
-                <a:latin typeface="Calibri"/>
-              </a:rPr>
-              <a:t>Console screen 1 (final), captured on 2026-10-17, run ab-20261017-120323-c97138; your output will differ</a:t>
+              <a:rPr sz="2100" b="0">
+                <a:solidFill>
+                  <a:srgbClr val="111820"/>
+                </a:solidFill>
+                <a:latin typeface="Calibri"/>
+              </a:rPr>
+              <a:t>Picture: screen 1 of a timed run of </a:t>
+            </a:r>
+            <a:r>
+              <a:rPr sz="2100" b="0">
+                <a:solidFill>
+                  <a:srgbClr val="111820"/>
+                </a:solidFill>
+                <a:latin typeface="Consolas"/>
+              </a:rPr>
+              <a:t>make final FEATURES=F5</a:t>
+            </a:r>
+            <a:r>
+              <a:rPr sz="2100" b="0">
+                <a:solidFill>
+                  <a:srgbClr val="111820"/>
+                </a:solidFill>
+                <a:latin typeface="Calibri"/>
+              </a:rPr>
+              <a:t> before class</a:t>
             </a:r>
           </a:p>
         </p:txBody>
@@ -38611,8 +38523,8 @@
         </p:blipFill>
         <p:spPr>
           <a:xfrm>
-            <a:off x="2942146" y="3233261"/>
-            <a:ext cx="6307708" cy="2691289"/>
+            <a:off x="3162598" y="3421380"/>
+            <a:ext cx="5866805" cy="2503170"/>
           </a:xfrm>
           <a:prstGeom prst="rect">
             <a:avLst/>
@@ -38955,7 +38867,7 @@
         <p:spPr>
           <a:xfrm>
             <a:off x="533400" y="1219200"/>
-            <a:ext cx="11125200" cy="1765554"/>
+            <a:ext cx="11125200" cy="1424178"/>
           </a:xfrm>
           <a:prstGeom prst="rect">
             <a:avLst/>
@@ -39039,7 +38951,7 @@
                 </a:solidFill>
                 <a:latin typeface="Calibri"/>
               </a:rPr>
-              <a:t>Console screen 2 (final), captured on 2026-10-17, run ab-20261017-120323-c97138; your output will differ</a:t>
+              <a:t>Picture: screen 2 of the same timed run</a:t>
             </a:r>
           </a:p>
         </p:txBody>
@@ -39060,8 +38972,8 @@
         </p:blipFill>
         <p:spPr>
           <a:xfrm>
-            <a:off x="2051622" y="3080004"/>
-            <a:ext cx="8088756" cy="2844546"/>
+            <a:off x="1566253" y="2738628"/>
+            <a:ext cx="9059494" cy="3185922"/>
           </a:xfrm>
           <a:prstGeom prst="rect">
             <a:avLst/>
@@ -39732,7 +39644,7 @@
                 </a:solidFill>
                 <a:latin typeface="Consolas"/>
               </a:rPr>
-              <a:t>src/shipharness/ab/report.py</a:t>
+              <a:t>platform/src/shipharness/ab/report.py</a:t>
             </a:r>
           </a:p>
         </p:txBody>
@@ -40059,7 +39971,7 @@
                 </a:solidFill>
                 <a:latin typeface="Calibri"/>
               </a:rPr>
-              <a:t>What the pilot measured: every section</a:t>
+              <a:t>What we measured: every section</a:t>
             </a:r>
           </a:p>
         </p:txBody>
@@ -40094,7 +40006,7 @@
                 </a:solidFill>
                 <a:latin typeface="Calibri"/>
               </a:rPr>
-              <a:t>Primary measure, runs passing per arm: pilot runs 3 and 4 and the class-profile round</a:t>
+              <a:t>Primary measure, runs passing per arm, before class</a:t>
             </a:r>
           </a:p>
         </p:txBody>
@@ -40192,7 +40104,7 @@
                 </a:solidFill>
                 <a:latin typeface="Calibri"/>
               </a:rPr>
-              <a:t>S3, F3, no out-of-scope file or test-phase source edit: bare 7 of 7, harness 7 of 7</a:t>
+              <a:t>S3, F3, scope: 7 of 7 each; S3 confirmation on F4, no out-of-scope file: bare 0 of 3, harness 3 of 3</a:t>
             </a:r>
           </a:p>
           <a:p>
@@ -40242,7 +40154,7 @@
                 </a:solidFill>
                 <a:latin typeface="Calibri"/>
               </a:rPr>
-              <a:t>All four: no measurable difference on this task with this model; the gate did not pass, so the planned larger experiments were not run</a:t>
+              <a:t>One harness lead, on scope, by construction; elsewhere no measurable difference on this task with this model</a:t>
             </a:r>
           </a:p>
           <a:p>
@@ -40267,7 +40179,7 @@
                 </a:solidFill>
                 <a:latin typeface="Calibri"/>
               </a:rPr>
-              <a:t>Post hoc (34 runs per arm): outside the allowed paths, harness 0, bare 9; done claimed 10 against 19, none false</a:t>
+              <a:t>Post hoc, 34 runs per arm: outside the allowed paths, harness 0, bare 9; done claimed 10 against 19, none false</a:t>
             </a:r>
           </a:p>
         </p:txBody>
@@ -40570,16 +40482,16 @@
                 </a:solidFill>
                 <a:latin typeface="Consolas"/>
               </a:rPr>
-              <a:t>submodules/01-instructions/assignment/</a:t>
-            </a:r>
-            <a:r>
-              <a:rPr sz="2100" b="0">
-                <a:solidFill>
-                  <a:srgbClr val="111820"/>
-                </a:solidFill>
-                <a:latin typeface="Calibri"/>
-              </a:rPr>
-              <a:t>, ≤ $2.50 and 150 traces</a:t>
+              <a:t>01-instructions/assignment/</a:t>
+            </a:r>
+            <a:r>
+              <a:rPr sz="2100" b="0">
+                <a:solidFill>
+                  <a:srgbClr val="111820"/>
+                </a:solidFill>
+                <a:latin typeface="Calibri"/>
+              </a:rPr>
+              <a:t>, at most $2.50 and 150 traces</a:t>
             </a:r>
           </a:p>
           <a:p>
@@ -40613,16 +40525,16 @@
                 </a:solidFill>
                 <a:latin typeface="Consolas"/>
               </a:rPr>
-              <a:t>submodules/02-state-lifecycle/assignment/</a:t>
-            </a:r>
-            <a:r>
-              <a:rPr sz="2100" b="0">
-                <a:solidFill>
-                  <a:srgbClr val="111820"/>
-                </a:solidFill>
-                <a:latin typeface="Calibri"/>
-              </a:rPr>
-              <a:t>, ≤ $0.40 and 4 traces</a:t>
+              <a:t>02-state-lifecycle/assignment/</a:t>
+            </a:r>
+            <a:r>
+              <a:rPr sz="2100" b="0">
+                <a:solidFill>
+                  <a:srgbClr val="111820"/>
+                </a:solidFill>
+                <a:latin typeface="Calibri"/>
+              </a:rPr>
+              <a:t>, at most $0.40 and 4 traces</a:t>
             </a:r>
           </a:p>
           <a:p>
@@ -40656,16 +40568,16 @@
                 </a:solidFill>
                 <a:latin typeface="Consolas"/>
               </a:rPr>
-              <a:t>submodules/03-scope-sandbox/assignment/</a:t>
-            </a:r>
-            <a:r>
-              <a:rPr sz="2100" b="0">
-                <a:solidFill>
-                  <a:srgbClr val="111820"/>
-                </a:solidFill>
-                <a:latin typeface="Calibri"/>
-              </a:rPr>
-              <a:t>, ≤ $0.48 and 4 traces</a:t>
+              <a:t>03-scope-sandbox/assignment/</a:t>
+            </a:r>
+            <a:r>
+              <a:rPr sz="2100" b="0">
+                <a:solidFill>
+                  <a:srgbClr val="111820"/>
+                </a:solidFill>
+                <a:latin typeface="Calibri"/>
+              </a:rPr>
+              <a:t>, at most $0.48 and 4 traces</a:t>
             </a:r>
           </a:p>
           <a:p>
@@ -40699,16 +40611,16 @@
                 </a:solidFill>
                 <a:latin typeface="Consolas"/>
               </a:rPr>
-              <a:t>submodules/04-verification/assignment/</a:t>
-            </a:r>
-            <a:r>
-              <a:rPr sz="2100" b="0">
-                <a:solidFill>
-                  <a:srgbClr val="111820"/>
-                </a:solidFill>
-                <a:latin typeface="Calibri"/>
-              </a:rPr>
-              <a:t>, ≤ $0.68</a:t>
+              <a:t>04-verification/assignment/</a:t>
+            </a:r>
+            <a:r>
+              <a:rPr sz="2100" b="0">
+                <a:solidFill>
+                  <a:srgbClr val="111820"/>
+                </a:solidFill>
+                <a:latin typeface="Calibri"/>
+              </a:rPr>
+              <a:t>, at most $0.68</a:t>
             </a:r>
           </a:p>
           <a:p>
@@ -40733,7 +40645,7 @@
                 </a:solidFill>
                 <a:latin typeface="Calibri"/>
               </a:rPr>
-              <a:t>Each: a brief with grading criteria, a starter folder, </a:t>
+              <a:t>Each: grading criteria, a starter folder, </a:t>
             </a:r>
             <a:r>
               <a:rPr sz="2100" b="0">
@@ -40751,7 +40663,7 @@
                 </a:solidFill>
                 <a:latin typeface="Calibri"/>
               </a:rPr>
-              <a:t> offline, one live step</a:t>
+              <a:t> offline, one live step, and a full solution</a:t>
             </a:r>
           </a:p>
           <a:p>
@@ -40776,7 +40688,7 @@
                 </a:solidFill>
                 <a:latin typeface="Calibri"/>
               </a:rPr>
-              <a:t>Total ≤ $6 and ≤ 400 traces; Thursday review</a:t>
+              <a:t>Total at most $6 and 400 traces; Thursday review</a:t>
             </a:r>
           </a:p>
         </p:txBody>
@@ -41630,7 +41542,7 @@
                 </a:solidFill>
                 <a:latin typeface="Calibri"/>
               </a:rPr>
-              <a:t>, in the Agent Skills format (B1)</a:t>
+              <a:t>, in the Agent Skills format</a:t>
             </a:r>
           </a:p>
           <a:p>
@@ -41732,7 +41644,7 @@
                 </a:solidFill>
                 <a:latin typeface="Consolas"/>
               </a:rPr>
-              <a:t>docs/apply-to-your-repo.md</a:t>
+              <a:t>use-in-your-repo/apply-to-your-repo.md</a:t>
             </a:r>
             <a:r>
               <a:rPr sz="2100" b="0">
@@ -41961,7 +41873,7 @@
                 </a:solidFill>
                 <a:latin typeface="Consolas"/>
               </a:rPr>
-              <a:t>skills/skill-template/SKILL.md</a:t>
+              <a:t>use-in-your-repo/skills/skill-template/SKILL.md</a:t>
             </a:r>
           </a:p>
         </p:txBody>
@@ -42255,7 +42167,7 @@
                 </a:solidFill>
                 <a:latin typeface="Calibri"/>
               </a:rPr>
-              <a:t>A1 Harness engineering: leveraging Codex in an agent-first world · Ryan Lopopolo, OpenAI · 2026-02-11</a:t>
+              <a:t>OpenAI, Harness engineering: leveraging Codex in an agent-first world · Ryan Lopopolo · 2026-02-11</a:t>
             </a:r>
           </a:p>
           <a:p>
@@ -42280,7 +42192,7 @@
                 </a:solidFill>
                 <a:latin typeface="Calibri"/>
               </a:rPr>
-              <a:t>A2 Effective harnesses for long-running agents · Justin Young, Anthropic · 2025-11-26</a:t>
+              <a:t>Anthropic, Effective harnesses for long-running agents · Justin Young · 2025-11-26</a:t>
             </a:r>
           </a:p>
           <a:p>
@@ -42305,7 +42217,7 @@
                 </a:solidFill>
                 <a:latin typeface="Calibri"/>
               </a:rPr>
-              <a:t>A3 Harness design for long-running application development · Prithvi Rajasekaran, Anthropic · 2026-03-24</a:t>
+              <a:t>Anthropic, Harness design for long-running application development · Prithvi Rajasekaran · 2026-03-24</a:t>
             </a:r>
           </a:p>
           <a:p>
@@ -42330,7 +42242,7 @@
                 </a:solidFill>
                 <a:latin typeface="Calibri"/>
               </a:rPr>
-              <a:t>A4 Building a C compiler with a team of parallel Claudes · Nicholas Carlini, Anthropic · 2026-02-05</a:t>
+              <a:t>Anthropic, Building a C compiler with a team of parallel Claudes · Nicholas Carlini · 2026-02-05</a:t>
             </a:r>
           </a:p>
           <a:p>
@@ -42355,7 +42267,7 @@
                 </a:solidFill>
                 <a:latin typeface="Calibri"/>
               </a:rPr>
-              <a:t>A5 Autonomous Coding Agent Demo (README) · Anthropic · 2025-11-26</a:t>
+              <a:t>Anthropic, Autonomous Coding Agent Demo (README) · 2025-11-26</a:t>
             </a:r>
           </a:p>
           <a:p>
@@ -42380,7 +42292,7 @@
                 </a:solidFill>
                 <a:latin typeface="Calibri"/>
               </a:rPr>
-              <a:t>A6 Prompting best practices · Anthropic, Claude docs · living page; A7 Using PLANS.md · Aaron Friel, OpenAI · 2025-10-07</a:t>
+              <a:t>Anthropic, Prompting best practices (living page); OpenAI, Using PLANS.md · Aaron Friel · 2025-10-07</a:t>
             </a:r>
           </a:p>
         </p:txBody>
@@ -42674,7 +42586,7 @@
                 </a:solidFill>
                 <a:latin typeface="Calibri"/>
               </a:rPr>
-              <a:t>B1 Agent Skills Specification; B2 What are skills?; B3 How to add skills support · Agent Skills project</a:t>
+              <a:t>Agent Skills: Specification; What are skills?; How to add skills support · agentskills.io</a:t>
             </a:r>
           </a:p>
           <a:p>
@@ -42699,7 +42611,7 @@
                 </a:solidFill>
                 <a:latin typeface="Calibri"/>
               </a:rPr>
-              <a:t>B4-B6 agentskills repo and skills-ref; B7 Claude Code skills; B8 Codex skills; B9-B10 Cursor skills</a:t>
+              <a:t>The skills-ref validator; Claude Code, Codex, and Cursor skills docs</a:t>
             </a:r>
           </a:p>
           <a:p>
@@ -42724,7 +42636,7 @@
                 </a:solidFill>
                 <a:latin typeface="Calibri"/>
               </a:rPr>
-              <a:t>B11 TestGen-LLM · Alshahwan et al., Meta · 2024; B12 ACH · Foster et al., Meta · 2025</a:t>
+              <a:t>TestGen-LLM · Alshahwan et al., Meta · 2024</a:t>
             </a:r>
           </a:p>
           <a:p>
@@ -42749,7 +42661,7 @@
                 </a:solidFill>
                 <a:latin typeface="Calibri"/>
               </a:rPr>
-              <a:t>B13 SpecBench · Zhao, Srikanth, Wu, Jiang (Weco AI) · 2026; B14 WecoAI/SpecBench repo</a:t>
+              <a:t>ACH, mutation-guided test generation · Foster et al., Meta · 2025</a:t>
             </a:r>
           </a:p>
           <a:p>
@@ -42774,7 +42686,32 @@
                 </a:solidFill>
                 <a:latin typeface="Calibri"/>
               </a:rPr>
-              <a:t>B15 (Spec-Bench, speculative decoding) is unrelated and not cited</a:t>
+              <a:t>SpecBench · Zhao, Srikanth, Wu, Jiang (Weco AI) · 2026, and its repository</a:t>
+            </a:r>
+          </a:p>
+          <a:p>
+            <a:pPr algn="l">
+              <a:spcAft>
+                <a:spcPts val="945"/>
+              </a:spcAft>
+            </a:pPr>
+            <a:r>
+              <a:rPr sz="2100" b="0">
+                <a:solidFill>
+                  <a:srgbClr val="111820"/>
+                </a:solidFill>
+                <a:latin typeface="Calibri"/>
+              </a:rPr>
+              <a:t>•  </a:t>
+            </a:r>
+            <a:r>
+              <a:rPr sz="2100" b="0">
+                <a:solidFill>
+                  <a:srgbClr val="111820"/>
+                </a:solidFill>
+                <a:latin typeface="Calibri"/>
+              </a:rPr>
+              <a:t>Codex docs on sandboxing and network access</a:t>
             </a:r>
           </a:p>
         </p:txBody>
@@ -43093,7 +43030,7 @@
                 </a:solidFill>
                 <a:latin typeface="Calibri"/>
               </a:rPr>
-              <a:t>The pilot's trap ticket: a legacy handler without the tenant filter, next to the right pattern</a:t>
+              <a:t>The ticket: a legacy handler without the tenant filter sits next to the right pattern</a:t>
             </a:r>
           </a:p>
           <a:p>
@@ -43118,7 +43055,7 @@
                 </a:solidFill>
                 <a:latin typeface="Calibri"/>
               </a:rPr>
-              <a:t>Of the pilot's 7 bare-arm F1 runs on that ticket, how many shipped at least one new R1 violation?</a:t>
+              <a:t>Before class, 7 bare-arm runs took this ticket. How many shipped a new R1 violation?</a:t>
             </a:r>
           </a:p>
           <a:p>
@@ -43509,7 +43446,7 @@
         <p:spPr>
           <a:xfrm>
             <a:off x="533400" y="1219200"/>
-            <a:ext cx="11125200" cy="2839517"/>
+            <a:ext cx="11125200" cy="2581656"/>
           </a:xfrm>
           <a:prstGeom prst="rect">
             <a:avLst/>
@@ -43524,11 +43461,11 @@
           <a:p>
             <a:pPr algn="l">
               <a:spcAft>
-                <a:spcPts val="918"/>
+                <a:spcPts val="945"/>
               </a:spcAft>
             </a:pPr>
             <a:r>
-              <a:rPr sz="2039" b="0">
+              <a:rPr sz="2100" b="0">
                 <a:solidFill>
                   <a:srgbClr val="111820"/>
                 </a:solidFill>
@@ -43537,7 +43474,7 @@
               <a:t>•  </a:t>
             </a:r>
             <a:r>
-              <a:rPr sz="2039" b="0">
+              <a:rPr sz="2100" b="0">
                 <a:solidFill>
                   <a:srgbClr val="111820"/>
                 </a:solidFill>
@@ -43546,7 +43483,7 @@
               <a:t>Now: run </a:t>
             </a:r>
             <a:r>
-              <a:rPr sz="2039" b="0">
+              <a:rPr sz="2100" b="0">
                 <a:solidFill>
                   <a:srgbClr val="111820"/>
                 </a:solidFill>
@@ -43555,7 +43492,7 @@
               <a:t>make show-1</a:t>
             </a:r>
             <a:r>
-              <a:rPr sz="2039" b="0">
+              <a:rPr sz="2100" b="0">
                 <a:solidFill>
                   <a:srgbClr val="111820"/>
                 </a:solidFill>
@@ -43567,11 +43504,11 @@
           <a:p>
             <a:pPr algn="l">
               <a:spcAft>
-                <a:spcPts val="918"/>
+                <a:spcPts val="945"/>
               </a:spcAft>
             </a:pPr>
             <a:r>
-              <a:rPr sz="2039" b="0">
+              <a:rPr sz="2100" b="0">
                 <a:solidFill>
                   <a:srgbClr val="111820"/>
                 </a:solidFill>
@@ -43580,23 +43517,23 @@
               <a:t>•  </a:t>
             </a:r>
             <a:r>
-              <a:rPr sz="2039" b="0">
-                <a:solidFill>
-                  <a:srgbClr val="111820"/>
-                </a:solidFill>
-                <a:latin typeface="Calibri"/>
-              </a:rPr>
-              <a:t>Harness in action: the harness arm alone on F1, live; not an A/B, so it stays out of the comparison</a:t>
+              <a:rPr sz="2100" b="0">
+                <a:solidFill>
+                  <a:srgbClr val="111820"/>
+                </a:solidFill>
+                <a:latin typeface="Calibri"/>
+              </a:rPr>
+              <a:t>Harness in action: the harness arm alone on F1, live; not an A/B</a:t>
             </a:r>
           </a:p>
           <a:p>
             <a:pPr algn="l">
               <a:spcAft>
-                <a:spcPts val="918"/>
+                <a:spcPts val="945"/>
               </a:spcAft>
             </a:pPr>
             <a:r>
-              <a:rPr sz="2039" b="0">
+              <a:rPr sz="2100" b="0">
                 <a:solidFill>
                   <a:srgbClr val="111820"/>
                 </a:solidFill>
@@ -43605,23 +43542,23 @@
               <a:t>•  </a:t>
             </a:r>
             <a:r>
-              <a:rPr sz="2039" b="0">
-                <a:solidFill>
-                  <a:srgbClr val="111820"/>
-                </a:solidFill>
-                <a:latin typeface="Calibri"/>
-              </a:rPr>
-              <a:t>Watch for: the map is in its context from the first turn; which documents does it open before it writes code?</a:t>
+              <a:rPr sz="2100" b="0">
+                <a:solidFill>
+                  <a:srgbClr val="111820"/>
+                </a:solidFill>
+                <a:latin typeface="Calibri"/>
+              </a:rPr>
+              <a:t>Watch for: which documents does it open before it writes code?</a:t>
             </a:r>
           </a:p>
           <a:p>
             <a:pPr algn="l">
               <a:spcAft>
-                <a:spcPts val="918"/>
+                <a:spcPts val="945"/>
               </a:spcAft>
             </a:pPr>
             <a:r>
-              <a:rPr sz="2039" b="0">
+              <a:rPr sz="2100" b="0">
                 <a:solidFill>
                   <a:srgbClr val="111820"/>
                 </a:solidFill>
@@ -43630,7 +43567,7 @@
               <a:t>•  </a:t>
             </a:r>
             <a:r>
-              <a:rPr sz="2039" b="0">
+              <a:rPr sz="2100" b="0">
                 <a:solidFill>
                   <a:srgbClr val="111820"/>
                 </a:solidFill>
@@ -43657,7 +43594,7 @@
         </p:blipFill>
         <p:spPr>
           <a:xfrm>
-            <a:off x="533400" y="4936524"/>
+            <a:off x="533400" y="4807593"/>
             <a:ext cx="11125200" cy="681719"/>
           </a:xfrm>
           <a:prstGeom prst="rect">
